--- a/assets/pa45/LT001_Copilot_MeetingCostBot_20260428.pptx
+++ b/assets/pa45/LT001_Copilot_MeetingCostBot_20260428.pptx
@@ -5,17 +5,19 @@
     <p:sldMasterId id="2147483648" r:id="rId1"/>
   </p:sldMasterIdLst>
   <p:notesMasterIdLst>
-    <p:notesMasterId r:id="rId10"/>
+    <p:notesMasterId r:id="rId16"/>
   </p:notesMasterIdLst>
   <p:sldIdLst>
-    <p:sldId id="272" r:id="rId2"/>
-    <p:sldId id="271" r:id="rId3"/>
-    <p:sldId id="273" r:id="rId4"/>
-    <p:sldId id="274" r:id="rId5"/>
-    <p:sldId id="275" r:id="rId6"/>
-    <p:sldId id="276" r:id="rId7"/>
-    <p:sldId id="277" r:id="rId8"/>
-    <p:sldId id="279" r:id="rId9"/>
+    <p:sldId id="272" r:id="rId10"/>
+    <p:sldId id="271" r:id="rId6"/>
+    <p:sldId id="273" r:id="rId11"/>
+    <p:sldId id="274" r:id="rId12"/>
+    <p:sldId id="275" r:id="rId13"/>
+    <p:sldId id="276" r:id="rId14"/>
+    <p:sldId id="277" r:id="rId15"/>
+    <p:sldId id="278" r:id="rId9"/>
+    <p:sldId id="279" r:id="rId8"/>
+    <p:sldId id="280" r:id="rId7"/>
   </p:sldIdLst>
   <p:sldSz cx="12192000" cy="6858000"/>
   <p:notesSz cx="6858000" cy="12192000"/>
@@ -666,7 +668,7 @@
 </p:notesMaster>
 </file>
 
-<file path=ppt/notesSlides/notesSlide1.xml><?xml version="1.0" encoding="utf-8"?>
+<file path=ppt/notesSlides/notesSlide4.xml><?xml version="1.0" encoding="utf-8"?>
 <p:notes xmlns:a="http://schemas.openxmlformats.org/drawingml/2006/main" xmlns:r="http://schemas.openxmlformats.org/officeDocument/2006/relationships" xmlns:p="http://schemas.openxmlformats.org/presentationml/2006/main">
   <p:cSld>
     <p:spTree>
@@ -785,7 +787,7 @@
           <a:p>
             <a:fld id="{F7021451-1387-4CA6-816F-3879F97B5CBC}" type="slidenum">
               <a:rPr lang="en-US"/>
-              <a:t>2</a:t>
+              <a:t>5</a:t>
             </a:fld>
             <a:endParaRPr lang="en-US"/>
           </a:p>
@@ -1161,659 +1163,6 @@
       </p:grpSpPr>
       <p:sp>
         <p:nvSpPr>
-          <p:cNvPr id="2" name="Rounded Rectangle 1"/>
-          <p:cNvSpPr/>
-          <p:nvPr/>
-        </p:nvSpPr>
-        <p:spPr>
-          <a:xfrm>
-            <a:off x="0" y="0"/>
-            <a:ext cx="12192000" cy="6858000"/>
-          </a:xfrm>
-          <a:prstGeom prst="roundRect">
-            <a:avLst>
-              <a:gd name="adj" fmla="val 10000"/>
-            </a:avLst>
-          </a:prstGeom>
-          <a:solidFill>
-            <a:srgbClr val="FFFFFF"/>
-          </a:solidFill>
-          <a:ln>
-            <a:noFill/>
-          </a:ln>
-        </p:spPr>
-        <p:style>
-          <a:lnRef idx="1">
-            <a:schemeClr val="accent1"/>
-          </a:lnRef>
-          <a:fillRef idx="3">
-            <a:schemeClr val="accent1"/>
-          </a:fillRef>
-          <a:effectRef idx="2">
-            <a:schemeClr val="accent1"/>
-          </a:effectRef>
-          <a:fontRef idx="minor">
-            <a:schemeClr val="lt1"/>
-          </a:fontRef>
-        </p:style>
-        <p:txBody>
-          <a:bodyPr rtlCol="0" anchor="ctr"/>
-          <a:lstStyle/>
-          <a:p>
-            <a:pPr algn="ctr"/>
-            <a:endParaRPr/>
-          </a:p>
-        </p:txBody>
-      </p:sp>
-      <p:sp>
-        <p:nvSpPr>
-          <p:cNvPr id="3" name="Rounded Rectangle 2"/>
-          <p:cNvSpPr/>
-          <p:nvPr/>
-        </p:nvSpPr>
-        <p:spPr>
-          <a:xfrm>
-            <a:off x="0" y="0"/>
-            <a:ext cx="320040" cy="6858000"/>
-          </a:xfrm>
-          <a:prstGeom prst="roundRect">
-            <a:avLst>
-              <a:gd name="adj" fmla="val 10000"/>
-            </a:avLst>
-          </a:prstGeom>
-          <a:solidFill>
-            <a:srgbClr val="464EB8"/>
-          </a:solidFill>
-          <a:ln>
-            <a:noFill/>
-          </a:ln>
-        </p:spPr>
-        <p:style>
-          <a:lnRef idx="1">
-            <a:schemeClr val="accent1"/>
-          </a:lnRef>
-          <a:fillRef idx="3">
-            <a:schemeClr val="accent1"/>
-          </a:fillRef>
-          <a:effectRef idx="2">
-            <a:schemeClr val="accent1"/>
-          </a:effectRef>
-          <a:fontRef idx="minor">
-            <a:schemeClr val="lt1"/>
-          </a:fontRef>
-        </p:style>
-        <p:txBody>
-          <a:bodyPr rtlCol="0" anchor="ctr"/>
-          <a:lstStyle/>
-          <a:p>
-            <a:pPr algn="ctr"/>
-            <a:endParaRPr/>
-          </a:p>
-        </p:txBody>
-      </p:sp>
-      <p:sp>
-        <p:nvSpPr>
-          <p:cNvPr id="4" name="Rounded Rectangle 3"/>
-          <p:cNvSpPr/>
-          <p:nvPr/>
-        </p:nvSpPr>
-        <p:spPr>
-          <a:xfrm>
-            <a:off x="11643360" y="0"/>
-            <a:ext cx="548640" cy="1828800"/>
-          </a:xfrm>
-          <a:prstGeom prst="roundRect">
-            <a:avLst>
-              <a:gd name="adj" fmla="val 10000"/>
-            </a:avLst>
-          </a:prstGeom>
-          <a:solidFill>
-            <a:srgbClr val="7460DB"/>
-          </a:solidFill>
-          <a:ln>
-            <a:noFill/>
-          </a:ln>
-        </p:spPr>
-        <p:style>
-          <a:lnRef idx="1">
-            <a:schemeClr val="accent1"/>
-          </a:lnRef>
-          <a:fillRef idx="3">
-            <a:schemeClr val="accent1"/>
-          </a:fillRef>
-          <a:effectRef idx="2">
-            <a:schemeClr val="accent1"/>
-          </a:effectRef>
-          <a:fontRef idx="minor">
-            <a:schemeClr val="lt1"/>
-          </a:fontRef>
-        </p:style>
-        <p:txBody>
-          <a:bodyPr rtlCol="0" anchor="ctr"/>
-          <a:lstStyle/>
-          <a:p>
-            <a:pPr algn="ctr"/>
-            <a:endParaRPr/>
-          </a:p>
-        </p:txBody>
-      </p:sp>
-      <p:sp>
-        <p:nvSpPr>
-          <p:cNvPr id="5" name="Rounded Rectangle 4"/>
-          <p:cNvSpPr/>
-          <p:nvPr/>
-        </p:nvSpPr>
-        <p:spPr>
-          <a:xfrm>
-            <a:off x="731520" y="640080"/>
-            <a:ext cx="3657600" cy="411480"/>
-          </a:xfrm>
-          <a:prstGeom prst="roundRect">
-            <a:avLst>
-              <a:gd name="adj" fmla="val 10000"/>
-            </a:avLst>
-          </a:prstGeom>
-          <a:solidFill>
-            <a:srgbClr val="E8E9F7"/>
-          </a:solidFill>
-          <a:ln>
-            <a:noFill/>
-          </a:ln>
-        </p:spPr>
-        <p:style>
-          <a:lnRef idx="1">
-            <a:schemeClr val="accent1"/>
-          </a:lnRef>
-          <a:fillRef idx="3">
-            <a:schemeClr val="accent1"/>
-          </a:fillRef>
-          <a:effectRef idx="2">
-            <a:schemeClr val="accent1"/>
-          </a:effectRef>
-          <a:fontRef idx="minor">
-            <a:schemeClr val="lt1"/>
-          </a:fontRef>
-        </p:style>
-        <p:txBody>
-          <a:bodyPr rtlCol="0" anchor="ctr"/>
-          <a:lstStyle/>
-          <a:p>
-            <a:pPr algn="ctr"/>
-            <a:endParaRPr/>
-          </a:p>
-        </p:txBody>
-      </p:sp>
-      <p:sp>
-        <p:nvSpPr>
-          <p:cNvPr id="6" name="TextBox 5"/>
-          <p:cNvSpPr txBox="1"/>
-          <p:nvPr/>
-        </p:nvSpPr>
-        <p:spPr>
-          <a:xfrm>
-            <a:off x="731520" y="640080"/>
-            <a:ext cx="3657600" cy="411480"/>
-          </a:xfrm>
-          <a:prstGeom prst="rect">
-            <a:avLst/>
-          </a:prstGeom>
-          <a:noFill/>
-        </p:spPr>
-        <p:txBody>
-          <a:bodyPr wrap="square" lIns="0" tIns="0" rIns="0" bIns="0" anchor="ctr">
-            <a:spAutoFit/>
-          </a:bodyPr>
-          <a:lstStyle/>
-          <a:p>
-            <a:pPr algn="ctr"/>
-            <a:r>
-              <a:rPr sz="1100" b="1">
-                <a:solidFill>
-                  <a:srgbClr val="373E99"/>
-                </a:solidFill>
-                <a:latin typeface="Yu Gothic"/>
-              </a:rPr>
-              <a:t>⚡ LIGHTNING TALK  ×  COPILOT COMMUNITY</a:t>
-            </a:r>
-          </a:p>
-        </p:txBody>
-      </p:sp>
-      <p:sp>
-        <p:nvSpPr>
-          <p:cNvPr id="7" name="TextBox 6"/>
-          <p:cNvSpPr txBox="1"/>
-          <p:nvPr/>
-        </p:nvSpPr>
-        <p:spPr>
-          <a:xfrm>
-            <a:off x="822960" y="1554480"/>
-            <a:ext cx="10515600" cy="3657600"/>
-          </a:xfrm>
-          <a:prstGeom prst="rect">
-            <a:avLst/>
-          </a:prstGeom>
-          <a:noFill/>
-        </p:spPr>
-        <p:txBody>
-          <a:bodyPr wrap="square" lIns="0" rIns="0">
-            <a:spAutoFit/>
-          </a:bodyPr>
-          <a:lstStyle/>
-          <a:p>
-            <a:pPr algn="l"/>
-            <a:r>
-              <a:rPr sz="3200" b="1">
-                <a:solidFill>
-                  <a:srgbClr val="323130"/>
-                </a:solidFill>
-                <a:latin typeface="Yu Gothic"/>
-              </a:rPr>
-              <a:t>Copilotに「会議減らしたい」と</a:t>
-            </a:r>
-          </a:p>
-          <a:p>
-            <a:pPr algn="l"/>
-            <a:r>
-              <a:rPr sz="3200" b="1">
-                <a:solidFill>
-                  <a:srgbClr val="323130"/>
-                </a:solidFill>
-                <a:latin typeface="Yu Gothic"/>
-              </a:rPr>
-              <a:t>泣きついたら、Power Automateで</a:t>
-            </a:r>
-          </a:p>
-          <a:p>
-            <a:pPr algn="l"/>
-            <a:r>
-              <a:rPr sz="3200" b="1">
-                <a:solidFill>
-                  <a:srgbClr val="323130"/>
-                </a:solidFill>
-                <a:latin typeface="Yu Gothic"/>
-              </a:rPr>
-              <a:t>会議コストBotを生み出す羽目</a:t>
-            </a:r>
-          </a:p>
-          <a:p>
-            <a:pPr algn="l"/>
-            <a:r>
-              <a:rPr sz="3200" b="1">
-                <a:solidFill>
-                  <a:srgbClr val="323130"/>
-                </a:solidFill>
-                <a:latin typeface="Yu Gothic"/>
-              </a:rPr>
-              <a:t>になった話</a:t>
-            </a:r>
-          </a:p>
-        </p:txBody>
-      </p:sp>
-      <p:sp>
-        <p:nvSpPr>
-          <p:cNvPr id="8" name="Rounded Rectangle 7"/>
-          <p:cNvSpPr/>
-          <p:nvPr/>
-        </p:nvSpPr>
-        <p:spPr>
-          <a:xfrm>
-            <a:off x="777240" y="5029200"/>
-            <a:ext cx="54864" cy="502920"/>
-          </a:xfrm>
-          <a:prstGeom prst="roundRect">
-            <a:avLst>
-              <a:gd name="adj" fmla="val 10000"/>
-            </a:avLst>
-          </a:prstGeom>
-          <a:solidFill>
-            <a:srgbClr val="0078D4"/>
-          </a:solidFill>
-          <a:ln>
-            <a:noFill/>
-          </a:ln>
-        </p:spPr>
-        <p:style>
-          <a:lnRef idx="1">
-            <a:schemeClr val="accent1"/>
-          </a:lnRef>
-          <a:fillRef idx="3">
-            <a:schemeClr val="accent1"/>
-          </a:fillRef>
-          <a:effectRef idx="2">
-            <a:schemeClr val="accent1"/>
-          </a:effectRef>
-          <a:fontRef idx="minor">
-            <a:schemeClr val="lt1"/>
-          </a:fontRef>
-        </p:style>
-        <p:txBody>
-          <a:bodyPr rtlCol="0" anchor="ctr"/>
-          <a:lstStyle/>
-          <a:p>
-            <a:pPr algn="ctr"/>
-            <a:endParaRPr/>
-          </a:p>
-        </p:txBody>
-      </p:sp>
-      <p:sp>
-        <p:nvSpPr>
-          <p:cNvPr id="9" name="TextBox 8"/>
-          <p:cNvSpPr txBox="1"/>
-          <p:nvPr/>
-        </p:nvSpPr>
-        <p:spPr>
-          <a:xfrm>
-            <a:off x="960120" y="5029200"/>
-            <a:ext cx="10972800" cy="502920"/>
-          </a:xfrm>
-          <a:prstGeom prst="rect">
-            <a:avLst/>
-          </a:prstGeom>
-          <a:noFill/>
-        </p:spPr>
-        <p:txBody>
-          <a:bodyPr wrap="square" lIns="0" tIns="0" rIns="0" bIns="0" anchor="ctr">
-            <a:spAutoFit/>
-          </a:bodyPr>
-          <a:lstStyle/>
-          <a:p>
-            <a:pPr algn="l"/>
-            <a:r>
-              <a:rPr sz="1600" b="0">
-                <a:solidFill>
-                  <a:srgbClr val="605E5C"/>
-                </a:solidFill>
-                <a:latin typeface="Yu Gothic"/>
-              </a:rPr>
-              <a:t>Copilot × Power Automate で7アクションのBotを作った話</a:t>
-            </a:r>
-          </a:p>
-        </p:txBody>
-      </p:sp>
-      <p:sp>
-        <p:nvSpPr>
-          <p:cNvPr id="10" name="Rounded Rectangle 9"/>
-          <p:cNvSpPr/>
-          <p:nvPr/>
-        </p:nvSpPr>
-        <p:spPr>
-          <a:xfrm>
-            <a:off x="777240" y="5852160"/>
-            <a:ext cx="54864" cy="502920"/>
-          </a:xfrm>
-          <a:prstGeom prst="roundRect">
-            <a:avLst>
-              <a:gd name="adj" fmla="val 10000"/>
-            </a:avLst>
-          </a:prstGeom>
-          <a:solidFill>
-            <a:srgbClr val="7460DB"/>
-          </a:solidFill>
-          <a:ln>
-            <a:noFill/>
-          </a:ln>
-        </p:spPr>
-        <p:style>
-          <a:lnRef idx="1">
-            <a:schemeClr val="accent1"/>
-          </a:lnRef>
-          <a:fillRef idx="3">
-            <a:schemeClr val="accent1"/>
-          </a:fillRef>
-          <a:effectRef idx="2">
-            <a:schemeClr val="accent1"/>
-          </a:effectRef>
-          <a:fontRef idx="minor">
-            <a:schemeClr val="lt1"/>
-          </a:fontRef>
-        </p:style>
-        <p:txBody>
-          <a:bodyPr rtlCol="0" anchor="ctr"/>
-          <a:lstStyle/>
-          <a:p>
-            <a:pPr algn="ctr"/>
-            <a:endParaRPr/>
-          </a:p>
-        </p:txBody>
-      </p:sp>
-      <p:sp>
-        <p:nvSpPr>
-          <p:cNvPr id="11" name="TextBox 10"/>
-          <p:cNvSpPr txBox="1"/>
-          <p:nvPr/>
-        </p:nvSpPr>
-        <p:spPr>
-          <a:xfrm>
-            <a:off x="960120" y="5852160"/>
-            <a:ext cx="10972800" cy="502920"/>
-          </a:xfrm>
-          <a:prstGeom prst="rect">
-            <a:avLst/>
-          </a:prstGeom>
-          <a:noFill/>
-        </p:spPr>
-        <p:txBody>
-          <a:bodyPr wrap="square" lIns="0" tIns="0" rIns="0" bIns="0" anchor="ctr">
-            <a:spAutoFit/>
-          </a:bodyPr>
-          <a:lstStyle/>
-          <a:p>
-            <a:pPr algn="l"/>
-            <a:r>
-              <a:rPr sz="1400" b="1">
-                <a:solidFill>
-                  <a:srgbClr val="373E99"/>
-                </a:solidFill>
-                <a:latin typeface="Yu Gothic"/>
-              </a:rPr>
-              <a:t>Haru (ism136)  /  Power Automate 45 主催</a:t>
-            </a:r>
-          </a:p>
-        </p:txBody>
-      </p:sp>
-      <p:sp>
-        <p:nvSpPr>
-          <p:cNvPr id="12" name="Oval 11"/>
-          <p:cNvSpPr/>
-          <p:nvPr/>
-        </p:nvSpPr>
-        <p:spPr>
-          <a:xfrm>
-            <a:off x="11094720" y="5989320"/>
-            <a:ext cx="146304" cy="146304"/>
-          </a:xfrm>
-          <a:prstGeom prst="ellipse">
-            <a:avLst/>
-          </a:prstGeom>
-          <a:solidFill>
-            <a:srgbClr val="0078D4"/>
-          </a:solidFill>
-          <a:ln>
-            <a:noFill/>
-          </a:ln>
-        </p:spPr>
-        <p:style>
-          <a:lnRef idx="1">
-            <a:schemeClr val="accent1"/>
-          </a:lnRef>
-          <a:fillRef idx="3">
-            <a:schemeClr val="accent1"/>
-          </a:fillRef>
-          <a:effectRef idx="2">
-            <a:schemeClr val="accent1"/>
-          </a:effectRef>
-          <a:fontRef idx="minor">
-            <a:schemeClr val="lt1"/>
-          </a:fontRef>
-        </p:style>
-        <p:txBody>
-          <a:bodyPr rtlCol="0" anchor="ctr"/>
-          <a:lstStyle/>
-          <a:p>
-            <a:pPr algn="ctr"/>
-            <a:endParaRPr/>
-          </a:p>
-        </p:txBody>
-      </p:sp>
-      <p:sp>
-        <p:nvSpPr>
-          <p:cNvPr id="13" name="Oval 12"/>
-          <p:cNvSpPr/>
-          <p:nvPr/>
-        </p:nvSpPr>
-        <p:spPr>
-          <a:xfrm>
-            <a:off x="11277600" y="5989320"/>
-            <a:ext cx="146304" cy="146304"/>
-          </a:xfrm>
-          <a:prstGeom prst="ellipse">
-            <a:avLst/>
-          </a:prstGeom>
-          <a:solidFill>
-            <a:srgbClr val="107C10"/>
-          </a:solidFill>
-          <a:ln>
-            <a:noFill/>
-          </a:ln>
-        </p:spPr>
-        <p:style>
-          <a:lnRef idx="1">
-            <a:schemeClr val="accent1"/>
-          </a:lnRef>
-          <a:fillRef idx="3">
-            <a:schemeClr val="accent1"/>
-          </a:fillRef>
-          <a:effectRef idx="2">
-            <a:schemeClr val="accent1"/>
-          </a:effectRef>
-          <a:fontRef idx="minor">
-            <a:schemeClr val="lt1"/>
-          </a:fontRef>
-        </p:style>
-        <p:txBody>
-          <a:bodyPr rtlCol="0" anchor="ctr"/>
-          <a:lstStyle/>
-          <a:p>
-            <a:pPr algn="ctr"/>
-            <a:endParaRPr/>
-          </a:p>
-        </p:txBody>
-      </p:sp>
-      <p:sp>
-        <p:nvSpPr>
-          <p:cNvPr id="14" name="Oval 13"/>
-          <p:cNvSpPr/>
-          <p:nvPr/>
-        </p:nvSpPr>
-        <p:spPr>
-          <a:xfrm>
-            <a:off x="11460481" y="5989320"/>
-            <a:ext cx="146304" cy="146304"/>
-          </a:xfrm>
-          <a:prstGeom prst="ellipse">
-            <a:avLst/>
-          </a:prstGeom>
-          <a:solidFill>
-            <a:srgbClr val="FFB900"/>
-          </a:solidFill>
-          <a:ln>
-            <a:noFill/>
-          </a:ln>
-        </p:spPr>
-        <p:style>
-          <a:lnRef idx="1">
-            <a:schemeClr val="accent1"/>
-          </a:lnRef>
-          <a:fillRef idx="3">
-            <a:schemeClr val="accent1"/>
-          </a:fillRef>
-          <a:effectRef idx="2">
-            <a:schemeClr val="accent1"/>
-          </a:effectRef>
-          <a:fontRef idx="minor">
-            <a:schemeClr val="lt1"/>
-          </a:fontRef>
-        </p:style>
-        <p:txBody>
-          <a:bodyPr rtlCol="0" anchor="ctr"/>
-          <a:lstStyle/>
-          <a:p>
-            <a:pPr algn="ctr"/>
-            <a:endParaRPr/>
-          </a:p>
-        </p:txBody>
-      </p:sp>
-      <p:sp>
-        <p:nvSpPr>
-          <p:cNvPr id="15" name="Oval 14"/>
-          <p:cNvSpPr/>
-          <p:nvPr/>
-        </p:nvSpPr>
-        <p:spPr>
-          <a:xfrm>
-            <a:off x="11643361" y="5989320"/>
-            <a:ext cx="146304" cy="146304"/>
-          </a:xfrm>
-          <a:prstGeom prst="ellipse">
-            <a:avLst/>
-          </a:prstGeom>
-          <a:solidFill>
-            <a:srgbClr val="D83B01"/>
-          </a:solidFill>
-          <a:ln>
-            <a:noFill/>
-          </a:ln>
-        </p:spPr>
-        <p:style>
-          <a:lnRef idx="1">
-            <a:schemeClr val="accent1"/>
-          </a:lnRef>
-          <a:fillRef idx="3">
-            <a:schemeClr val="accent1"/>
-          </a:fillRef>
-          <a:effectRef idx="2">
-            <a:schemeClr val="accent1"/>
-          </a:effectRef>
-          <a:fontRef idx="minor">
-            <a:schemeClr val="lt1"/>
-          </a:fontRef>
-        </p:style>
-        <p:txBody>
-          <a:bodyPr rtlCol="0" anchor="ctr"/>
-          <a:lstStyle/>
-          <a:p>
-            <a:pPr algn="ctr"/>
-            <a:endParaRPr/>
-          </a:p>
-        </p:txBody>
-      </p:sp>
-    </p:spTree>
-  </p:cSld>
-  <p:clrMapOvr>
-    <a:masterClrMapping/>
-  </p:clrMapOvr>
-</p:sld>
-</file>
-
-<file path=ppt/slides/slide2.xml><?xml version="1.0" encoding="utf-8"?>
-<p:sld xmlns:a="http://schemas.openxmlformats.org/drawingml/2006/main" xmlns:r="http://schemas.openxmlformats.org/officeDocument/2006/relationships" xmlns:p="http://schemas.openxmlformats.org/presentationml/2006/main">
-  <p:cSld>
-    <p:spTree>
-      <p:nvGrpSpPr>
-        <p:cNvPr id="1" name=""/>
-        <p:cNvGrpSpPr/>
-        <p:nvPr/>
-      </p:nvGrpSpPr>
-      <p:grpSpPr>
-        <a:xfrm>
-          <a:off x="0" y="0"/>
-          <a:ext cx="0" cy="0"/>
-          <a:chOff x="0" y="0"/>
-          <a:chExt cx="0" cy="0"/>
-        </a:xfrm>
-      </p:grpSpPr>
-      <p:sp>
-        <p:nvSpPr>
           <p:cNvPr id="2" name="Shape 0"/>
           <p:cNvSpPr/>
           <p:nvPr/>
@@ -2069,7 +1418,7 @@
                 <a:ea typeface="BIZ UDGothic" pitchFamily="34" charset="-122"/>
                 <a:cs typeface="BIZ UDGothic" pitchFamily="34" charset="-120"/>
               </a:rPr>
-              <a:t>Power Automate 45 </a:t>
+              <a:t xml:space="preserve">Power Automate 45 </a:t>
             </a:r>
             <a:r>
               <a:rPr lang="en-US" sz="2700" b="1" kern="0" spc="-67" dirty="0">
@@ -2261,7 +1610,7 @@
                 <a:ea typeface="BIZ UDGothic" pitchFamily="34" charset="-122"/>
                 <a:cs typeface="BIZ UDGothic" pitchFamily="34" charset="-120"/>
               </a:rPr>
-              <a:t> </a:t>
+              <a:t xml:space="preserve"> </a:t>
             </a:r>
             <a:endParaRPr lang="en-US" sz="1600" dirty="0"/>
           </a:p>
@@ -2513,7 +1862,7 @@
                 <a:ea typeface="BIZ UDGothic" pitchFamily="34" charset="-122"/>
                 <a:cs typeface="BIZ UDGothic" pitchFamily="34" charset="-120"/>
               </a:rPr>
-              <a:t>・広島コミュニティ </a:t>
+              <a:t xml:space="preserve">・広島コミュニティ </a:t>
             </a:r>
             <a:r>
               <a:rPr lang="en-US" sz="1600">
@@ -2524,7 +1873,7 @@
                 <a:ea typeface="BIZ UDGothic" pitchFamily="34" charset="-122"/>
                 <a:cs typeface="BIZ UDGothic" pitchFamily="34" charset="-120"/>
               </a:rPr>
-              <a:t>PLUG </a:t>
+              <a:t xml:space="preserve">PLUG </a:t>
             </a:r>
             <a:r>
               <a:rPr lang="ja-JP" altLang="en-US" sz="1600">
@@ -2680,7 +2029,7 @@
                 <a:ea typeface="BIZ UDGothic" pitchFamily="34" charset="-122"/>
                 <a:cs typeface="BIZ UDGothic" pitchFamily="34" charset="-120"/>
               </a:rPr>
-              <a:t> 主な活動・実績 </a:t>
+              <a:t xml:space="preserve"> 主な活動・実績 </a:t>
             </a:r>
             <a:endParaRPr lang="en-US" sz="1800" dirty="0"/>
           </a:p>
@@ -3749,8 +3098,8 @@
 </p:sld>
 </file>
 
-<file path=ppt/slides/slide3.xml><?xml version="1.0" encoding="utf-8"?>
-<p:sld xmlns:a="http://schemas.openxmlformats.org/drawingml/2006/main" xmlns:r="http://schemas.openxmlformats.org/officeDocument/2006/relationships" xmlns:p="http://schemas.openxmlformats.org/presentationml/2006/main">
+<file path=ppt/slides/slide10.xml><?xml version="1.0" encoding="utf-8"?>
+<p:sld xmlns:a="http://schemas.openxmlformats.org/drawingml/2006/main" xmlns:p="http://schemas.openxmlformats.org/presentationml/2006/main" xmlns:r="http://schemas.openxmlformats.org/officeDocument/2006/relationships">
   <p:cSld>
     <p:spTree>
       <p:nvGrpSpPr>
@@ -3758,14 +3107,7 @@
         <p:cNvGrpSpPr/>
         <p:nvPr/>
       </p:nvGrpSpPr>
-      <p:grpSpPr>
-        <a:xfrm>
-          <a:off x="0" y="0"/>
-          <a:ext cx="0" cy="0"/>
-          <a:chOff x="0" y="0"/>
-          <a:chExt cx="0" cy="0"/>
-        </a:xfrm>
-      </p:grpSpPr>
+      <p:grpSpPr/>
       <p:sp>
         <p:nvSpPr>
           <p:cNvPr id="2" name="Rounded Rectangle 1"/>
@@ -3808,7 +3150,6 @@
           <a:lstStyle/>
           <a:p>
             <a:pPr algn="ctr"/>
-            <a:endParaRPr/>
           </a:p>
         </p:txBody>
       </p:sp>
@@ -3820,8 +3161,8 @@
         </p:nvSpPr>
         <p:spPr>
           <a:xfrm>
-            <a:off x="457200" y="411480"/>
-            <a:ext cx="822960" cy="502920"/>
+            <a:off x="0" y="0"/>
+            <a:ext cx="3048000" cy="164592"/>
           </a:xfrm>
           <a:prstGeom prst="roundRect">
             <a:avLst>
@@ -3829,7 +3170,7 @@
             </a:avLst>
           </a:prstGeom>
           <a:solidFill>
-            <a:srgbClr val="464EB8"/>
+            <a:srgbClr val="0078D4"/>
           </a:solidFill>
           <a:ln>
             <a:noFill/>
@@ -3854,90 +3195,19 @@
           <a:lstStyle/>
           <a:p>
             <a:pPr algn="ctr"/>
-            <a:endParaRPr/>
-          </a:p>
-        </p:txBody>
-      </p:sp>
-      <p:sp>
-        <p:nvSpPr>
-          <p:cNvPr id="4" name="TextBox 3"/>
-          <p:cNvSpPr txBox="1"/>
-          <p:nvPr/>
-        </p:nvSpPr>
-        <p:spPr>
-          <a:xfrm>
-            <a:off x="457200" y="411480"/>
-            <a:ext cx="822960" cy="502920"/>
-          </a:xfrm>
-          <a:prstGeom prst="rect">
-            <a:avLst/>
-          </a:prstGeom>
-          <a:noFill/>
-        </p:spPr>
-        <p:txBody>
-          <a:bodyPr wrap="square" lIns="0" tIns="0" rIns="0" bIns="0" anchor="ctr">
-            <a:spAutoFit/>
-          </a:bodyPr>
-          <a:lstStyle/>
-          <a:p>
-            <a:pPr algn="ctr"/>
-            <a:r>
-              <a:rPr sz="1800" b="1">
-                <a:solidFill>
-                  <a:srgbClr val="FFFFFF"/>
-                </a:solidFill>
-                <a:latin typeface="Yu Gothic"/>
-              </a:rPr>
-              <a:t>01</a:t>
-            </a:r>
-          </a:p>
-        </p:txBody>
-      </p:sp>
-      <p:sp>
-        <p:nvSpPr>
-          <p:cNvPr id="5" name="TextBox 4"/>
-          <p:cNvSpPr txBox="1"/>
-          <p:nvPr/>
-        </p:nvSpPr>
-        <p:spPr>
-          <a:xfrm>
-            <a:off x="1463040" y="493663"/>
-            <a:ext cx="10058400" cy="338554"/>
-          </a:xfrm>
-          <a:prstGeom prst="rect">
-            <a:avLst/>
-          </a:prstGeom>
-          <a:noFill/>
-        </p:spPr>
-        <p:txBody>
-          <a:bodyPr wrap="square" lIns="0" tIns="0" rIns="0" bIns="0" anchor="ctr">
-            <a:spAutoFit/>
-          </a:bodyPr>
-          <a:lstStyle/>
-          <a:p>
-            <a:pPr algn="l"/>
-            <a:r>
-              <a:rPr sz="2200" b="1">
-                <a:solidFill>
-                  <a:srgbClr val="323130"/>
-                </a:solidFill>
-                <a:latin typeface="Yu Gothic"/>
-              </a:rPr>
-              <a:t>ある日、カレンダーを見たら…</a:t>
-            </a:r>
-          </a:p>
-        </p:txBody>
-      </p:sp>
-      <p:sp>
-        <p:nvSpPr>
-          <p:cNvPr id="6" name="Rounded Rectangle 5"/>
+          </a:p>
+        </p:txBody>
+      </p:sp>
+      <p:sp>
+        <p:nvSpPr>
+          <p:cNvPr id="4" name="Rounded Rectangle 3"/>
           <p:cNvSpPr/>
           <p:nvPr/>
         </p:nvSpPr>
         <p:spPr>
           <a:xfrm>
-            <a:off x="457200" y="1005840"/>
-            <a:ext cx="1828800" cy="36576"/>
+            <a:off x="3048000" y="0"/>
+            <a:ext cx="3048000" cy="164592"/>
           </a:xfrm>
           <a:prstGeom prst="roundRect">
             <a:avLst>
@@ -3945,7 +3215,7 @@
             </a:avLst>
           </a:prstGeom>
           <a:solidFill>
-            <a:srgbClr val="0078D4"/>
+            <a:srgbClr val="107C10"/>
           </a:solidFill>
           <a:ln>
             <a:noFill/>
@@ -3970,7 +3240,1810 @@
           <a:lstStyle/>
           <a:p>
             <a:pPr algn="ctr"/>
-            <a:endParaRPr/>
+          </a:p>
+        </p:txBody>
+      </p:sp>
+      <p:sp>
+        <p:nvSpPr>
+          <p:cNvPr id="5" name="Rounded Rectangle 4"/>
+          <p:cNvSpPr/>
+          <p:nvPr/>
+        </p:nvSpPr>
+        <p:spPr>
+          <a:xfrm>
+            <a:off x="6096000" y="0"/>
+            <a:ext cx="3048000" cy="164592"/>
+          </a:xfrm>
+          <a:prstGeom prst="roundRect">
+            <a:avLst>
+              <a:gd name="adj" fmla="val 10000"/>
+            </a:avLst>
+          </a:prstGeom>
+          <a:solidFill>
+            <a:srgbClr val="FFB900"/>
+          </a:solidFill>
+          <a:ln>
+            <a:noFill/>
+          </a:ln>
+        </p:spPr>
+        <p:style>
+          <a:lnRef idx="1">
+            <a:schemeClr val="accent1"/>
+          </a:lnRef>
+          <a:fillRef idx="3">
+            <a:schemeClr val="accent1"/>
+          </a:fillRef>
+          <a:effectRef idx="2">
+            <a:schemeClr val="accent1"/>
+          </a:effectRef>
+          <a:fontRef idx="minor">
+            <a:schemeClr val="lt1"/>
+          </a:fontRef>
+        </p:style>
+        <p:txBody>
+          <a:bodyPr rtlCol="0" anchor="ctr"/>
+          <a:lstStyle/>
+          <a:p>
+            <a:pPr algn="ctr"/>
+          </a:p>
+        </p:txBody>
+      </p:sp>
+      <p:sp>
+        <p:nvSpPr>
+          <p:cNvPr id="6" name="Rounded Rectangle 5"/>
+          <p:cNvSpPr/>
+          <p:nvPr/>
+        </p:nvSpPr>
+        <p:spPr>
+          <a:xfrm>
+            <a:off x="9144000" y="0"/>
+            <a:ext cx="3048000" cy="164592"/>
+          </a:xfrm>
+          <a:prstGeom prst="roundRect">
+            <a:avLst>
+              <a:gd name="adj" fmla="val 10000"/>
+            </a:avLst>
+          </a:prstGeom>
+          <a:solidFill>
+            <a:srgbClr val="D83B01"/>
+          </a:solidFill>
+          <a:ln>
+            <a:noFill/>
+          </a:ln>
+        </p:spPr>
+        <p:style>
+          <a:lnRef idx="1">
+            <a:schemeClr val="accent1"/>
+          </a:lnRef>
+          <a:fillRef idx="3">
+            <a:schemeClr val="accent1"/>
+          </a:fillRef>
+          <a:effectRef idx="2">
+            <a:schemeClr val="accent1"/>
+          </a:effectRef>
+          <a:fontRef idx="minor">
+            <a:schemeClr val="lt1"/>
+          </a:fontRef>
+        </p:style>
+        <p:txBody>
+          <a:bodyPr rtlCol="0" anchor="ctr"/>
+          <a:lstStyle/>
+          <a:p>
+            <a:pPr algn="ctr"/>
+          </a:p>
+        </p:txBody>
+      </p:sp>
+      <p:sp>
+        <p:nvSpPr>
+          <p:cNvPr id="7" name="Rounded Rectangle 6"/>
+          <p:cNvSpPr/>
+          <p:nvPr/>
+        </p:nvSpPr>
+        <p:spPr>
+          <a:xfrm>
+            <a:off x="457200" y="548640"/>
+            <a:ext cx="2194560" cy="457200"/>
+          </a:xfrm>
+          <a:prstGeom prst="roundRect">
+            <a:avLst>
+              <a:gd name="adj" fmla="val 10000"/>
+            </a:avLst>
+          </a:prstGeom>
+          <a:solidFill>
+            <a:srgbClr val="D83B01"/>
+          </a:solidFill>
+          <a:ln>
+            <a:noFill/>
+          </a:ln>
+        </p:spPr>
+        <p:style>
+          <a:lnRef idx="1">
+            <a:schemeClr val="accent1"/>
+          </a:lnRef>
+          <a:fillRef idx="3">
+            <a:schemeClr val="accent1"/>
+          </a:fillRef>
+          <a:effectRef idx="2">
+            <a:schemeClr val="accent1"/>
+          </a:effectRef>
+          <a:fontRef idx="minor">
+            <a:schemeClr val="lt1"/>
+          </a:fontRef>
+        </p:style>
+        <p:txBody>
+          <a:bodyPr rtlCol="0" anchor="ctr"/>
+          <a:lstStyle/>
+          <a:p>
+            <a:pPr algn="ctr"/>
+          </a:p>
+        </p:txBody>
+      </p:sp>
+      <p:sp>
+        <p:nvSpPr>
+          <p:cNvPr id="8" name="TextBox 7"/>
+          <p:cNvSpPr txBox="1"/>
+          <p:nvPr/>
+        </p:nvSpPr>
+        <p:spPr>
+          <a:xfrm>
+            <a:off x="457200" y="548640"/>
+            <a:ext cx="2194560" cy="457200"/>
+          </a:xfrm>
+          <a:prstGeom prst="rect">
+            <a:avLst/>
+          </a:prstGeom>
+          <a:noFill/>
+        </p:spPr>
+        <p:txBody>
+          <a:bodyPr wrap="square" lIns="0" rIns="0" tIns="0" bIns="0" anchor="ctr">
+            <a:spAutoFit/>
+          </a:bodyPr>
+          <a:lstStyle/>
+          <a:p>
+            <a:pPr algn="ctr"/>
+            <a:r>
+              <a:rPr sz="1200" b="1">
+                <a:solidFill>
+                  <a:srgbClr val="FFFFFF"/>
+                </a:solidFill>
+                <a:latin typeface="Yu Gothic"/>
+              </a:rPr>
+              <a:t>🎉  COMING SOON</a:t>
+            </a:r>
+          </a:p>
+        </p:txBody>
+      </p:sp>
+      <p:sp>
+        <p:nvSpPr>
+          <p:cNvPr id="9" name="TextBox 8"/>
+          <p:cNvSpPr txBox="1"/>
+          <p:nvPr/>
+        </p:nvSpPr>
+        <p:spPr>
+          <a:xfrm>
+            <a:off x="457200" y="1371600"/>
+            <a:ext cx="10972800" cy="1828800"/>
+          </a:xfrm>
+          <a:prstGeom prst="rect">
+            <a:avLst/>
+          </a:prstGeom>
+          <a:noFill/>
+        </p:spPr>
+        <p:txBody>
+          <a:bodyPr wrap="square" lIns="0" rIns="0">
+            <a:spAutoFit/>
+          </a:bodyPr>
+          <a:lstStyle/>
+          <a:p>
+            <a:pPr algn="l"/>
+            <a:r>
+              <a:rPr sz="2200" b="0">
+                <a:solidFill>
+                  <a:srgbClr val="323130"/>
+                </a:solidFill>
+                <a:latin typeface="Yu Gothic"/>
+              </a:rPr>
+              <a:t>そして、Botの次は</a:t>
+            </a:r>
+          </a:p>
+          <a:p>
+            <a:pPr algn="l"/>
+            <a:r>
+              <a:rPr sz="3200" b="1">
+                <a:solidFill>
+                  <a:srgbClr val="323130"/>
+                </a:solidFill>
+                <a:latin typeface="Yu Gothic"/>
+              </a:rPr>
+              <a:t>「あなたの今月の会議コスト」</a:t>
+            </a:r>
+          </a:p>
+          <a:p>
+            <a:pPr algn="l"/>
+            <a:r>
+              <a:rPr sz="3200" b="1">
+                <a:solidFill>
+                  <a:srgbClr val="323130"/>
+                </a:solidFill>
+                <a:latin typeface="Yu Gothic"/>
+              </a:rPr>
+              <a:t>ダッシュボードも作成中です。</a:t>
+            </a:r>
+          </a:p>
+        </p:txBody>
+      </p:sp>
+      <p:sp>
+        <p:nvSpPr>
+          <p:cNvPr id="10" name="Rounded Rectangle 9"/>
+          <p:cNvSpPr/>
+          <p:nvPr/>
+        </p:nvSpPr>
+        <p:spPr>
+          <a:xfrm>
+            <a:off x="457200" y="3657600"/>
+            <a:ext cx="11430000" cy="457200"/>
+          </a:xfrm>
+          <a:prstGeom prst="roundRect">
+            <a:avLst>
+              <a:gd name="adj" fmla="val 10000"/>
+            </a:avLst>
+          </a:prstGeom>
+          <a:solidFill>
+            <a:srgbClr val="373E99"/>
+          </a:solidFill>
+          <a:ln>
+            <a:noFill/>
+          </a:ln>
+        </p:spPr>
+        <p:style>
+          <a:lnRef idx="1">
+            <a:schemeClr val="accent1"/>
+          </a:lnRef>
+          <a:fillRef idx="3">
+            <a:schemeClr val="accent1"/>
+          </a:fillRef>
+          <a:effectRef idx="2">
+            <a:schemeClr val="accent1"/>
+          </a:effectRef>
+          <a:fontRef idx="minor">
+            <a:schemeClr val="lt1"/>
+          </a:fontRef>
+        </p:style>
+        <p:txBody>
+          <a:bodyPr rtlCol="0" anchor="ctr"/>
+          <a:lstStyle/>
+          <a:p>
+            <a:pPr algn="ctr"/>
+          </a:p>
+        </p:txBody>
+      </p:sp>
+      <p:sp>
+        <p:nvSpPr>
+          <p:cNvPr id="11" name="TextBox 10"/>
+          <p:cNvSpPr txBox="1"/>
+          <p:nvPr/>
+        </p:nvSpPr>
+        <p:spPr>
+          <a:xfrm>
+            <a:off x="685800" y="3657600"/>
+            <a:ext cx="10972800" cy="457200"/>
+          </a:xfrm>
+          <a:prstGeom prst="rect">
+            <a:avLst/>
+          </a:prstGeom>
+          <a:noFill/>
+        </p:spPr>
+        <p:txBody>
+          <a:bodyPr wrap="square" lIns="0" rIns="0" tIns="0" bIns="0" anchor="ctr">
+            <a:spAutoFit/>
+          </a:bodyPr>
+          <a:lstStyle/>
+          <a:p>
+            <a:pPr algn="l"/>
+            <a:r>
+              <a:rPr sz="1400" b="1">
+                <a:solidFill>
+                  <a:srgbClr val="FFFFFF"/>
+                </a:solidFill>
+                <a:latin typeface="Yu Gothic"/>
+              </a:rPr>
+              <a:t>📊  Power BI:  あなたの今月の会議コスト</a:t>
+            </a:r>
+          </a:p>
+        </p:txBody>
+      </p:sp>
+      <p:sp>
+        <p:nvSpPr>
+          <p:cNvPr id="12" name="Rounded Rectangle 11"/>
+          <p:cNvSpPr/>
+          <p:nvPr/>
+        </p:nvSpPr>
+        <p:spPr>
+          <a:xfrm>
+            <a:off x="457200" y="4206240"/>
+            <a:ext cx="3657600" cy="1371600"/>
+          </a:xfrm>
+          <a:prstGeom prst="roundRect">
+            <a:avLst>
+              <a:gd name="adj" fmla="val 8000"/>
+            </a:avLst>
+          </a:prstGeom>
+          <a:solidFill>
+            <a:srgbClr val="FFFFFF"/>
+          </a:solidFill>
+          <a:ln w="9525">
+            <a:solidFill>
+              <a:srgbClr val="C8C6C4"/>
+            </a:solidFill>
+          </a:ln>
+        </p:spPr>
+        <p:style>
+          <a:lnRef idx="1">
+            <a:schemeClr val="accent1"/>
+          </a:lnRef>
+          <a:fillRef idx="3">
+            <a:schemeClr val="accent1"/>
+          </a:fillRef>
+          <a:effectRef idx="2">
+            <a:schemeClr val="accent1"/>
+          </a:effectRef>
+          <a:fontRef idx="minor">
+            <a:schemeClr val="lt1"/>
+          </a:fontRef>
+        </p:style>
+        <p:txBody>
+          <a:bodyPr rtlCol="0" anchor="ctr"/>
+          <a:lstStyle/>
+          <a:p>
+            <a:pPr algn="ctr"/>
+          </a:p>
+        </p:txBody>
+      </p:sp>
+      <p:sp>
+        <p:nvSpPr>
+          <p:cNvPr id="13" name="Rounded Rectangle 12"/>
+          <p:cNvSpPr/>
+          <p:nvPr/>
+        </p:nvSpPr>
+        <p:spPr>
+          <a:xfrm>
+            <a:off x="457200" y="4206240"/>
+            <a:ext cx="3657600" cy="54864"/>
+          </a:xfrm>
+          <a:prstGeom prst="roundRect">
+            <a:avLst>
+              <a:gd name="adj" fmla="val 10000"/>
+            </a:avLst>
+          </a:prstGeom>
+          <a:solidFill>
+            <a:srgbClr val="D83B01"/>
+          </a:solidFill>
+          <a:ln>
+            <a:noFill/>
+          </a:ln>
+        </p:spPr>
+        <p:style>
+          <a:lnRef idx="1">
+            <a:schemeClr val="accent1"/>
+          </a:lnRef>
+          <a:fillRef idx="3">
+            <a:schemeClr val="accent1"/>
+          </a:fillRef>
+          <a:effectRef idx="2">
+            <a:schemeClr val="accent1"/>
+          </a:effectRef>
+          <a:fontRef idx="minor">
+            <a:schemeClr val="lt1"/>
+          </a:fontRef>
+        </p:style>
+        <p:txBody>
+          <a:bodyPr rtlCol="0" anchor="ctr"/>
+          <a:lstStyle/>
+          <a:p>
+            <a:pPr algn="ctr"/>
+          </a:p>
+        </p:txBody>
+      </p:sp>
+      <p:sp>
+        <p:nvSpPr>
+          <p:cNvPr id="14" name="TextBox 13"/>
+          <p:cNvSpPr txBox="1"/>
+          <p:nvPr/>
+        </p:nvSpPr>
+        <p:spPr>
+          <a:xfrm>
+            <a:off x="685800" y="4297680"/>
+            <a:ext cx="3383280" cy="365760"/>
+          </a:xfrm>
+          <a:prstGeom prst="rect">
+            <a:avLst/>
+          </a:prstGeom>
+          <a:noFill/>
+        </p:spPr>
+        <p:txBody>
+          <a:bodyPr wrap="square" lIns="0" rIns="0" tIns="0" bIns="0" anchor="t">
+            <a:spAutoFit/>
+          </a:bodyPr>
+          <a:lstStyle/>
+          <a:p>
+            <a:pPr algn="l"/>
+            <a:r>
+              <a:rPr sz="1100" b="1">
+                <a:solidFill>
+                  <a:srgbClr val="605E5C"/>
+                </a:solidFill>
+                <a:latin typeface="Yu Gothic"/>
+              </a:rPr>
+              <a:t>💰 今月のコスト</a:t>
+            </a:r>
+          </a:p>
+        </p:txBody>
+      </p:sp>
+      <p:sp>
+        <p:nvSpPr>
+          <p:cNvPr id="15" name="TextBox 14"/>
+          <p:cNvSpPr txBox="1"/>
+          <p:nvPr/>
+        </p:nvSpPr>
+        <p:spPr>
+          <a:xfrm>
+            <a:off x="685800" y="4709160"/>
+            <a:ext cx="3383280" cy="777240"/>
+          </a:xfrm>
+          <a:prstGeom prst="rect">
+            <a:avLst/>
+          </a:prstGeom>
+          <a:noFill/>
+        </p:spPr>
+        <p:txBody>
+          <a:bodyPr wrap="square" lIns="0" rIns="0" tIns="0" bIns="0" anchor="ctr">
+            <a:spAutoFit/>
+          </a:bodyPr>
+          <a:lstStyle/>
+          <a:p>
+            <a:pPr algn="l"/>
+            <a:r>
+              <a:rPr sz="2600" b="1">
+                <a:solidFill>
+                  <a:srgbClr val="D83B01"/>
+                </a:solidFill>
+                <a:latin typeface="Yu Gothic"/>
+              </a:rPr>
+              <a:t>284,500円</a:t>
+            </a:r>
+          </a:p>
+        </p:txBody>
+      </p:sp>
+      <p:sp>
+        <p:nvSpPr>
+          <p:cNvPr id="16" name="Rounded Rectangle 15"/>
+          <p:cNvSpPr/>
+          <p:nvPr/>
+        </p:nvSpPr>
+        <p:spPr>
+          <a:xfrm>
+            <a:off x="4297680" y="4206240"/>
+            <a:ext cx="3657600" cy="1371600"/>
+          </a:xfrm>
+          <a:prstGeom prst="roundRect">
+            <a:avLst>
+              <a:gd name="adj" fmla="val 8000"/>
+            </a:avLst>
+          </a:prstGeom>
+          <a:solidFill>
+            <a:srgbClr val="FFFFFF"/>
+          </a:solidFill>
+          <a:ln w="9525">
+            <a:solidFill>
+              <a:srgbClr val="C8C6C4"/>
+            </a:solidFill>
+          </a:ln>
+        </p:spPr>
+        <p:style>
+          <a:lnRef idx="1">
+            <a:schemeClr val="accent1"/>
+          </a:lnRef>
+          <a:fillRef idx="3">
+            <a:schemeClr val="accent1"/>
+          </a:fillRef>
+          <a:effectRef idx="2">
+            <a:schemeClr val="accent1"/>
+          </a:effectRef>
+          <a:fontRef idx="minor">
+            <a:schemeClr val="lt1"/>
+          </a:fontRef>
+        </p:style>
+        <p:txBody>
+          <a:bodyPr rtlCol="0" anchor="ctr"/>
+          <a:lstStyle/>
+          <a:p>
+            <a:pPr algn="ctr"/>
+          </a:p>
+        </p:txBody>
+      </p:sp>
+      <p:sp>
+        <p:nvSpPr>
+          <p:cNvPr id="17" name="Rounded Rectangle 16"/>
+          <p:cNvSpPr/>
+          <p:nvPr/>
+        </p:nvSpPr>
+        <p:spPr>
+          <a:xfrm>
+            <a:off x="4297680" y="4206240"/>
+            <a:ext cx="3657600" cy="54864"/>
+          </a:xfrm>
+          <a:prstGeom prst="roundRect">
+            <a:avLst>
+              <a:gd name="adj" fmla="val 10000"/>
+            </a:avLst>
+          </a:prstGeom>
+          <a:solidFill>
+            <a:srgbClr val="0078D4"/>
+          </a:solidFill>
+          <a:ln>
+            <a:noFill/>
+          </a:ln>
+        </p:spPr>
+        <p:style>
+          <a:lnRef idx="1">
+            <a:schemeClr val="accent1"/>
+          </a:lnRef>
+          <a:fillRef idx="3">
+            <a:schemeClr val="accent1"/>
+          </a:fillRef>
+          <a:effectRef idx="2">
+            <a:schemeClr val="accent1"/>
+          </a:effectRef>
+          <a:fontRef idx="minor">
+            <a:schemeClr val="lt1"/>
+          </a:fontRef>
+        </p:style>
+        <p:txBody>
+          <a:bodyPr rtlCol="0" anchor="ctr"/>
+          <a:lstStyle/>
+          <a:p>
+            <a:pPr algn="ctr"/>
+          </a:p>
+        </p:txBody>
+      </p:sp>
+      <p:sp>
+        <p:nvSpPr>
+          <p:cNvPr id="18" name="TextBox 17"/>
+          <p:cNvSpPr txBox="1"/>
+          <p:nvPr/>
+        </p:nvSpPr>
+        <p:spPr>
+          <a:xfrm>
+            <a:off x="4526280" y="4297680"/>
+            <a:ext cx="3383280" cy="365760"/>
+          </a:xfrm>
+          <a:prstGeom prst="rect">
+            <a:avLst/>
+          </a:prstGeom>
+          <a:noFill/>
+        </p:spPr>
+        <p:txBody>
+          <a:bodyPr wrap="square" lIns="0" rIns="0" tIns="0" bIns="0" anchor="t">
+            <a:spAutoFit/>
+          </a:bodyPr>
+          <a:lstStyle/>
+          <a:p>
+            <a:pPr algn="l"/>
+            <a:r>
+              <a:rPr sz="1100" b="1">
+                <a:solidFill>
+                  <a:srgbClr val="605E5C"/>
+                </a:solidFill>
+                <a:latin typeface="Yu Gothic"/>
+              </a:rPr>
+              <a:t>⏰ 会議時間</a:t>
+            </a:r>
+          </a:p>
+        </p:txBody>
+      </p:sp>
+      <p:sp>
+        <p:nvSpPr>
+          <p:cNvPr id="19" name="TextBox 18"/>
+          <p:cNvSpPr txBox="1"/>
+          <p:nvPr/>
+        </p:nvSpPr>
+        <p:spPr>
+          <a:xfrm>
+            <a:off x="4526280" y="4709160"/>
+            <a:ext cx="3383280" cy="777240"/>
+          </a:xfrm>
+          <a:prstGeom prst="rect">
+            <a:avLst/>
+          </a:prstGeom>
+          <a:noFill/>
+        </p:spPr>
+        <p:txBody>
+          <a:bodyPr wrap="square" lIns="0" rIns="0" tIns="0" bIns="0" anchor="ctr">
+            <a:spAutoFit/>
+          </a:bodyPr>
+          <a:lstStyle/>
+          <a:p>
+            <a:pPr algn="l"/>
+            <a:r>
+              <a:rPr sz="2600" b="1">
+                <a:solidFill>
+                  <a:srgbClr val="0078D4"/>
+                </a:solidFill>
+                <a:latin typeface="Yu Gothic"/>
+              </a:rPr>
+              <a:t>62時間</a:t>
+            </a:r>
+          </a:p>
+        </p:txBody>
+      </p:sp>
+      <p:sp>
+        <p:nvSpPr>
+          <p:cNvPr id="20" name="Rounded Rectangle 19"/>
+          <p:cNvSpPr/>
+          <p:nvPr/>
+        </p:nvSpPr>
+        <p:spPr>
+          <a:xfrm>
+            <a:off x="8138160" y="4206240"/>
+            <a:ext cx="3657600" cy="1371600"/>
+          </a:xfrm>
+          <a:prstGeom prst="roundRect">
+            <a:avLst>
+              <a:gd name="adj" fmla="val 8000"/>
+            </a:avLst>
+          </a:prstGeom>
+          <a:solidFill>
+            <a:srgbClr val="FFFFFF"/>
+          </a:solidFill>
+          <a:ln w="9525">
+            <a:solidFill>
+              <a:srgbClr val="C8C6C4"/>
+            </a:solidFill>
+          </a:ln>
+        </p:spPr>
+        <p:style>
+          <a:lnRef idx="1">
+            <a:schemeClr val="accent1"/>
+          </a:lnRef>
+          <a:fillRef idx="3">
+            <a:schemeClr val="accent1"/>
+          </a:fillRef>
+          <a:effectRef idx="2">
+            <a:schemeClr val="accent1"/>
+          </a:effectRef>
+          <a:fontRef idx="minor">
+            <a:schemeClr val="lt1"/>
+          </a:fontRef>
+        </p:style>
+        <p:txBody>
+          <a:bodyPr rtlCol="0" anchor="ctr"/>
+          <a:lstStyle/>
+          <a:p>
+            <a:pPr algn="ctr"/>
+          </a:p>
+        </p:txBody>
+      </p:sp>
+      <p:sp>
+        <p:nvSpPr>
+          <p:cNvPr id="21" name="Rounded Rectangle 20"/>
+          <p:cNvSpPr/>
+          <p:nvPr/>
+        </p:nvSpPr>
+        <p:spPr>
+          <a:xfrm>
+            <a:off x="8138160" y="4206240"/>
+            <a:ext cx="3657600" cy="54864"/>
+          </a:xfrm>
+          <a:prstGeom prst="roundRect">
+            <a:avLst>
+              <a:gd name="adj" fmla="val 10000"/>
+            </a:avLst>
+          </a:prstGeom>
+          <a:solidFill>
+            <a:srgbClr val="107C10"/>
+          </a:solidFill>
+          <a:ln>
+            <a:noFill/>
+          </a:ln>
+        </p:spPr>
+        <p:style>
+          <a:lnRef idx="1">
+            <a:schemeClr val="accent1"/>
+          </a:lnRef>
+          <a:fillRef idx="3">
+            <a:schemeClr val="accent1"/>
+          </a:fillRef>
+          <a:effectRef idx="2">
+            <a:schemeClr val="accent1"/>
+          </a:effectRef>
+          <a:fontRef idx="minor">
+            <a:schemeClr val="lt1"/>
+          </a:fontRef>
+        </p:style>
+        <p:txBody>
+          <a:bodyPr rtlCol="0" anchor="ctr"/>
+          <a:lstStyle/>
+          <a:p>
+            <a:pPr algn="ctr"/>
+          </a:p>
+        </p:txBody>
+      </p:sp>
+      <p:sp>
+        <p:nvSpPr>
+          <p:cNvPr id="22" name="TextBox 21"/>
+          <p:cNvSpPr txBox="1"/>
+          <p:nvPr/>
+        </p:nvSpPr>
+        <p:spPr>
+          <a:xfrm>
+            <a:off x="8366760" y="4297680"/>
+            <a:ext cx="3383280" cy="365760"/>
+          </a:xfrm>
+          <a:prstGeom prst="rect">
+            <a:avLst/>
+          </a:prstGeom>
+          <a:noFill/>
+        </p:spPr>
+        <p:txBody>
+          <a:bodyPr wrap="square" lIns="0" rIns="0" tIns="0" bIns="0" anchor="t">
+            <a:spAutoFit/>
+          </a:bodyPr>
+          <a:lstStyle/>
+          <a:p>
+            <a:pPr algn="l"/>
+            <a:r>
+              <a:rPr sz="1100" b="1">
+                <a:solidFill>
+                  <a:srgbClr val="605E5C"/>
+                </a:solidFill>
+                <a:latin typeface="Yu Gothic"/>
+              </a:rPr>
+              <a:t>👥 のべ参加者</a:t>
+            </a:r>
+          </a:p>
+        </p:txBody>
+      </p:sp>
+      <p:sp>
+        <p:nvSpPr>
+          <p:cNvPr id="23" name="TextBox 22"/>
+          <p:cNvSpPr txBox="1"/>
+          <p:nvPr/>
+        </p:nvSpPr>
+        <p:spPr>
+          <a:xfrm>
+            <a:off x="8366760" y="4709160"/>
+            <a:ext cx="3383280" cy="777240"/>
+          </a:xfrm>
+          <a:prstGeom prst="rect">
+            <a:avLst/>
+          </a:prstGeom>
+          <a:noFill/>
+        </p:spPr>
+        <p:txBody>
+          <a:bodyPr wrap="square" lIns="0" rIns="0" tIns="0" bIns="0" anchor="ctr">
+            <a:spAutoFit/>
+          </a:bodyPr>
+          <a:lstStyle/>
+          <a:p>
+            <a:pPr algn="l"/>
+            <a:r>
+              <a:rPr sz="2600" b="1">
+                <a:solidFill>
+                  <a:srgbClr val="107C10"/>
+                </a:solidFill>
+                <a:latin typeface="Yu Gothic"/>
+              </a:rPr>
+              <a:t>187人</a:t>
+            </a:r>
+          </a:p>
+        </p:txBody>
+      </p:sp>
+      <p:sp>
+        <p:nvSpPr>
+          <p:cNvPr id="24" name="Rounded Rectangle 23"/>
+          <p:cNvSpPr/>
+          <p:nvPr/>
+        </p:nvSpPr>
+        <p:spPr>
+          <a:xfrm>
+            <a:off x="457200" y="5852160"/>
+            <a:ext cx="54864" cy="365760"/>
+          </a:xfrm>
+          <a:prstGeom prst="roundRect">
+            <a:avLst>
+              <a:gd name="adj" fmla="val 10000"/>
+            </a:avLst>
+          </a:prstGeom>
+          <a:solidFill>
+            <a:srgbClr val="7460DB"/>
+          </a:solidFill>
+          <a:ln>
+            <a:noFill/>
+          </a:ln>
+        </p:spPr>
+        <p:style>
+          <a:lnRef idx="1">
+            <a:schemeClr val="accent1"/>
+          </a:lnRef>
+          <a:fillRef idx="3">
+            <a:schemeClr val="accent1"/>
+          </a:fillRef>
+          <a:effectRef idx="2">
+            <a:schemeClr val="accent1"/>
+          </a:effectRef>
+          <a:fontRef idx="minor">
+            <a:schemeClr val="lt1"/>
+          </a:fontRef>
+        </p:style>
+        <p:txBody>
+          <a:bodyPr rtlCol="0" anchor="ctr"/>
+          <a:lstStyle/>
+          <a:p>
+            <a:pPr algn="ctr"/>
+          </a:p>
+        </p:txBody>
+      </p:sp>
+      <p:sp>
+        <p:nvSpPr>
+          <p:cNvPr id="25" name="TextBox 24"/>
+          <p:cNvSpPr txBox="1"/>
+          <p:nvPr/>
+        </p:nvSpPr>
+        <p:spPr>
+          <a:xfrm>
+            <a:off x="640080" y="5852160"/>
+            <a:ext cx="10972800" cy="365760"/>
+          </a:xfrm>
+          <a:prstGeom prst="rect">
+            <a:avLst/>
+          </a:prstGeom>
+          <a:noFill/>
+        </p:spPr>
+        <p:txBody>
+          <a:bodyPr wrap="square" lIns="0" rIns="0" tIns="0" bIns="0" anchor="ctr">
+            <a:spAutoFit/>
+          </a:bodyPr>
+          <a:lstStyle/>
+          <a:p>
+            <a:pPr algn="l"/>
+            <a:r>
+              <a:rPr sz="1400" b="0">
+                <a:solidFill>
+                  <a:srgbClr val="373E99"/>
+                </a:solidFill>
+                <a:latin typeface="Yu Gothic"/>
+              </a:rPr>
+              <a:t>真面目すぎず、ニヤッと笑える数字の見せ方で作ってます 😎</a:t>
+            </a:r>
+          </a:p>
+        </p:txBody>
+      </p:sp>
+      <p:sp>
+        <p:nvSpPr>
+          <p:cNvPr id="26" name="TextBox 25"/>
+          <p:cNvSpPr txBox="1"/>
+          <p:nvPr/>
+        </p:nvSpPr>
+        <p:spPr>
+          <a:xfrm>
+            <a:off x="365760" y="6446520"/>
+            <a:ext cx="6400800" cy="274320"/>
+          </a:xfrm>
+          <a:prstGeom prst="rect">
+            <a:avLst/>
+          </a:prstGeom>
+          <a:noFill/>
+        </p:spPr>
+        <p:txBody>
+          <a:bodyPr wrap="square" lIns="0" rIns="0" tIns="0" bIns="0" anchor="t">
+            <a:spAutoFit/>
+          </a:bodyPr>
+          <a:lstStyle/>
+          <a:p>
+            <a:pPr algn="l"/>
+            <a:r>
+              <a:rPr sz="1000" b="0">
+                <a:solidFill>
+                  <a:srgbClr val="605E5C"/>
+                </a:solidFill>
+                <a:latin typeface="Yu Gothic"/>
+              </a:rPr>
+              <a:t>Power Automate 45 (PA45)  ×  Copilot Community LT</a:t>
+            </a:r>
+          </a:p>
+        </p:txBody>
+      </p:sp>
+      <p:sp>
+        <p:nvSpPr>
+          <p:cNvPr id="27" name="TextBox 26"/>
+          <p:cNvSpPr txBox="1"/>
+          <p:nvPr/>
+        </p:nvSpPr>
+        <p:spPr>
+          <a:xfrm>
+            <a:off x="11277600" y="6446520"/>
+            <a:ext cx="548640" cy="274320"/>
+          </a:xfrm>
+          <a:prstGeom prst="rect">
+            <a:avLst/>
+          </a:prstGeom>
+          <a:noFill/>
+        </p:spPr>
+        <p:txBody>
+          <a:bodyPr wrap="square" lIns="0" rIns="0" tIns="0" bIns="0" anchor="t">
+            <a:spAutoFit/>
+          </a:bodyPr>
+          <a:lstStyle/>
+          <a:p>
+            <a:pPr algn="r"/>
+            <a:r>
+              <a:rPr sz="1000" b="0">
+                <a:solidFill>
+                  <a:srgbClr val="605E5C"/>
+                </a:solidFill>
+                <a:latin typeface="Yu Gothic"/>
+              </a:rPr>
+              <a:t>10 / 10</a:t>
+            </a:r>
+          </a:p>
+        </p:txBody>
+      </p:sp>
+    </p:spTree>
+  </p:cSld>
+  <p:clrMapOvr>
+    <a:masterClrMapping/>
+  </p:clrMapOvr>
+</p:sld>
+</file>
+
+<file path=ppt/slides/slide2.xml><?xml version="1.0" encoding="utf-8"?>
+<p:sld xmlns:a="http://schemas.openxmlformats.org/drawingml/2006/main" xmlns:p="http://schemas.openxmlformats.org/presentationml/2006/main" xmlns:r="http://schemas.openxmlformats.org/officeDocument/2006/relationships">
+  <p:cSld>
+    <p:spTree>
+      <p:nvGrpSpPr>
+        <p:cNvPr id="1" name=""/>
+        <p:cNvGrpSpPr/>
+        <p:nvPr/>
+      </p:nvGrpSpPr>
+      <p:grpSpPr/>
+      <p:sp>
+        <p:nvSpPr>
+          <p:cNvPr id="2" name="Rounded Rectangle 1"/>
+          <p:cNvSpPr/>
+          <p:nvPr/>
+        </p:nvSpPr>
+        <p:spPr>
+          <a:xfrm>
+            <a:off x="0" y="0"/>
+            <a:ext cx="12192000" cy="6858000"/>
+          </a:xfrm>
+          <a:prstGeom prst="roundRect">
+            <a:avLst>
+              <a:gd name="adj" fmla="val 10000"/>
+            </a:avLst>
+          </a:prstGeom>
+          <a:solidFill>
+            <a:srgbClr val="FFFFFF"/>
+          </a:solidFill>
+          <a:ln>
+            <a:noFill/>
+          </a:ln>
+        </p:spPr>
+        <p:style>
+          <a:lnRef idx="1">
+            <a:schemeClr val="accent1"/>
+          </a:lnRef>
+          <a:fillRef idx="3">
+            <a:schemeClr val="accent1"/>
+          </a:fillRef>
+          <a:effectRef idx="2">
+            <a:schemeClr val="accent1"/>
+          </a:effectRef>
+          <a:fontRef idx="minor">
+            <a:schemeClr val="lt1"/>
+          </a:fontRef>
+        </p:style>
+        <p:txBody>
+          <a:bodyPr rtlCol="0" anchor="ctr"/>
+          <a:lstStyle/>
+          <a:p>
+            <a:pPr algn="ctr"/>
+          </a:p>
+        </p:txBody>
+      </p:sp>
+      <p:sp>
+        <p:nvSpPr>
+          <p:cNvPr id="3" name="Rounded Rectangle 2"/>
+          <p:cNvSpPr/>
+          <p:nvPr/>
+        </p:nvSpPr>
+        <p:spPr>
+          <a:xfrm>
+            <a:off x="0" y="0"/>
+            <a:ext cx="320040" cy="6858000"/>
+          </a:xfrm>
+          <a:prstGeom prst="roundRect">
+            <a:avLst>
+              <a:gd name="adj" fmla="val 10000"/>
+            </a:avLst>
+          </a:prstGeom>
+          <a:solidFill>
+            <a:srgbClr val="464EB8"/>
+          </a:solidFill>
+          <a:ln>
+            <a:noFill/>
+          </a:ln>
+        </p:spPr>
+        <p:style>
+          <a:lnRef idx="1">
+            <a:schemeClr val="accent1"/>
+          </a:lnRef>
+          <a:fillRef idx="3">
+            <a:schemeClr val="accent1"/>
+          </a:fillRef>
+          <a:effectRef idx="2">
+            <a:schemeClr val="accent1"/>
+          </a:effectRef>
+          <a:fontRef idx="minor">
+            <a:schemeClr val="lt1"/>
+          </a:fontRef>
+        </p:style>
+        <p:txBody>
+          <a:bodyPr rtlCol="0" anchor="ctr"/>
+          <a:lstStyle/>
+          <a:p>
+            <a:pPr algn="ctr"/>
+          </a:p>
+        </p:txBody>
+      </p:sp>
+      <p:sp>
+        <p:nvSpPr>
+          <p:cNvPr id="4" name="Rounded Rectangle 3"/>
+          <p:cNvSpPr/>
+          <p:nvPr/>
+        </p:nvSpPr>
+        <p:spPr>
+          <a:xfrm>
+            <a:off x="11643360" y="0"/>
+            <a:ext cx="548640" cy="1828800"/>
+          </a:xfrm>
+          <a:prstGeom prst="roundRect">
+            <a:avLst>
+              <a:gd name="adj" fmla="val 10000"/>
+            </a:avLst>
+          </a:prstGeom>
+          <a:solidFill>
+            <a:srgbClr val="7460DB"/>
+          </a:solidFill>
+          <a:ln>
+            <a:noFill/>
+          </a:ln>
+        </p:spPr>
+        <p:style>
+          <a:lnRef idx="1">
+            <a:schemeClr val="accent1"/>
+          </a:lnRef>
+          <a:fillRef idx="3">
+            <a:schemeClr val="accent1"/>
+          </a:fillRef>
+          <a:effectRef idx="2">
+            <a:schemeClr val="accent1"/>
+          </a:effectRef>
+          <a:fontRef idx="minor">
+            <a:schemeClr val="lt1"/>
+          </a:fontRef>
+        </p:style>
+        <p:txBody>
+          <a:bodyPr rtlCol="0" anchor="ctr"/>
+          <a:lstStyle/>
+          <a:p>
+            <a:pPr algn="ctr"/>
+          </a:p>
+        </p:txBody>
+      </p:sp>
+      <p:sp>
+        <p:nvSpPr>
+          <p:cNvPr id="5" name="Rounded Rectangle 4"/>
+          <p:cNvSpPr/>
+          <p:nvPr/>
+        </p:nvSpPr>
+        <p:spPr>
+          <a:xfrm>
+            <a:off x="731520" y="640080"/>
+            <a:ext cx="3657600" cy="411480"/>
+          </a:xfrm>
+          <a:prstGeom prst="roundRect">
+            <a:avLst>
+              <a:gd name="adj" fmla="val 10000"/>
+            </a:avLst>
+          </a:prstGeom>
+          <a:solidFill>
+            <a:srgbClr val="E8E9F7"/>
+          </a:solidFill>
+          <a:ln>
+            <a:noFill/>
+          </a:ln>
+        </p:spPr>
+        <p:style>
+          <a:lnRef idx="1">
+            <a:schemeClr val="accent1"/>
+          </a:lnRef>
+          <a:fillRef idx="3">
+            <a:schemeClr val="accent1"/>
+          </a:fillRef>
+          <a:effectRef idx="2">
+            <a:schemeClr val="accent1"/>
+          </a:effectRef>
+          <a:fontRef idx="minor">
+            <a:schemeClr val="lt1"/>
+          </a:fontRef>
+        </p:style>
+        <p:txBody>
+          <a:bodyPr rtlCol="0" anchor="ctr"/>
+          <a:lstStyle/>
+          <a:p>
+            <a:pPr algn="ctr"/>
+          </a:p>
+        </p:txBody>
+      </p:sp>
+      <p:sp>
+        <p:nvSpPr>
+          <p:cNvPr id="6" name="TextBox 5"/>
+          <p:cNvSpPr txBox="1"/>
+          <p:nvPr/>
+        </p:nvSpPr>
+        <p:spPr>
+          <a:xfrm>
+            <a:off x="731520" y="640080"/>
+            <a:ext cx="3657600" cy="411480"/>
+          </a:xfrm>
+          <a:prstGeom prst="rect">
+            <a:avLst/>
+          </a:prstGeom>
+          <a:noFill/>
+        </p:spPr>
+        <p:txBody>
+          <a:bodyPr wrap="square" lIns="0" rIns="0" tIns="0" bIns="0" anchor="ctr">
+            <a:spAutoFit/>
+          </a:bodyPr>
+          <a:lstStyle/>
+          <a:p>
+            <a:pPr algn="ctr"/>
+            <a:r>
+              <a:rPr sz="1100" b="1">
+                <a:solidFill>
+                  <a:srgbClr val="373E99"/>
+                </a:solidFill>
+                <a:latin typeface="Yu Gothic"/>
+              </a:rPr>
+              <a:t>⚡ LIGHTNING TALK  ×  COPILOT COMMUNITY</a:t>
+            </a:r>
+          </a:p>
+        </p:txBody>
+      </p:sp>
+      <p:sp>
+        <p:nvSpPr>
+          <p:cNvPr id="7" name="TextBox 6"/>
+          <p:cNvSpPr txBox="1"/>
+          <p:nvPr/>
+        </p:nvSpPr>
+        <p:spPr>
+          <a:xfrm>
+            <a:off x="822960" y="1554480"/>
+            <a:ext cx="10515600" cy="3657600"/>
+          </a:xfrm>
+          <a:prstGeom prst="rect">
+            <a:avLst/>
+          </a:prstGeom>
+          <a:noFill/>
+        </p:spPr>
+        <p:txBody>
+          <a:bodyPr wrap="square" lIns="0" rIns="0">
+            <a:spAutoFit/>
+          </a:bodyPr>
+          <a:lstStyle/>
+          <a:p>
+            <a:pPr algn="l"/>
+            <a:r>
+              <a:rPr sz="3200" b="1">
+                <a:solidFill>
+                  <a:srgbClr val="323130"/>
+                </a:solidFill>
+                <a:latin typeface="Yu Gothic"/>
+              </a:rPr>
+              <a:t>Copilotに「会議減らしたい」と</a:t>
+            </a:r>
+          </a:p>
+          <a:p>
+            <a:pPr algn="l"/>
+            <a:r>
+              <a:rPr sz="3200" b="1">
+                <a:solidFill>
+                  <a:srgbClr val="323130"/>
+                </a:solidFill>
+                <a:latin typeface="Yu Gothic"/>
+              </a:rPr>
+              <a:t>泣きついたら、Power Automateで</a:t>
+            </a:r>
+          </a:p>
+          <a:p>
+            <a:pPr algn="l"/>
+            <a:r>
+              <a:rPr sz="3200" b="1">
+                <a:solidFill>
+                  <a:srgbClr val="323130"/>
+                </a:solidFill>
+                <a:latin typeface="Yu Gothic"/>
+              </a:rPr>
+              <a:t>会議コストBotを生み出す羽目</a:t>
+            </a:r>
+          </a:p>
+          <a:p>
+            <a:pPr algn="l"/>
+            <a:r>
+              <a:rPr sz="3200" b="1">
+                <a:solidFill>
+                  <a:srgbClr val="323130"/>
+                </a:solidFill>
+                <a:latin typeface="Yu Gothic"/>
+              </a:rPr>
+              <a:t>になった話</a:t>
+            </a:r>
+          </a:p>
+        </p:txBody>
+      </p:sp>
+      <p:sp>
+        <p:nvSpPr>
+          <p:cNvPr id="8" name="Rounded Rectangle 7"/>
+          <p:cNvSpPr/>
+          <p:nvPr/>
+        </p:nvSpPr>
+        <p:spPr>
+          <a:xfrm>
+            <a:off x="777240" y="5029200"/>
+            <a:ext cx="54864" cy="502920"/>
+          </a:xfrm>
+          <a:prstGeom prst="roundRect">
+            <a:avLst>
+              <a:gd name="adj" fmla="val 10000"/>
+            </a:avLst>
+          </a:prstGeom>
+          <a:solidFill>
+            <a:srgbClr val="0078D4"/>
+          </a:solidFill>
+          <a:ln>
+            <a:noFill/>
+          </a:ln>
+        </p:spPr>
+        <p:style>
+          <a:lnRef idx="1">
+            <a:schemeClr val="accent1"/>
+          </a:lnRef>
+          <a:fillRef idx="3">
+            <a:schemeClr val="accent1"/>
+          </a:fillRef>
+          <a:effectRef idx="2">
+            <a:schemeClr val="accent1"/>
+          </a:effectRef>
+          <a:fontRef idx="minor">
+            <a:schemeClr val="lt1"/>
+          </a:fontRef>
+        </p:style>
+        <p:txBody>
+          <a:bodyPr rtlCol="0" anchor="ctr"/>
+          <a:lstStyle/>
+          <a:p>
+            <a:pPr algn="ctr"/>
+          </a:p>
+        </p:txBody>
+      </p:sp>
+      <p:sp>
+        <p:nvSpPr>
+          <p:cNvPr id="9" name="TextBox 8"/>
+          <p:cNvSpPr txBox="1"/>
+          <p:nvPr/>
+        </p:nvSpPr>
+        <p:spPr>
+          <a:xfrm>
+            <a:off x="960120" y="5029200"/>
+            <a:ext cx="10972800" cy="502920"/>
+          </a:xfrm>
+          <a:prstGeom prst="rect">
+            <a:avLst/>
+          </a:prstGeom>
+          <a:noFill/>
+        </p:spPr>
+        <p:txBody>
+          <a:bodyPr wrap="square" lIns="0" rIns="0" tIns="0" bIns="0" anchor="ctr">
+            <a:spAutoFit/>
+          </a:bodyPr>
+          <a:lstStyle/>
+          <a:p>
+            <a:pPr algn="l"/>
+            <a:r>
+              <a:rPr sz="1600" b="0">
+                <a:solidFill>
+                  <a:srgbClr val="605E5C"/>
+                </a:solidFill>
+                <a:latin typeface="Yu Gothic"/>
+              </a:rPr>
+              <a:t>Copilot × Power Automate で7アクションのBotを作った話</a:t>
+            </a:r>
+          </a:p>
+        </p:txBody>
+      </p:sp>
+      <p:sp>
+        <p:nvSpPr>
+          <p:cNvPr id="10" name="Rounded Rectangle 9"/>
+          <p:cNvSpPr/>
+          <p:nvPr/>
+        </p:nvSpPr>
+        <p:spPr>
+          <a:xfrm>
+            <a:off x="777240" y="5852160"/>
+            <a:ext cx="54864" cy="502920"/>
+          </a:xfrm>
+          <a:prstGeom prst="roundRect">
+            <a:avLst>
+              <a:gd name="adj" fmla="val 10000"/>
+            </a:avLst>
+          </a:prstGeom>
+          <a:solidFill>
+            <a:srgbClr val="7460DB"/>
+          </a:solidFill>
+          <a:ln>
+            <a:noFill/>
+          </a:ln>
+        </p:spPr>
+        <p:style>
+          <a:lnRef idx="1">
+            <a:schemeClr val="accent1"/>
+          </a:lnRef>
+          <a:fillRef idx="3">
+            <a:schemeClr val="accent1"/>
+          </a:fillRef>
+          <a:effectRef idx="2">
+            <a:schemeClr val="accent1"/>
+          </a:effectRef>
+          <a:fontRef idx="minor">
+            <a:schemeClr val="lt1"/>
+          </a:fontRef>
+        </p:style>
+        <p:txBody>
+          <a:bodyPr rtlCol="0" anchor="ctr"/>
+          <a:lstStyle/>
+          <a:p>
+            <a:pPr algn="ctr"/>
+          </a:p>
+        </p:txBody>
+      </p:sp>
+      <p:sp>
+        <p:nvSpPr>
+          <p:cNvPr id="11" name="TextBox 10"/>
+          <p:cNvSpPr txBox="1"/>
+          <p:nvPr/>
+        </p:nvSpPr>
+        <p:spPr>
+          <a:xfrm>
+            <a:off x="960120" y="5852160"/>
+            <a:ext cx="10972800" cy="502920"/>
+          </a:xfrm>
+          <a:prstGeom prst="rect">
+            <a:avLst/>
+          </a:prstGeom>
+          <a:noFill/>
+        </p:spPr>
+        <p:txBody>
+          <a:bodyPr wrap="square" lIns="0" rIns="0" tIns="0" bIns="0" anchor="ctr">
+            <a:spAutoFit/>
+          </a:bodyPr>
+          <a:lstStyle/>
+          <a:p>
+            <a:pPr algn="l"/>
+            <a:r>
+              <a:rPr sz="1400" b="1">
+                <a:solidFill>
+                  <a:srgbClr val="373E99"/>
+                </a:solidFill>
+                <a:latin typeface="Yu Gothic"/>
+              </a:rPr>
+              <a:t>Haru (ism136)  /  Power Automate 45 主催</a:t>
+            </a:r>
+          </a:p>
+        </p:txBody>
+      </p:sp>
+      <p:sp>
+        <p:nvSpPr>
+          <p:cNvPr id="12" name="Oval 11"/>
+          <p:cNvSpPr/>
+          <p:nvPr/>
+        </p:nvSpPr>
+        <p:spPr>
+          <a:xfrm>
+            <a:off x="11094720" y="5989320"/>
+            <a:ext cx="146304" cy="146304"/>
+          </a:xfrm>
+          <a:prstGeom prst="ellipse">
+            <a:avLst/>
+          </a:prstGeom>
+          <a:solidFill>
+            <a:srgbClr val="0078D4"/>
+          </a:solidFill>
+          <a:ln>
+            <a:noFill/>
+          </a:ln>
+        </p:spPr>
+        <p:style>
+          <a:lnRef idx="1">
+            <a:schemeClr val="accent1"/>
+          </a:lnRef>
+          <a:fillRef idx="3">
+            <a:schemeClr val="accent1"/>
+          </a:fillRef>
+          <a:effectRef idx="2">
+            <a:schemeClr val="accent1"/>
+          </a:effectRef>
+          <a:fontRef idx="minor">
+            <a:schemeClr val="lt1"/>
+          </a:fontRef>
+        </p:style>
+        <p:txBody>
+          <a:bodyPr rtlCol="0" anchor="ctr"/>
+          <a:lstStyle/>
+          <a:p>
+            <a:pPr algn="ctr"/>
+          </a:p>
+        </p:txBody>
+      </p:sp>
+      <p:sp>
+        <p:nvSpPr>
+          <p:cNvPr id="13" name="Oval 12"/>
+          <p:cNvSpPr/>
+          <p:nvPr/>
+        </p:nvSpPr>
+        <p:spPr>
+          <a:xfrm>
+            <a:off x="11277600" y="5989320"/>
+            <a:ext cx="146304" cy="146304"/>
+          </a:xfrm>
+          <a:prstGeom prst="ellipse">
+            <a:avLst/>
+          </a:prstGeom>
+          <a:solidFill>
+            <a:srgbClr val="107C10"/>
+          </a:solidFill>
+          <a:ln>
+            <a:noFill/>
+          </a:ln>
+        </p:spPr>
+        <p:style>
+          <a:lnRef idx="1">
+            <a:schemeClr val="accent1"/>
+          </a:lnRef>
+          <a:fillRef idx="3">
+            <a:schemeClr val="accent1"/>
+          </a:fillRef>
+          <a:effectRef idx="2">
+            <a:schemeClr val="accent1"/>
+          </a:effectRef>
+          <a:fontRef idx="minor">
+            <a:schemeClr val="lt1"/>
+          </a:fontRef>
+        </p:style>
+        <p:txBody>
+          <a:bodyPr rtlCol="0" anchor="ctr"/>
+          <a:lstStyle/>
+          <a:p>
+            <a:pPr algn="ctr"/>
+          </a:p>
+        </p:txBody>
+      </p:sp>
+      <p:sp>
+        <p:nvSpPr>
+          <p:cNvPr id="14" name="Oval 13"/>
+          <p:cNvSpPr/>
+          <p:nvPr/>
+        </p:nvSpPr>
+        <p:spPr>
+          <a:xfrm>
+            <a:off x="11460481" y="5989320"/>
+            <a:ext cx="146304" cy="146304"/>
+          </a:xfrm>
+          <a:prstGeom prst="ellipse">
+            <a:avLst/>
+          </a:prstGeom>
+          <a:solidFill>
+            <a:srgbClr val="FFB900"/>
+          </a:solidFill>
+          <a:ln>
+            <a:noFill/>
+          </a:ln>
+        </p:spPr>
+        <p:style>
+          <a:lnRef idx="1">
+            <a:schemeClr val="accent1"/>
+          </a:lnRef>
+          <a:fillRef idx="3">
+            <a:schemeClr val="accent1"/>
+          </a:fillRef>
+          <a:effectRef idx="2">
+            <a:schemeClr val="accent1"/>
+          </a:effectRef>
+          <a:fontRef idx="minor">
+            <a:schemeClr val="lt1"/>
+          </a:fontRef>
+        </p:style>
+        <p:txBody>
+          <a:bodyPr rtlCol="0" anchor="ctr"/>
+          <a:lstStyle/>
+          <a:p>
+            <a:pPr algn="ctr"/>
+          </a:p>
+        </p:txBody>
+      </p:sp>
+      <p:sp>
+        <p:nvSpPr>
+          <p:cNvPr id="15" name="Oval 14"/>
+          <p:cNvSpPr/>
+          <p:nvPr/>
+        </p:nvSpPr>
+        <p:spPr>
+          <a:xfrm>
+            <a:off x="11643361" y="5989320"/>
+            <a:ext cx="146304" cy="146304"/>
+          </a:xfrm>
+          <a:prstGeom prst="ellipse">
+            <a:avLst/>
+          </a:prstGeom>
+          <a:solidFill>
+            <a:srgbClr val="D83B01"/>
+          </a:solidFill>
+          <a:ln>
+            <a:noFill/>
+          </a:ln>
+        </p:spPr>
+        <p:style>
+          <a:lnRef idx="1">
+            <a:schemeClr val="accent1"/>
+          </a:lnRef>
+          <a:fillRef idx="3">
+            <a:schemeClr val="accent1"/>
+          </a:fillRef>
+          <a:effectRef idx="2">
+            <a:schemeClr val="accent1"/>
+          </a:effectRef>
+          <a:fontRef idx="minor">
+            <a:schemeClr val="lt1"/>
+          </a:fontRef>
+        </p:style>
+        <p:txBody>
+          <a:bodyPr rtlCol="0" anchor="ctr"/>
+          <a:lstStyle/>
+          <a:p>
+            <a:pPr algn="ctr"/>
+          </a:p>
+        </p:txBody>
+      </p:sp>
+    </p:spTree>
+  </p:cSld>
+  <p:clrMapOvr>
+    <a:masterClrMapping/>
+  </p:clrMapOvr>
+</p:sld>
+</file>
+
+<file path=ppt/slides/slide3.xml><?xml version="1.0" encoding="utf-8"?>
+<p:sld xmlns:a="http://schemas.openxmlformats.org/drawingml/2006/main" xmlns:p="http://schemas.openxmlformats.org/presentationml/2006/main" xmlns:r="http://schemas.openxmlformats.org/officeDocument/2006/relationships">
+  <p:cSld>
+    <p:spTree>
+      <p:nvGrpSpPr>
+        <p:cNvPr id="1" name=""/>
+        <p:cNvGrpSpPr/>
+        <p:nvPr/>
+      </p:nvGrpSpPr>
+      <p:grpSpPr/>
+      <p:sp>
+        <p:nvSpPr>
+          <p:cNvPr id="2" name="Rounded Rectangle 1"/>
+          <p:cNvSpPr/>
+          <p:nvPr/>
+        </p:nvSpPr>
+        <p:spPr>
+          <a:xfrm>
+            <a:off x="0" y="0"/>
+            <a:ext cx="12192000" cy="6858000"/>
+          </a:xfrm>
+          <a:prstGeom prst="roundRect">
+            <a:avLst>
+              <a:gd name="adj" fmla="val 10000"/>
+            </a:avLst>
+          </a:prstGeom>
+          <a:solidFill>
+            <a:srgbClr val="FFFFFF"/>
+          </a:solidFill>
+          <a:ln>
+            <a:noFill/>
+          </a:ln>
+        </p:spPr>
+        <p:style>
+          <a:lnRef idx="1">
+            <a:schemeClr val="accent1"/>
+          </a:lnRef>
+          <a:fillRef idx="3">
+            <a:schemeClr val="accent1"/>
+          </a:fillRef>
+          <a:effectRef idx="2">
+            <a:schemeClr val="accent1"/>
+          </a:effectRef>
+          <a:fontRef idx="minor">
+            <a:schemeClr val="lt1"/>
+          </a:fontRef>
+        </p:style>
+        <p:txBody>
+          <a:bodyPr rtlCol="0" anchor="ctr"/>
+          <a:lstStyle/>
+          <a:p>
+            <a:pPr algn="ctr"/>
+          </a:p>
+        </p:txBody>
+      </p:sp>
+      <p:sp>
+        <p:nvSpPr>
+          <p:cNvPr id="3" name="Rounded Rectangle 2"/>
+          <p:cNvSpPr/>
+          <p:nvPr/>
+        </p:nvSpPr>
+        <p:spPr>
+          <a:xfrm>
+            <a:off x="457200" y="411480"/>
+            <a:ext cx="822960" cy="502920"/>
+          </a:xfrm>
+          <a:prstGeom prst="roundRect">
+            <a:avLst>
+              <a:gd name="adj" fmla="val 10000"/>
+            </a:avLst>
+          </a:prstGeom>
+          <a:solidFill>
+            <a:srgbClr val="464EB8"/>
+          </a:solidFill>
+          <a:ln>
+            <a:noFill/>
+          </a:ln>
+        </p:spPr>
+        <p:style>
+          <a:lnRef idx="1">
+            <a:schemeClr val="accent1"/>
+          </a:lnRef>
+          <a:fillRef idx="3">
+            <a:schemeClr val="accent1"/>
+          </a:fillRef>
+          <a:effectRef idx="2">
+            <a:schemeClr val="accent1"/>
+          </a:effectRef>
+          <a:fontRef idx="minor">
+            <a:schemeClr val="lt1"/>
+          </a:fontRef>
+        </p:style>
+        <p:txBody>
+          <a:bodyPr rtlCol="0" anchor="ctr"/>
+          <a:lstStyle/>
+          <a:p>
+            <a:pPr algn="ctr"/>
+          </a:p>
+        </p:txBody>
+      </p:sp>
+      <p:sp>
+        <p:nvSpPr>
+          <p:cNvPr id="4" name="TextBox 3"/>
+          <p:cNvSpPr txBox="1"/>
+          <p:nvPr/>
+        </p:nvSpPr>
+        <p:spPr>
+          <a:xfrm>
+            <a:off x="457200" y="411480"/>
+            <a:ext cx="822960" cy="502920"/>
+          </a:xfrm>
+          <a:prstGeom prst="rect">
+            <a:avLst/>
+          </a:prstGeom>
+          <a:noFill/>
+        </p:spPr>
+        <p:txBody>
+          <a:bodyPr wrap="square" lIns="0" rIns="0" tIns="0" bIns="0" anchor="ctr">
+            <a:spAutoFit/>
+          </a:bodyPr>
+          <a:lstStyle/>
+          <a:p>
+            <a:pPr algn="ctr"/>
+            <a:r>
+              <a:rPr sz="1800" b="1">
+                <a:solidFill>
+                  <a:srgbClr val="FFFFFF"/>
+                </a:solidFill>
+                <a:latin typeface="Yu Gothic"/>
+              </a:rPr>
+              <a:t>01</a:t>
+            </a:r>
+          </a:p>
+        </p:txBody>
+      </p:sp>
+      <p:sp>
+        <p:nvSpPr>
+          <p:cNvPr id="5" name="TextBox 4"/>
+          <p:cNvSpPr txBox="1"/>
+          <p:nvPr/>
+        </p:nvSpPr>
+        <p:spPr>
+          <a:xfrm>
+            <a:off x="1463040" y="411480"/>
+            <a:ext cx="10058400" cy="502920"/>
+          </a:xfrm>
+          <a:prstGeom prst="rect">
+            <a:avLst/>
+          </a:prstGeom>
+          <a:noFill/>
+        </p:spPr>
+        <p:txBody>
+          <a:bodyPr wrap="square" lIns="0" rIns="0" tIns="0" bIns="0" anchor="ctr">
+            <a:spAutoFit/>
+          </a:bodyPr>
+          <a:lstStyle/>
+          <a:p>
+            <a:pPr algn="l"/>
+            <a:r>
+              <a:rPr sz="2200" b="1">
+                <a:solidFill>
+                  <a:srgbClr val="323130"/>
+                </a:solidFill>
+                <a:latin typeface="Yu Gothic"/>
+              </a:rPr>
+              <a:t>ある日、自分のカレンダーを見たら…</a:t>
+            </a:r>
+          </a:p>
+        </p:txBody>
+      </p:sp>
+      <p:sp>
+        <p:nvSpPr>
+          <p:cNvPr id="6" name="Rounded Rectangle 5"/>
+          <p:cNvSpPr/>
+          <p:nvPr/>
+        </p:nvSpPr>
+        <p:spPr>
+          <a:xfrm>
+            <a:off x="457200" y="1005840"/>
+            <a:ext cx="1828800" cy="36576"/>
+          </a:xfrm>
+          <a:prstGeom prst="roundRect">
+            <a:avLst>
+              <a:gd name="adj" fmla="val 10000"/>
+            </a:avLst>
+          </a:prstGeom>
+          <a:solidFill>
+            <a:srgbClr val="0078D4"/>
+          </a:solidFill>
+          <a:ln>
+            <a:noFill/>
+          </a:ln>
+        </p:spPr>
+        <p:style>
+          <a:lnRef idx="1">
+            <a:schemeClr val="accent1"/>
+          </a:lnRef>
+          <a:fillRef idx="3">
+            <a:schemeClr val="accent1"/>
+          </a:fillRef>
+          <a:effectRef idx="2">
+            <a:schemeClr val="accent1"/>
+          </a:effectRef>
+          <a:fontRef idx="minor">
+            <a:schemeClr val="lt1"/>
+          </a:fontRef>
+        </p:style>
+        <p:txBody>
+          <a:bodyPr rtlCol="0" anchor="ctr"/>
+          <a:lstStyle/>
+          <a:p>
+            <a:pPr algn="ctr"/>
           </a:p>
         </p:txBody>
       </p:sp>
@@ -3984,15 +5057,14 @@
         </p:nvPicPr>
         <p:blipFill>
           <a:blip r:embed="rId2"/>
-          <a:srcRect b="10021"/>
           <a:stretch>
             <a:fillRect/>
           </a:stretch>
         </p:blipFill>
         <p:spPr>
           <a:xfrm>
-            <a:off x="426720" y="1051560"/>
-            <a:ext cx="10058400" cy="4846320"/>
+            <a:off x="457200" y="1280160"/>
+            <a:ext cx="10058400" cy="4206240"/>
           </a:xfrm>
           <a:prstGeom prst="rect">
             <a:avLst/>
@@ -4043,7 +5115,6 @@
           <a:lstStyle/>
           <a:p>
             <a:pPr algn="ctr"/>
-            <a:endParaRPr/>
           </a:p>
         </p:txBody>
       </p:sp>
@@ -4064,7 +5135,7 @@
           <a:noFill/>
         </p:spPr>
         <p:txBody>
-          <a:bodyPr wrap="square" lIns="0" tIns="0" rIns="0" bIns="0" anchor="ctr">
+          <a:bodyPr wrap="square" lIns="0" rIns="0" tIns="0" bIns="0" anchor="ctr">
             <a:spAutoFit/>
           </a:bodyPr>
           <a:lstStyle/>
@@ -4090,7 +5161,7 @@
         </p:nvSpPr>
         <p:spPr>
           <a:xfrm>
-            <a:off x="457200" y="5920740"/>
+            <a:off x="457200" y="5669280"/>
             <a:ext cx="54864" cy="457200"/>
           </a:xfrm>
           <a:prstGeom prst="roundRect">
@@ -4124,7 +5195,6 @@
           <a:lstStyle/>
           <a:p>
             <a:pPr algn="ctr"/>
-            <a:endParaRPr/>
           </a:p>
         </p:txBody>
       </p:sp>
@@ -4136,7 +5206,7 @@
         </p:nvSpPr>
         <p:spPr>
           <a:xfrm>
-            <a:off x="640080" y="5920740"/>
+            <a:off x="640080" y="5669280"/>
             <a:ext cx="10972800" cy="457200"/>
           </a:xfrm>
           <a:prstGeom prst="rect">
@@ -4145,7 +5215,7 @@
           <a:noFill/>
         </p:spPr>
         <p:txBody>
-          <a:bodyPr wrap="square" lIns="0" tIns="0" rIns="0" bIns="0" anchor="ctr">
+          <a:bodyPr wrap="square" lIns="0" rIns="0" tIns="0" bIns="0" anchor="ctr">
             <a:spAutoFit/>
           </a:bodyPr>
           <a:lstStyle/>
@@ -4171,7 +5241,7 @@
         </p:nvSpPr>
         <p:spPr>
           <a:xfrm>
-            <a:off x="365760" y="6556192"/>
+            <a:off x="365760" y="6446520"/>
             <a:ext cx="6400800" cy="274320"/>
           </a:xfrm>
           <a:prstGeom prst="rect">
@@ -4180,7 +5250,7 @@
           <a:noFill/>
         </p:spPr>
         <p:txBody>
-          <a:bodyPr wrap="square" lIns="0" tIns="0" rIns="0" bIns="0" anchor="t">
+          <a:bodyPr wrap="square" lIns="0" rIns="0" tIns="0" bIns="0" anchor="t">
             <a:spAutoFit/>
           </a:bodyPr>
           <a:lstStyle/>
@@ -4215,7 +5285,7 @@
           <a:noFill/>
         </p:spPr>
         <p:txBody>
-          <a:bodyPr wrap="square" lIns="0" tIns="0" rIns="0" bIns="0" anchor="t">
+          <a:bodyPr wrap="square" lIns="0" rIns="0" tIns="0" bIns="0" anchor="t">
             <a:spAutoFit/>
           </a:bodyPr>
           <a:lstStyle/>
@@ -4242,7 +5312,7 @@
 </file>
 
 <file path=ppt/slides/slide4.xml><?xml version="1.0" encoding="utf-8"?>
-<p:sld xmlns:a="http://schemas.openxmlformats.org/drawingml/2006/main" xmlns:r="http://schemas.openxmlformats.org/officeDocument/2006/relationships" xmlns:p="http://schemas.openxmlformats.org/presentationml/2006/main">
+<p:sld xmlns:a="http://schemas.openxmlformats.org/drawingml/2006/main" xmlns:p="http://schemas.openxmlformats.org/presentationml/2006/main" xmlns:r="http://schemas.openxmlformats.org/officeDocument/2006/relationships">
   <p:cSld>
     <p:spTree>
       <p:nvGrpSpPr>
@@ -4250,14 +5320,7 @@
         <p:cNvGrpSpPr/>
         <p:nvPr/>
       </p:nvGrpSpPr>
-      <p:grpSpPr>
-        <a:xfrm>
-          <a:off x="0" y="0"/>
-          <a:ext cx="0" cy="0"/>
-          <a:chOff x="0" y="0"/>
-          <a:chExt cx="0" cy="0"/>
-        </a:xfrm>
-      </p:grpSpPr>
+      <p:grpSpPr/>
       <p:sp>
         <p:nvSpPr>
           <p:cNvPr id="2" name="Rounded Rectangle 1"/>
@@ -4300,7 +5363,6 @@
           <a:lstStyle/>
           <a:p>
             <a:pPr algn="ctr"/>
-            <a:endParaRPr/>
           </a:p>
         </p:txBody>
       </p:sp>
@@ -4346,7 +5408,6 @@
           <a:lstStyle/>
           <a:p>
             <a:pPr algn="ctr"/>
-            <a:endParaRPr/>
           </a:p>
         </p:txBody>
       </p:sp>
@@ -4367,7 +5428,7 @@
           <a:noFill/>
         </p:spPr>
         <p:txBody>
-          <a:bodyPr wrap="square" lIns="0" tIns="0" rIns="0" bIns="0" anchor="ctr">
+          <a:bodyPr wrap="square" lIns="0" rIns="0" tIns="0" bIns="0" anchor="ctr">
             <a:spAutoFit/>
           </a:bodyPr>
           <a:lstStyle/>
@@ -4402,7 +5463,7 @@
           <a:noFill/>
         </p:spPr>
         <p:txBody>
-          <a:bodyPr wrap="square" lIns="0" tIns="0" rIns="0" bIns="0" anchor="ctr">
+          <a:bodyPr wrap="square" lIns="0" rIns="0" tIns="0" bIns="0" anchor="ctr">
             <a:spAutoFit/>
           </a:bodyPr>
           <a:lstStyle/>
@@ -4462,7 +5523,6 @@
           <a:lstStyle/>
           <a:p>
             <a:pPr algn="ctr"/>
-            <a:endParaRPr/>
           </a:p>
         </p:txBody>
       </p:sp>
@@ -4476,15 +5536,14 @@
         </p:nvPicPr>
         <p:blipFill>
           <a:blip r:embed="rId2"/>
-          <a:srcRect b="22442"/>
           <a:stretch>
             <a:fillRect/>
           </a:stretch>
         </p:blipFill>
         <p:spPr>
           <a:xfrm>
-            <a:off x="457200" y="1142999"/>
-            <a:ext cx="7343874" cy="4469101"/>
+            <a:off x="457200" y="1280160"/>
+            <a:ext cx="8686800" cy="4297680"/>
           </a:xfrm>
           <a:prstGeom prst="rect">
             <a:avLst/>
@@ -4508,7 +5567,7 @@
           <a:noFill/>
         </p:spPr>
         <p:txBody>
-          <a:bodyPr wrap="square" lIns="0" tIns="0" rIns="0" bIns="0" anchor="t">
+          <a:bodyPr wrap="square" lIns="0" rIns="0" tIns="0" bIns="0" anchor="t">
             <a:spAutoFit/>
           </a:bodyPr>
           <a:lstStyle/>
@@ -4570,7 +5629,6 @@
           <a:lstStyle/>
           <a:p>
             <a:pPr algn="ctr"/>
-            <a:endParaRPr/>
           </a:p>
         </p:txBody>
       </p:sp>
@@ -4616,7 +5674,6 @@
           <a:lstStyle/>
           <a:p>
             <a:pPr algn="ctr"/>
-            <a:endParaRPr/>
           </a:p>
         </p:txBody>
       </p:sp>
@@ -4637,7 +5694,7 @@
           <a:noFill/>
         </p:spPr>
         <p:txBody>
-          <a:bodyPr wrap="square" lIns="0" tIns="0" rIns="0" bIns="0" anchor="t">
+          <a:bodyPr wrap="square" lIns="0" rIns="0" tIns="0" bIns="0" anchor="t">
             <a:spAutoFit/>
           </a:bodyPr>
           <a:lstStyle/>
@@ -4672,7 +5729,7 @@
           <a:noFill/>
         </p:spPr>
         <p:txBody>
-          <a:bodyPr wrap="square" lIns="0" tIns="0" rIns="0" bIns="0" anchor="ctr">
+          <a:bodyPr wrap="square" lIns="0" rIns="0" tIns="0" bIns="0" anchor="ctr">
             <a:spAutoFit/>
           </a:bodyPr>
           <a:lstStyle/>
@@ -4734,7 +5791,6 @@
           <a:lstStyle/>
           <a:p>
             <a:pPr algn="ctr"/>
-            <a:endParaRPr/>
           </a:p>
         </p:txBody>
       </p:sp>
@@ -4780,7 +5836,6 @@
           <a:lstStyle/>
           <a:p>
             <a:pPr algn="ctr"/>
-            <a:endParaRPr/>
           </a:p>
         </p:txBody>
       </p:sp>
@@ -4801,7 +5856,7 @@
           <a:noFill/>
         </p:spPr>
         <p:txBody>
-          <a:bodyPr wrap="square" lIns="0" tIns="0" rIns="0" bIns="0" anchor="t">
+          <a:bodyPr wrap="square" lIns="0" rIns="0" tIns="0" bIns="0" anchor="t">
             <a:spAutoFit/>
           </a:bodyPr>
           <a:lstStyle/>
@@ -4836,7 +5891,7 @@
           <a:noFill/>
         </p:spPr>
         <p:txBody>
-          <a:bodyPr wrap="square" lIns="0" tIns="0" rIns="0" bIns="0" anchor="ctr">
+          <a:bodyPr wrap="square" lIns="0" rIns="0" tIns="0" bIns="0" anchor="ctr">
             <a:spAutoFit/>
           </a:bodyPr>
           <a:lstStyle/>
@@ -4898,7 +5953,6 @@
           <a:lstStyle/>
           <a:p>
             <a:pPr algn="ctr"/>
-            <a:endParaRPr/>
           </a:p>
         </p:txBody>
       </p:sp>
@@ -4944,7 +5998,6 @@
           <a:lstStyle/>
           <a:p>
             <a:pPr algn="ctr"/>
-            <a:endParaRPr/>
           </a:p>
         </p:txBody>
       </p:sp>
@@ -4965,7 +6018,7 @@
           <a:noFill/>
         </p:spPr>
         <p:txBody>
-          <a:bodyPr wrap="square" lIns="0" tIns="0" rIns="0" bIns="0" anchor="t">
+          <a:bodyPr wrap="square" lIns="0" rIns="0" tIns="0" bIns="0" anchor="t">
             <a:spAutoFit/>
           </a:bodyPr>
           <a:lstStyle/>
@@ -5000,7 +6053,7 @@
           <a:noFill/>
         </p:spPr>
         <p:txBody>
-          <a:bodyPr wrap="square" lIns="0" tIns="0" rIns="0" bIns="0" anchor="ctr">
+          <a:bodyPr wrap="square" lIns="0" rIns="0" tIns="0" bIns="0" anchor="ctr">
             <a:spAutoFit/>
           </a:bodyPr>
           <a:lstStyle/>
@@ -5062,7 +6115,6 @@
           <a:lstStyle/>
           <a:p>
             <a:pPr algn="ctr"/>
-            <a:endParaRPr/>
           </a:p>
         </p:txBody>
       </p:sp>
@@ -5108,7 +6160,6 @@
           <a:lstStyle/>
           <a:p>
             <a:pPr algn="ctr"/>
-            <a:endParaRPr/>
           </a:p>
         </p:txBody>
       </p:sp>
@@ -5129,7 +6180,7 @@
           <a:noFill/>
         </p:spPr>
         <p:txBody>
-          <a:bodyPr wrap="square" lIns="0" tIns="0" rIns="0" bIns="0" anchor="t">
+          <a:bodyPr wrap="square" lIns="0" rIns="0" tIns="0" bIns="0" anchor="t">
             <a:spAutoFit/>
           </a:bodyPr>
           <a:lstStyle/>
@@ -5143,6 +6194,41 @@
                 <a:latin typeface="Yu Gothic"/>
               </a:rPr>
               <a:t>推定コスト</a:t>
+            </a:r>
+          </a:p>
+        </p:txBody>
+      </p:sp>
+      <p:sp>
+        <p:nvSpPr>
+          <p:cNvPr id="24" name="TextBox 23"/>
+          <p:cNvSpPr txBox="1"/>
+          <p:nvPr/>
+        </p:nvSpPr>
+        <p:spPr>
+          <a:xfrm>
+            <a:off x="9555480" y="4956048"/>
+            <a:ext cx="2286000" cy="457200"/>
+          </a:xfrm>
+          <a:prstGeom prst="rect">
+            <a:avLst/>
+          </a:prstGeom>
+          <a:noFill/>
+        </p:spPr>
+        <p:txBody>
+          <a:bodyPr wrap="square" lIns="0" rIns="0" tIns="0" bIns="0" anchor="ctr">
+            <a:spAutoFit/>
+          </a:bodyPr>
+          <a:lstStyle/>
+          <a:p>
+            <a:pPr algn="l"/>
+            <a:r>
+              <a:rPr sz="2000" b="1">
+                <a:solidFill>
+                  <a:srgbClr val="D83B01"/>
+                </a:solidFill>
+                <a:latin typeface="Yu Gothic"/>
+              </a:rPr>
+              <a:t>700,000円</a:t>
             </a:r>
           </a:p>
         </p:txBody>
@@ -5189,7 +6275,6 @@
           <a:lstStyle/>
           <a:p>
             <a:pPr algn="ctr"/>
-            <a:endParaRPr/>
           </a:p>
         </p:txBody>
       </p:sp>
@@ -5210,7 +6295,7 @@
           <a:noFill/>
         </p:spPr>
         <p:txBody>
-          <a:bodyPr wrap="square" lIns="0" tIns="0" rIns="0" bIns="0" anchor="ctr">
+          <a:bodyPr wrap="square" lIns="0" rIns="0" tIns="0" bIns="0" anchor="ctr">
             <a:spAutoFit/>
           </a:bodyPr>
           <a:lstStyle/>
@@ -5245,7 +6330,7 @@
           <a:noFill/>
         </p:spPr>
         <p:txBody>
-          <a:bodyPr wrap="square" lIns="0" tIns="0" rIns="0" bIns="0" anchor="t">
+          <a:bodyPr wrap="square" lIns="0" rIns="0" tIns="0" bIns="0" anchor="t">
             <a:spAutoFit/>
           </a:bodyPr>
           <a:lstStyle/>
@@ -5280,7 +6365,7 @@
           <a:noFill/>
         </p:spPr>
         <p:txBody>
-          <a:bodyPr wrap="square" lIns="0" tIns="0" rIns="0" bIns="0" anchor="t">
+          <a:bodyPr wrap="square" lIns="0" rIns="0" tIns="0" bIns="0" anchor="t">
             <a:spAutoFit/>
           </a:bodyPr>
           <a:lstStyle/>
@@ -5307,7 +6392,7 @@
 </file>
 
 <file path=ppt/slides/slide5.xml><?xml version="1.0" encoding="utf-8"?>
-<p:sld xmlns:a="http://schemas.openxmlformats.org/drawingml/2006/main" xmlns:r="http://schemas.openxmlformats.org/officeDocument/2006/relationships" xmlns:p="http://schemas.openxmlformats.org/presentationml/2006/main">
+<p:sld xmlns:a="http://schemas.openxmlformats.org/drawingml/2006/main" xmlns:p="http://schemas.openxmlformats.org/presentationml/2006/main" xmlns:r="http://schemas.openxmlformats.org/officeDocument/2006/relationships">
   <p:cSld>
     <p:spTree>
       <p:nvGrpSpPr>
@@ -5315,14 +6400,7 @@
         <p:cNvGrpSpPr/>
         <p:nvPr/>
       </p:nvGrpSpPr>
-      <p:grpSpPr>
-        <a:xfrm>
-          <a:off x="0" y="0"/>
-          <a:ext cx="0" cy="0"/>
-          <a:chOff x="0" y="0"/>
-          <a:chExt cx="0" cy="0"/>
-        </a:xfrm>
-      </p:grpSpPr>
+      <p:grpSpPr/>
       <p:sp>
         <p:nvSpPr>
           <p:cNvPr id="2" name="Rounded Rectangle 1"/>
@@ -5365,7 +6443,6 @@
           <a:lstStyle/>
           <a:p>
             <a:pPr algn="ctr"/>
-            <a:endParaRPr/>
           </a:p>
         </p:txBody>
       </p:sp>
@@ -5411,7 +6488,6 @@
           <a:lstStyle/>
           <a:p>
             <a:pPr algn="ctr"/>
-            <a:endParaRPr/>
           </a:p>
         </p:txBody>
       </p:sp>
@@ -5432,7 +6508,7 @@
           <a:noFill/>
         </p:spPr>
         <p:txBody>
-          <a:bodyPr wrap="square" lIns="0" tIns="0" rIns="0" bIns="0" anchor="ctr">
+          <a:bodyPr wrap="square" lIns="0" rIns="0" tIns="0" bIns="0" anchor="ctr">
             <a:spAutoFit/>
           </a:bodyPr>
           <a:lstStyle/>
@@ -5467,7 +6543,7 @@
           <a:noFill/>
         </p:spPr>
         <p:txBody>
-          <a:bodyPr wrap="square" lIns="0" tIns="0" rIns="0" bIns="0" anchor="ctr">
+          <a:bodyPr wrap="square" lIns="0" rIns="0" tIns="0" bIns="0" anchor="ctr">
             <a:spAutoFit/>
           </a:bodyPr>
           <a:lstStyle/>
@@ -5527,7 +6603,6 @@
           <a:lstStyle/>
           <a:p>
             <a:pPr algn="ctr"/>
-            <a:endParaRPr/>
           </a:p>
         </p:txBody>
       </p:sp>
@@ -5575,7 +6650,6 @@
           <a:lstStyle/>
           <a:p>
             <a:pPr algn="ctr"/>
-            <a:endParaRPr/>
           </a:p>
         </p:txBody>
       </p:sp>
@@ -5596,7 +6670,7 @@
           <a:noFill/>
         </p:spPr>
         <p:txBody>
-          <a:bodyPr wrap="square" lIns="0" tIns="0" rIns="0" bIns="0" anchor="ctr">
+          <a:bodyPr wrap="square" lIns="0" rIns="0" tIns="0" bIns="0" anchor="ctr">
             <a:spAutoFit/>
           </a:bodyPr>
           <a:lstStyle/>
@@ -5658,7 +6732,6 @@
           <a:lstStyle/>
           <a:p>
             <a:pPr algn="ctr"/>
-            <a:endParaRPr/>
           </a:p>
         </p:txBody>
       </p:sp>
@@ -5679,7 +6752,7 @@
           <a:noFill/>
         </p:spPr>
         <p:txBody>
-          <a:bodyPr wrap="square" lIns="0" tIns="0" rIns="0" bIns="0" anchor="ctr">
+          <a:bodyPr wrap="square" lIns="0" rIns="0" tIns="0" bIns="0" anchor="ctr">
             <a:spAutoFit/>
           </a:bodyPr>
           <a:lstStyle/>
@@ -5699,6 +6772,41 @@
       </p:sp>
       <p:sp>
         <p:nvSpPr>
+          <p:cNvPr id="11" name="TextBox 10"/>
+          <p:cNvSpPr txBox="1"/>
+          <p:nvPr/>
+        </p:nvSpPr>
+        <p:spPr>
+          <a:xfrm>
+            <a:off x="10515600" y="3520440"/>
+            <a:ext cx="1371600" cy="365760"/>
+          </a:xfrm>
+          <a:prstGeom prst="rect">
+            <a:avLst/>
+          </a:prstGeom>
+          <a:noFill/>
+        </p:spPr>
+        <p:txBody>
+          <a:bodyPr wrap="square" lIns="0" rIns="0" tIns="0" bIns="0" anchor="t">
+            <a:spAutoFit/>
+          </a:bodyPr>
+          <a:lstStyle/>
+          <a:p>
+            <a:pPr algn="l"/>
+            <a:r>
+              <a:rPr sz="1400" b="1">
+                <a:solidFill>
+                  <a:srgbClr val="605E5C"/>
+                </a:solidFill>
+                <a:latin typeface="Yu Gothic"/>
+              </a:rPr>
+              <a:t>💭 モヤッ</a:t>
+            </a:r>
+          </a:p>
+        </p:txBody>
+      </p:sp>
+      <p:sp>
+        <p:nvSpPr>
           <p:cNvPr id="12" name="TextBox 11"/>
           <p:cNvSpPr txBox="1"/>
           <p:nvPr/>
@@ -5714,7 +6822,7 @@
           <a:noFill/>
         </p:spPr>
         <p:txBody>
-          <a:bodyPr wrap="square" lIns="0" tIns="0" rIns="0" bIns="0" anchor="t">
+          <a:bodyPr wrap="square" lIns="0" rIns="0" tIns="0" bIns="0" anchor="t">
             <a:spAutoFit/>
           </a:bodyPr>
           <a:lstStyle/>
@@ -5774,7 +6882,6 @@
           <a:lstStyle/>
           <a:p>
             <a:pPr algn="ctr"/>
-            <a:endParaRPr/>
           </a:p>
         </p:txBody>
       </p:sp>
@@ -5795,7 +6902,7 @@
           <a:noFill/>
         </p:spPr>
         <p:txBody>
-          <a:bodyPr wrap="square" lIns="0" tIns="0" rIns="0" bIns="0" anchor="t">
+          <a:bodyPr wrap="square" lIns="0" rIns="0" tIns="0" bIns="0" anchor="t">
             <a:spAutoFit/>
           </a:bodyPr>
           <a:lstStyle/>
@@ -5830,7 +6937,7 @@
           <a:noFill/>
         </p:spPr>
         <p:txBody>
-          <a:bodyPr wrap="square" lIns="0" tIns="0" rIns="0" bIns="0" anchor="t">
+          <a:bodyPr wrap="square" lIns="0" rIns="0" tIns="0" bIns="0" anchor="t">
             <a:spAutoFit/>
           </a:bodyPr>
           <a:lstStyle/>
@@ -5865,7 +6972,7 @@
           <a:noFill/>
         </p:spPr>
         <p:txBody>
-          <a:bodyPr wrap="square" lIns="0" tIns="0" rIns="0" bIns="0" anchor="t">
+          <a:bodyPr wrap="square" lIns="0" rIns="0" tIns="0" bIns="0" anchor="t">
             <a:spAutoFit/>
           </a:bodyPr>
           <a:lstStyle/>
@@ -5900,7 +7007,7 @@
           <a:noFill/>
         </p:spPr>
         <p:txBody>
-          <a:bodyPr wrap="square" lIns="0" tIns="0" rIns="0" bIns="0" anchor="t">
+          <a:bodyPr wrap="square" lIns="0" rIns="0" tIns="0" bIns="0" anchor="t">
             <a:spAutoFit/>
           </a:bodyPr>
           <a:lstStyle/>
@@ -5927,7 +7034,7 @@
 </file>
 
 <file path=ppt/slides/slide6.xml><?xml version="1.0" encoding="utf-8"?>
-<p:sld xmlns:a="http://schemas.openxmlformats.org/drawingml/2006/main" xmlns:r="http://schemas.openxmlformats.org/officeDocument/2006/relationships" xmlns:p="http://schemas.openxmlformats.org/presentationml/2006/main">
+<p:sld xmlns:a="http://schemas.openxmlformats.org/drawingml/2006/main" xmlns:p="http://schemas.openxmlformats.org/presentationml/2006/main" xmlns:r="http://schemas.openxmlformats.org/officeDocument/2006/relationships">
   <p:cSld>
     <p:spTree>
       <p:nvGrpSpPr>
@@ -5935,14 +7042,7 @@
         <p:cNvGrpSpPr/>
         <p:nvPr/>
       </p:nvGrpSpPr>
-      <p:grpSpPr>
-        <a:xfrm>
-          <a:off x="0" y="0"/>
-          <a:ext cx="0" cy="0"/>
-          <a:chOff x="0" y="0"/>
-          <a:chExt cx="0" cy="0"/>
-        </a:xfrm>
-      </p:grpSpPr>
+      <p:grpSpPr/>
       <p:sp>
         <p:nvSpPr>
           <p:cNvPr id="2" name="Rounded Rectangle 1"/>
@@ -5985,7 +7085,6 @@
           <a:lstStyle/>
           <a:p>
             <a:pPr algn="ctr"/>
-            <a:endParaRPr/>
           </a:p>
         </p:txBody>
       </p:sp>
@@ -6031,7 +7130,6 @@
           <a:lstStyle/>
           <a:p>
             <a:pPr algn="ctr"/>
-            <a:endParaRPr/>
           </a:p>
         </p:txBody>
       </p:sp>
@@ -6052,7 +7150,7 @@
           <a:noFill/>
         </p:spPr>
         <p:txBody>
-          <a:bodyPr wrap="square" lIns="0" tIns="0" rIns="0" bIns="0" anchor="ctr">
+          <a:bodyPr wrap="square" lIns="0" rIns="0" tIns="0" bIns="0" anchor="ctr">
             <a:spAutoFit/>
           </a:bodyPr>
           <a:lstStyle/>
@@ -6087,7 +7185,7 @@
           <a:noFill/>
         </p:spPr>
         <p:txBody>
-          <a:bodyPr wrap="square" lIns="0" tIns="0" rIns="0" bIns="0" anchor="ctr">
+          <a:bodyPr wrap="square" lIns="0" rIns="0" tIns="0" bIns="0" anchor="ctr">
             <a:spAutoFit/>
           </a:bodyPr>
           <a:lstStyle/>
@@ -6147,7 +7245,6 @@
           <a:lstStyle/>
           <a:p>
             <a:pPr algn="ctr"/>
-            <a:endParaRPr/>
           </a:p>
         </p:txBody>
       </p:sp>
@@ -6195,7 +7292,6 @@
           <a:lstStyle/>
           <a:p>
             <a:pPr algn="ctr"/>
-            <a:endParaRPr/>
           </a:p>
         </p:txBody>
       </p:sp>
@@ -6241,7 +7337,6 @@
           <a:lstStyle/>
           <a:p>
             <a:pPr algn="ctr"/>
-            <a:endParaRPr/>
           </a:p>
         </p:txBody>
       </p:sp>
@@ -6262,7 +7357,7 @@
           <a:noFill/>
         </p:spPr>
         <p:txBody>
-          <a:bodyPr wrap="square" lIns="0" tIns="0" rIns="0" bIns="0" anchor="ctr">
+          <a:bodyPr wrap="square" lIns="0" rIns="0" tIns="0" bIns="0" anchor="ctr">
             <a:spAutoFit/>
           </a:bodyPr>
           <a:lstStyle/>
@@ -6289,7 +7384,7 @@
         <p:spPr>
           <a:xfrm>
             <a:off x="777240" y="1874519"/>
-            <a:ext cx="5029200" cy="3908762"/>
+            <a:ext cx="4937760" cy="4114800"/>
           </a:xfrm>
           <a:prstGeom prst="rect">
             <a:avLst/>
@@ -6304,7 +7399,7 @@
           <a:p>
             <a:pPr algn="l"/>
             <a:r>
-              <a:rPr sz="1400" b="1">
+              <a:rPr sz="1100" b="1">
                 <a:solidFill>
                   <a:srgbClr val="323130"/>
                 </a:solidFill>
@@ -6316,7 +7411,7 @@
           <a:p>
             <a:pPr algn="l"/>
             <a:r>
-              <a:rPr b="0">
+              <a:rPr sz="1400" b="0">
                 <a:solidFill>
                   <a:srgbClr val="323130"/>
                 </a:solidFill>
@@ -6327,17 +7422,20 @@
           </a:p>
           <a:p>
             <a:pPr algn="l"/>
-            <a:endParaRPr b="0">
-              <a:solidFill>
-                <a:srgbClr val="323130"/>
-              </a:solidFill>
-              <a:latin typeface="Yu Gothic"/>
-            </a:endParaRPr>
+            <a:r>
+              <a:rPr sz="600" b="0">
+                <a:solidFill>
+                  <a:srgbClr val="323130"/>
+                </a:solidFill>
+                <a:latin typeface="Yu Gothic"/>
+              </a:rPr>
+              <a:t/>
+            </a:r>
           </a:p>
           <a:p>
             <a:pPr algn="l"/>
             <a:r>
-              <a:rPr sz="1400" b="1">
+              <a:rPr sz="1100" b="1">
                 <a:solidFill>
                   <a:srgbClr val="323130"/>
                 </a:solidFill>
@@ -6349,7 +7447,7 @@
           <a:p>
             <a:pPr algn="l"/>
             <a:r>
-              <a:rPr sz="1600" b="0">
+              <a:rPr sz="1300" b="0">
                 <a:solidFill>
                   <a:srgbClr val="323130"/>
                 </a:solidFill>
@@ -6361,7 +7459,7 @@
           <a:p>
             <a:pPr algn="l"/>
             <a:r>
-              <a:rPr sz="1600" b="0">
+              <a:rPr sz="1300" b="0">
                 <a:solidFill>
                   <a:srgbClr val="323130"/>
                 </a:solidFill>
@@ -6372,17 +7470,20 @@
           </a:p>
           <a:p>
             <a:pPr algn="l"/>
-            <a:endParaRPr sz="1600" b="0">
-              <a:solidFill>
-                <a:srgbClr val="323130"/>
-              </a:solidFill>
-              <a:latin typeface="Yu Gothic"/>
-            </a:endParaRPr>
+            <a:r>
+              <a:rPr sz="600" b="0">
+                <a:solidFill>
+                  <a:srgbClr val="323130"/>
+                </a:solidFill>
+                <a:latin typeface="Yu Gothic"/>
+              </a:rPr>
+              <a:t/>
+            </a:r>
           </a:p>
           <a:p>
             <a:pPr algn="l"/>
             <a:r>
-              <a:rPr sz="1400" b="1">
+              <a:rPr sz="1100" b="1">
                 <a:solidFill>
                   <a:srgbClr val="323130"/>
                 </a:solidFill>
@@ -6394,7 +7495,7 @@
           <a:p>
             <a:pPr algn="l"/>
             <a:r>
-              <a:rPr b="0">
+              <a:rPr sz="1400" b="0">
                 <a:solidFill>
                   <a:srgbClr val="323130"/>
                 </a:solidFill>
@@ -6405,17 +7506,20 @@
           </a:p>
           <a:p>
             <a:pPr algn="l"/>
-            <a:endParaRPr b="0">
-              <a:solidFill>
-                <a:srgbClr val="323130"/>
-              </a:solidFill>
-              <a:latin typeface="Yu Gothic"/>
-            </a:endParaRPr>
+            <a:r>
+              <a:rPr sz="600" b="0">
+                <a:solidFill>
+                  <a:srgbClr val="323130"/>
+                </a:solidFill>
+                <a:latin typeface="Yu Gothic"/>
+              </a:rPr>
+              <a:t/>
+            </a:r>
           </a:p>
           <a:p>
             <a:pPr algn="l"/>
             <a:r>
-              <a:rPr sz="1400" b="1">
+              <a:rPr sz="1100" b="1">
                 <a:solidFill>
                   <a:srgbClr val="323130"/>
                 </a:solidFill>
@@ -6427,52 +7531,55 @@
           <a:p>
             <a:pPr algn="l"/>
             <a:r>
+              <a:rPr sz="1100" b="0">
+                <a:solidFill>
+                  <a:srgbClr val="323130"/>
+                </a:solidFill>
+                <a:latin typeface="Yu Gothic"/>
+              </a:rPr>
+              <a:t>div(sub(ticks(end),ticks(start)),</a:t>
+            </a:r>
+          </a:p>
+          <a:p>
+            <a:pPr algn="l"/>
+            <a:r>
+              <a:rPr sz="1100" b="0">
+                <a:solidFill>
+                  <a:srgbClr val="323130"/>
+                </a:solidFill>
+                <a:latin typeface="Yu Gothic"/>
+              </a:rPr>
+              <a:t>  600000000)</a:t>
+            </a:r>
+          </a:p>
+          <a:p>
+            <a:pPr algn="l"/>
+            <a:r>
+              <a:rPr sz="600" b="0">
+                <a:solidFill>
+                  <a:srgbClr val="323130"/>
+                </a:solidFill>
+                <a:latin typeface="Yu Gothic"/>
+              </a:rPr>
+              <a:t/>
+            </a:r>
+          </a:p>
+          <a:p>
+            <a:pPr algn="l"/>
+            <a:r>
+              <a:rPr sz="1100" b="1">
+                <a:solidFill>
+                  <a:srgbClr val="323130"/>
+                </a:solidFill>
+                <a:latin typeface="Yu Gothic"/>
+              </a:rPr>
+              <a:t>自分:</a:t>
+            </a:r>
+          </a:p>
+          <a:p>
+            <a:pPr algn="l"/>
+            <a:r>
               <a:rPr sz="1400" b="0">
-                <a:solidFill>
-                  <a:srgbClr val="323130"/>
-                </a:solidFill>
-                <a:latin typeface="Yu Gothic"/>
-              </a:rPr>
-              <a:t>div(sub(ticks(end),ticks(start)),</a:t>
-            </a:r>
-          </a:p>
-          <a:p>
-            <a:pPr algn="l"/>
-            <a:r>
-              <a:rPr sz="1400" b="0">
-                <a:solidFill>
-                  <a:srgbClr val="323130"/>
-                </a:solidFill>
-                <a:latin typeface="Yu Gothic"/>
-              </a:rPr>
-              <a:t>  600000000)</a:t>
-            </a:r>
-          </a:p>
-          <a:p>
-            <a:pPr algn="l"/>
-            <a:endParaRPr sz="1400" b="0">
-              <a:solidFill>
-                <a:srgbClr val="323130"/>
-              </a:solidFill>
-              <a:latin typeface="Yu Gothic"/>
-            </a:endParaRPr>
-          </a:p>
-          <a:p>
-            <a:pPr algn="l"/>
-            <a:r>
-              <a:rPr sz="1400" b="1">
-                <a:solidFill>
-                  <a:srgbClr val="323130"/>
-                </a:solidFill>
-                <a:latin typeface="Yu Gothic"/>
-              </a:rPr>
-              <a:t>自分:</a:t>
-            </a:r>
-          </a:p>
-          <a:p>
-            <a:pPr algn="l"/>
-            <a:r>
-              <a:rPr b="0">
                 <a:solidFill>
                   <a:srgbClr val="323130"/>
                 </a:solidFill>
@@ -6527,7 +7634,6 @@
           <a:lstStyle/>
           <a:p>
             <a:pPr algn="ctr"/>
-            <a:endParaRPr/>
           </a:p>
         </p:txBody>
       </p:sp>
@@ -6573,7 +7679,6 @@
           <a:lstStyle/>
           <a:p>
             <a:pPr algn="ctr"/>
-            <a:endParaRPr/>
           </a:p>
         </p:txBody>
       </p:sp>
@@ -6594,7 +7699,7 @@
           <a:noFill/>
         </p:spPr>
         <p:txBody>
-          <a:bodyPr wrap="square" lIns="0" tIns="0" rIns="0" bIns="0" anchor="ctr">
+          <a:bodyPr wrap="square" lIns="0" rIns="0" tIns="0" bIns="0" anchor="ctr">
             <a:spAutoFit/>
           </a:bodyPr>
           <a:lstStyle/>
@@ -6654,7 +7759,6 @@
           <a:lstStyle/>
           <a:p>
             <a:pPr algn="ctr"/>
-            <a:endParaRPr/>
           </a:p>
         </p:txBody>
       </p:sp>
@@ -6675,7 +7779,7 @@
           <a:noFill/>
         </p:spPr>
         <p:txBody>
-          <a:bodyPr wrap="square" lIns="0" tIns="0" rIns="0" bIns="0" anchor="ctr">
+          <a:bodyPr wrap="square" lIns="0" rIns="0" tIns="0" bIns="0" anchor="ctr">
             <a:spAutoFit/>
           </a:bodyPr>
           <a:lstStyle/>
@@ -6701,23 +7805,23 @@
         </p:nvSpPr>
         <p:spPr>
           <a:xfrm>
-            <a:off x="7086600" y="2070386"/>
-            <a:ext cx="4572000" cy="246221"/>
-          </a:xfrm>
-          <a:prstGeom prst="rect">
-            <a:avLst/>
-          </a:prstGeom>
-          <a:noFill/>
-        </p:spPr>
-        <p:txBody>
-          <a:bodyPr wrap="square" lIns="0" tIns="0" rIns="0" bIns="0" anchor="ctr">
+            <a:off x="7086600" y="1965960"/>
+            <a:ext cx="4572000" cy="384048"/>
+          </a:xfrm>
+          <a:prstGeom prst="rect">
+            <a:avLst/>
+          </a:prstGeom>
+          <a:noFill/>
+        </p:spPr>
+        <p:txBody>
+          <a:bodyPr wrap="square" lIns="0" rIns="0" tIns="0" bIns="0" anchor="ctr">
             <a:spAutoFit/>
           </a:bodyPr>
           <a:lstStyle/>
           <a:p>
             <a:pPr algn="l"/>
             <a:r>
-              <a:rPr sz="1600" b="0">
+              <a:rPr sz="1200" b="0">
                 <a:solidFill>
                   <a:srgbClr val="323130"/>
                 </a:solidFill>
@@ -6770,7 +7874,6 @@
           <a:lstStyle/>
           <a:p>
             <a:pPr algn="ctr"/>
-            <a:endParaRPr/>
           </a:p>
         </p:txBody>
       </p:sp>
@@ -6791,7 +7894,7 @@
           <a:noFill/>
         </p:spPr>
         <p:txBody>
-          <a:bodyPr wrap="square" lIns="0" tIns="0" rIns="0" bIns="0" anchor="ctr">
+          <a:bodyPr wrap="square" lIns="0" rIns="0" tIns="0" bIns="0" anchor="ctr">
             <a:spAutoFit/>
           </a:bodyPr>
           <a:lstStyle/>
@@ -6817,23 +7920,23 @@
         </p:nvSpPr>
         <p:spPr>
           <a:xfrm>
-            <a:off x="7086600" y="2637314"/>
-            <a:ext cx="4572000" cy="246221"/>
-          </a:xfrm>
-          <a:prstGeom prst="rect">
-            <a:avLst/>
-          </a:prstGeom>
-          <a:noFill/>
-        </p:spPr>
-        <p:txBody>
-          <a:bodyPr wrap="square" lIns="0" tIns="0" rIns="0" bIns="0" anchor="ctr">
+            <a:off x="7086600" y="2532888"/>
+            <a:ext cx="4572000" cy="384048"/>
+          </a:xfrm>
+          <a:prstGeom prst="rect">
+            <a:avLst/>
+          </a:prstGeom>
+          <a:noFill/>
+        </p:spPr>
+        <p:txBody>
+          <a:bodyPr wrap="square" lIns="0" rIns="0" tIns="0" bIns="0" anchor="ctr">
             <a:spAutoFit/>
           </a:bodyPr>
           <a:lstStyle/>
           <a:p>
             <a:pPr algn="l"/>
             <a:r>
-              <a:rPr sz="1600" b="0">
+              <a:rPr sz="1200" b="0">
                 <a:solidFill>
                   <a:srgbClr val="323130"/>
                 </a:solidFill>
@@ -6886,7 +7989,6 @@
           <a:lstStyle/>
           <a:p>
             <a:pPr algn="ctr"/>
-            <a:endParaRPr/>
           </a:p>
         </p:txBody>
       </p:sp>
@@ -6907,7 +8009,7 @@
           <a:noFill/>
         </p:spPr>
         <p:txBody>
-          <a:bodyPr wrap="square" lIns="0" tIns="0" rIns="0" bIns="0" anchor="ctr">
+          <a:bodyPr wrap="square" lIns="0" rIns="0" tIns="0" bIns="0" anchor="ctr">
             <a:spAutoFit/>
           </a:bodyPr>
           <a:lstStyle/>
@@ -6933,23 +8035,23 @@
         </p:nvSpPr>
         <p:spPr>
           <a:xfrm>
-            <a:off x="7086600" y="3149378"/>
-            <a:ext cx="4572000" cy="246221"/>
-          </a:xfrm>
-          <a:prstGeom prst="rect">
-            <a:avLst/>
-          </a:prstGeom>
-          <a:noFill/>
-        </p:spPr>
-        <p:txBody>
-          <a:bodyPr wrap="square" lIns="0" tIns="0" rIns="0" bIns="0" anchor="ctr">
+            <a:off x="7086600" y="3099815"/>
+            <a:ext cx="4572000" cy="384048"/>
+          </a:xfrm>
+          <a:prstGeom prst="rect">
+            <a:avLst/>
+          </a:prstGeom>
+          <a:noFill/>
+        </p:spPr>
+        <p:txBody>
+          <a:bodyPr wrap="square" lIns="0" rIns="0" tIns="0" bIns="0" anchor="ctr">
             <a:spAutoFit/>
           </a:bodyPr>
           <a:lstStyle/>
           <a:p>
             <a:pPr algn="l"/>
             <a:r>
-              <a:rPr sz="1600" b="0">
+              <a:rPr sz="1200" b="0">
                 <a:solidFill>
                   <a:srgbClr val="323130"/>
                 </a:solidFill>
@@ -7002,7 +8104,6 @@
           <a:lstStyle/>
           <a:p>
             <a:pPr algn="ctr"/>
-            <a:endParaRPr/>
           </a:p>
         </p:txBody>
       </p:sp>
@@ -7023,7 +8124,7 @@
           <a:noFill/>
         </p:spPr>
         <p:txBody>
-          <a:bodyPr wrap="square" lIns="0" tIns="0" rIns="0" bIns="0" anchor="ctr">
+          <a:bodyPr wrap="square" lIns="0" rIns="0" tIns="0" bIns="0" anchor="ctr">
             <a:spAutoFit/>
           </a:bodyPr>
           <a:lstStyle/>
@@ -7049,23 +8150,23 @@
         </p:nvSpPr>
         <p:spPr>
           <a:xfrm>
-            <a:off x="7086600" y="3716307"/>
-            <a:ext cx="4572000" cy="246221"/>
-          </a:xfrm>
-          <a:prstGeom prst="rect">
-            <a:avLst/>
-          </a:prstGeom>
-          <a:noFill/>
-        </p:spPr>
-        <p:txBody>
-          <a:bodyPr wrap="square" lIns="0" tIns="0" rIns="0" bIns="0" anchor="ctr">
+            <a:off x="7086600" y="3666744"/>
+            <a:ext cx="4572000" cy="384048"/>
+          </a:xfrm>
+          <a:prstGeom prst="rect">
+            <a:avLst/>
+          </a:prstGeom>
+          <a:noFill/>
+        </p:spPr>
+        <p:txBody>
+          <a:bodyPr wrap="square" lIns="0" rIns="0" tIns="0" bIns="0" anchor="ctr">
             <a:spAutoFit/>
           </a:bodyPr>
           <a:lstStyle/>
           <a:p>
             <a:pPr algn="l"/>
             <a:r>
-              <a:rPr sz="1600" b="0">
+              <a:rPr sz="1200" b="0">
                 <a:solidFill>
                   <a:srgbClr val="323130"/>
                 </a:solidFill>
@@ -7118,7 +8219,6 @@
           <a:lstStyle/>
           <a:p>
             <a:pPr algn="ctr"/>
-            <a:endParaRPr/>
           </a:p>
         </p:txBody>
       </p:sp>
@@ -7139,7 +8239,7 @@
           <a:noFill/>
         </p:spPr>
         <p:txBody>
-          <a:bodyPr wrap="square" lIns="0" tIns="0" rIns="0" bIns="0" anchor="ctr">
+          <a:bodyPr wrap="square" lIns="0" rIns="0" tIns="0" bIns="0" anchor="ctr">
             <a:spAutoFit/>
           </a:bodyPr>
           <a:lstStyle/>
@@ -7165,23 +8265,23 @@
         </p:nvSpPr>
         <p:spPr>
           <a:xfrm>
-            <a:off x="7086600" y="4283235"/>
-            <a:ext cx="4572000" cy="246221"/>
-          </a:xfrm>
-          <a:prstGeom prst="rect">
-            <a:avLst/>
-          </a:prstGeom>
-          <a:noFill/>
-        </p:spPr>
-        <p:txBody>
-          <a:bodyPr wrap="square" lIns="0" tIns="0" rIns="0" bIns="0" anchor="ctr">
+            <a:off x="7086600" y="4233672"/>
+            <a:ext cx="4572000" cy="384048"/>
+          </a:xfrm>
+          <a:prstGeom prst="rect">
+            <a:avLst/>
+          </a:prstGeom>
+          <a:noFill/>
+        </p:spPr>
+        <p:txBody>
+          <a:bodyPr wrap="square" lIns="0" rIns="0" tIns="0" bIns="0" anchor="ctr">
             <a:spAutoFit/>
           </a:bodyPr>
           <a:lstStyle/>
           <a:p>
             <a:pPr algn="l"/>
             <a:r>
-              <a:rPr sz="1600" b="0">
+              <a:rPr sz="1200" b="0">
                 <a:solidFill>
                   <a:srgbClr val="323130"/>
                 </a:solidFill>
@@ -7234,7 +8334,6 @@
           <a:lstStyle/>
           <a:p>
             <a:pPr algn="ctr"/>
-            <a:endParaRPr/>
           </a:p>
         </p:txBody>
       </p:sp>
@@ -7255,7 +8354,7 @@
           <a:noFill/>
         </p:spPr>
         <p:txBody>
-          <a:bodyPr wrap="square" lIns="0" tIns="0" rIns="0" bIns="0" anchor="ctr">
+          <a:bodyPr wrap="square" lIns="0" rIns="0" tIns="0" bIns="0" anchor="ctr">
             <a:spAutoFit/>
           </a:bodyPr>
           <a:lstStyle/>
@@ -7281,23 +8380,23 @@
         </p:nvSpPr>
         <p:spPr>
           <a:xfrm>
-            <a:off x="7086600" y="4850163"/>
-            <a:ext cx="4572000" cy="246221"/>
-          </a:xfrm>
-          <a:prstGeom prst="rect">
-            <a:avLst/>
-          </a:prstGeom>
-          <a:noFill/>
-        </p:spPr>
-        <p:txBody>
-          <a:bodyPr wrap="square" lIns="0" tIns="0" rIns="0" bIns="0" anchor="ctr">
+            <a:off x="7086600" y="4800600"/>
+            <a:ext cx="4572000" cy="384048"/>
+          </a:xfrm>
+          <a:prstGeom prst="rect">
+            <a:avLst/>
+          </a:prstGeom>
+          <a:noFill/>
+        </p:spPr>
+        <p:txBody>
+          <a:bodyPr wrap="square" lIns="0" rIns="0" tIns="0" bIns="0" anchor="ctr">
             <a:spAutoFit/>
           </a:bodyPr>
           <a:lstStyle/>
           <a:p>
             <a:pPr algn="l"/>
             <a:r>
-              <a:rPr sz="1600" b="0">
+              <a:rPr sz="1200" b="0">
                 <a:solidFill>
                   <a:srgbClr val="323130"/>
                 </a:solidFill>
@@ -7350,7 +8449,6 @@
           <a:lstStyle/>
           <a:p>
             <a:pPr algn="ctr"/>
-            <a:endParaRPr/>
           </a:p>
         </p:txBody>
       </p:sp>
@@ -7371,7 +8469,7 @@
           <a:noFill/>
         </p:spPr>
         <p:txBody>
-          <a:bodyPr wrap="square" lIns="0" tIns="0" rIns="0" bIns="0" anchor="ctr">
+          <a:bodyPr wrap="square" lIns="0" rIns="0" tIns="0" bIns="0" anchor="ctr">
             <a:spAutoFit/>
           </a:bodyPr>
           <a:lstStyle/>
@@ -7397,47 +8495,29 @@
         </p:nvSpPr>
         <p:spPr>
           <a:xfrm>
-            <a:off x="7086600" y="5417090"/>
-            <a:ext cx="4572000" cy="246221"/>
-          </a:xfrm>
-          <a:prstGeom prst="rect">
-            <a:avLst/>
-          </a:prstGeom>
-          <a:noFill/>
-        </p:spPr>
-        <p:txBody>
-          <a:bodyPr wrap="square" lIns="0" tIns="0" rIns="0" bIns="0" anchor="ctr">
+            <a:off x="7086600" y="5367527"/>
+            <a:ext cx="4572000" cy="384048"/>
+          </a:xfrm>
+          <a:prstGeom prst="rect">
+            <a:avLst/>
+          </a:prstGeom>
+          <a:noFill/>
+        </p:spPr>
+        <p:txBody>
+          <a:bodyPr wrap="square" lIns="0" rIns="0" tIns="0" bIns="0" anchor="ctr">
             <a:spAutoFit/>
           </a:bodyPr>
           <a:lstStyle/>
           <a:p>
             <a:pPr algn="l"/>
             <a:r>
-              <a:rPr sz="1600" b="0">
+              <a:rPr sz="1200" b="0">
                 <a:solidFill>
                   <a:srgbClr val="323130"/>
                 </a:solidFill>
                 <a:latin typeface="Yu Gothic"/>
               </a:rPr>
-              <a:t>Teams投稿</a:t>
-            </a:r>
-            <a:r>
-              <a:rPr lang="ja-JP" altLang="en-US" sz="1600" b="0">
-                <a:solidFill>
-                  <a:srgbClr val="323130"/>
-                </a:solidFill>
-                <a:latin typeface="Yu Gothic"/>
-              </a:rPr>
-              <a:t>ありがとうございました。 </a:t>
-            </a:r>
-            <a:r>
-              <a:rPr sz="1600" b="0">
-                <a:solidFill>
-                  <a:srgbClr val="323130"/>
-                </a:solidFill>
-                <a:latin typeface="Yu Gothic"/>
-              </a:rPr>
-              <a:t>(Flowbot)</a:t>
+              <a:t>Teams投稿 (Flowbot)</a:t>
             </a:r>
           </a:p>
         </p:txBody>
@@ -7459,7 +8539,7 @@
           <a:noFill/>
         </p:spPr>
         <p:txBody>
-          <a:bodyPr wrap="square" lIns="0" tIns="0" rIns="0" bIns="0" anchor="t">
+          <a:bodyPr wrap="square" lIns="0" rIns="0" tIns="0" bIns="0" anchor="t">
             <a:spAutoFit/>
           </a:bodyPr>
           <a:lstStyle/>
@@ -7494,7 +8574,7 @@
           <a:noFill/>
         </p:spPr>
         <p:txBody>
-          <a:bodyPr wrap="square" lIns="0" tIns="0" rIns="0" bIns="0" anchor="t">
+          <a:bodyPr wrap="square" lIns="0" rIns="0" tIns="0" bIns="0" anchor="t">
             <a:spAutoFit/>
           </a:bodyPr>
           <a:lstStyle/>
@@ -7521,7 +8601,7 @@
 </file>
 
 <file path=ppt/slides/slide7.xml><?xml version="1.0" encoding="utf-8"?>
-<p:sld xmlns:a="http://schemas.openxmlformats.org/drawingml/2006/main" xmlns:r="http://schemas.openxmlformats.org/officeDocument/2006/relationships" xmlns:p="http://schemas.openxmlformats.org/presentationml/2006/main">
+<p:sld xmlns:a="http://schemas.openxmlformats.org/drawingml/2006/main" xmlns:p="http://schemas.openxmlformats.org/presentationml/2006/main" xmlns:r="http://schemas.openxmlformats.org/officeDocument/2006/relationships">
   <p:cSld>
     <p:spTree>
       <p:nvGrpSpPr>
@@ -7529,14 +8609,7 @@
         <p:cNvGrpSpPr/>
         <p:nvPr/>
       </p:nvGrpSpPr>
-      <p:grpSpPr>
-        <a:xfrm>
-          <a:off x="0" y="0"/>
-          <a:ext cx="0" cy="0"/>
-          <a:chOff x="0" y="0"/>
-          <a:chExt cx="0" cy="0"/>
-        </a:xfrm>
-      </p:grpSpPr>
+      <p:grpSpPr/>
       <p:sp>
         <p:nvSpPr>
           <p:cNvPr id="2" name="Rounded Rectangle 1"/>
@@ -7579,7 +8652,6 @@
           <a:lstStyle/>
           <a:p>
             <a:pPr algn="ctr"/>
-            <a:endParaRPr/>
           </a:p>
         </p:txBody>
       </p:sp>
@@ -7625,7 +8697,6 @@
           <a:lstStyle/>
           <a:p>
             <a:pPr algn="ctr"/>
-            <a:endParaRPr/>
           </a:p>
         </p:txBody>
       </p:sp>
@@ -7646,7 +8717,7 @@
           <a:noFill/>
         </p:spPr>
         <p:txBody>
-          <a:bodyPr wrap="square" lIns="0" tIns="0" rIns="0" bIns="0" anchor="ctr">
+          <a:bodyPr wrap="square" lIns="0" rIns="0" tIns="0" bIns="0" anchor="ctr">
             <a:spAutoFit/>
           </a:bodyPr>
           <a:lstStyle/>
@@ -7681,7 +8752,7 @@
           <a:noFill/>
         </p:spPr>
         <p:txBody>
-          <a:bodyPr wrap="square" lIns="0" tIns="0" rIns="0" bIns="0" anchor="ctr">
+          <a:bodyPr wrap="square" lIns="0" rIns="0" tIns="0" bIns="0" anchor="ctr">
             <a:spAutoFit/>
           </a:bodyPr>
           <a:lstStyle/>
@@ -7741,7 +8812,6 @@
           <a:lstStyle/>
           <a:p>
             <a:pPr algn="ctr"/>
-            <a:endParaRPr/>
           </a:p>
         </p:txBody>
       </p:sp>
@@ -7753,7 +8823,7 @@
         </p:nvSpPr>
         <p:spPr>
           <a:xfrm>
-            <a:off x="365760" y="1316736"/>
+            <a:off x="457200" y="1371600"/>
             <a:ext cx="11430000" cy="4206240"/>
           </a:xfrm>
           <a:prstGeom prst="roundRect">
@@ -7790,7 +8860,76 @@
           <a:lstStyle/>
           <a:p>
             <a:pPr algn="ctr"/>
-            <a:endParaRPr/>
+          </a:p>
+        </p:txBody>
+      </p:sp>
+      <p:sp>
+        <p:nvSpPr>
+          <p:cNvPr id="8" name="TextBox 7"/>
+          <p:cNvSpPr txBox="1"/>
+          <p:nvPr/>
+        </p:nvSpPr>
+        <p:spPr>
+          <a:xfrm>
+            <a:off x="457200" y="1371600"/>
+            <a:ext cx="11430000" cy="3840480"/>
+          </a:xfrm>
+          <a:prstGeom prst="rect">
+            <a:avLst/>
+          </a:prstGeom>
+          <a:noFill/>
+        </p:spPr>
+        <p:txBody>
+          <a:bodyPr wrap="square" lIns="0" rIns="0" tIns="0" bIns="0" anchor="ctr">
+            <a:spAutoFit/>
+          </a:bodyPr>
+          <a:lstStyle/>
+          <a:p>
+            <a:pPr algn="ctr"/>
+            <a:r>
+              <a:rPr sz="1800" b="1">
+                <a:solidFill>
+                  <a:srgbClr val="605E5C"/>
+                </a:solidFill>
+                <a:latin typeface="Yu Gothic"/>
+              </a:rPr>
+              <a:t>📸  ここにPower Automateフロー全体のスクショを貼り付け</a:t>
+            </a:r>
+          </a:p>
+        </p:txBody>
+      </p:sp>
+      <p:sp>
+        <p:nvSpPr>
+          <p:cNvPr id="9" name="TextBox 8"/>
+          <p:cNvSpPr txBox="1"/>
+          <p:nvPr/>
+        </p:nvSpPr>
+        <p:spPr>
+          <a:xfrm>
+            <a:off x="457200" y="5120640"/>
+            <a:ext cx="11430000" cy="365760"/>
+          </a:xfrm>
+          <a:prstGeom prst="rect">
+            <a:avLst/>
+          </a:prstGeom>
+          <a:noFill/>
+        </p:spPr>
+        <p:txBody>
+          <a:bodyPr wrap="square" lIns="0" rIns="0" tIns="0" bIns="0" anchor="t">
+            <a:spAutoFit/>
+          </a:bodyPr>
+          <a:lstStyle/>
+          <a:p>
+            <a:pPr algn="ctr"/>
+            <a:r>
+              <a:rPr sz="1100" b="0">
+                <a:solidFill>
+                  <a:srgbClr val="605E5C"/>
+                </a:solidFill>
+                <a:latin typeface="Yu Gothic"/>
+              </a:rPr>
+              <a:t>👉 推奨：フロー全体が見えるスクショ → トリミングして横配置</a:t>
+            </a:r>
           </a:p>
         </p:txBody>
       </p:sp>
@@ -7838,7 +8977,6 @@
           <a:lstStyle/>
           <a:p>
             <a:pPr algn="ctr"/>
-            <a:endParaRPr/>
           </a:p>
         </p:txBody>
       </p:sp>
@@ -7884,7 +9022,6 @@
           <a:lstStyle/>
           <a:p>
             <a:pPr algn="ctr"/>
-            <a:endParaRPr/>
           </a:p>
         </p:txBody>
       </p:sp>
@@ -7905,7 +9042,7 @@
           <a:noFill/>
         </p:spPr>
         <p:txBody>
-          <a:bodyPr wrap="square" lIns="0" tIns="0" rIns="0" bIns="0" anchor="t">
+          <a:bodyPr wrap="square" lIns="0" rIns="0" tIns="0" bIns="0" anchor="t">
             <a:spAutoFit/>
           </a:bodyPr>
           <a:lstStyle/>
@@ -7940,7 +9077,7 @@
           <a:noFill/>
         </p:spPr>
         <p:txBody>
-          <a:bodyPr wrap="square" lIns="0" tIns="0" rIns="0" bIns="0" anchor="t">
+          <a:bodyPr wrap="square" lIns="0" rIns="0" tIns="0" bIns="0" anchor="t">
             <a:spAutoFit/>
           </a:bodyPr>
           <a:lstStyle/>
@@ -8002,7 +9139,6 @@
           <a:lstStyle/>
           <a:p>
             <a:pPr algn="ctr"/>
-            <a:endParaRPr/>
           </a:p>
         </p:txBody>
       </p:sp>
@@ -8048,7 +9184,6 @@
           <a:lstStyle/>
           <a:p>
             <a:pPr algn="ctr"/>
-            <a:endParaRPr/>
           </a:p>
         </p:txBody>
       </p:sp>
@@ -8069,7 +9204,7 @@
           <a:noFill/>
         </p:spPr>
         <p:txBody>
-          <a:bodyPr wrap="square" lIns="0" tIns="0" rIns="0" bIns="0" anchor="t">
+          <a:bodyPr wrap="square" lIns="0" rIns="0" tIns="0" bIns="0" anchor="t">
             <a:spAutoFit/>
           </a:bodyPr>
           <a:lstStyle/>
@@ -8104,7 +9239,7 @@
           <a:noFill/>
         </p:spPr>
         <p:txBody>
-          <a:bodyPr wrap="square" lIns="0" tIns="0" rIns="0" bIns="0" anchor="t">
+          <a:bodyPr wrap="square" lIns="0" rIns="0" tIns="0" bIns="0" anchor="t">
             <a:spAutoFit/>
           </a:bodyPr>
           <a:lstStyle/>
@@ -8166,7 +9301,6 @@
           <a:lstStyle/>
           <a:p>
             <a:pPr algn="ctr"/>
-            <a:endParaRPr/>
           </a:p>
         </p:txBody>
       </p:sp>
@@ -8212,7 +9346,6 @@
           <a:lstStyle/>
           <a:p>
             <a:pPr algn="ctr"/>
-            <a:endParaRPr/>
           </a:p>
         </p:txBody>
       </p:sp>
@@ -8233,7 +9366,7 @@
           <a:noFill/>
         </p:spPr>
         <p:txBody>
-          <a:bodyPr wrap="square" lIns="0" tIns="0" rIns="0" bIns="0" anchor="t">
+          <a:bodyPr wrap="square" lIns="0" rIns="0" tIns="0" bIns="0" anchor="t">
             <a:spAutoFit/>
           </a:bodyPr>
           <a:lstStyle/>
@@ -8268,7 +9401,7 @@
           <a:noFill/>
         </p:spPr>
         <p:txBody>
-          <a:bodyPr wrap="square" lIns="0" tIns="0" rIns="0" bIns="0" anchor="t">
+          <a:bodyPr wrap="square" lIns="0" rIns="0" tIns="0" bIns="0" anchor="t">
             <a:spAutoFit/>
           </a:bodyPr>
           <a:lstStyle/>
@@ -8303,7 +9436,7 @@
           <a:noFill/>
         </p:spPr>
         <p:txBody>
-          <a:bodyPr wrap="square" lIns="0" tIns="0" rIns="0" bIns="0" anchor="t">
+          <a:bodyPr wrap="square" lIns="0" rIns="0" tIns="0" bIns="0" anchor="t">
             <a:spAutoFit/>
           </a:bodyPr>
           <a:lstStyle/>
@@ -8338,7 +9471,7 @@
           <a:noFill/>
         </p:spPr>
         <p:txBody>
-          <a:bodyPr wrap="square" lIns="0" tIns="0" rIns="0" bIns="0" anchor="t">
+          <a:bodyPr wrap="square" lIns="0" rIns="0" tIns="0" bIns="0" anchor="t">
             <a:spAutoFit/>
           </a:bodyPr>
           <a:lstStyle/>
@@ -8356,156 +9489,6 @@
           </a:p>
         </p:txBody>
       </p:sp>
-      <p:pic>
-        <p:nvPicPr>
-          <p:cNvPr id="25" name="図 24" descr="The image displays a user interface with a flowchart that illustrates an event creation process, including steps for required and optional participant counts, and a calculation for total participants.&#10;&#10;AI 生成コンテンツは誤りを含む可能性があります。">
-            <a:extLst>
-              <a:ext uri="{FF2B5EF4-FFF2-40B4-BE49-F238E27FC236}">
-                <a16:creationId xmlns:a16="http://schemas.microsoft.com/office/drawing/2014/main" id="{ECD95901-3818-AB98-430B-A0191FCCFA4C}"/>
-              </a:ext>
-            </a:extLst>
-          </p:cNvPr>
-          <p:cNvPicPr>
-            <a:picLocks noChangeAspect="1"/>
-          </p:cNvPicPr>
-          <p:nvPr/>
-        </p:nvPicPr>
-        <p:blipFill>
-          <a:blip r:embed="rId2"/>
-          <a:stretch>
-            <a:fillRect/>
-          </a:stretch>
-        </p:blipFill>
-        <p:spPr>
-          <a:xfrm>
-            <a:off x="512064" y="1680173"/>
-            <a:ext cx="2162191" cy="3467125"/>
-          </a:xfrm>
-          <a:prstGeom prst="rect">
-            <a:avLst/>
-          </a:prstGeom>
-        </p:spPr>
-      </p:pic>
-      <p:pic>
-        <p:nvPicPr>
-          <p:cNvPr id="27" name="図 26" descr="The image illustrates a workflow diagram in Japanese, showing a series of steps for initializing a variable, calculating costs, and notifying conference attendees via chat or email.&#10;&#10;AI 生成コンテンツは誤りを含む可能性があります。">
-            <a:extLst>
-              <a:ext uri="{FF2B5EF4-FFF2-40B4-BE49-F238E27FC236}">
-                <a16:creationId xmlns:a16="http://schemas.microsoft.com/office/drawing/2014/main" id="{58B7430B-E5E7-D7F4-22F3-4D118C5C5059}"/>
-              </a:ext>
-            </a:extLst>
-          </p:cNvPr>
-          <p:cNvPicPr>
-            <a:picLocks noChangeAspect="1"/>
-          </p:cNvPicPr>
-          <p:nvPr/>
-        </p:nvPicPr>
-        <p:blipFill>
-          <a:blip r:embed="rId3"/>
-          <a:stretch>
-            <a:fillRect/>
-          </a:stretch>
-        </p:blipFill>
-        <p:spPr>
-          <a:xfrm>
-            <a:off x="7630838" y="1538273"/>
-            <a:ext cx="2047890" cy="3781453"/>
-          </a:xfrm>
-          <a:prstGeom prst="rect">
-            <a:avLst/>
-          </a:prstGeom>
-        </p:spPr>
-      </p:pic>
-      <p:pic>
-        <p:nvPicPr>
-          <p:cNvPr id="29" name="図 28" descr="The provided text appears to be a snippet of code, specifically a conditional statement in a programming language, likely JavaScript. It checks if an array called `triggerOutputs` has an element at the key `'body/requiredAttendees'` and is empty. If it is, it returns `0`. If it's not empty, it splits the array at the semicolon delimiter, then returns the length of the resulting array minus one.&#10;&#10;AI 生成コンテンツは誤りを含む可能性があります。">
-            <a:extLst>
-              <a:ext uri="{FF2B5EF4-FFF2-40B4-BE49-F238E27FC236}">
-                <a16:creationId xmlns:a16="http://schemas.microsoft.com/office/drawing/2014/main" id="{038036A4-7789-1BD5-DF2D-59D757D0F762}"/>
-              </a:ext>
-            </a:extLst>
-          </p:cNvPr>
-          <p:cNvPicPr>
-            <a:picLocks noChangeAspect="1"/>
-          </p:cNvPicPr>
-          <p:nvPr/>
-        </p:nvPicPr>
-        <p:blipFill>
-          <a:blip r:embed="rId4"/>
-          <a:stretch>
-            <a:fillRect/>
-          </a:stretch>
-        </p:blipFill>
-        <p:spPr>
-          <a:xfrm>
-            <a:off x="2729119" y="2684333"/>
-            <a:ext cx="4514883" cy="657230"/>
-          </a:xfrm>
-          <a:prstGeom prst="rect">
-            <a:avLst/>
-          </a:prstGeom>
-        </p:spPr>
-      </p:pic>
-      <p:pic>
-        <p:nvPicPr>
-          <p:cNvPr id="31" name="図 30" descr="body/optionalAttendees&#10;&#10;AI 生成コンテンツは誤りを含む可能性があります。">
-            <a:extLst>
-              <a:ext uri="{FF2B5EF4-FFF2-40B4-BE49-F238E27FC236}">
-                <a16:creationId xmlns:a16="http://schemas.microsoft.com/office/drawing/2014/main" id="{8F64F2FC-8D13-BD47-FC04-95553988425C}"/>
-              </a:ext>
-            </a:extLst>
-          </p:cNvPr>
-          <p:cNvPicPr>
-            <a:picLocks noChangeAspect="1"/>
-          </p:cNvPicPr>
-          <p:nvPr/>
-        </p:nvPicPr>
-        <p:blipFill>
-          <a:blip r:embed="rId5"/>
-          <a:stretch>
-            <a:fillRect/>
-          </a:stretch>
-        </p:blipFill>
-        <p:spPr>
-          <a:xfrm>
-            <a:off x="2767219" y="3627853"/>
-            <a:ext cx="4476783" cy="685805"/>
-          </a:xfrm>
-          <a:prstGeom prst="rect">
-            <a:avLst/>
-          </a:prstGeom>
-        </p:spPr>
-      </p:pic>
-      <p:pic>
-        <p:nvPicPr>
-          <p:cNvPr id="33" name="図 32" descr="The image shows a snippet of code with a function call in a programming language, specifically adding two outputs with given strings and an integer.&#10;&#10;AI 生成コンテンツは誤りを含む可能性があります。">
-            <a:extLst>
-              <a:ext uri="{FF2B5EF4-FFF2-40B4-BE49-F238E27FC236}">
-                <a16:creationId xmlns:a16="http://schemas.microsoft.com/office/drawing/2014/main" id="{5B4ED5E9-2204-DFCF-0FF4-DAA225B1A49E}"/>
-              </a:ext>
-            </a:extLst>
-          </p:cNvPr>
-          <p:cNvPicPr>
-            <a:picLocks noChangeAspect="1"/>
-          </p:cNvPicPr>
-          <p:nvPr/>
-        </p:nvPicPr>
-        <p:blipFill>
-          <a:blip r:embed="rId6"/>
-          <a:stretch>
-            <a:fillRect/>
-          </a:stretch>
-        </p:blipFill>
-        <p:spPr>
-          <a:xfrm>
-            <a:off x="2816019" y="4587978"/>
-            <a:ext cx="4514883" cy="533404"/>
-          </a:xfrm>
-          <a:prstGeom prst="rect">
-            <a:avLst/>
-          </a:prstGeom>
-        </p:spPr>
-      </p:pic>
     </p:spTree>
   </p:cSld>
   <p:clrMapOvr>
@@ -8515,7 +9498,7 @@
 </file>
 
 <file path=ppt/slides/slide8.xml><?xml version="1.0" encoding="utf-8"?>
-<p:sld xmlns:a="http://schemas.openxmlformats.org/drawingml/2006/main" xmlns:r="http://schemas.openxmlformats.org/officeDocument/2006/relationships" xmlns:p="http://schemas.openxmlformats.org/presentationml/2006/main">
+<p:sld xmlns:a="http://schemas.openxmlformats.org/drawingml/2006/main" xmlns:p="http://schemas.openxmlformats.org/presentationml/2006/main" xmlns:r="http://schemas.openxmlformats.org/officeDocument/2006/relationships">
   <p:cSld>
     <p:spTree>
       <p:nvGrpSpPr>
@@ -8523,14 +9506,7 @@
         <p:cNvGrpSpPr/>
         <p:nvPr/>
       </p:nvGrpSpPr>
-      <p:grpSpPr>
-        <a:xfrm>
-          <a:off x="0" y="0"/>
-          <a:ext cx="0" cy="0"/>
-          <a:chOff x="0" y="0"/>
-          <a:chExt cx="0" cy="0"/>
-        </a:xfrm>
-      </p:grpSpPr>
+      <p:grpSpPr/>
       <p:sp>
         <p:nvSpPr>
           <p:cNvPr id="2" name="Rounded Rectangle 1"/>
@@ -8573,7 +9549,6 @@
           <a:lstStyle/>
           <a:p>
             <a:pPr algn="ctr"/>
-            <a:endParaRPr/>
           </a:p>
         </p:txBody>
       </p:sp>
@@ -8619,7 +9594,6 @@
           <a:lstStyle/>
           <a:p>
             <a:pPr algn="ctr"/>
-            <a:endParaRPr/>
           </a:p>
         </p:txBody>
       </p:sp>
@@ -8640,7 +9614,7 @@
           <a:noFill/>
         </p:spPr>
         <p:txBody>
-          <a:bodyPr wrap="square" lIns="0" tIns="0" rIns="0" bIns="0" anchor="ctr">
+          <a:bodyPr wrap="square" lIns="0" rIns="0" tIns="0" bIns="0" anchor="ctr">
             <a:spAutoFit/>
           </a:bodyPr>
           <a:lstStyle/>
@@ -8653,7 +9627,7 @@
                 </a:solidFill>
                 <a:latin typeface="Yu Gothic"/>
               </a:rPr>
-              <a:t>07</a:t>
+              <a:t>06</a:t>
             </a:r>
           </a:p>
         </p:txBody>
@@ -8675,7 +9649,7 @@
           <a:noFill/>
         </p:spPr>
         <p:txBody>
-          <a:bodyPr wrap="square" lIns="0" tIns="0" rIns="0" bIns="0" anchor="ctr">
+          <a:bodyPr wrap="square" lIns="0" rIns="0" tIns="0" bIns="0" anchor="ctr">
             <a:spAutoFit/>
           </a:bodyPr>
           <a:lstStyle/>
@@ -8735,7 +9709,6 @@
           <a:lstStyle/>
           <a:p>
             <a:pPr algn="ctr"/>
-            <a:endParaRPr/>
           </a:p>
         </p:txBody>
       </p:sp>
@@ -8783,7 +9756,6 @@
           <a:lstStyle/>
           <a:p>
             <a:pPr algn="ctr"/>
-            <a:endParaRPr/>
           </a:p>
         </p:txBody>
       </p:sp>
@@ -8829,7 +9801,6 @@
           <a:lstStyle/>
           <a:p>
             <a:pPr algn="ctr"/>
-            <a:endParaRPr/>
           </a:p>
         </p:txBody>
       </p:sp>
@@ -8850,7 +9821,7 @@
           <a:noFill/>
         </p:spPr>
         <p:txBody>
-          <a:bodyPr wrap="square" lIns="0" tIns="0" rIns="0" bIns="0" anchor="ctr">
+          <a:bodyPr wrap="square" lIns="0" rIns="0" tIns="0" bIns="0" anchor="ctr">
             <a:spAutoFit/>
           </a:bodyPr>
           <a:lstStyle/>
@@ -8870,14 +9841,97 @@
       </p:sp>
       <p:sp>
         <p:nvSpPr>
-          <p:cNvPr id="14" name="Rounded Rectangle 13"/>
+          <p:cNvPr id="10" name="TextBox 9"/>
+          <p:cNvSpPr txBox="1"/>
+          <p:nvPr/>
+        </p:nvSpPr>
+        <p:spPr>
+          <a:xfrm>
+            <a:off x="777240" y="1828800"/>
+            <a:ext cx="5029200" cy="2377440"/>
+          </a:xfrm>
+          <a:prstGeom prst="rect">
+            <a:avLst/>
+          </a:prstGeom>
+          <a:noFill/>
+        </p:spPr>
+        <p:txBody>
+          <a:bodyPr wrap="square" lIns="0" rIns="0">
+            <a:spAutoFit/>
+          </a:bodyPr>
+          <a:lstStyle/>
+          <a:p>
+            <a:pPr algn="l"/>
+            <a:r>
+              <a:rPr sz="1300" b="0">
+                <a:solidFill>
+                  <a:srgbClr val="323130"/>
+                </a:solidFill>
+                <a:latin typeface="Yu Gothic"/>
+              </a:rPr>
+              <a:t>📅 件名：定例MTG</a:t>
+            </a:r>
+          </a:p>
+          <a:p>
+            <a:pPr algn="l"/>
+            <a:r>
+              <a:rPr sz="1300" b="0">
+                <a:solidFill>
+                  <a:srgbClr val="323130"/>
+                </a:solidFill>
+                <a:latin typeface="Yu Gothic"/>
+              </a:rPr>
+              <a:t>👥 参加者：6人</a:t>
+            </a:r>
+          </a:p>
+          <a:p>
+            <a:pPr algn="l"/>
+            <a:r>
+              <a:rPr sz="1300" b="0">
+                <a:solidFill>
+                  <a:srgbClr val="323130"/>
+                </a:solidFill>
+                <a:latin typeface="Yu Gothic"/>
+              </a:rPr>
+              <a:t>⏰ 時間：60分</a:t>
+            </a:r>
+          </a:p>
+          <a:p>
+            <a:pPr algn="l"/>
+            <a:r>
+              <a:rPr sz="600" b="0">
+                <a:solidFill>
+                  <a:srgbClr val="323130"/>
+                </a:solidFill>
+                <a:latin typeface="Yu Gothic"/>
+              </a:rPr>
+              <a:t/>
+            </a:r>
+          </a:p>
+          <a:p>
+            <a:pPr algn="l"/>
+            <a:r>
+              <a:rPr sz="2200" b="1">
+                <a:solidFill>
+                  <a:srgbClr val="323130"/>
+                </a:solidFill>
+                <a:latin typeface="Yu Gothic"/>
+              </a:rPr>
+              <a:t>💰 推定コスト：30,000円</a:t>
+            </a:r>
+          </a:p>
+        </p:txBody>
+      </p:sp>
+      <p:sp>
+        <p:nvSpPr>
+          <p:cNvPr id="11" name="Rounded Rectangle 10"/>
           <p:cNvSpPr/>
           <p:nvPr/>
         </p:nvSpPr>
         <p:spPr>
           <a:xfrm>
-            <a:off x="6309360" y="1280160"/>
-            <a:ext cx="5577840" cy="1554480"/>
+            <a:off x="777240" y="3886200"/>
+            <a:ext cx="5029200" cy="411480"/>
           </a:xfrm>
           <a:prstGeom prst="roundRect">
             <a:avLst>
@@ -8885,7 +9939,7 @@
             </a:avLst>
           </a:prstGeom>
           <a:solidFill>
-            <a:srgbClr val="373E99"/>
+            <a:srgbClr val="FFF4CE"/>
           </a:solidFill>
           <a:ln>
             <a:noFill/>
@@ -8910,125 +9964,19 @@
           <a:lstStyle/>
           <a:p>
             <a:pPr algn="ctr"/>
-            <a:endParaRPr/>
-          </a:p>
-        </p:txBody>
-      </p:sp>
-      <p:sp>
-        <p:nvSpPr>
-          <p:cNvPr id="15" name="TextBox 14"/>
-          <p:cNvSpPr txBox="1"/>
-          <p:nvPr/>
-        </p:nvSpPr>
-        <p:spPr>
-          <a:xfrm>
-            <a:off x="6537960" y="1371600"/>
-            <a:ext cx="5029200" cy="640080"/>
-          </a:xfrm>
-          <a:prstGeom prst="rect">
-            <a:avLst/>
-          </a:prstGeom>
-          <a:noFill/>
-        </p:spPr>
-        <p:txBody>
-          <a:bodyPr wrap="square" lIns="0" tIns="0" rIns="0" bIns="0" anchor="ctr">
-            <a:spAutoFit/>
-          </a:bodyPr>
-          <a:lstStyle/>
-          <a:p>
-            <a:pPr algn="l"/>
-            <a:r>
-              <a:rPr sz="2200" b="1">
-                <a:solidFill>
-                  <a:srgbClr val="FFFFFF"/>
-                </a:solidFill>
-                <a:latin typeface="Yu Gothic"/>
-              </a:rPr>
-              <a:t>会議は減らなかった。</a:t>
-            </a:r>
-          </a:p>
-        </p:txBody>
-      </p:sp>
-      <p:sp>
-        <p:nvSpPr>
-          <p:cNvPr id="16" name="TextBox 15"/>
-          <p:cNvSpPr txBox="1"/>
-          <p:nvPr/>
-        </p:nvSpPr>
-        <p:spPr>
-          <a:xfrm>
-            <a:off x="6537960" y="2011680"/>
-            <a:ext cx="5029200" cy="640080"/>
-          </a:xfrm>
-          <a:prstGeom prst="rect">
-            <a:avLst/>
-          </a:prstGeom>
-          <a:noFill/>
-        </p:spPr>
-        <p:txBody>
-          <a:bodyPr wrap="square" lIns="0" tIns="0" rIns="0" bIns="0" anchor="ctr">
-            <a:spAutoFit/>
-          </a:bodyPr>
-          <a:lstStyle/>
-          <a:p>
-            <a:pPr algn="l"/>
-            <a:r>
-              <a:rPr sz="2200" b="1">
-                <a:solidFill>
-                  <a:srgbClr val="FFB900"/>
-                </a:solidFill>
-                <a:latin typeface="Yu Gothic"/>
-              </a:rPr>
-              <a:t>でも、空気が変わった。</a:t>
-            </a:r>
-          </a:p>
-        </p:txBody>
-      </p:sp>
-      <p:sp>
-        <p:nvSpPr>
-          <p:cNvPr id="17" name="TextBox 16"/>
-          <p:cNvSpPr txBox="1"/>
-          <p:nvPr/>
-        </p:nvSpPr>
-        <p:spPr>
-          <a:xfrm>
-            <a:off x="6309360" y="3017520"/>
-            <a:ext cx="5303520" cy="365760"/>
-          </a:xfrm>
-          <a:prstGeom prst="rect">
-            <a:avLst/>
-          </a:prstGeom>
-          <a:noFill/>
-        </p:spPr>
-        <p:txBody>
-          <a:bodyPr wrap="square" lIns="0" tIns="0" rIns="0" bIns="0" anchor="t">
-            <a:spAutoFit/>
-          </a:bodyPr>
-          <a:lstStyle/>
-          <a:p>
-            <a:pPr algn="l"/>
-            <a:r>
-              <a:rPr sz="1500" b="1">
-                <a:solidFill>
-                  <a:srgbClr val="373E99"/>
-                </a:solidFill>
-                <a:latin typeface="Yu Gothic"/>
-              </a:rPr>
-              <a:t>💡 今日の学び</a:t>
-            </a:r>
-          </a:p>
-        </p:txBody>
-      </p:sp>
-      <p:sp>
-        <p:nvSpPr>
-          <p:cNvPr id="18" name="Rounded Rectangle 17"/>
+          </a:p>
+        </p:txBody>
+      </p:sp>
+      <p:sp>
+        <p:nvSpPr>
+          <p:cNvPr id="12" name="Rounded Rectangle 11"/>
           <p:cNvSpPr/>
           <p:nvPr/>
         </p:nvSpPr>
         <p:spPr>
           <a:xfrm>
-            <a:off x="6309360" y="3566160"/>
-            <a:ext cx="292608" cy="292608"/>
+            <a:off x="777240" y="3886200"/>
+            <a:ext cx="54864" cy="411480"/>
           </a:xfrm>
           <a:prstGeom prst="roundRect">
             <a:avLst>
@@ -9036,7 +9984,7 @@
             </a:avLst>
           </a:prstGeom>
           <a:solidFill>
-            <a:srgbClr val="0078D4"/>
+            <a:srgbClr val="FFB900"/>
           </a:solidFill>
           <a:ln>
             <a:noFill/>
@@ -9061,90 +10009,54 @@
           <a:lstStyle/>
           <a:p>
             <a:pPr algn="ctr"/>
-            <a:endParaRPr/>
-          </a:p>
-        </p:txBody>
-      </p:sp>
-      <p:sp>
-        <p:nvSpPr>
-          <p:cNvPr id="19" name="TextBox 18"/>
-          <p:cNvSpPr txBox="1"/>
-          <p:nvPr/>
-        </p:nvSpPr>
-        <p:spPr>
-          <a:xfrm>
-            <a:off x="6309360" y="3566160"/>
-            <a:ext cx="292608" cy="292608"/>
-          </a:xfrm>
-          <a:prstGeom prst="rect">
-            <a:avLst/>
-          </a:prstGeom>
-          <a:noFill/>
-        </p:spPr>
-        <p:txBody>
-          <a:bodyPr wrap="square" lIns="0" tIns="0" rIns="0" bIns="0" anchor="ctr">
+          </a:p>
+        </p:txBody>
+      </p:sp>
+      <p:sp>
+        <p:nvSpPr>
+          <p:cNvPr id="13" name="TextBox 12"/>
+          <p:cNvSpPr txBox="1"/>
+          <p:nvPr/>
+        </p:nvSpPr>
+        <p:spPr>
+          <a:xfrm>
+            <a:off x="914400" y="3886200"/>
+            <a:ext cx="4846320" cy="411480"/>
+          </a:xfrm>
+          <a:prstGeom prst="rect">
+            <a:avLst/>
+          </a:prstGeom>
+          <a:noFill/>
+        </p:spPr>
+        <p:txBody>
+          <a:bodyPr wrap="square" lIns="0" rIns="0" tIns="0" bIns="0" anchor="ctr">
             <a:spAutoFit/>
           </a:bodyPr>
           <a:lstStyle/>
           <a:p>
-            <a:pPr algn="ctr"/>
-            <a:r>
-              <a:rPr sz="1100" b="1">
-                <a:solidFill>
-                  <a:srgbClr val="FFFFFF"/>
-                </a:solidFill>
-                <a:latin typeface="Yu Gothic"/>
-              </a:rPr>
-              <a:t>1</a:t>
-            </a:r>
-          </a:p>
-        </p:txBody>
-      </p:sp>
-      <p:sp>
-        <p:nvSpPr>
-          <p:cNvPr id="20" name="TextBox 19"/>
-          <p:cNvSpPr txBox="1"/>
-          <p:nvPr/>
-        </p:nvSpPr>
-        <p:spPr>
-          <a:xfrm>
-            <a:off x="6766560" y="3520440"/>
-            <a:ext cx="5029200" cy="411480"/>
-          </a:xfrm>
-          <a:prstGeom prst="rect">
-            <a:avLst/>
-          </a:prstGeom>
-          <a:noFill/>
-        </p:spPr>
-        <p:txBody>
-          <a:bodyPr wrap="square" lIns="0" tIns="0" rIns="0" bIns="0" anchor="ctr">
-            <a:spAutoFit/>
-          </a:bodyPr>
-          <a:lstStyle/>
-          <a:p>
             <a:pPr algn="l"/>
             <a:r>
-              <a:rPr sz="1300" b="0">
+              <a:rPr sz="1200" b="1">
                 <a:solidFill>
                   <a:srgbClr val="323130"/>
                 </a:solidFill>
                 <a:latin typeface="Yu Gothic"/>
               </a:rPr>
-              <a:t>Copilotは"何を作るか"も提案してくれる</a:t>
-            </a:r>
-          </a:p>
-        </p:txBody>
-      </p:sp>
-      <p:sp>
-        <p:nvSpPr>
-          <p:cNvPr id="21" name="Rounded Rectangle 20"/>
+              <a:t>⚠ 本当にこの人数必要ですか？</a:t>
+            </a:r>
+          </a:p>
+        </p:txBody>
+      </p:sp>
+      <p:sp>
+        <p:nvSpPr>
+          <p:cNvPr id="14" name="Rounded Rectangle 13"/>
           <p:cNvSpPr/>
           <p:nvPr/>
         </p:nvSpPr>
         <p:spPr>
           <a:xfrm>
-            <a:off x="6309360" y="4069080"/>
-            <a:ext cx="292608" cy="292608"/>
+            <a:off x="6309360" y="1280160"/>
+            <a:ext cx="5577840" cy="1554480"/>
           </a:xfrm>
           <a:prstGeom prst="roundRect">
             <a:avLst>
@@ -9152,7 +10064,7 @@
             </a:avLst>
           </a:prstGeom>
           <a:solidFill>
-            <a:srgbClr val="0078D4"/>
+            <a:srgbClr val="373E99"/>
           </a:solidFill>
           <a:ln>
             <a:noFill/>
@@ -9177,89 +10089,123 @@
           <a:lstStyle/>
           <a:p>
             <a:pPr algn="ctr"/>
-            <a:endParaRPr/>
-          </a:p>
-        </p:txBody>
-      </p:sp>
-      <p:sp>
-        <p:nvSpPr>
-          <p:cNvPr id="22" name="TextBox 21"/>
-          <p:cNvSpPr txBox="1"/>
-          <p:nvPr/>
-        </p:nvSpPr>
-        <p:spPr>
-          <a:xfrm>
-            <a:off x="6309360" y="4069080"/>
-            <a:ext cx="292608" cy="292608"/>
-          </a:xfrm>
-          <a:prstGeom prst="rect">
-            <a:avLst/>
-          </a:prstGeom>
-          <a:noFill/>
-        </p:spPr>
-        <p:txBody>
-          <a:bodyPr wrap="square" lIns="0" tIns="0" rIns="0" bIns="0" anchor="ctr">
+          </a:p>
+        </p:txBody>
+      </p:sp>
+      <p:sp>
+        <p:nvSpPr>
+          <p:cNvPr id="15" name="TextBox 14"/>
+          <p:cNvSpPr txBox="1"/>
+          <p:nvPr/>
+        </p:nvSpPr>
+        <p:spPr>
+          <a:xfrm>
+            <a:off x="6537960" y="1371600"/>
+            <a:ext cx="5029200" cy="640080"/>
+          </a:xfrm>
+          <a:prstGeom prst="rect">
+            <a:avLst/>
+          </a:prstGeom>
+          <a:noFill/>
+        </p:spPr>
+        <p:txBody>
+          <a:bodyPr wrap="square" lIns="0" rIns="0" tIns="0" bIns="0" anchor="ctr">
             <a:spAutoFit/>
           </a:bodyPr>
           <a:lstStyle/>
           <a:p>
-            <a:pPr algn="ctr"/>
-            <a:r>
-              <a:rPr sz="1100" b="1">
+            <a:pPr algn="l"/>
+            <a:r>
+              <a:rPr sz="2200" b="1">
                 <a:solidFill>
                   <a:srgbClr val="FFFFFF"/>
                 </a:solidFill>
                 <a:latin typeface="Yu Gothic"/>
               </a:rPr>
-              <a:t>2</a:t>
-            </a:r>
-          </a:p>
-        </p:txBody>
-      </p:sp>
-      <p:sp>
-        <p:nvSpPr>
-          <p:cNvPr id="23" name="TextBox 22"/>
-          <p:cNvSpPr txBox="1"/>
-          <p:nvPr/>
-        </p:nvSpPr>
-        <p:spPr>
-          <a:xfrm>
-            <a:off x="6766560" y="4023360"/>
-            <a:ext cx="5029200" cy="411480"/>
-          </a:xfrm>
-          <a:prstGeom prst="rect">
-            <a:avLst/>
-          </a:prstGeom>
-          <a:noFill/>
-        </p:spPr>
-        <p:txBody>
-          <a:bodyPr wrap="square" lIns="0" tIns="0" rIns="0" bIns="0" anchor="ctr">
+              <a:t>会議は減らなかった。</a:t>
+            </a:r>
+          </a:p>
+        </p:txBody>
+      </p:sp>
+      <p:sp>
+        <p:nvSpPr>
+          <p:cNvPr id="16" name="TextBox 15"/>
+          <p:cNvSpPr txBox="1"/>
+          <p:nvPr/>
+        </p:nvSpPr>
+        <p:spPr>
+          <a:xfrm>
+            <a:off x="6537960" y="2011680"/>
+            <a:ext cx="5029200" cy="640080"/>
+          </a:xfrm>
+          <a:prstGeom prst="rect">
+            <a:avLst/>
+          </a:prstGeom>
+          <a:noFill/>
+        </p:spPr>
+        <p:txBody>
+          <a:bodyPr wrap="square" lIns="0" rIns="0" tIns="0" bIns="0" anchor="ctr">
             <a:spAutoFit/>
           </a:bodyPr>
           <a:lstStyle/>
           <a:p>
             <a:pPr algn="l"/>
             <a:r>
-              <a:rPr sz="1300" b="0">
-                <a:solidFill>
-                  <a:srgbClr val="323130"/>
-                </a:solidFill>
-                <a:latin typeface="Yu Gothic"/>
-              </a:rPr>
-              <a:t>式が読めなくても動く（理解は後で追いつく）</a:t>
-            </a:r>
-          </a:p>
-        </p:txBody>
-      </p:sp>
-      <p:sp>
-        <p:nvSpPr>
-          <p:cNvPr id="24" name="Rounded Rectangle 23"/>
+              <a:rPr sz="2200" b="1">
+                <a:solidFill>
+                  <a:srgbClr val="FFB900"/>
+                </a:solidFill>
+                <a:latin typeface="Yu Gothic"/>
+              </a:rPr>
+              <a:t>でも、空気が変わった。</a:t>
+            </a:r>
+          </a:p>
+        </p:txBody>
+      </p:sp>
+      <p:sp>
+        <p:nvSpPr>
+          <p:cNvPr id="17" name="TextBox 16"/>
+          <p:cNvSpPr txBox="1"/>
+          <p:nvPr/>
+        </p:nvSpPr>
+        <p:spPr>
+          <a:xfrm>
+            <a:off x="6309360" y="3017520"/>
+            <a:ext cx="5303520" cy="365760"/>
+          </a:xfrm>
+          <a:prstGeom prst="rect">
+            <a:avLst/>
+          </a:prstGeom>
+          <a:noFill/>
+        </p:spPr>
+        <p:txBody>
+          <a:bodyPr wrap="square" lIns="0" rIns="0" tIns="0" bIns="0" anchor="t">
+            <a:spAutoFit/>
+          </a:bodyPr>
+          <a:lstStyle/>
+          <a:p>
+            <a:pPr algn="l"/>
+            <a:r>
+              <a:rPr sz="1500" b="1">
+                <a:solidFill>
+                  <a:srgbClr val="373E99"/>
+                </a:solidFill>
+                <a:latin typeface="Yu Gothic"/>
+              </a:rPr>
+              <a:t>💡 今日の学び</a:t>
+            </a:r>
+          </a:p>
+        </p:txBody>
+      </p:sp>
+      <p:sp>
+        <p:nvSpPr>
+          <p:cNvPr id="18" name="Rounded Rectangle 17"/>
           <p:cNvSpPr/>
           <p:nvPr/>
         </p:nvSpPr>
         <p:spPr>
           <a:xfrm>
-            <a:off x="6309360" y="4572000"/>
+            <a:off x="6309360" y="3566160"/>
             <a:ext cx="292608" cy="292608"/>
           </a:xfrm>
           <a:prstGeom prst="roundRect">
@@ -9293,19 +10239,18 @@
           <a:lstStyle/>
           <a:p>
             <a:pPr algn="ctr"/>
-            <a:endParaRPr/>
-          </a:p>
-        </p:txBody>
-      </p:sp>
-      <p:sp>
-        <p:nvSpPr>
-          <p:cNvPr id="25" name="TextBox 24"/>
-          <p:cNvSpPr txBox="1"/>
-          <p:nvPr/>
-        </p:nvSpPr>
-        <p:spPr>
-          <a:xfrm>
-            <a:off x="6309360" y="4572000"/>
+          </a:p>
+        </p:txBody>
+      </p:sp>
+      <p:sp>
+        <p:nvSpPr>
+          <p:cNvPr id="19" name="TextBox 18"/>
+          <p:cNvSpPr txBox="1"/>
+          <p:nvPr/>
+        </p:nvSpPr>
+        <p:spPr>
+          <a:xfrm>
+            <a:off x="6309360" y="3566160"/>
             <a:ext cx="292608" cy="292608"/>
           </a:xfrm>
           <a:prstGeom prst="rect">
@@ -9314,7 +10259,7 @@
           <a:noFill/>
         </p:spPr>
         <p:txBody>
-          <a:bodyPr wrap="square" lIns="0" tIns="0" rIns="0" bIns="0" anchor="ctr">
+          <a:bodyPr wrap="square" lIns="0" rIns="0" tIns="0" bIns="0" anchor="ctr">
             <a:spAutoFit/>
           </a:bodyPr>
           <a:lstStyle/>
@@ -9327,20 +10272,20 @@
                 </a:solidFill>
                 <a:latin typeface="Yu Gothic"/>
               </a:rPr>
-              <a:t>3</a:t>
-            </a:r>
-          </a:p>
-        </p:txBody>
-      </p:sp>
-      <p:sp>
-        <p:nvSpPr>
-          <p:cNvPr id="26" name="TextBox 25"/>
-          <p:cNvSpPr txBox="1"/>
-          <p:nvPr/>
-        </p:nvSpPr>
-        <p:spPr>
-          <a:xfrm>
-            <a:off x="6766560" y="4526280"/>
+              <a:t>1</a:t>
+            </a:r>
+          </a:p>
+        </p:txBody>
+      </p:sp>
+      <p:sp>
+        <p:nvSpPr>
+          <p:cNvPr id="20" name="TextBox 19"/>
+          <p:cNvSpPr txBox="1"/>
+          <p:nvPr/>
+        </p:nvSpPr>
+        <p:spPr>
+          <a:xfrm>
+            <a:off x="6766560" y="3520440"/>
             <a:ext cx="5029200" cy="411480"/>
           </a:xfrm>
           <a:prstGeom prst="rect">
@@ -9349,7 +10294,7 @@
           <a:noFill/>
         </p:spPr>
         <p:txBody>
-          <a:bodyPr wrap="square" lIns="0" tIns="0" rIns="0" bIns="0" anchor="ctr">
+          <a:bodyPr wrap="square" lIns="0" rIns="0" tIns="0" bIns="0" anchor="ctr">
             <a:spAutoFit/>
           </a:bodyPr>
           <a:lstStyle/>
@@ -9362,21 +10307,21 @@
                 </a:solidFill>
                 <a:latin typeface="Yu Gothic"/>
               </a:rPr>
-              <a:t>数字を見せると、人は動く</a:t>
-            </a:r>
-          </a:p>
-        </p:txBody>
-      </p:sp>
-      <p:sp>
-        <p:nvSpPr>
-          <p:cNvPr id="27" name="Rounded Rectangle 26"/>
+              <a:t>Copilotは"何を作るか"も提案してくれる</a:t>
+            </a:r>
+          </a:p>
+        </p:txBody>
+      </p:sp>
+      <p:sp>
+        <p:nvSpPr>
+          <p:cNvPr id="21" name="Rounded Rectangle 20"/>
           <p:cNvSpPr/>
           <p:nvPr/>
         </p:nvSpPr>
         <p:spPr>
           <a:xfrm>
-            <a:off x="457200" y="5029200"/>
-            <a:ext cx="11430000" cy="1280160"/>
+            <a:off x="6309360" y="4069080"/>
+            <a:ext cx="292608" cy="292608"/>
           </a:xfrm>
           <a:prstGeom prst="roundRect">
             <a:avLst>
@@ -9384,7 +10329,7 @@
             </a:avLst>
           </a:prstGeom>
           <a:solidFill>
-            <a:srgbClr val="464EB8"/>
+            <a:srgbClr val="0078D4"/>
           </a:solidFill>
           <a:ln>
             <a:noFill/>
@@ -9409,20 +10354,89 @@
           <a:lstStyle/>
           <a:p>
             <a:pPr algn="ctr"/>
-            <a:endParaRPr/>
-          </a:p>
-        </p:txBody>
-      </p:sp>
-      <p:sp>
-        <p:nvSpPr>
-          <p:cNvPr id="28" name="Rounded Rectangle 27"/>
+          </a:p>
+        </p:txBody>
+      </p:sp>
+      <p:sp>
+        <p:nvSpPr>
+          <p:cNvPr id="22" name="TextBox 21"/>
+          <p:cNvSpPr txBox="1"/>
+          <p:nvPr/>
+        </p:nvSpPr>
+        <p:spPr>
+          <a:xfrm>
+            <a:off x="6309360" y="4069080"/>
+            <a:ext cx="292608" cy="292608"/>
+          </a:xfrm>
+          <a:prstGeom prst="rect">
+            <a:avLst/>
+          </a:prstGeom>
+          <a:noFill/>
+        </p:spPr>
+        <p:txBody>
+          <a:bodyPr wrap="square" lIns="0" rIns="0" tIns="0" bIns="0" anchor="ctr">
+            <a:spAutoFit/>
+          </a:bodyPr>
+          <a:lstStyle/>
+          <a:p>
+            <a:pPr algn="ctr"/>
+            <a:r>
+              <a:rPr sz="1100" b="1">
+                <a:solidFill>
+                  <a:srgbClr val="FFFFFF"/>
+                </a:solidFill>
+                <a:latin typeface="Yu Gothic"/>
+              </a:rPr>
+              <a:t>2</a:t>
+            </a:r>
+          </a:p>
+        </p:txBody>
+      </p:sp>
+      <p:sp>
+        <p:nvSpPr>
+          <p:cNvPr id="23" name="TextBox 22"/>
+          <p:cNvSpPr txBox="1"/>
+          <p:nvPr/>
+        </p:nvSpPr>
+        <p:spPr>
+          <a:xfrm>
+            <a:off x="6766560" y="4023360"/>
+            <a:ext cx="5029200" cy="411480"/>
+          </a:xfrm>
+          <a:prstGeom prst="rect">
+            <a:avLst/>
+          </a:prstGeom>
+          <a:noFill/>
+        </p:spPr>
+        <p:txBody>
+          <a:bodyPr wrap="square" lIns="0" rIns="0" tIns="0" bIns="0" anchor="ctr">
+            <a:spAutoFit/>
+          </a:bodyPr>
+          <a:lstStyle/>
+          <a:p>
+            <a:pPr algn="l"/>
+            <a:r>
+              <a:rPr sz="1300" b="0">
+                <a:solidFill>
+                  <a:srgbClr val="323130"/>
+                </a:solidFill>
+                <a:latin typeface="Yu Gothic"/>
+              </a:rPr>
+              <a:t>式が読めなくても動く（理解は後で追いつく）</a:t>
+            </a:r>
+          </a:p>
+        </p:txBody>
+      </p:sp>
+      <p:sp>
+        <p:nvSpPr>
+          <p:cNvPr id="24" name="Rounded Rectangle 23"/>
           <p:cNvSpPr/>
           <p:nvPr/>
         </p:nvSpPr>
         <p:spPr>
           <a:xfrm>
-            <a:off x="457200" y="5029200"/>
-            <a:ext cx="137160" cy="1280160"/>
+            <a:off x="6309360" y="4572000"/>
+            <a:ext cx="292608" cy="292608"/>
           </a:xfrm>
           <a:prstGeom prst="roundRect">
             <a:avLst>
@@ -9430,7 +10444,7 @@
             </a:avLst>
           </a:prstGeom>
           <a:solidFill>
-            <a:srgbClr val="7460DB"/>
+            <a:srgbClr val="0078D4"/>
           </a:solidFill>
           <a:ln>
             <a:noFill/>
@@ -9455,225 +10469,1696 @@
           <a:lstStyle/>
           <a:p>
             <a:pPr algn="ctr"/>
-            <a:endParaRPr/>
-          </a:p>
-        </p:txBody>
-      </p:sp>
-      <p:sp>
-        <p:nvSpPr>
-          <p:cNvPr id="29" name="TextBox 28"/>
-          <p:cNvSpPr txBox="1"/>
-          <p:nvPr/>
-        </p:nvSpPr>
-        <p:spPr>
-          <a:xfrm>
-            <a:off x="868680" y="5166360"/>
-            <a:ext cx="10972800" cy="457200"/>
-          </a:xfrm>
-          <a:prstGeom prst="rect">
-            <a:avLst/>
-          </a:prstGeom>
-          <a:noFill/>
-        </p:spPr>
-        <p:txBody>
-          <a:bodyPr wrap="square" lIns="0" tIns="0" rIns="0" bIns="0" anchor="t">
+          </a:p>
+        </p:txBody>
+      </p:sp>
+      <p:sp>
+        <p:nvSpPr>
+          <p:cNvPr id="25" name="TextBox 24"/>
+          <p:cNvSpPr txBox="1"/>
+          <p:nvPr/>
+        </p:nvSpPr>
+        <p:spPr>
+          <a:xfrm>
+            <a:off x="6309360" y="4572000"/>
+            <a:ext cx="292608" cy="292608"/>
+          </a:xfrm>
+          <a:prstGeom prst="rect">
+            <a:avLst/>
+          </a:prstGeom>
+          <a:noFill/>
+        </p:spPr>
+        <p:txBody>
+          <a:bodyPr wrap="square" lIns="0" rIns="0" tIns="0" bIns="0" anchor="ctr">
             <a:spAutoFit/>
           </a:bodyPr>
           <a:lstStyle/>
           <a:p>
-            <a:pPr algn="l"/>
-            <a:r>
-              <a:rPr sz="1800" b="1">
-                <a:solidFill>
-                  <a:srgbClr val="FFB900"/>
-                </a:solidFill>
-                <a:latin typeface="Yu Gothic"/>
-              </a:rPr>
-              <a:t>🎁  Power Automate 45 (PA45)</a:t>
-            </a:r>
-          </a:p>
-        </p:txBody>
-      </p:sp>
-      <p:sp>
-        <p:nvSpPr>
-          <p:cNvPr id="30" name="TextBox 29"/>
-          <p:cNvSpPr txBox="1"/>
-          <p:nvPr/>
-        </p:nvSpPr>
-        <p:spPr>
-          <a:xfrm>
-            <a:off x="868680" y="5623560"/>
-            <a:ext cx="10972800" cy="365760"/>
-          </a:xfrm>
-          <a:prstGeom prst="rect">
-            <a:avLst/>
-          </a:prstGeom>
-          <a:noFill/>
-        </p:spPr>
-        <p:txBody>
-          <a:bodyPr wrap="square" lIns="0" tIns="0" rIns="0" bIns="0" anchor="t">
+            <a:pPr algn="ctr"/>
+            <a:r>
+              <a:rPr sz="1100" b="1">
+                <a:solidFill>
+                  <a:srgbClr val="FFFFFF"/>
+                </a:solidFill>
+                <a:latin typeface="Yu Gothic"/>
+              </a:rPr>
+              <a:t>3</a:t>
+            </a:r>
+          </a:p>
+        </p:txBody>
+      </p:sp>
+      <p:sp>
+        <p:nvSpPr>
+          <p:cNvPr id="26" name="TextBox 25"/>
+          <p:cNvSpPr txBox="1"/>
+          <p:nvPr/>
+        </p:nvSpPr>
+        <p:spPr>
+          <a:xfrm>
+            <a:off x="6766560" y="4526280"/>
+            <a:ext cx="5029200" cy="411480"/>
+          </a:xfrm>
+          <a:prstGeom prst="rect">
+            <a:avLst/>
+          </a:prstGeom>
+          <a:noFill/>
+        </p:spPr>
+        <p:txBody>
+          <a:bodyPr wrap="square" lIns="0" rIns="0" tIns="0" bIns="0" anchor="ctr">
             <a:spAutoFit/>
           </a:bodyPr>
           <a:lstStyle/>
           <a:p>
             <a:pPr algn="l"/>
             <a:r>
-              <a:rPr sz="1500" b="0">
-                <a:solidFill>
-                  <a:srgbClr val="FFFFFF"/>
-                </a:solidFill>
-                <a:latin typeface="Yu Gothic"/>
-              </a:rPr>
-              <a:t>毎週木曜 20:15〜  /  45分の "1粒ハンズオン"</a:t>
-            </a:r>
-          </a:p>
-        </p:txBody>
-      </p:sp>
-      <p:sp>
-        <p:nvSpPr>
-          <p:cNvPr id="31" name="TextBox 30"/>
-          <p:cNvSpPr txBox="1"/>
-          <p:nvPr/>
-        </p:nvSpPr>
-        <p:spPr>
-          <a:xfrm>
-            <a:off x="868680" y="5989320"/>
-            <a:ext cx="10972800" cy="320040"/>
-          </a:xfrm>
-          <a:prstGeom prst="rect">
-            <a:avLst/>
-          </a:prstGeom>
-          <a:noFill/>
-        </p:spPr>
-        <p:txBody>
-          <a:bodyPr wrap="square" lIns="0" tIns="0" rIns="0" bIns="0" anchor="t">
-            <a:spAutoFit/>
-          </a:bodyPr>
-          <a:lstStyle/>
-          <a:p>
-            <a:pPr algn="l"/>
-            <a:r>
-              <a:rPr sz="1200" b="0">
-                <a:solidFill>
-                  <a:srgbClr val="E8E9F7"/>
-                </a:solidFill>
-                <a:latin typeface="Yu Gothic"/>
-              </a:rPr>
-              <a:t>powerautomate-create.connpass.com</a:t>
-            </a:r>
-          </a:p>
-        </p:txBody>
-      </p:sp>
-      <p:sp>
-        <p:nvSpPr>
-          <p:cNvPr id="32" name="TextBox 31"/>
-          <p:cNvSpPr txBox="1"/>
-          <p:nvPr/>
-        </p:nvSpPr>
-        <p:spPr>
-          <a:xfrm>
-            <a:off x="365760" y="6446520"/>
-            <a:ext cx="6400800" cy="274320"/>
-          </a:xfrm>
-          <a:prstGeom prst="rect">
-            <a:avLst/>
-          </a:prstGeom>
-          <a:noFill/>
-        </p:spPr>
-        <p:txBody>
-          <a:bodyPr wrap="square" lIns="0" tIns="0" rIns="0" bIns="0" anchor="t">
-            <a:spAutoFit/>
-          </a:bodyPr>
-          <a:lstStyle/>
-          <a:p>
-            <a:pPr algn="l"/>
-            <a:r>
-              <a:rPr sz="1000" b="0">
-                <a:solidFill>
-                  <a:srgbClr val="605E5C"/>
-                </a:solidFill>
-                <a:latin typeface="Yu Gothic"/>
-              </a:rPr>
-              <a:t>Power Automate 45 (PA45)  ×  Copilot Community LT</a:t>
-            </a:r>
-          </a:p>
-        </p:txBody>
-      </p:sp>
-      <p:sp>
-        <p:nvSpPr>
-          <p:cNvPr id="33" name="TextBox 32"/>
-          <p:cNvSpPr txBox="1"/>
-          <p:nvPr/>
-        </p:nvSpPr>
-        <p:spPr>
-          <a:xfrm>
-            <a:off x="11277600" y="6446520"/>
-            <a:ext cx="548640" cy="274320"/>
-          </a:xfrm>
-          <a:prstGeom prst="rect">
-            <a:avLst/>
-          </a:prstGeom>
-          <a:noFill/>
-        </p:spPr>
-        <p:txBody>
-          <a:bodyPr wrap="square" lIns="0" tIns="0" rIns="0" bIns="0" anchor="t">
-            <a:spAutoFit/>
-          </a:bodyPr>
-          <a:lstStyle/>
-          <a:p>
-            <a:pPr algn="r"/>
-            <a:r>
-              <a:rPr sz="1000" b="0">
-                <a:solidFill>
-                  <a:srgbClr val="605E5C"/>
-                </a:solidFill>
-                <a:latin typeface="Yu Gothic"/>
-              </a:rPr>
-              <a:t>9 / 10</a:t>
-            </a:r>
-          </a:p>
-        </p:txBody>
-      </p:sp>
-      <p:pic>
-        <p:nvPicPr>
-          <p:cNvPr id="35" name="図 34" descr="PA45,&#10;&#10;AI 生成コンテンツは誤りを含む可能性があります。">
-            <a:extLst>
-              <a:ext uri="{FF2B5EF4-FFF2-40B4-BE49-F238E27FC236}">
-                <a16:creationId xmlns:a16="http://schemas.microsoft.com/office/drawing/2014/main" id="{B134EC95-E660-EC78-DEE9-EC24ACCDF754}"/>
-              </a:ext>
-            </a:extLst>
-          </p:cNvPr>
-          <p:cNvPicPr>
-            <a:picLocks noChangeAspect="1"/>
-          </p:cNvPicPr>
-          <p:nvPr/>
-        </p:nvPicPr>
-        <p:blipFill>
-          <a:blip r:embed="rId2"/>
-          <a:stretch>
-            <a:fillRect/>
-          </a:stretch>
-        </p:blipFill>
-        <p:spPr>
-          <a:xfrm>
-            <a:off x="1463040" y="1889760"/>
-            <a:ext cx="2957109" cy="2407931"/>
-          </a:xfrm>
-          <a:prstGeom prst="rect">
-            <a:avLst/>
-          </a:prstGeom>
+              <a:rPr sz="1300" b="0">
+                <a:solidFill>
+                  <a:srgbClr val="323130"/>
+                </a:solidFill>
+                <a:latin typeface="Yu Gothic"/>
+              </a:rPr>
+              <a:t>数字を見せると、人は動く</a:t>
+            </a:r>
+          </a:p>
+        </p:txBody>
+      </p:sp>
+      <p:sp>
+        <p:nvSpPr>
+          <p:cNvPr id="27" name="Rounded Rectangle 26"/>
+          <p:cNvSpPr/>
+          <p:nvPr/>
+        </p:nvSpPr>
+        <p:spPr>
+          <a:xfrm>
+            <a:off x="457200" y="5029200"/>
+            <a:ext cx="11430000" cy="1280160"/>
+          </a:xfrm>
+          <a:prstGeom prst="roundRect">
+            <a:avLst>
+              <a:gd name="adj" fmla="val 10000"/>
+            </a:avLst>
+          </a:prstGeom>
+          <a:solidFill>
+            <a:srgbClr val="464EB8"/>
+          </a:solidFill>
           <a:ln>
             <a:noFill/>
           </a:ln>
-          <a:effectLst>
-            <a:outerShdw blurRad="190500" algn="tl" rotWithShape="0">
-              <a:srgbClr val="000000">
-                <a:alpha val="70000"/>
-              </a:srgbClr>
-            </a:outerShdw>
-          </a:effectLst>
-        </p:spPr>
-      </p:pic>
+        </p:spPr>
+        <p:style>
+          <a:lnRef idx="1">
+            <a:schemeClr val="accent1"/>
+          </a:lnRef>
+          <a:fillRef idx="3">
+            <a:schemeClr val="accent1"/>
+          </a:fillRef>
+          <a:effectRef idx="2">
+            <a:schemeClr val="accent1"/>
+          </a:effectRef>
+          <a:fontRef idx="minor">
+            <a:schemeClr val="lt1"/>
+          </a:fontRef>
+        </p:style>
+        <p:txBody>
+          <a:bodyPr rtlCol="0" anchor="ctr"/>
+          <a:lstStyle/>
+          <a:p>
+            <a:pPr algn="ctr"/>
+          </a:p>
+        </p:txBody>
+      </p:sp>
+      <p:sp>
+        <p:nvSpPr>
+          <p:cNvPr id="28" name="Rounded Rectangle 27"/>
+          <p:cNvSpPr/>
+          <p:nvPr/>
+        </p:nvSpPr>
+        <p:spPr>
+          <a:xfrm>
+            <a:off x="457200" y="5029200"/>
+            <a:ext cx="137160" cy="1280160"/>
+          </a:xfrm>
+          <a:prstGeom prst="roundRect">
+            <a:avLst>
+              <a:gd name="adj" fmla="val 10000"/>
+            </a:avLst>
+          </a:prstGeom>
+          <a:solidFill>
+            <a:srgbClr val="7460DB"/>
+          </a:solidFill>
+          <a:ln>
+            <a:noFill/>
+          </a:ln>
+        </p:spPr>
+        <p:style>
+          <a:lnRef idx="1">
+            <a:schemeClr val="accent1"/>
+          </a:lnRef>
+          <a:fillRef idx="3">
+            <a:schemeClr val="accent1"/>
+          </a:fillRef>
+          <a:effectRef idx="2">
+            <a:schemeClr val="accent1"/>
+          </a:effectRef>
+          <a:fontRef idx="minor">
+            <a:schemeClr val="lt1"/>
+          </a:fontRef>
+        </p:style>
+        <p:txBody>
+          <a:bodyPr rtlCol="0" anchor="ctr"/>
+          <a:lstStyle/>
+          <a:p>
+            <a:pPr algn="ctr"/>
+          </a:p>
+        </p:txBody>
+      </p:sp>
+      <p:sp>
+        <p:nvSpPr>
+          <p:cNvPr id="29" name="TextBox 28"/>
+          <p:cNvSpPr txBox="1"/>
+          <p:nvPr/>
+        </p:nvSpPr>
+        <p:spPr>
+          <a:xfrm>
+            <a:off x="868680" y="5166360"/>
+            <a:ext cx="10972800" cy="457200"/>
+          </a:xfrm>
+          <a:prstGeom prst="rect">
+            <a:avLst/>
+          </a:prstGeom>
+          <a:noFill/>
+        </p:spPr>
+        <p:txBody>
+          <a:bodyPr wrap="square" lIns="0" rIns="0" tIns="0" bIns="0" anchor="t">
+            <a:spAutoFit/>
+          </a:bodyPr>
+          <a:lstStyle/>
+          <a:p>
+            <a:pPr algn="l"/>
+            <a:r>
+              <a:rPr sz="1800" b="1">
+                <a:solidFill>
+                  <a:srgbClr val="FFB900"/>
+                </a:solidFill>
+                <a:latin typeface="Yu Gothic"/>
+              </a:rPr>
+              <a:t>🎁  Power Automate 45 (PA45)</a:t>
+            </a:r>
+          </a:p>
+        </p:txBody>
+      </p:sp>
+      <p:sp>
+        <p:nvSpPr>
+          <p:cNvPr id="30" name="TextBox 29"/>
+          <p:cNvSpPr txBox="1"/>
+          <p:nvPr/>
+        </p:nvSpPr>
+        <p:spPr>
+          <a:xfrm>
+            <a:off x="868680" y="5623560"/>
+            <a:ext cx="10972800" cy="365760"/>
+          </a:xfrm>
+          <a:prstGeom prst="rect">
+            <a:avLst/>
+          </a:prstGeom>
+          <a:noFill/>
+        </p:spPr>
+        <p:txBody>
+          <a:bodyPr wrap="square" lIns="0" rIns="0" tIns="0" bIns="0" anchor="t">
+            <a:spAutoFit/>
+          </a:bodyPr>
+          <a:lstStyle/>
+          <a:p>
+            <a:pPr algn="l"/>
+            <a:r>
+              <a:rPr sz="1500" b="0">
+                <a:solidFill>
+                  <a:srgbClr val="FFFFFF"/>
+                </a:solidFill>
+                <a:latin typeface="Yu Gothic"/>
+              </a:rPr>
+              <a:t>毎週木曜 20:15〜  /  45分の "1粒ハンズオン"</a:t>
+            </a:r>
+          </a:p>
+        </p:txBody>
+      </p:sp>
+      <p:sp>
+        <p:nvSpPr>
+          <p:cNvPr id="31" name="TextBox 30"/>
+          <p:cNvSpPr txBox="1"/>
+          <p:nvPr/>
+        </p:nvSpPr>
+        <p:spPr>
+          <a:xfrm>
+            <a:off x="868680" y="5989320"/>
+            <a:ext cx="10972800" cy="320040"/>
+          </a:xfrm>
+          <a:prstGeom prst="rect">
+            <a:avLst/>
+          </a:prstGeom>
+          <a:noFill/>
+        </p:spPr>
+        <p:txBody>
+          <a:bodyPr wrap="square" lIns="0" rIns="0" tIns="0" bIns="0" anchor="t">
+            <a:spAutoFit/>
+          </a:bodyPr>
+          <a:lstStyle/>
+          <a:p>
+            <a:pPr algn="l"/>
+            <a:r>
+              <a:rPr sz="1200" b="0">
+                <a:solidFill>
+                  <a:srgbClr val="E8E9F7"/>
+                </a:solidFill>
+                <a:latin typeface="Yu Gothic"/>
+              </a:rPr>
+              <a:t>powerautomate-create.connpass.com</a:t>
+            </a:r>
+          </a:p>
+        </p:txBody>
+      </p:sp>
+      <p:sp>
+        <p:nvSpPr>
+          <p:cNvPr id="32" name="TextBox 31"/>
+          <p:cNvSpPr txBox="1"/>
+          <p:nvPr/>
+        </p:nvSpPr>
+        <p:spPr>
+          <a:xfrm>
+            <a:off x="365760" y="6446520"/>
+            <a:ext cx="6400800" cy="274320"/>
+          </a:xfrm>
+          <a:prstGeom prst="rect">
+            <a:avLst/>
+          </a:prstGeom>
+          <a:noFill/>
+        </p:spPr>
+        <p:txBody>
+          <a:bodyPr wrap="square" lIns="0" rIns="0" tIns="0" bIns="0" anchor="t">
+            <a:spAutoFit/>
+          </a:bodyPr>
+          <a:lstStyle/>
+          <a:p>
+            <a:pPr algn="l"/>
+            <a:r>
+              <a:rPr sz="1000" b="0">
+                <a:solidFill>
+                  <a:srgbClr val="605E5C"/>
+                </a:solidFill>
+                <a:latin typeface="Yu Gothic"/>
+              </a:rPr>
+              <a:t>Power Automate 45 (PA45)  ×  Copilot Community LT</a:t>
+            </a:r>
+          </a:p>
+        </p:txBody>
+      </p:sp>
+      <p:sp>
+        <p:nvSpPr>
+          <p:cNvPr id="33" name="TextBox 32"/>
+          <p:cNvSpPr txBox="1"/>
+          <p:nvPr/>
+        </p:nvSpPr>
+        <p:spPr>
+          <a:xfrm>
+            <a:off x="11277600" y="6446520"/>
+            <a:ext cx="548640" cy="274320"/>
+          </a:xfrm>
+          <a:prstGeom prst="rect">
+            <a:avLst/>
+          </a:prstGeom>
+          <a:noFill/>
+        </p:spPr>
+        <p:txBody>
+          <a:bodyPr wrap="square" lIns="0" rIns="0" tIns="0" bIns="0" anchor="t">
+            <a:spAutoFit/>
+          </a:bodyPr>
+          <a:lstStyle/>
+          <a:p>
+            <a:pPr algn="r"/>
+            <a:r>
+              <a:rPr sz="1000" b="0">
+                <a:solidFill>
+                  <a:srgbClr val="605E5C"/>
+                </a:solidFill>
+                <a:latin typeface="Yu Gothic"/>
+              </a:rPr>
+              <a:t>8 / 10</a:t>
+            </a:r>
+          </a:p>
+        </p:txBody>
+      </p:sp>
+    </p:spTree>
+  </p:cSld>
+  <p:clrMapOvr>
+    <a:masterClrMapping/>
+  </p:clrMapOvr>
+</p:sld>
+</file>
+
+<file path=ppt/slides/slide9.xml><?xml version="1.0" encoding="utf-8"?>
+<p:sld xmlns:a="http://schemas.openxmlformats.org/drawingml/2006/main" xmlns:p="http://schemas.openxmlformats.org/presentationml/2006/main" xmlns:r="http://schemas.openxmlformats.org/officeDocument/2006/relationships">
+  <p:cSld>
+    <p:spTree>
+      <p:nvGrpSpPr>
+        <p:cNvPr id="1" name=""/>
+        <p:cNvGrpSpPr/>
+        <p:nvPr/>
+      </p:nvGrpSpPr>
+      <p:grpSpPr/>
+      <p:sp>
+        <p:nvSpPr>
+          <p:cNvPr id="2" name="Rounded Rectangle 1"/>
+          <p:cNvSpPr/>
+          <p:nvPr/>
+        </p:nvSpPr>
+        <p:spPr>
+          <a:xfrm>
+            <a:off x="0" y="0"/>
+            <a:ext cx="12192000" cy="6858000"/>
+          </a:xfrm>
+          <a:prstGeom prst="roundRect">
+            <a:avLst>
+              <a:gd name="adj" fmla="val 10000"/>
+            </a:avLst>
+          </a:prstGeom>
+          <a:solidFill>
+            <a:srgbClr val="FFFFFF"/>
+          </a:solidFill>
+          <a:ln>
+            <a:noFill/>
+          </a:ln>
+        </p:spPr>
+        <p:style>
+          <a:lnRef idx="1">
+            <a:schemeClr val="accent1"/>
+          </a:lnRef>
+          <a:fillRef idx="3">
+            <a:schemeClr val="accent1"/>
+          </a:fillRef>
+          <a:effectRef idx="2">
+            <a:schemeClr val="accent1"/>
+          </a:effectRef>
+          <a:fontRef idx="minor">
+            <a:schemeClr val="lt1"/>
+          </a:fontRef>
+        </p:style>
+        <p:txBody>
+          <a:bodyPr rtlCol="0" anchor="ctr"/>
+          <a:lstStyle/>
+          <a:p>
+            <a:pPr algn="ctr"/>
+          </a:p>
+        </p:txBody>
+      </p:sp>
+      <p:sp>
+        <p:nvSpPr>
+          <p:cNvPr id="3" name="Rounded Rectangle 2"/>
+          <p:cNvSpPr/>
+          <p:nvPr/>
+        </p:nvSpPr>
+        <p:spPr>
+          <a:xfrm>
+            <a:off x="457200" y="411480"/>
+            <a:ext cx="822960" cy="502920"/>
+          </a:xfrm>
+          <a:prstGeom prst="roundRect">
+            <a:avLst>
+              <a:gd name="adj" fmla="val 10000"/>
+            </a:avLst>
+          </a:prstGeom>
+          <a:solidFill>
+            <a:srgbClr val="464EB8"/>
+          </a:solidFill>
+          <a:ln>
+            <a:noFill/>
+          </a:ln>
+        </p:spPr>
+        <p:style>
+          <a:lnRef idx="1">
+            <a:schemeClr val="accent1"/>
+          </a:lnRef>
+          <a:fillRef idx="3">
+            <a:schemeClr val="accent1"/>
+          </a:fillRef>
+          <a:effectRef idx="2">
+            <a:schemeClr val="accent1"/>
+          </a:effectRef>
+          <a:fontRef idx="minor">
+            <a:schemeClr val="lt1"/>
+          </a:fontRef>
+        </p:style>
+        <p:txBody>
+          <a:bodyPr rtlCol="0" anchor="ctr"/>
+          <a:lstStyle/>
+          <a:p>
+            <a:pPr algn="ctr"/>
+          </a:p>
+        </p:txBody>
+      </p:sp>
+      <p:sp>
+        <p:nvSpPr>
+          <p:cNvPr id="4" name="TextBox 3"/>
+          <p:cNvSpPr txBox="1"/>
+          <p:nvPr/>
+        </p:nvSpPr>
+        <p:spPr>
+          <a:xfrm>
+            <a:off x="457200" y="411480"/>
+            <a:ext cx="822960" cy="502920"/>
+          </a:xfrm>
+          <a:prstGeom prst="rect">
+            <a:avLst/>
+          </a:prstGeom>
+          <a:noFill/>
+        </p:spPr>
+        <p:txBody>
+          <a:bodyPr wrap="square" lIns="0" rIns="0" tIns="0" bIns="0" anchor="ctr">
+            <a:spAutoFit/>
+          </a:bodyPr>
+          <a:lstStyle/>
+          <a:p>
+            <a:pPr algn="ctr"/>
+            <a:r>
+              <a:rPr sz="1800" b="1">
+                <a:solidFill>
+                  <a:srgbClr val="FFFFFF"/>
+                </a:solidFill>
+                <a:latin typeface="Yu Gothic"/>
+              </a:rPr>
+              <a:t>07</a:t>
+            </a:r>
+          </a:p>
+        </p:txBody>
+      </p:sp>
+      <p:sp>
+        <p:nvSpPr>
+          <p:cNvPr id="5" name="TextBox 4"/>
+          <p:cNvSpPr txBox="1"/>
+          <p:nvPr/>
+        </p:nvSpPr>
+        <p:spPr>
+          <a:xfrm>
+            <a:off x="1463040" y="411480"/>
+            <a:ext cx="10058400" cy="502920"/>
+          </a:xfrm>
+          <a:prstGeom prst="rect">
+            <a:avLst/>
+          </a:prstGeom>
+          <a:noFill/>
+        </p:spPr>
+        <p:txBody>
+          <a:bodyPr wrap="square" lIns="0" rIns="0" tIns="0" bIns="0" anchor="ctr">
+            <a:spAutoFit/>
+          </a:bodyPr>
+          <a:lstStyle/>
+          <a:p>
+            <a:pPr algn="l"/>
+            <a:r>
+              <a:rPr sz="2200" b="1">
+                <a:solidFill>
+                  <a:srgbClr val="323130"/>
+                </a:solidFill>
+                <a:latin typeface="Yu Gothic"/>
+              </a:rPr>
+              <a:t>自分が考える × Copilotが手伝う</a:t>
+            </a:r>
+          </a:p>
+        </p:txBody>
+      </p:sp>
+      <p:sp>
+        <p:nvSpPr>
+          <p:cNvPr id="6" name="Rounded Rectangle 5"/>
+          <p:cNvSpPr/>
+          <p:nvPr/>
+        </p:nvSpPr>
+        <p:spPr>
+          <a:xfrm>
+            <a:off x="457200" y="1005840"/>
+            <a:ext cx="1828800" cy="36576"/>
+          </a:xfrm>
+          <a:prstGeom prst="roundRect">
+            <a:avLst>
+              <a:gd name="adj" fmla="val 10000"/>
+            </a:avLst>
+          </a:prstGeom>
+          <a:solidFill>
+            <a:srgbClr val="0078D4"/>
+          </a:solidFill>
+          <a:ln>
+            <a:noFill/>
+          </a:ln>
+        </p:spPr>
+        <p:style>
+          <a:lnRef idx="1">
+            <a:schemeClr val="accent1"/>
+          </a:lnRef>
+          <a:fillRef idx="3">
+            <a:schemeClr val="accent1"/>
+          </a:fillRef>
+          <a:effectRef idx="2">
+            <a:schemeClr val="accent1"/>
+          </a:effectRef>
+          <a:fontRef idx="minor">
+            <a:schemeClr val="lt1"/>
+          </a:fontRef>
+        </p:style>
+        <p:txBody>
+          <a:bodyPr rtlCol="0" anchor="ctr"/>
+          <a:lstStyle/>
+          <a:p>
+            <a:pPr algn="ctr"/>
+          </a:p>
+        </p:txBody>
+      </p:sp>
+      <p:sp>
+        <p:nvSpPr>
+          <p:cNvPr id="7" name="TextBox 6"/>
+          <p:cNvSpPr txBox="1"/>
+          <p:nvPr/>
+        </p:nvSpPr>
+        <p:spPr>
+          <a:xfrm>
+            <a:off x="457200" y="1325880"/>
+            <a:ext cx="11430000" cy="457200"/>
+          </a:xfrm>
+          <a:prstGeom prst="rect">
+            <a:avLst/>
+          </a:prstGeom>
+          <a:noFill/>
+        </p:spPr>
+        <p:txBody>
+          <a:bodyPr wrap="square" lIns="0" rIns="0" tIns="0" bIns="0" anchor="t">
+            <a:spAutoFit/>
+          </a:bodyPr>
+          <a:lstStyle/>
+          <a:p>
+            <a:pPr algn="l"/>
+            <a:r>
+              <a:rPr sz="1500" b="1">
+                <a:solidFill>
+                  <a:srgbClr val="605E5C"/>
+                </a:solidFill>
+                <a:latin typeface="Yu Gothic"/>
+              </a:rPr>
+              <a:t>全部を自分で作る必要はない。でも、全部をCopilotに任せることもできない。</a:t>
+            </a:r>
+          </a:p>
+        </p:txBody>
+      </p:sp>
+      <p:sp>
+        <p:nvSpPr>
+          <p:cNvPr id="8" name="Rounded Rectangle 7"/>
+          <p:cNvSpPr/>
+          <p:nvPr/>
+        </p:nvSpPr>
+        <p:spPr>
+          <a:xfrm>
+            <a:off x="457200" y="1920240"/>
+            <a:ext cx="5577840" cy="3657600"/>
+          </a:xfrm>
+          <a:prstGeom prst="roundRect">
+            <a:avLst>
+              <a:gd name="adj" fmla="val 8000"/>
+            </a:avLst>
+          </a:prstGeom>
+          <a:solidFill>
+            <a:srgbClr val="FFFFFF"/>
+          </a:solidFill>
+          <a:ln w="9525">
+            <a:solidFill>
+              <a:srgbClr val="C8C6C4"/>
+            </a:solidFill>
+          </a:ln>
+        </p:spPr>
+        <p:style>
+          <a:lnRef idx="1">
+            <a:schemeClr val="accent1"/>
+          </a:lnRef>
+          <a:fillRef idx="3">
+            <a:schemeClr val="accent1"/>
+          </a:fillRef>
+          <a:effectRef idx="2">
+            <a:schemeClr val="accent1"/>
+          </a:effectRef>
+          <a:fontRef idx="minor">
+            <a:schemeClr val="lt1"/>
+          </a:fontRef>
+        </p:style>
+        <p:txBody>
+          <a:bodyPr rtlCol="0" anchor="ctr"/>
+          <a:lstStyle/>
+          <a:p>
+            <a:pPr algn="ctr"/>
+          </a:p>
+        </p:txBody>
+      </p:sp>
+      <p:sp>
+        <p:nvSpPr>
+          <p:cNvPr id="9" name="Rounded Rectangle 8"/>
+          <p:cNvSpPr/>
+          <p:nvPr/>
+        </p:nvSpPr>
+        <p:spPr>
+          <a:xfrm>
+            <a:off x="457200" y="1920240"/>
+            <a:ext cx="5577840" cy="548640"/>
+          </a:xfrm>
+          <a:prstGeom prst="roundRect">
+            <a:avLst>
+              <a:gd name="adj" fmla="val 10000"/>
+            </a:avLst>
+          </a:prstGeom>
+          <a:solidFill>
+            <a:srgbClr val="464EB8"/>
+          </a:solidFill>
+          <a:ln>
+            <a:noFill/>
+          </a:ln>
+        </p:spPr>
+        <p:style>
+          <a:lnRef idx="1">
+            <a:schemeClr val="accent1"/>
+          </a:lnRef>
+          <a:fillRef idx="3">
+            <a:schemeClr val="accent1"/>
+          </a:fillRef>
+          <a:effectRef idx="2">
+            <a:schemeClr val="accent1"/>
+          </a:effectRef>
+          <a:fontRef idx="minor">
+            <a:schemeClr val="lt1"/>
+          </a:fontRef>
+        </p:style>
+        <p:txBody>
+          <a:bodyPr rtlCol="0" anchor="ctr"/>
+          <a:lstStyle/>
+          <a:p>
+            <a:pPr algn="ctr"/>
+          </a:p>
+        </p:txBody>
+      </p:sp>
+      <p:sp>
+        <p:nvSpPr>
+          <p:cNvPr id="10" name="TextBox 9"/>
+          <p:cNvSpPr txBox="1"/>
+          <p:nvPr/>
+        </p:nvSpPr>
+        <p:spPr>
+          <a:xfrm>
+            <a:off x="685800" y="1920240"/>
+            <a:ext cx="5120640" cy="548640"/>
+          </a:xfrm>
+          <a:prstGeom prst="rect">
+            <a:avLst/>
+          </a:prstGeom>
+          <a:noFill/>
+        </p:spPr>
+        <p:txBody>
+          <a:bodyPr wrap="square" lIns="0" rIns="0" tIns="0" bIns="0" anchor="ctr">
+            <a:spAutoFit/>
+          </a:bodyPr>
+          <a:lstStyle/>
+          <a:p>
+            <a:pPr algn="l"/>
+            <a:r>
+              <a:rPr sz="1500" b="1">
+                <a:solidFill>
+                  <a:srgbClr val="FFFFFF"/>
+                </a:solidFill>
+                <a:latin typeface="Yu Gothic"/>
+              </a:rPr>
+              <a:t>🧠  自分にしかできないこと</a:t>
+            </a:r>
+          </a:p>
+        </p:txBody>
+      </p:sp>
+      <p:sp>
+        <p:nvSpPr>
+          <p:cNvPr id="11" name="Rounded Rectangle 10"/>
+          <p:cNvSpPr/>
+          <p:nvPr/>
+        </p:nvSpPr>
+        <p:spPr>
+          <a:xfrm>
+            <a:off x="685800" y="2697480"/>
+            <a:ext cx="54864" cy="777240"/>
+          </a:xfrm>
+          <a:prstGeom prst="roundRect">
+            <a:avLst>
+              <a:gd name="adj" fmla="val 10000"/>
+            </a:avLst>
+          </a:prstGeom>
+          <a:solidFill>
+            <a:srgbClr val="464EB8"/>
+          </a:solidFill>
+          <a:ln>
+            <a:noFill/>
+          </a:ln>
+        </p:spPr>
+        <p:style>
+          <a:lnRef idx="1">
+            <a:schemeClr val="accent1"/>
+          </a:lnRef>
+          <a:fillRef idx="3">
+            <a:schemeClr val="accent1"/>
+          </a:fillRef>
+          <a:effectRef idx="2">
+            <a:schemeClr val="accent1"/>
+          </a:effectRef>
+          <a:fontRef idx="minor">
+            <a:schemeClr val="lt1"/>
+          </a:fontRef>
+        </p:style>
+        <p:txBody>
+          <a:bodyPr rtlCol="0" anchor="ctr"/>
+          <a:lstStyle/>
+          <a:p>
+            <a:pPr algn="ctr"/>
+          </a:p>
+        </p:txBody>
+      </p:sp>
+      <p:sp>
+        <p:nvSpPr>
+          <p:cNvPr id="12" name="TextBox 11"/>
+          <p:cNvSpPr txBox="1"/>
+          <p:nvPr/>
+        </p:nvSpPr>
+        <p:spPr>
+          <a:xfrm>
+            <a:off x="868680" y="2697480"/>
+            <a:ext cx="4937760" cy="365760"/>
+          </a:xfrm>
+          <a:prstGeom prst="rect">
+            <a:avLst/>
+          </a:prstGeom>
+          <a:noFill/>
+        </p:spPr>
+        <p:txBody>
+          <a:bodyPr wrap="square" lIns="0" rIns="0" tIns="0" bIns="0" anchor="t">
+            <a:spAutoFit/>
+          </a:bodyPr>
+          <a:lstStyle/>
+          <a:p>
+            <a:pPr algn="l"/>
+            <a:r>
+              <a:rPr sz="1400" b="1">
+                <a:solidFill>
+                  <a:srgbClr val="323130"/>
+                </a:solidFill>
+                <a:latin typeface="Yu Gothic"/>
+              </a:rPr>
+              <a:t>現場の困りごとに気づくこと</a:t>
+            </a:r>
+          </a:p>
+        </p:txBody>
+      </p:sp>
+      <p:sp>
+        <p:nvSpPr>
+          <p:cNvPr id="13" name="TextBox 12"/>
+          <p:cNvSpPr txBox="1"/>
+          <p:nvPr/>
+        </p:nvSpPr>
+        <p:spPr>
+          <a:xfrm>
+            <a:off x="868680" y="3063240"/>
+            <a:ext cx="4937760" cy="457200"/>
+          </a:xfrm>
+          <a:prstGeom prst="rect">
+            <a:avLst/>
+          </a:prstGeom>
+          <a:noFill/>
+        </p:spPr>
+        <p:txBody>
+          <a:bodyPr wrap="square" lIns="0" rIns="0" tIns="0" bIns="0" anchor="t">
+            <a:spAutoFit/>
+          </a:bodyPr>
+          <a:lstStyle/>
+          <a:p>
+            <a:pPr algn="l"/>
+            <a:r>
+              <a:rPr sz="1100" b="0">
+                <a:solidFill>
+                  <a:srgbClr val="605E5C"/>
+                </a:solidFill>
+                <a:latin typeface="Yu Gothic"/>
+              </a:rPr>
+              <a:t>「会議多すぎ問題」を肌で感じるのは現場の自分だけ</a:t>
+            </a:r>
+          </a:p>
+        </p:txBody>
+      </p:sp>
+      <p:sp>
+        <p:nvSpPr>
+          <p:cNvPr id="14" name="Rounded Rectangle 13"/>
+          <p:cNvSpPr/>
+          <p:nvPr/>
+        </p:nvSpPr>
+        <p:spPr>
+          <a:xfrm>
+            <a:off x="685800" y="3657600"/>
+            <a:ext cx="54864" cy="777240"/>
+          </a:xfrm>
+          <a:prstGeom prst="roundRect">
+            <a:avLst>
+              <a:gd name="adj" fmla="val 10000"/>
+            </a:avLst>
+          </a:prstGeom>
+          <a:solidFill>
+            <a:srgbClr val="464EB8"/>
+          </a:solidFill>
+          <a:ln>
+            <a:noFill/>
+          </a:ln>
+        </p:spPr>
+        <p:style>
+          <a:lnRef idx="1">
+            <a:schemeClr val="accent1"/>
+          </a:lnRef>
+          <a:fillRef idx="3">
+            <a:schemeClr val="accent1"/>
+          </a:fillRef>
+          <a:effectRef idx="2">
+            <a:schemeClr val="accent1"/>
+          </a:effectRef>
+          <a:fontRef idx="minor">
+            <a:schemeClr val="lt1"/>
+          </a:fontRef>
+        </p:style>
+        <p:txBody>
+          <a:bodyPr rtlCol="0" anchor="ctr"/>
+          <a:lstStyle/>
+          <a:p>
+            <a:pPr algn="ctr"/>
+          </a:p>
+        </p:txBody>
+      </p:sp>
+      <p:sp>
+        <p:nvSpPr>
+          <p:cNvPr id="15" name="TextBox 14"/>
+          <p:cNvSpPr txBox="1"/>
+          <p:nvPr/>
+        </p:nvSpPr>
+        <p:spPr>
+          <a:xfrm>
+            <a:off x="868680" y="3657600"/>
+            <a:ext cx="4937760" cy="365760"/>
+          </a:xfrm>
+          <a:prstGeom prst="rect">
+            <a:avLst/>
+          </a:prstGeom>
+          <a:noFill/>
+        </p:spPr>
+        <p:txBody>
+          <a:bodyPr wrap="square" lIns="0" rIns="0" tIns="0" bIns="0" anchor="t">
+            <a:spAutoFit/>
+          </a:bodyPr>
+          <a:lstStyle/>
+          <a:p>
+            <a:pPr algn="l"/>
+            <a:r>
+              <a:rPr sz="1400" b="1">
+                <a:solidFill>
+                  <a:srgbClr val="323130"/>
+                </a:solidFill>
+                <a:latin typeface="Yu Gothic"/>
+              </a:rPr>
+              <a:t>"こういうの欲しい" のアイデア</a:t>
+            </a:r>
+          </a:p>
+        </p:txBody>
+      </p:sp>
+      <p:sp>
+        <p:nvSpPr>
+          <p:cNvPr id="16" name="TextBox 15"/>
+          <p:cNvSpPr txBox="1"/>
+          <p:nvPr/>
+        </p:nvSpPr>
+        <p:spPr>
+          <a:xfrm>
+            <a:off x="868680" y="4023360"/>
+            <a:ext cx="4937760" cy="457200"/>
+          </a:xfrm>
+          <a:prstGeom prst="rect">
+            <a:avLst/>
+          </a:prstGeom>
+          <a:noFill/>
+        </p:spPr>
+        <p:txBody>
+          <a:bodyPr wrap="square" lIns="0" rIns="0" tIns="0" bIns="0" anchor="t">
+            <a:spAutoFit/>
+          </a:bodyPr>
+          <a:lstStyle/>
+          <a:p>
+            <a:pPr algn="l"/>
+            <a:r>
+              <a:rPr sz="1100" b="0">
+                <a:solidFill>
+                  <a:srgbClr val="605E5C"/>
+                </a:solidFill>
+                <a:latin typeface="Yu Gothic"/>
+              </a:rPr>
+              <a:t>数字で見せたい・呼ぶ前にひと呼吸 という発想は人間側</a:t>
+            </a:r>
+          </a:p>
+        </p:txBody>
+      </p:sp>
+      <p:sp>
+        <p:nvSpPr>
+          <p:cNvPr id="17" name="Rounded Rectangle 16"/>
+          <p:cNvSpPr/>
+          <p:nvPr/>
+        </p:nvSpPr>
+        <p:spPr>
+          <a:xfrm>
+            <a:off x="685800" y="4617720"/>
+            <a:ext cx="54864" cy="777240"/>
+          </a:xfrm>
+          <a:prstGeom prst="roundRect">
+            <a:avLst>
+              <a:gd name="adj" fmla="val 10000"/>
+            </a:avLst>
+          </a:prstGeom>
+          <a:solidFill>
+            <a:srgbClr val="464EB8"/>
+          </a:solidFill>
+          <a:ln>
+            <a:noFill/>
+          </a:ln>
+        </p:spPr>
+        <p:style>
+          <a:lnRef idx="1">
+            <a:schemeClr val="accent1"/>
+          </a:lnRef>
+          <a:fillRef idx="3">
+            <a:schemeClr val="accent1"/>
+          </a:fillRef>
+          <a:effectRef idx="2">
+            <a:schemeClr val="accent1"/>
+          </a:effectRef>
+          <a:fontRef idx="minor">
+            <a:schemeClr val="lt1"/>
+          </a:fontRef>
+        </p:style>
+        <p:txBody>
+          <a:bodyPr rtlCol="0" anchor="ctr"/>
+          <a:lstStyle/>
+          <a:p>
+            <a:pPr algn="ctr"/>
+          </a:p>
+        </p:txBody>
+      </p:sp>
+      <p:sp>
+        <p:nvSpPr>
+          <p:cNvPr id="18" name="TextBox 17"/>
+          <p:cNvSpPr txBox="1"/>
+          <p:nvPr/>
+        </p:nvSpPr>
+        <p:spPr>
+          <a:xfrm>
+            <a:off x="868680" y="4617720"/>
+            <a:ext cx="4937760" cy="365760"/>
+          </a:xfrm>
+          <a:prstGeom prst="rect">
+            <a:avLst/>
+          </a:prstGeom>
+          <a:noFill/>
+        </p:spPr>
+        <p:txBody>
+          <a:bodyPr wrap="square" lIns="0" rIns="0" tIns="0" bIns="0" anchor="t">
+            <a:spAutoFit/>
+          </a:bodyPr>
+          <a:lstStyle/>
+          <a:p>
+            <a:pPr algn="l"/>
+            <a:r>
+              <a:rPr sz="1400" b="1">
+                <a:solidFill>
+                  <a:srgbClr val="323130"/>
+                </a:solidFill>
+                <a:latin typeface="Yu Gothic"/>
+              </a:rPr>
+              <a:t>各職場にミートした業務改善</a:t>
+            </a:r>
+          </a:p>
+        </p:txBody>
+      </p:sp>
+      <p:sp>
+        <p:nvSpPr>
+          <p:cNvPr id="19" name="TextBox 18"/>
+          <p:cNvSpPr txBox="1"/>
+          <p:nvPr/>
+        </p:nvSpPr>
+        <p:spPr>
+          <a:xfrm>
+            <a:off x="868680" y="4983480"/>
+            <a:ext cx="4937760" cy="457200"/>
+          </a:xfrm>
+          <a:prstGeom prst="rect">
+            <a:avLst/>
+          </a:prstGeom>
+          <a:noFill/>
+        </p:spPr>
+        <p:txBody>
+          <a:bodyPr wrap="square" lIns="0" rIns="0" tIns="0" bIns="0" anchor="t">
+            <a:spAutoFit/>
+          </a:bodyPr>
+          <a:lstStyle/>
+          <a:p>
+            <a:pPr algn="l"/>
+            <a:r>
+              <a:rPr sz="1100" b="0">
+                <a:solidFill>
+                  <a:srgbClr val="605E5C"/>
+                </a:solidFill>
+                <a:latin typeface="Yu Gothic"/>
+              </a:rPr>
+              <a:t>時給5,000円・ハッシュタグ・通知文も現場の文脈次第</a:t>
+            </a:r>
+          </a:p>
+        </p:txBody>
+      </p:sp>
+      <p:sp>
+        <p:nvSpPr>
+          <p:cNvPr id="20" name="Rounded Rectangle 19"/>
+          <p:cNvSpPr/>
+          <p:nvPr/>
+        </p:nvSpPr>
+        <p:spPr>
+          <a:xfrm>
+            <a:off x="6309360" y="1920240"/>
+            <a:ext cx="5577840" cy="3657600"/>
+          </a:xfrm>
+          <a:prstGeom prst="roundRect">
+            <a:avLst>
+              <a:gd name="adj" fmla="val 8000"/>
+            </a:avLst>
+          </a:prstGeom>
+          <a:solidFill>
+            <a:srgbClr val="FFFFFF"/>
+          </a:solidFill>
+          <a:ln w="9525">
+            <a:solidFill>
+              <a:srgbClr val="C8C6C4"/>
+            </a:solidFill>
+          </a:ln>
+        </p:spPr>
+        <p:style>
+          <a:lnRef idx="1">
+            <a:schemeClr val="accent1"/>
+          </a:lnRef>
+          <a:fillRef idx="3">
+            <a:schemeClr val="accent1"/>
+          </a:fillRef>
+          <a:effectRef idx="2">
+            <a:schemeClr val="accent1"/>
+          </a:effectRef>
+          <a:fontRef idx="minor">
+            <a:schemeClr val="lt1"/>
+          </a:fontRef>
+        </p:style>
+        <p:txBody>
+          <a:bodyPr rtlCol="0" anchor="ctr"/>
+          <a:lstStyle/>
+          <a:p>
+            <a:pPr algn="ctr"/>
+          </a:p>
+        </p:txBody>
+      </p:sp>
+      <p:sp>
+        <p:nvSpPr>
+          <p:cNvPr id="21" name="Rounded Rectangle 20"/>
+          <p:cNvSpPr/>
+          <p:nvPr/>
+        </p:nvSpPr>
+        <p:spPr>
+          <a:xfrm>
+            <a:off x="6309360" y="1920240"/>
+            <a:ext cx="5577840" cy="548640"/>
+          </a:xfrm>
+          <a:prstGeom prst="roundRect">
+            <a:avLst>
+              <a:gd name="adj" fmla="val 10000"/>
+            </a:avLst>
+          </a:prstGeom>
+          <a:solidFill>
+            <a:srgbClr val="7460DB"/>
+          </a:solidFill>
+          <a:ln>
+            <a:noFill/>
+          </a:ln>
+        </p:spPr>
+        <p:style>
+          <a:lnRef idx="1">
+            <a:schemeClr val="accent1"/>
+          </a:lnRef>
+          <a:fillRef idx="3">
+            <a:schemeClr val="accent1"/>
+          </a:fillRef>
+          <a:effectRef idx="2">
+            <a:schemeClr val="accent1"/>
+          </a:effectRef>
+          <a:fontRef idx="minor">
+            <a:schemeClr val="lt1"/>
+          </a:fontRef>
+        </p:style>
+        <p:txBody>
+          <a:bodyPr rtlCol="0" anchor="ctr"/>
+          <a:lstStyle/>
+          <a:p>
+            <a:pPr algn="ctr"/>
+          </a:p>
+        </p:txBody>
+      </p:sp>
+      <p:sp>
+        <p:nvSpPr>
+          <p:cNvPr id="22" name="TextBox 21"/>
+          <p:cNvSpPr txBox="1"/>
+          <p:nvPr/>
+        </p:nvSpPr>
+        <p:spPr>
+          <a:xfrm>
+            <a:off x="6537960" y="1920240"/>
+            <a:ext cx="5120640" cy="548640"/>
+          </a:xfrm>
+          <a:prstGeom prst="rect">
+            <a:avLst/>
+          </a:prstGeom>
+          <a:noFill/>
+        </p:spPr>
+        <p:txBody>
+          <a:bodyPr wrap="square" lIns="0" rIns="0" tIns="0" bIns="0" anchor="ctr">
+            <a:spAutoFit/>
+          </a:bodyPr>
+          <a:lstStyle/>
+          <a:p>
+            <a:pPr algn="l"/>
+            <a:r>
+              <a:rPr sz="1500" b="1">
+                <a:solidFill>
+                  <a:srgbClr val="FFFFFF"/>
+                </a:solidFill>
+                <a:latin typeface="Yu Gothic"/>
+              </a:rPr>
+              <a:t>🤖  Copilotに手伝ってもらえること</a:t>
+            </a:r>
+          </a:p>
+        </p:txBody>
+      </p:sp>
+      <p:sp>
+        <p:nvSpPr>
+          <p:cNvPr id="23" name="Rounded Rectangle 22"/>
+          <p:cNvSpPr/>
+          <p:nvPr/>
+        </p:nvSpPr>
+        <p:spPr>
+          <a:xfrm>
+            <a:off x="6537960" y="2697480"/>
+            <a:ext cx="54864" cy="777240"/>
+          </a:xfrm>
+          <a:prstGeom prst="roundRect">
+            <a:avLst>
+              <a:gd name="adj" fmla="val 10000"/>
+            </a:avLst>
+          </a:prstGeom>
+          <a:solidFill>
+            <a:srgbClr val="7460DB"/>
+          </a:solidFill>
+          <a:ln>
+            <a:noFill/>
+          </a:ln>
+        </p:spPr>
+        <p:style>
+          <a:lnRef idx="1">
+            <a:schemeClr val="accent1"/>
+          </a:lnRef>
+          <a:fillRef idx="3">
+            <a:schemeClr val="accent1"/>
+          </a:fillRef>
+          <a:effectRef idx="2">
+            <a:schemeClr val="accent1"/>
+          </a:effectRef>
+          <a:fontRef idx="minor">
+            <a:schemeClr val="lt1"/>
+          </a:fontRef>
+        </p:style>
+        <p:txBody>
+          <a:bodyPr rtlCol="0" anchor="ctr"/>
+          <a:lstStyle/>
+          <a:p>
+            <a:pPr algn="ctr"/>
+          </a:p>
+        </p:txBody>
+      </p:sp>
+      <p:sp>
+        <p:nvSpPr>
+          <p:cNvPr id="24" name="TextBox 23"/>
+          <p:cNvSpPr txBox="1"/>
+          <p:nvPr/>
+        </p:nvSpPr>
+        <p:spPr>
+          <a:xfrm>
+            <a:off x="6720840" y="2697480"/>
+            <a:ext cx="4937760" cy="365760"/>
+          </a:xfrm>
+          <a:prstGeom prst="rect">
+            <a:avLst/>
+          </a:prstGeom>
+          <a:noFill/>
+        </p:spPr>
+        <p:txBody>
+          <a:bodyPr wrap="square" lIns="0" rIns="0" tIns="0" bIns="0" anchor="t">
+            <a:spAutoFit/>
+          </a:bodyPr>
+          <a:lstStyle/>
+          <a:p>
+            <a:pPr algn="l"/>
+            <a:r>
+              <a:rPr sz="1400" b="1">
+                <a:solidFill>
+                  <a:srgbClr val="323130"/>
+                </a:solidFill>
+                <a:latin typeface="Yu Gothic"/>
+              </a:rPr>
+              <a:t>関数・式の書き方</a:t>
+            </a:r>
+          </a:p>
+        </p:txBody>
+      </p:sp>
+      <p:sp>
+        <p:nvSpPr>
+          <p:cNvPr id="25" name="TextBox 24"/>
+          <p:cNvSpPr txBox="1"/>
+          <p:nvPr/>
+        </p:nvSpPr>
+        <p:spPr>
+          <a:xfrm>
+            <a:off x="6720840" y="3063240"/>
+            <a:ext cx="4937760" cy="457200"/>
+          </a:xfrm>
+          <a:prstGeom prst="rect">
+            <a:avLst/>
+          </a:prstGeom>
+          <a:noFill/>
+        </p:spPr>
+        <p:txBody>
+          <a:bodyPr wrap="square" lIns="0" rIns="0" tIns="0" bIns="0" anchor="t">
+            <a:spAutoFit/>
+          </a:bodyPr>
+          <a:lstStyle/>
+          <a:p>
+            <a:pPr algn="l"/>
+            <a:r>
+              <a:rPr sz="1100" b="0">
+                <a:solidFill>
+                  <a:srgbClr val="605E5C"/>
+                </a:solidFill>
+                <a:latin typeface="Yu Gothic"/>
+              </a:rPr>
+              <a:t>ticks() ・ split() ・ length() の組み合わせは即答してくれる</a:t>
+            </a:r>
+          </a:p>
+        </p:txBody>
+      </p:sp>
+      <p:sp>
+        <p:nvSpPr>
+          <p:cNvPr id="26" name="Rounded Rectangle 25"/>
+          <p:cNvSpPr/>
+          <p:nvPr/>
+        </p:nvSpPr>
+        <p:spPr>
+          <a:xfrm>
+            <a:off x="6537960" y="3657600"/>
+            <a:ext cx="54864" cy="777240"/>
+          </a:xfrm>
+          <a:prstGeom prst="roundRect">
+            <a:avLst>
+              <a:gd name="adj" fmla="val 10000"/>
+            </a:avLst>
+          </a:prstGeom>
+          <a:solidFill>
+            <a:srgbClr val="7460DB"/>
+          </a:solidFill>
+          <a:ln>
+            <a:noFill/>
+          </a:ln>
+        </p:spPr>
+        <p:style>
+          <a:lnRef idx="1">
+            <a:schemeClr val="accent1"/>
+          </a:lnRef>
+          <a:fillRef idx="3">
+            <a:schemeClr val="accent1"/>
+          </a:fillRef>
+          <a:effectRef idx="2">
+            <a:schemeClr val="accent1"/>
+          </a:effectRef>
+          <a:fontRef idx="minor">
+            <a:schemeClr val="lt1"/>
+          </a:fontRef>
+        </p:style>
+        <p:txBody>
+          <a:bodyPr rtlCol="0" anchor="ctr"/>
+          <a:lstStyle/>
+          <a:p>
+            <a:pPr algn="ctr"/>
+          </a:p>
+        </p:txBody>
+      </p:sp>
+      <p:sp>
+        <p:nvSpPr>
+          <p:cNvPr id="27" name="TextBox 26"/>
+          <p:cNvSpPr txBox="1"/>
+          <p:nvPr/>
+        </p:nvSpPr>
+        <p:spPr>
+          <a:xfrm>
+            <a:off x="6720840" y="3657600"/>
+            <a:ext cx="4937760" cy="365760"/>
+          </a:xfrm>
+          <a:prstGeom prst="rect">
+            <a:avLst/>
+          </a:prstGeom>
+          <a:noFill/>
+        </p:spPr>
+        <p:txBody>
+          <a:bodyPr wrap="square" lIns="0" rIns="0" tIns="0" bIns="0" anchor="t">
+            <a:spAutoFit/>
+          </a:bodyPr>
+          <a:lstStyle/>
+          <a:p>
+            <a:pPr algn="l"/>
+            <a:r>
+              <a:rPr sz="1400" b="1">
+                <a:solidFill>
+                  <a:srgbClr val="323130"/>
+                </a:solidFill>
+                <a:latin typeface="Yu Gothic"/>
+              </a:rPr>
+              <a:t>フローの構造提案</a:t>
+            </a:r>
+          </a:p>
+        </p:txBody>
+      </p:sp>
+      <p:sp>
+        <p:nvSpPr>
+          <p:cNvPr id="28" name="TextBox 27"/>
+          <p:cNvSpPr txBox="1"/>
+          <p:nvPr/>
+        </p:nvSpPr>
+        <p:spPr>
+          <a:xfrm>
+            <a:off x="6720840" y="4023360"/>
+            <a:ext cx="4937760" cy="457200"/>
+          </a:xfrm>
+          <a:prstGeom prst="rect">
+            <a:avLst/>
+          </a:prstGeom>
+          <a:noFill/>
+        </p:spPr>
+        <p:txBody>
+          <a:bodyPr wrap="square" lIns="0" rIns="0" tIns="0" bIns="0" anchor="t">
+            <a:spAutoFit/>
+          </a:bodyPr>
+          <a:lstStyle/>
+          <a:p>
+            <a:pPr algn="l"/>
+            <a:r>
+              <a:rPr sz="1100" b="0">
+                <a:solidFill>
+                  <a:srgbClr val="605E5C"/>
+                </a:solidFill>
+                <a:latin typeface="Yu Gothic"/>
+              </a:rPr>
+              <a:t>「○○したい」と話しかけるだけで7アクション分の設計を出してくれる</a:t>
+            </a:r>
+          </a:p>
+        </p:txBody>
+      </p:sp>
+      <p:sp>
+        <p:nvSpPr>
+          <p:cNvPr id="29" name="Rounded Rectangle 28"/>
+          <p:cNvSpPr/>
+          <p:nvPr/>
+        </p:nvSpPr>
+        <p:spPr>
+          <a:xfrm>
+            <a:off x="6537960" y="4617720"/>
+            <a:ext cx="54864" cy="777240"/>
+          </a:xfrm>
+          <a:prstGeom prst="roundRect">
+            <a:avLst>
+              <a:gd name="adj" fmla="val 10000"/>
+            </a:avLst>
+          </a:prstGeom>
+          <a:solidFill>
+            <a:srgbClr val="7460DB"/>
+          </a:solidFill>
+          <a:ln>
+            <a:noFill/>
+          </a:ln>
+        </p:spPr>
+        <p:style>
+          <a:lnRef idx="1">
+            <a:schemeClr val="accent1"/>
+          </a:lnRef>
+          <a:fillRef idx="3">
+            <a:schemeClr val="accent1"/>
+          </a:fillRef>
+          <a:effectRef idx="2">
+            <a:schemeClr val="accent1"/>
+          </a:effectRef>
+          <a:fontRef idx="minor">
+            <a:schemeClr val="lt1"/>
+          </a:fontRef>
+        </p:style>
+        <p:txBody>
+          <a:bodyPr rtlCol="0" anchor="ctr"/>
+          <a:lstStyle/>
+          <a:p>
+            <a:pPr algn="ctr"/>
+          </a:p>
+        </p:txBody>
+      </p:sp>
+      <p:sp>
+        <p:nvSpPr>
+          <p:cNvPr id="30" name="TextBox 29"/>
+          <p:cNvSpPr txBox="1"/>
+          <p:nvPr/>
+        </p:nvSpPr>
+        <p:spPr>
+          <a:xfrm>
+            <a:off x="6720840" y="4617720"/>
+            <a:ext cx="4937760" cy="365760"/>
+          </a:xfrm>
+          <a:prstGeom prst="rect">
+            <a:avLst/>
+          </a:prstGeom>
+          <a:noFill/>
+        </p:spPr>
+        <p:txBody>
+          <a:bodyPr wrap="square" lIns="0" rIns="0" tIns="0" bIns="0" anchor="t">
+            <a:spAutoFit/>
+          </a:bodyPr>
+          <a:lstStyle/>
+          <a:p>
+            <a:pPr algn="l"/>
+            <a:r>
+              <a:rPr sz="1400" b="1">
+                <a:solidFill>
+                  <a:srgbClr val="323130"/>
+                </a:solidFill>
+                <a:latin typeface="Yu Gothic"/>
+              </a:rPr>
+              <a:t>シンタックスやエラーの解消</a:t>
+            </a:r>
+          </a:p>
+        </p:txBody>
+      </p:sp>
+      <p:sp>
+        <p:nvSpPr>
+          <p:cNvPr id="31" name="TextBox 30"/>
+          <p:cNvSpPr txBox="1"/>
+          <p:nvPr/>
+        </p:nvSpPr>
+        <p:spPr>
+          <a:xfrm>
+            <a:off x="6720840" y="4983480"/>
+            <a:ext cx="4937760" cy="457200"/>
+          </a:xfrm>
+          <a:prstGeom prst="rect">
+            <a:avLst/>
+          </a:prstGeom>
+          <a:noFill/>
+        </p:spPr>
+        <p:txBody>
+          <a:bodyPr wrap="square" lIns="0" rIns="0" tIns="0" bIns="0" anchor="t">
+            <a:spAutoFit/>
+          </a:bodyPr>
+          <a:lstStyle/>
+          <a:p>
+            <a:pPr algn="l"/>
+            <a:r>
+              <a:rPr sz="1100" b="0">
+                <a:solidFill>
+                  <a:srgbClr val="605E5C"/>
+                </a:solidFill>
+                <a:latin typeface="Yu Gothic"/>
+              </a:rPr>
+              <a:t>「読めない式」も丁寧に説明してくれるので学習にもなる</a:t>
+            </a:r>
+          </a:p>
+        </p:txBody>
+      </p:sp>
+      <p:sp>
+        <p:nvSpPr>
+          <p:cNvPr id="32" name="Rounded Rectangle 31"/>
+          <p:cNvSpPr/>
+          <p:nvPr/>
+        </p:nvSpPr>
+        <p:spPr>
+          <a:xfrm>
+            <a:off x="457200" y="5760720"/>
+            <a:ext cx="11430000" cy="640080"/>
+          </a:xfrm>
+          <a:prstGeom prst="roundRect">
+            <a:avLst>
+              <a:gd name="adj" fmla="val 10000"/>
+            </a:avLst>
+          </a:prstGeom>
+          <a:solidFill>
+            <a:srgbClr val="373E99"/>
+          </a:solidFill>
+          <a:ln>
+            <a:noFill/>
+          </a:ln>
+        </p:spPr>
+        <p:style>
+          <a:lnRef idx="1">
+            <a:schemeClr val="accent1"/>
+          </a:lnRef>
+          <a:fillRef idx="3">
+            <a:schemeClr val="accent1"/>
+          </a:fillRef>
+          <a:effectRef idx="2">
+            <a:schemeClr val="accent1"/>
+          </a:effectRef>
+          <a:fontRef idx="minor">
+            <a:schemeClr val="lt1"/>
+          </a:fontRef>
+        </p:style>
+        <p:txBody>
+          <a:bodyPr rtlCol="0" anchor="ctr"/>
+          <a:lstStyle/>
+          <a:p>
+            <a:pPr algn="ctr"/>
+          </a:p>
+        </p:txBody>
+      </p:sp>
+      <p:sp>
+        <p:nvSpPr>
+          <p:cNvPr id="33" name="TextBox 32"/>
+          <p:cNvSpPr txBox="1"/>
+          <p:nvPr/>
+        </p:nvSpPr>
+        <p:spPr>
+          <a:xfrm>
+            <a:off x="868680" y="5760720"/>
+            <a:ext cx="10972800" cy="640080"/>
+          </a:xfrm>
+          <a:prstGeom prst="rect">
+            <a:avLst/>
+          </a:prstGeom>
+          <a:noFill/>
+        </p:spPr>
+        <p:txBody>
+          <a:bodyPr wrap="square" lIns="0" rIns="0" tIns="0" bIns="0" anchor="ctr">
+            <a:spAutoFit/>
+          </a:bodyPr>
+          <a:lstStyle/>
+          <a:p>
+            <a:pPr algn="l"/>
+            <a:r>
+              <a:rPr sz="1600" b="1">
+                <a:solidFill>
+                  <a:srgbClr val="FFB900"/>
+                </a:solidFill>
+                <a:latin typeface="Yu Gothic"/>
+              </a:rPr>
+              <a:t>💡  アイデアは現場から、実装はCopilotと。これが一番強い。</a:t>
+            </a:r>
+          </a:p>
+        </p:txBody>
+      </p:sp>
+      <p:sp>
+        <p:nvSpPr>
+          <p:cNvPr id="34" name="TextBox 33"/>
+          <p:cNvSpPr txBox="1"/>
+          <p:nvPr/>
+        </p:nvSpPr>
+        <p:spPr>
+          <a:xfrm>
+            <a:off x="365760" y="6446520"/>
+            <a:ext cx="6400800" cy="274320"/>
+          </a:xfrm>
+          <a:prstGeom prst="rect">
+            <a:avLst/>
+          </a:prstGeom>
+          <a:noFill/>
+        </p:spPr>
+        <p:txBody>
+          <a:bodyPr wrap="square" lIns="0" rIns="0" tIns="0" bIns="0" anchor="t">
+            <a:spAutoFit/>
+          </a:bodyPr>
+          <a:lstStyle/>
+          <a:p>
+            <a:pPr algn="l"/>
+            <a:r>
+              <a:rPr sz="1000" b="0">
+                <a:solidFill>
+                  <a:srgbClr val="605E5C"/>
+                </a:solidFill>
+                <a:latin typeface="Yu Gothic"/>
+              </a:rPr>
+              <a:t>Power Automate 45 (PA45)  ×  Copilot Community LT</a:t>
+            </a:r>
+          </a:p>
+        </p:txBody>
+      </p:sp>
+      <p:sp>
+        <p:nvSpPr>
+          <p:cNvPr id="35" name="TextBox 34"/>
+          <p:cNvSpPr txBox="1"/>
+          <p:nvPr/>
+        </p:nvSpPr>
+        <p:spPr>
+          <a:xfrm>
+            <a:off x="11277600" y="6446520"/>
+            <a:ext cx="548640" cy="274320"/>
+          </a:xfrm>
+          <a:prstGeom prst="rect">
+            <a:avLst/>
+          </a:prstGeom>
+          <a:noFill/>
+        </p:spPr>
+        <p:txBody>
+          <a:bodyPr wrap="square" lIns="0" rIns="0" tIns="0" bIns="0" anchor="t">
+            <a:spAutoFit/>
+          </a:bodyPr>
+          <a:lstStyle/>
+          <a:p>
+            <a:pPr algn="r"/>
+            <a:r>
+              <a:rPr sz="1000" b="0">
+                <a:solidFill>
+                  <a:srgbClr val="605E5C"/>
+                </a:solidFill>
+                <a:latin typeface="Yu Gothic"/>
+              </a:rPr>
+              <a:t>9 / 10</a:t>
+            </a:r>
+          </a:p>
+        </p:txBody>
+      </p:sp>
     </p:spTree>
   </p:cSld>
   <p:clrMapOvr>

--- a/assets/pa45/LT001_Copilot_MeetingCostBot_20260428.pptx
+++ b/assets/pa45/LT001_Copilot_MeetingCostBot_20260428.pptx
@@ -5,19 +5,18 @@
     <p:sldMasterId id="2147483648" r:id="rId1"/>
   </p:sldMasterIdLst>
   <p:notesMasterIdLst>
-    <p:notesMasterId r:id="rId16"/>
+    <p:notesMasterId r:id="rId10"/>
   </p:notesMasterIdLst>
   <p:sldIdLst>
-    <p:sldId id="272" r:id="rId10"/>
-    <p:sldId id="271" r:id="rId6"/>
-    <p:sldId id="273" r:id="rId11"/>
-    <p:sldId id="274" r:id="rId12"/>
-    <p:sldId id="275" r:id="rId13"/>
-    <p:sldId id="276" r:id="rId14"/>
-    <p:sldId id="277" r:id="rId15"/>
-    <p:sldId id="278" r:id="rId9"/>
-    <p:sldId id="279" r:id="rId8"/>
-    <p:sldId id="280" r:id="rId7"/>
+    <p:sldId id="272" r:id="rId2"/>
+    <p:sldId id="271" r:id="rId3"/>
+    <p:sldId id="273" r:id="rId4"/>
+    <p:sldId id="274" r:id="rId5"/>
+    <p:sldId id="275" r:id="rId6"/>
+    <p:sldId id="276" r:id="rId7"/>
+    <p:sldId id="277" r:id="rId8"/>
+    <p:sldId id="279" r:id="rId9"/>
+    <p:sldId id="280" r:id="rId17"/>
   </p:sldIdLst>
   <p:sldSz cx="12192000" cy="6858000"/>
   <p:notesSz cx="6858000" cy="12192000"/>
@@ -668,7 +667,7 @@
 </p:notesMaster>
 </file>
 
-<file path=ppt/notesSlides/notesSlide4.xml><?xml version="1.0" encoding="utf-8"?>
+<file path=ppt/notesSlides/notesSlide1.xml><?xml version="1.0" encoding="utf-8"?>
 <p:notes xmlns:a="http://schemas.openxmlformats.org/drawingml/2006/main" xmlns:r="http://schemas.openxmlformats.org/officeDocument/2006/relationships" xmlns:p="http://schemas.openxmlformats.org/presentationml/2006/main">
   <p:cSld>
     <p:spTree>
@@ -787,7 +786,7 @@
           <a:p>
             <a:fld id="{F7021451-1387-4CA6-816F-3879F97B5CBC}" type="slidenum">
               <a:rPr lang="en-US"/>
-              <a:t>5</a:t>
+              <a:t>2</a:t>
             </a:fld>
             <a:endParaRPr lang="en-US"/>
           </a:p>
@@ -1163,6 +1162,659 @@
       </p:grpSpPr>
       <p:sp>
         <p:nvSpPr>
+          <p:cNvPr id="2" name="Rounded Rectangle 1"/>
+          <p:cNvSpPr/>
+          <p:nvPr/>
+        </p:nvSpPr>
+        <p:spPr>
+          <a:xfrm>
+            <a:off x="0" y="0"/>
+            <a:ext cx="12192000" cy="6858000"/>
+          </a:xfrm>
+          <a:prstGeom prst="roundRect">
+            <a:avLst>
+              <a:gd name="adj" fmla="val 10000"/>
+            </a:avLst>
+          </a:prstGeom>
+          <a:solidFill>
+            <a:srgbClr val="FFFFFF"/>
+          </a:solidFill>
+          <a:ln>
+            <a:noFill/>
+          </a:ln>
+        </p:spPr>
+        <p:style>
+          <a:lnRef idx="1">
+            <a:schemeClr val="accent1"/>
+          </a:lnRef>
+          <a:fillRef idx="3">
+            <a:schemeClr val="accent1"/>
+          </a:fillRef>
+          <a:effectRef idx="2">
+            <a:schemeClr val="accent1"/>
+          </a:effectRef>
+          <a:fontRef idx="minor">
+            <a:schemeClr val="lt1"/>
+          </a:fontRef>
+        </p:style>
+        <p:txBody>
+          <a:bodyPr rtlCol="0" anchor="ctr"/>
+          <a:lstStyle/>
+          <a:p>
+            <a:pPr algn="ctr"/>
+            <a:endParaRPr/>
+          </a:p>
+        </p:txBody>
+      </p:sp>
+      <p:sp>
+        <p:nvSpPr>
+          <p:cNvPr id="3" name="Rounded Rectangle 2"/>
+          <p:cNvSpPr/>
+          <p:nvPr/>
+        </p:nvSpPr>
+        <p:spPr>
+          <a:xfrm>
+            <a:off x="0" y="0"/>
+            <a:ext cx="320040" cy="6858000"/>
+          </a:xfrm>
+          <a:prstGeom prst="roundRect">
+            <a:avLst>
+              <a:gd name="adj" fmla="val 10000"/>
+            </a:avLst>
+          </a:prstGeom>
+          <a:solidFill>
+            <a:srgbClr val="464EB8"/>
+          </a:solidFill>
+          <a:ln>
+            <a:noFill/>
+          </a:ln>
+        </p:spPr>
+        <p:style>
+          <a:lnRef idx="1">
+            <a:schemeClr val="accent1"/>
+          </a:lnRef>
+          <a:fillRef idx="3">
+            <a:schemeClr val="accent1"/>
+          </a:fillRef>
+          <a:effectRef idx="2">
+            <a:schemeClr val="accent1"/>
+          </a:effectRef>
+          <a:fontRef idx="minor">
+            <a:schemeClr val="lt1"/>
+          </a:fontRef>
+        </p:style>
+        <p:txBody>
+          <a:bodyPr rtlCol="0" anchor="ctr"/>
+          <a:lstStyle/>
+          <a:p>
+            <a:pPr algn="ctr"/>
+            <a:endParaRPr/>
+          </a:p>
+        </p:txBody>
+      </p:sp>
+      <p:sp>
+        <p:nvSpPr>
+          <p:cNvPr id="4" name="Rounded Rectangle 3"/>
+          <p:cNvSpPr/>
+          <p:nvPr/>
+        </p:nvSpPr>
+        <p:spPr>
+          <a:xfrm>
+            <a:off x="11643360" y="0"/>
+            <a:ext cx="548640" cy="1828800"/>
+          </a:xfrm>
+          <a:prstGeom prst="roundRect">
+            <a:avLst>
+              <a:gd name="adj" fmla="val 10000"/>
+            </a:avLst>
+          </a:prstGeom>
+          <a:solidFill>
+            <a:srgbClr val="7460DB"/>
+          </a:solidFill>
+          <a:ln>
+            <a:noFill/>
+          </a:ln>
+        </p:spPr>
+        <p:style>
+          <a:lnRef idx="1">
+            <a:schemeClr val="accent1"/>
+          </a:lnRef>
+          <a:fillRef idx="3">
+            <a:schemeClr val="accent1"/>
+          </a:fillRef>
+          <a:effectRef idx="2">
+            <a:schemeClr val="accent1"/>
+          </a:effectRef>
+          <a:fontRef idx="minor">
+            <a:schemeClr val="lt1"/>
+          </a:fontRef>
+        </p:style>
+        <p:txBody>
+          <a:bodyPr rtlCol="0" anchor="ctr"/>
+          <a:lstStyle/>
+          <a:p>
+            <a:pPr algn="ctr"/>
+            <a:endParaRPr/>
+          </a:p>
+        </p:txBody>
+      </p:sp>
+      <p:sp>
+        <p:nvSpPr>
+          <p:cNvPr id="5" name="Rounded Rectangle 4"/>
+          <p:cNvSpPr/>
+          <p:nvPr/>
+        </p:nvSpPr>
+        <p:spPr>
+          <a:xfrm>
+            <a:off x="731520" y="640080"/>
+            <a:ext cx="3657600" cy="411480"/>
+          </a:xfrm>
+          <a:prstGeom prst="roundRect">
+            <a:avLst>
+              <a:gd name="adj" fmla="val 10000"/>
+            </a:avLst>
+          </a:prstGeom>
+          <a:solidFill>
+            <a:srgbClr val="E8E9F7"/>
+          </a:solidFill>
+          <a:ln>
+            <a:noFill/>
+          </a:ln>
+        </p:spPr>
+        <p:style>
+          <a:lnRef idx="1">
+            <a:schemeClr val="accent1"/>
+          </a:lnRef>
+          <a:fillRef idx="3">
+            <a:schemeClr val="accent1"/>
+          </a:fillRef>
+          <a:effectRef idx="2">
+            <a:schemeClr val="accent1"/>
+          </a:effectRef>
+          <a:fontRef idx="minor">
+            <a:schemeClr val="lt1"/>
+          </a:fontRef>
+        </p:style>
+        <p:txBody>
+          <a:bodyPr rtlCol="0" anchor="ctr"/>
+          <a:lstStyle/>
+          <a:p>
+            <a:pPr algn="ctr"/>
+            <a:endParaRPr/>
+          </a:p>
+        </p:txBody>
+      </p:sp>
+      <p:sp>
+        <p:nvSpPr>
+          <p:cNvPr id="6" name="TextBox 5"/>
+          <p:cNvSpPr txBox="1"/>
+          <p:nvPr/>
+        </p:nvSpPr>
+        <p:spPr>
+          <a:xfrm>
+            <a:off x="731520" y="640080"/>
+            <a:ext cx="3657600" cy="411480"/>
+          </a:xfrm>
+          <a:prstGeom prst="rect">
+            <a:avLst/>
+          </a:prstGeom>
+          <a:noFill/>
+        </p:spPr>
+        <p:txBody>
+          <a:bodyPr wrap="square" lIns="0" tIns="0" rIns="0" bIns="0" anchor="ctr">
+            <a:spAutoFit/>
+          </a:bodyPr>
+          <a:lstStyle/>
+          <a:p>
+            <a:pPr algn="ctr"/>
+            <a:r>
+              <a:rPr sz="1100" b="1">
+                <a:solidFill>
+                  <a:srgbClr val="373E99"/>
+                </a:solidFill>
+                <a:latin typeface="Yu Gothic"/>
+              </a:rPr>
+              <a:t>⚡ LIGHTNING TALK  ×  COPILOT COMMUNITY</a:t>
+            </a:r>
+          </a:p>
+        </p:txBody>
+      </p:sp>
+      <p:sp>
+        <p:nvSpPr>
+          <p:cNvPr id="7" name="TextBox 6"/>
+          <p:cNvSpPr txBox="1"/>
+          <p:nvPr/>
+        </p:nvSpPr>
+        <p:spPr>
+          <a:xfrm>
+            <a:off x="822960" y="1554480"/>
+            <a:ext cx="10515600" cy="3657600"/>
+          </a:xfrm>
+          <a:prstGeom prst="rect">
+            <a:avLst/>
+          </a:prstGeom>
+          <a:noFill/>
+        </p:spPr>
+        <p:txBody>
+          <a:bodyPr wrap="square" lIns="0" rIns="0">
+            <a:spAutoFit/>
+          </a:bodyPr>
+          <a:lstStyle/>
+          <a:p>
+            <a:pPr algn="l"/>
+            <a:r>
+              <a:rPr sz="3200" b="1">
+                <a:solidFill>
+                  <a:srgbClr val="323130"/>
+                </a:solidFill>
+                <a:latin typeface="Yu Gothic"/>
+              </a:rPr>
+              <a:t>Copilotに「会議減らしたい」と</a:t>
+            </a:r>
+          </a:p>
+          <a:p>
+            <a:pPr algn="l"/>
+            <a:r>
+              <a:rPr sz="3200" b="1">
+                <a:solidFill>
+                  <a:srgbClr val="323130"/>
+                </a:solidFill>
+                <a:latin typeface="Yu Gothic"/>
+              </a:rPr>
+              <a:t>泣きついたら、Power Automateで</a:t>
+            </a:r>
+          </a:p>
+          <a:p>
+            <a:pPr algn="l"/>
+            <a:r>
+              <a:rPr sz="3200" b="1">
+                <a:solidFill>
+                  <a:srgbClr val="323130"/>
+                </a:solidFill>
+                <a:latin typeface="Yu Gothic"/>
+              </a:rPr>
+              <a:t>会議コストBotを生み出す羽目</a:t>
+            </a:r>
+          </a:p>
+          <a:p>
+            <a:pPr algn="l"/>
+            <a:r>
+              <a:rPr sz="3200" b="1">
+                <a:solidFill>
+                  <a:srgbClr val="323130"/>
+                </a:solidFill>
+                <a:latin typeface="Yu Gothic"/>
+              </a:rPr>
+              <a:t>になった話</a:t>
+            </a:r>
+          </a:p>
+        </p:txBody>
+      </p:sp>
+      <p:sp>
+        <p:nvSpPr>
+          <p:cNvPr id="8" name="Rounded Rectangle 7"/>
+          <p:cNvSpPr/>
+          <p:nvPr/>
+        </p:nvSpPr>
+        <p:spPr>
+          <a:xfrm>
+            <a:off x="777240" y="5029200"/>
+            <a:ext cx="54864" cy="502920"/>
+          </a:xfrm>
+          <a:prstGeom prst="roundRect">
+            <a:avLst>
+              <a:gd name="adj" fmla="val 10000"/>
+            </a:avLst>
+          </a:prstGeom>
+          <a:solidFill>
+            <a:srgbClr val="0078D4"/>
+          </a:solidFill>
+          <a:ln>
+            <a:noFill/>
+          </a:ln>
+        </p:spPr>
+        <p:style>
+          <a:lnRef idx="1">
+            <a:schemeClr val="accent1"/>
+          </a:lnRef>
+          <a:fillRef idx="3">
+            <a:schemeClr val="accent1"/>
+          </a:fillRef>
+          <a:effectRef idx="2">
+            <a:schemeClr val="accent1"/>
+          </a:effectRef>
+          <a:fontRef idx="minor">
+            <a:schemeClr val="lt1"/>
+          </a:fontRef>
+        </p:style>
+        <p:txBody>
+          <a:bodyPr rtlCol="0" anchor="ctr"/>
+          <a:lstStyle/>
+          <a:p>
+            <a:pPr algn="ctr"/>
+            <a:endParaRPr/>
+          </a:p>
+        </p:txBody>
+      </p:sp>
+      <p:sp>
+        <p:nvSpPr>
+          <p:cNvPr id="9" name="TextBox 8"/>
+          <p:cNvSpPr txBox="1"/>
+          <p:nvPr/>
+        </p:nvSpPr>
+        <p:spPr>
+          <a:xfrm>
+            <a:off x="960120" y="5029200"/>
+            <a:ext cx="10972800" cy="502920"/>
+          </a:xfrm>
+          <a:prstGeom prst="rect">
+            <a:avLst/>
+          </a:prstGeom>
+          <a:noFill/>
+        </p:spPr>
+        <p:txBody>
+          <a:bodyPr wrap="square" lIns="0" tIns="0" rIns="0" bIns="0" anchor="ctr">
+            <a:spAutoFit/>
+          </a:bodyPr>
+          <a:lstStyle/>
+          <a:p>
+            <a:pPr algn="l"/>
+            <a:r>
+              <a:rPr sz="1600" b="0">
+                <a:solidFill>
+                  <a:srgbClr val="605E5C"/>
+                </a:solidFill>
+                <a:latin typeface="Yu Gothic"/>
+              </a:rPr>
+              <a:t>Copilot × Power Automate で7アクションのBotを作った話</a:t>
+            </a:r>
+          </a:p>
+        </p:txBody>
+      </p:sp>
+      <p:sp>
+        <p:nvSpPr>
+          <p:cNvPr id="10" name="Rounded Rectangle 9"/>
+          <p:cNvSpPr/>
+          <p:nvPr/>
+        </p:nvSpPr>
+        <p:spPr>
+          <a:xfrm>
+            <a:off x="777240" y="5852160"/>
+            <a:ext cx="54864" cy="502920"/>
+          </a:xfrm>
+          <a:prstGeom prst="roundRect">
+            <a:avLst>
+              <a:gd name="adj" fmla="val 10000"/>
+            </a:avLst>
+          </a:prstGeom>
+          <a:solidFill>
+            <a:srgbClr val="7460DB"/>
+          </a:solidFill>
+          <a:ln>
+            <a:noFill/>
+          </a:ln>
+        </p:spPr>
+        <p:style>
+          <a:lnRef idx="1">
+            <a:schemeClr val="accent1"/>
+          </a:lnRef>
+          <a:fillRef idx="3">
+            <a:schemeClr val="accent1"/>
+          </a:fillRef>
+          <a:effectRef idx="2">
+            <a:schemeClr val="accent1"/>
+          </a:effectRef>
+          <a:fontRef idx="minor">
+            <a:schemeClr val="lt1"/>
+          </a:fontRef>
+        </p:style>
+        <p:txBody>
+          <a:bodyPr rtlCol="0" anchor="ctr"/>
+          <a:lstStyle/>
+          <a:p>
+            <a:pPr algn="ctr"/>
+            <a:endParaRPr/>
+          </a:p>
+        </p:txBody>
+      </p:sp>
+      <p:sp>
+        <p:nvSpPr>
+          <p:cNvPr id="11" name="TextBox 10"/>
+          <p:cNvSpPr txBox="1"/>
+          <p:nvPr/>
+        </p:nvSpPr>
+        <p:spPr>
+          <a:xfrm>
+            <a:off x="960120" y="5852160"/>
+            <a:ext cx="10972800" cy="502920"/>
+          </a:xfrm>
+          <a:prstGeom prst="rect">
+            <a:avLst/>
+          </a:prstGeom>
+          <a:noFill/>
+        </p:spPr>
+        <p:txBody>
+          <a:bodyPr wrap="square" lIns="0" tIns="0" rIns="0" bIns="0" anchor="ctr">
+            <a:spAutoFit/>
+          </a:bodyPr>
+          <a:lstStyle/>
+          <a:p>
+            <a:pPr algn="l"/>
+            <a:r>
+              <a:rPr sz="1400" b="1">
+                <a:solidFill>
+                  <a:srgbClr val="373E99"/>
+                </a:solidFill>
+                <a:latin typeface="Yu Gothic"/>
+              </a:rPr>
+              <a:t>Haru (ism136)  /  Power Automate 45 主催</a:t>
+            </a:r>
+          </a:p>
+        </p:txBody>
+      </p:sp>
+      <p:sp>
+        <p:nvSpPr>
+          <p:cNvPr id="12" name="Oval 11"/>
+          <p:cNvSpPr/>
+          <p:nvPr/>
+        </p:nvSpPr>
+        <p:spPr>
+          <a:xfrm>
+            <a:off x="11094720" y="5989320"/>
+            <a:ext cx="146304" cy="146304"/>
+          </a:xfrm>
+          <a:prstGeom prst="ellipse">
+            <a:avLst/>
+          </a:prstGeom>
+          <a:solidFill>
+            <a:srgbClr val="0078D4"/>
+          </a:solidFill>
+          <a:ln>
+            <a:noFill/>
+          </a:ln>
+        </p:spPr>
+        <p:style>
+          <a:lnRef idx="1">
+            <a:schemeClr val="accent1"/>
+          </a:lnRef>
+          <a:fillRef idx="3">
+            <a:schemeClr val="accent1"/>
+          </a:fillRef>
+          <a:effectRef idx="2">
+            <a:schemeClr val="accent1"/>
+          </a:effectRef>
+          <a:fontRef idx="minor">
+            <a:schemeClr val="lt1"/>
+          </a:fontRef>
+        </p:style>
+        <p:txBody>
+          <a:bodyPr rtlCol="0" anchor="ctr"/>
+          <a:lstStyle/>
+          <a:p>
+            <a:pPr algn="ctr"/>
+            <a:endParaRPr/>
+          </a:p>
+        </p:txBody>
+      </p:sp>
+      <p:sp>
+        <p:nvSpPr>
+          <p:cNvPr id="13" name="Oval 12"/>
+          <p:cNvSpPr/>
+          <p:nvPr/>
+        </p:nvSpPr>
+        <p:spPr>
+          <a:xfrm>
+            <a:off x="11277600" y="5989320"/>
+            <a:ext cx="146304" cy="146304"/>
+          </a:xfrm>
+          <a:prstGeom prst="ellipse">
+            <a:avLst/>
+          </a:prstGeom>
+          <a:solidFill>
+            <a:srgbClr val="107C10"/>
+          </a:solidFill>
+          <a:ln>
+            <a:noFill/>
+          </a:ln>
+        </p:spPr>
+        <p:style>
+          <a:lnRef idx="1">
+            <a:schemeClr val="accent1"/>
+          </a:lnRef>
+          <a:fillRef idx="3">
+            <a:schemeClr val="accent1"/>
+          </a:fillRef>
+          <a:effectRef idx="2">
+            <a:schemeClr val="accent1"/>
+          </a:effectRef>
+          <a:fontRef idx="minor">
+            <a:schemeClr val="lt1"/>
+          </a:fontRef>
+        </p:style>
+        <p:txBody>
+          <a:bodyPr rtlCol="0" anchor="ctr"/>
+          <a:lstStyle/>
+          <a:p>
+            <a:pPr algn="ctr"/>
+            <a:endParaRPr/>
+          </a:p>
+        </p:txBody>
+      </p:sp>
+      <p:sp>
+        <p:nvSpPr>
+          <p:cNvPr id="14" name="Oval 13"/>
+          <p:cNvSpPr/>
+          <p:nvPr/>
+        </p:nvSpPr>
+        <p:spPr>
+          <a:xfrm>
+            <a:off x="11460481" y="5989320"/>
+            <a:ext cx="146304" cy="146304"/>
+          </a:xfrm>
+          <a:prstGeom prst="ellipse">
+            <a:avLst/>
+          </a:prstGeom>
+          <a:solidFill>
+            <a:srgbClr val="FFB900"/>
+          </a:solidFill>
+          <a:ln>
+            <a:noFill/>
+          </a:ln>
+        </p:spPr>
+        <p:style>
+          <a:lnRef idx="1">
+            <a:schemeClr val="accent1"/>
+          </a:lnRef>
+          <a:fillRef idx="3">
+            <a:schemeClr val="accent1"/>
+          </a:fillRef>
+          <a:effectRef idx="2">
+            <a:schemeClr val="accent1"/>
+          </a:effectRef>
+          <a:fontRef idx="minor">
+            <a:schemeClr val="lt1"/>
+          </a:fontRef>
+        </p:style>
+        <p:txBody>
+          <a:bodyPr rtlCol="0" anchor="ctr"/>
+          <a:lstStyle/>
+          <a:p>
+            <a:pPr algn="ctr"/>
+            <a:endParaRPr/>
+          </a:p>
+        </p:txBody>
+      </p:sp>
+      <p:sp>
+        <p:nvSpPr>
+          <p:cNvPr id="15" name="Oval 14"/>
+          <p:cNvSpPr/>
+          <p:nvPr/>
+        </p:nvSpPr>
+        <p:spPr>
+          <a:xfrm>
+            <a:off x="11643361" y="5989320"/>
+            <a:ext cx="146304" cy="146304"/>
+          </a:xfrm>
+          <a:prstGeom prst="ellipse">
+            <a:avLst/>
+          </a:prstGeom>
+          <a:solidFill>
+            <a:srgbClr val="D83B01"/>
+          </a:solidFill>
+          <a:ln>
+            <a:noFill/>
+          </a:ln>
+        </p:spPr>
+        <p:style>
+          <a:lnRef idx="1">
+            <a:schemeClr val="accent1"/>
+          </a:lnRef>
+          <a:fillRef idx="3">
+            <a:schemeClr val="accent1"/>
+          </a:fillRef>
+          <a:effectRef idx="2">
+            <a:schemeClr val="accent1"/>
+          </a:effectRef>
+          <a:fontRef idx="minor">
+            <a:schemeClr val="lt1"/>
+          </a:fontRef>
+        </p:style>
+        <p:txBody>
+          <a:bodyPr rtlCol="0" anchor="ctr"/>
+          <a:lstStyle/>
+          <a:p>
+            <a:pPr algn="ctr"/>
+            <a:endParaRPr/>
+          </a:p>
+        </p:txBody>
+      </p:sp>
+    </p:spTree>
+  </p:cSld>
+  <p:clrMapOvr>
+    <a:masterClrMapping/>
+  </p:clrMapOvr>
+</p:sld>
+</file>
+
+<file path=ppt/slides/slide2.xml><?xml version="1.0" encoding="utf-8"?>
+<p:sld xmlns:a="http://schemas.openxmlformats.org/drawingml/2006/main" xmlns:r="http://schemas.openxmlformats.org/officeDocument/2006/relationships" xmlns:p="http://schemas.openxmlformats.org/presentationml/2006/main">
+  <p:cSld>
+    <p:spTree>
+      <p:nvGrpSpPr>
+        <p:cNvPr id="1" name=""/>
+        <p:cNvGrpSpPr/>
+        <p:nvPr/>
+      </p:nvGrpSpPr>
+      <p:grpSpPr>
+        <a:xfrm>
+          <a:off x="0" y="0"/>
+          <a:ext cx="0" cy="0"/>
+          <a:chOff x="0" y="0"/>
+          <a:chExt cx="0" cy="0"/>
+        </a:xfrm>
+      </p:grpSpPr>
+      <p:sp>
+        <p:nvSpPr>
           <p:cNvPr id="2" name="Shape 0"/>
           <p:cNvSpPr/>
           <p:nvPr/>
@@ -1418,7 +2070,7 @@
                 <a:ea typeface="BIZ UDGothic" pitchFamily="34" charset="-122"/>
                 <a:cs typeface="BIZ UDGothic" pitchFamily="34" charset="-120"/>
               </a:rPr>
-              <a:t xml:space="preserve">Power Automate 45 </a:t>
+              <a:t>Power Automate 45 </a:t>
             </a:r>
             <a:r>
               <a:rPr lang="en-US" sz="2700" b="1" kern="0" spc="-67" dirty="0">
@@ -1610,7 +2262,7 @@
                 <a:ea typeface="BIZ UDGothic" pitchFamily="34" charset="-122"/>
                 <a:cs typeface="BIZ UDGothic" pitchFamily="34" charset="-120"/>
               </a:rPr>
-              <a:t xml:space="preserve"> </a:t>
+              <a:t> </a:t>
             </a:r>
             <a:endParaRPr lang="en-US" sz="1600" dirty="0"/>
           </a:p>
@@ -1862,7 +2514,7 @@
                 <a:ea typeface="BIZ UDGothic" pitchFamily="34" charset="-122"/>
                 <a:cs typeface="BIZ UDGothic" pitchFamily="34" charset="-120"/>
               </a:rPr>
-              <a:t xml:space="preserve">・広島コミュニティ </a:t>
+              <a:t>・広島コミュニティ </a:t>
             </a:r>
             <a:r>
               <a:rPr lang="en-US" sz="1600">
@@ -1873,7 +2525,7 @@
                 <a:ea typeface="BIZ UDGothic" pitchFamily="34" charset="-122"/>
                 <a:cs typeface="BIZ UDGothic" pitchFamily="34" charset="-120"/>
               </a:rPr>
-              <a:t xml:space="preserve">PLUG </a:t>
+              <a:t>PLUG </a:t>
             </a:r>
             <a:r>
               <a:rPr lang="ja-JP" altLang="en-US" sz="1600">
@@ -2029,7 +2681,7 @@
                 <a:ea typeface="BIZ UDGothic" pitchFamily="34" charset="-122"/>
                 <a:cs typeface="BIZ UDGothic" pitchFamily="34" charset="-120"/>
               </a:rPr>
-              <a:t xml:space="preserve"> 主な活動・実績 </a:t>
+              <a:t> 主な活動・実績 </a:t>
             </a:r>
             <a:endParaRPr lang="en-US" sz="1800" dirty="0"/>
           </a:p>
@@ -3098,8 +3750,8 @@
 </p:sld>
 </file>
 
-<file path=ppt/slides/slide10.xml><?xml version="1.0" encoding="utf-8"?>
-<p:sld xmlns:a="http://schemas.openxmlformats.org/drawingml/2006/main" xmlns:p="http://schemas.openxmlformats.org/presentationml/2006/main" xmlns:r="http://schemas.openxmlformats.org/officeDocument/2006/relationships">
+<file path=ppt/slides/slide3.xml><?xml version="1.0" encoding="utf-8"?>
+<p:sld xmlns:a="http://schemas.openxmlformats.org/drawingml/2006/main" xmlns:r="http://schemas.openxmlformats.org/officeDocument/2006/relationships" xmlns:p="http://schemas.openxmlformats.org/presentationml/2006/main">
   <p:cSld>
     <p:spTree>
       <p:nvGrpSpPr>
@@ -3107,7 +3759,14 @@
         <p:cNvGrpSpPr/>
         <p:nvPr/>
       </p:nvGrpSpPr>
-      <p:grpSpPr/>
+      <p:grpSpPr>
+        <a:xfrm>
+          <a:off x="0" y="0"/>
+          <a:ext cx="0" cy="0"/>
+          <a:chOff x="0" y="0"/>
+          <a:chExt cx="0" cy="0"/>
+        </a:xfrm>
+      </p:grpSpPr>
       <p:sp>
         <p:nvSpPr>
           <p:cNvPr id="2" name="Rounded Rectangle 1"/>
@@ -3150,6 +3809,7 @@
           <a:lstStyle/>
           <a:p>
             <a:pPr algn="ctr"/>
+            <a:endParaRPr/>
           </a:p>
         </p:txBody>
       </p:sp>
@@ -3161,8 +3821,8 @@
         </p:nvSpPr>
         <p:spPr>
           <a:xfrm>
-            <a:off x="0" y="0"/>
-            <a:ext cx="3048000" cy="164592"/>
+            <a:off x="457200" y="411480"/>
+            <a:ext cx="822960" cy="502920"/>
           </a:xfrm>
           <a:prstGeom prst="roundRect">
             <a:avLst>
@@ -3170,7 +3830,7 @@
             </a:avLst>
           </a:prstGeom>
           <a:solidFill>
-            <a:srgbClr val="0078D4"/>
+            <a:srgbClr val="464EB8"/>
           </a:solidFill>
           <a:ln>
             <a:noFill/>
@@ -3195,19 +3855,90 @@
           <a:lstStyle/>
           <a:p>
             <a:pPr algn="ctr"/>
-          </a:p>
-        </p:txBody>
-      </p:sp>
-      <p:sp>
-        <p:nvSpPr>
-          <p:cNvPr id="4" name="Rounded Rectangle 3"/>
+            <a:endParaRPr/>
+          </a:p>
+        </p:txBody>
+      </p:sp>
+      <p:sp>
+        <p:nvSpPr>
+          <p:cNvPr id="4" name="TextBox 3"/>
+          <p:cNvSpPr txBox="1"/>
+          <p:nvPr/>
+        </p:nvSpPr>
+        <p:spPr>
+          <a:xfrm>
+            <a:off x="457200" y="411480"/>
+            <a:ext cx="822960" cy="502920"/>
+          </a:xfrm>
+          <a:prstGeom prst="rect">
+            <a:avLst/>
+          </a:prstGeom>
+          <a:noFill/>
+        </p:spPr>
+        <p:txBody>
+          <a:bodyPr wrap="square" lIns="0" tIns="0" rIns="0" bIns="0" anchor="ctr">
+            <a:spAutoFit/>
+          </a:bodyPr>
+          <a:lstStyle/>
+          <a:p>
+            <a:pPr algn="ctr"/>
+            <a:r>
+              <a:rPr sz="1800" b="1">
+                <a:solidFill>
+                  <a:srgbClr val="FFFFFF"/>
+                </a:solidFill>
+                <a:latin typeface="Yu Gothic"/>
+              </a:rPr>
+              <a:t>01</a:t>
+            </a:r>
+          </a:p>
+        </p:txBody>
+      </p:sp>
+      <p:sp>
+        <p:nvSpPr>
+          <p:cNvPr id="5" name="TextBox 4"/>
+          <p:cNvSpPr txBox="1"/>
+          <p:nvPr/>
+        </p:nvSpPr>
+        <p:spPr>
+          <a:xfrm>
+            <a:off x="1463040" y="493663"/>
+            <a:ext cx="10058400" cy="338554"/>
+          </a:xfrm>
+          <a:prstGeom prst="rect">
+            <a:avLst/>
+          </a:prstGeom>
+          <a:noFill/>
+        </p:spPr>
+        <p:txBody>
+          <a:bodyPr wrap="square" lIns="0" tIns="0" rIns="0" bIns="0" anchor="ctr">
+            <a:spAutoFit/>
+          </a:bodyPr>
+          <a:lstStyle/>
+          <a:p>
+            <a:pPr algn="l"/>
+            <a:r>
+              <a:rPr sz="2200" b="1">
+                <a:solidFill>
+                  <a:srgbClr val="323130"/>
+                </a:solidFill>
+                <a:latin typeface="Yu Gothic"/>
+              </a:rPr>
+              <a:t>ある日、カレンダーを見たら…</a:t>
+            </a:r>
+          </a:p>
+        </p:txBody>
+      </p:sp>
+      <p:sp>
+        <p:nvSpPr>
+          <p:cNvPr id="6" name="Rounded Rectangle 5"/>
           <p:cNvSpPr/>
           <p:nvPr/>
         </p:nvSpPr>
         <p:spPr>
           <a:xfrm>
-            <a:off x="3048000" y="0"/>
-            <a:ext cx="3048000" cy="164592"/>
+            <a:off x="457200" y="1005840"/>
+            <a:ext cx="1828800" cy="36576"/>
           </a:xfrm>
           <a:prstGeom prst="roundRect">
             <a:avLst>
@@ -3215,7 +3946,7 @@
             </a:avLst>
           </a:prstGeom>
           <a:solidFill>
-            <a:srgbClr val="107C10"/>
+            <a:srgbClr val="0078D4"/>
           </a:solidFill>
           <a:ln>
             <a:noFill/>
@@ -3240,1810 +3971,7 @@
           <a:lstStyle/>
           <a:p>
             <a:pPr algn="ctr"/>
-          </a:p>
-        </p:txBody>
-      </p:sp>
-      <p:sp>
-        <p:nvSpPr>
-          <p:cNvPr id="5" name="Rounded Rectangle 4"/>
-          <p:cNvSpPr/>
-          <p:nvPr/>
-        </p:nvSpPr>
-        <p:spPr>
-          <a:xfrm>
-            <a:off x="6096000" y="0"/>
-            <a:ext cx="3048000" cy="164592"/>
-          </a:xfrm>
-          <a:prstGeom prst="roundRect">
-            <a:avLst>
-              <a:gd name="adj" fmla="val 10000"/>
-            </a:avLst>
-          </a:prstGeom>
-          <a:solidFill>
-            <a:srgbClr val="FFB900"/>
-          </a:solidFill>
-          <a:ln>
-            <a:noFill/>
-          </a:ln>
-        </p:spPr>
-        <p:style>
-          <a:lnRef idx="1">
-            <a:schemeClr val="accent1"/>
-          </a:lnRef>
-          <a:fillRef idx="3">
-            <a:schemeClr val="accent1"/>
-          </a:fillRef>
-          <a:effectRef idx="2">
-            <a:schemeClr val="accent1"/>
-          </a:effectRef>
-          <a:fontRef idx="minor">
-            <a:schemeClr val="lt1"/>
-          </a:fontRef>
-        </p:style>
-        <p:txBody>
-          <a:bodyPr rtlCol="0" anchor="ctr"/>
-          <a:lstStyle/>
-          <a:p>
-            <a:pPr algn="ctr"/>
-          </a:p>
-        </p:txBody>
-      </p:sp>
-      <p:sp>
-        <p:nvSpPr>
-          <p:cNvPr id="6" name="Rounded Rectangle 5"/>
-          <p:cNvSpPr/>
-          <p:nvPr/>
-        </p:nvSpPr>
-        <p:spPr>
-          <a:xfrm>
-            <a:off x="9144000" y="0"/>
-            <a:ext cx="3048000" cy="164592"/>
-          </a:xfrm>
-          <a:prstGeom prst="roundRect">
-            <a:avLst>
-              <a:gd name="adj" fmla="val 10000"/>
-            </a:avLst>
-          </a:prstGeom>
-          <a:solidFill>
-            <a:srgbClr val="D83B01"/>
-          </a:solidFill>
-          <a:ln>
-            <a:noFill/>
-          </a:ln>
-        </p:spPr>
-        <p:style>
-          <a:lnRef idx="1">
-            <a:schemeClr val="accent1"/>
-          </a:lnRef>
-          <a:fillRef idx="3">
-            <a:schemeClr val="accent1"/>
-          </a:fillRef>
-          <a:effectRef idx="2">
-            <a:schemeClr val="accent1"/>
-          </a:effectRef>
-          <a:fontRef idx="minor">
-            <a:schemeClr val="lt1"/>
-          </a:fontRef>
-        </p:style>
-        <p:txBody>
-          <a:bodyPr rtlCol="0" anchor="ctr"/>
-          <a:lstStyle/>
-          <a:p>
-            <a:pPr algn="ctr"/>
-          </a:p>
-        </p:txBody>
-      </p:sp>
-      <p:sp>
-        <p:nvSpPr>
-          <p:cNvPr id="7" name="Rounded Rectangle 6"/>
-          <p:cNvSpPr/>
-          <p:nvPr/>
-        </p:nvSpPr>
-        <p:spPr>
-          <a:xfrm>
-            <a:off x="457200" y="548640"/>
-            <a:ext cx="2194560" cy="457200"/>
-          </a:xfrm>
-          <a:prstGeom prst="roundRect">
-            <a:avLst>
-              <a:gd name="adj" fmla="val 10000"/>
-            </a:avLst>
-          </a:prstGeom>
-          <a:solidFill>
-            <a:srgbClr val="D83B01"/>
-          </a:solidFill>
-          <a:ln>
-            <a:noFill/>
-          </a:ln>
-        </p:spPr>
-        <p:style>
-          <a:lnRef idx="1">
-            <a:schemeClr val="accent1"/>
-          </a:lnRef>
-          <a:fillRef idx="3">
-            <a:schemeClr val="accent1"/>
-          </a:fillRef>
-          <a:effectRef idx="2">
-            <a:schemeClr val="accent1"/>
-          </a:effectRef>
-          <a:fontRef idx="minor">
-            <a:schemeClr val="lt1"/>
-          </a:fontRef>
-        </p:style>
-        <p:txBody>
-          <a:bodyPr rtlCol="0" anchor="ctr"/>
-          <a:lstStyle/>
-          <a:p>
-            <a:pPr algn="ctr"/>
-          </a:p>
-        </p:txBody>
-      </p:sp>
-      <p:sp>
-        <p:nvSpPr>
-          <p:cNvPr id="8" name="TextBox 7"/>
-          <p:cNvSpPr txBox="1"/>
-          <p:nvPr/>
-        </p:nvSpPr>
-        <p:spPr>
-          <a:xfrm>
-            <a:off x="457200" y="548640"/>
-            <a:ext cx="2194560" cy="457200"/>
-          </a:xfrm>
-          <a:prstGeom prst="rect">
-            <a:avLst/>
-          </a:prstGeom>
-          <a:noFill/>
-        </p:spPr>
-        <p:txBody>
-          <a:bodyPr wrap="square" lIns="0" rIns="0" tIns="0" bIns="0" anchor="ctr">
-            <a:spAutoFit/>
-          </a:bodyPr>
-          <a:lstStyle/>
-          <a:p>
-            <a:pPr algn="ctr"/>
-            <a:r>
-              <a:rPr sz="1200" b="1">
-                <a:solidFill>
-                  <a:srgbClr val="FFFFFF"/>
-                </a:solidFill>
-                <a:latin typeface="Yu Gothic"/>
-              </a:rPr>
-              <a:t>🎉  COMING SOON</a:t>
-            </a:r>
-          </a:p>
-        </p:txBody>
-      </p:sp>
-      <p:sp>
-        <p:nvSpPr>
-          <p:cNvPr id="9" name="TextBox 8"/>
-          <p:cNvSpPr txBox="1"/>
-          <p:nvPr/>
-        </p:nvSpPr>
-        <p:spPr>
-          <a:xfrm>
-            <a:off x="457200" y="1371600"/>
-            <a:ext cx="10972800" cy="1828800"/>
-          </a:xfrm>
-          <a:prstGeom prst="rect">
-            <a:avLst/>
-          </a:prstGeom>
-          <a:noFill/>
-        </p:spPr>
-        <p:txBody>
-          <a:bodyPr wrap="square" lIns="0" rIns="0">
-            <a:spAutoFit/>
-          </a:bodyPr>
-          <a:lstStyle/>
-          <a:p>
-            <a:pPr algn="l"/>
-            <a:r>
-              <a:rPr sz="2200" b="0">
-                <a:solidFill>
-                  <a:srgbClr val="323130"/>
-                </a:solidFill>
-                <a:latin typeface="Yu Gothic"/>
-              </a:rPr>
-              <a:t>そして、Botの次は</a:t>
-            </a:r>
-          </a:p>
-          <a:p>
-            <a:pPr algn="l"/>
-            <a:r>
-              <a:rPr sz="3200" b="1">
-                <a:solidFill>
-                  <a:srgbClr val="323130"/>
-                </a:solidFill>
-                <a:latin typeface="Yu Gothic"/>
-              </a:rPr>
-              <a:t>「あなたの今月の会議コスト」</a:t>
-            </a:r>
-          </a:p>
-          <a:p>
-            <a:pPr algn="l"/>
-            <a:r>
-              <a:rPr sz="3200" b="1">
-                <a:solidFill>
-                  <a:srgbClr val="323130"/>
-                </a:solidFill>
-                <a:latin typeface="Yu Gothic"/>
-              </a:rPr>
-              <a:t>ダッシュボードも作成中です。</a:t>
-            </a:r>
-          </a:p>
-        </p:txBody>
-      </p:sp>
-      <p:sp>
-        <p:nvSpPr>
-          <p:cNvPr id="10" name="Rounded Rectangle 9"/>
-          <p:cNvSpPr/>
-          <p:nvPr/>
-        </p:nvSpPr>
-        <p:spPr>
-          <a:xfrm>
-            <a:off x="457200" y="3657600"/>
-            <a:ext cx="11430000" cy="457200"/>
-          </a:xfrm>
-          <a:prstGeom prst="roundRect">
-            <a:avLst>
-              <a:gd name="adj" fmla="val 10000"/>
-            </a:avLst>
-          </a:prstGeom>
-          <a:solidFill>
-            <a:srgbClr val="373E99"/>
-          </a:solidFill>
-          <a:ln>
-            <a:noFill/>
-          </a:ln>
-        </p:spPr>
-        <p:style>
-          <a:lnRef idx="1">
-            <a:schemeClr val="accent1"/>
-          </a:lnRef>
-          <a:fillRef idx="3">
-            <a:schemeClr val="accent1"/>
-          </a:fillRef>
-          <a:effectRef idx="2">
-            <a:schemeClr val="accent1"/>
-          </a:effectRef>
-          <a:fontRef idx="minor">
-            <a:schemeClr val="lt1"/>
-          </a:fontRef>
-        </p:style>
-        <p:txBody>
-          <a:bodyPr rtlCol="0" anchor="ctr"/>
-          <a:lstStyle/>
-          <a:p>
-            <a:pPr algn="ctr"/>
-          </a:p>
-        </p:txBody>
-      </p:sp>
-      <p:sp>
-        <p:nvSpPr>
-          <p:cNvPr id="11" name="TextBox 10"/>
-          <p:cNvSpPr txBox="1"/>
-          <p:nvPr/>
-        </p:nvSpPr>
-        <p:spPr>
-          <a:xfrm>
-            <a:off x="685800" y="3657600"/>
-            <a:ext cx="10972800" cy="457200"/>
-          </a:xfrm>
-          <a:prstGeom prst="rect">
-            <a:avLst/>
-          </a:prstGeom>
-          <a:noFill/>
-        </p:spPr>
-        <p:txBody>
-          <a:bodyPr wrap="square" lIns="0" rIns="0" tIns="0" bIns="0" anchor="ctr">
-            <a:spAutoFit/>
-          </a:bodyPr>
-          <a:lstStyle/>
-          <a:p>
-            <a:pPr algn="l"/>
-            <a:r>
-              <a:rPr sz="1400" b="1">
-                <a:solidFill>
-                  <a:srgbClr val="FFFFFF"/>
-                </a:solidFill>
-                <a:latin typeface="Yu Gothic"/>
-              </a:rPr>
-              <a:t>📊  Power BI:  あなたの今月の会議コスト</a:t>
-            </a:r>
-          </a:p>
-        </p:txBody>
-      </p:sp>
-      <p:sp>
-        <p:nvSpPr>
-          <p:cNvPr id="12" name="Rounded Rectangle 11"/>
-          <p:cNvSpPr/>
-          <p:nvPr/>
-        </p:nvSpPr>
-        <p:spPr>
-          <a:xfrm>
-            <a:off x="457200" y="4206240"/>
-            <a:ext cx="3657600" cy="1371600"/>
-          </a:xfrm>
-          <a:prstGeom prst="roundRect">
-            <a:avLst>
-              <a:gd name="adj" fmla="val 8000"/>
-            </a:avLst>
-          </a:prstGeom>
-          <a:solidFill>
-            <a:srgbClr val="FFFFFF"/>
-          </a:solidFill>
-          <a:ln w="9525">
-            <a:solidFill>
-              <a:srgbClr val="C8C6C4"/>
-            </a:solidFill>
-          </a:ln>
-        </p:spPr>
-        <p:style>
-          <a:lnRef idx="1">
-            <a:schemeClr val="accent1"/>
-          </a:lnRef>
-          <a:fillRef idx="3">
-            <a:schemeClr val="accent1"/>
-          </a:fillRef>
-          <a:effectRef idx="2">
-            <a:schemeClr val="accent1"/>
-          </a:effectRef>
-          <a:fontRef idx="minor">
-            <a:schemeClr val="lt1"/>
-          </a:fontRef>
-        </p:style>
-        <p:txBody>
-          <a:bodyPr rtlCol="0" anchor="ctr"/>
-          <a:lstStyle/>
-          <a:p>
-            <a:pPr algn="ctr"/>
-          </a:p>
-        </p:txBody>
-      </p:sp>
-      <p:sp>
-        <p:nvSpPr>
-          <p:cNvPr id="13" name="Rounded Rectangle 12"/>
-          <p:cNvSpPr/>
-          <p:nvPr/>
-        </p:nvSpPr>
-        <p:spPr>
-          <a:xfrm>
-            <a:off x="457200" y="4206240"/>
-            <a:ext cx="3657600" cy="54864"/>
-          </a:xfrm>
-          <a:prstGeom prst="roundRect">
-            <a:avLst>
-              <a:gd name="adj" fmla="val 10000"/>
-            </a:avLst>
-          </a:prstGeom>
-          <a:solidFill>
-            <a:srgbClr val="D83B01"/>
-          </a:solidFill>
-          <a:ln>
-            <a:noFill/>
-          </a:ln>
-        </p:spPr>
-        <p:style>
-          <a:lnRef idx="1">
-            <a:schemeClr val="accent1"/>
-          </a:lnRef>
-          <a:fillRef idx="3">
-            <a:schemeClr val="accent1"/>
-          </a:fillRef>
-          <a:effectRef idx="2">
-            <a:schemeClr val="accent1"/>
-          </a:effectRef>
-          <a:fontRef idx="minor">
-            <a:schemeClr val="lt1"/>
-          </a:fontRef>
-        </p:style>
-        <p:txBody>
-          <a:bodyPr rtlCol="0" anchor="ctr"/>
-          <a:lstStyle/>
-          <a:p>
-            <a:pPr algn="ctr"/>
-          </a:p>
-        </p:txBody>
-      </p:sp>
-      <p:sp>
-        <p:nvSpPr>
-          <p:cNvPr id="14" name="TextBox 13"/>
-          <p:cNvSpPr txBox="1"/>
-          <p:nvPr/>
-        </p:nvSpPr>
-        <p:spPr>
-          <a:xfrm>
-            <a:off x="685800" y="4297680"/>
-            <a:ext cx="3383280" cy="365760"/>
-          </a:xfrm>
-          <a:prstGeom prst="rect">
-            <a:avLst/>
-          </a:prstGeom>
-          <a:noFill/>
-        </p:spPr>
-        <p:txBody>
-          <a:bodyPr wrap="square" lIns="0" rIns="0" tIns="0" bIns="0" anchor="t">
-            <a:spAutoFit/>
-          </a:bodyPr>
-          <a:lstStyle/>
-          <a:p>
-            <a:pPr algn="l"/>
-            <a:r>
-              <a:rPr sz="1100" b="1">
-                <a:solidFill>
-                  <a:srgbClr val="605E5C"/>
-                </a:solidFill>
-                <a:latin typeface="Yu Gothic"/>
-              </a:rPr>
-              <a:t>💰 今月のコスト</a:t>
-            </a:r>
-          </a:p>
-        </p:txBody>
-      </p:sp>
-      <p:sp>
-        <p:nvSpPr>
-          <p:cNvPr id="15" name="TextBox 14"/>
-          <p:cNvSpPr txBox="1"/>
-          <p:nvPr/>
-        </p:nvSpPr>
-        <p:spPr>
-          <a:xfrm>
-            <a:off x="685800" y="4709160"/>
-            <a:ext cx="3383280" cy="777240"/>
-          </a:xfrm>
-          <a:prstGeom prst="rect">
-            <a:avLst/>
-          </a:prstGeom>
-          <a:noFill/>
-        </p:spPr>
-        <p:txBody>
-          <a:bodyPr wrap="square" lIns="0" rIns="0" tIns="0" bIns="0" anchor="ctr">
-            <a:spAutoFit/>
-          </a:bodyPr>
-          <a:lstStyle/>
-          <a:p>
-            <a:pPr algn="l"/>
-            <a:r>
-              <a:rPr sz="2600" b="1">
-                <a:solidFill>
-                  <a:srgbClr val="D83B01"/>
-                </a:solidFill>
-                <a:latin typeface="Yu Gothic"/>
-              </a:rPr>
-              <a:t>284,500円</a:t>
-            </a:r>
-          </a:p>
-        </p:txBody>
-      </p:sp>
-      <p:sp>
-        <p:nvSpPr>
-          <p:cNvPr id="16" name="Rounded Rectangle 15"/>
-          <p:cNvSpPr/>
-          <p:nvPr/>
-        </p:nvSpPr>
-        <p:spPr>
-          <a:xfrm>
-            <a:off x="4297680" y="4206240"/>
-            <a:ext cx="3657600" cy="1371600"/>
-          </a:xfrm>
-          <a:prstGeom prst="roundRect">
-            <a:avLst>
-              <a:gd name="adj" fmla="val 8000"/>
-            </a:avLst>
-          </a:prstGeom>
-          <a:solidFill>
-            <a:srgbClr val="FFFFFF"/>
-          </a:solidFill>
-          <a:ln w="9525">
-            <a:solidFill>
-              <a:srgbClr val="C8C6C4"/>
-            </a:solidFill>
-          </a:ln>
-        </p:spPr>
-        <p:style>
-          <a:lnRef idx="1">
-            <a:schemeClr val="accent1"/>
-          </a:lnRef>
-          <a:fillRef idx="3">
-            <a:schemeClr val="accent1"/>
-          </a:fillRef>
-          <a:effectRef idx="2">
-            <a:schemeClr val="accent1"/>
-          </a:effectRef>
-          <a:fontRef idx="minor">
-            <a:schemeClr val="lt1"/>
-          </a:fontRef>
-        </p:style>
-        <p:txBody>
-          <a:bodyPr rtlCol="0" anchor="ctr"/>
-          <a:lstStyle/>
-          <a:p>
-            <a:pPr algn="ctr"/>
-          </a:p>
-        </p:txBody>
-      </p:sp>
-      <p:sp>
-        <p:nvSpPr>
-          <p:cNvPr id="17" name="Rounded Rectangle 16"/>
-          <p:cNvSpPr/>
-          <p:nvPr/>
-        </p:nvSpPr>
-        <p:spPr>
-          <a:xfrm>
-            <a:off x="4297680" y="4206240"/>
-            <a:ext cx="3657600" cy="54864"/>
-          </a:xfrm>
-          <a:prstGeom prst="roundRect">
-            <a:avLst>
-              <a:gd name="adj" fmla="val 10000"/>
-            </a:avLst>
-          </a:prstGeom>
-          <a:solidFill>
-            <a:srgbClr val="0078D4"/>
-          </a:solidFill>
-          <a:ln>
-            <a:noFill/>
-          </a:ln>
-        </p:spPr>
-        <p:style>
-          <a:lnRef idx="1">
-            <a:schemeClr val="accent1"/>
-          </a:lnRef>
-          <a:fillRef idx="3">
-            <a:schemeClr val="accent1"/>
-          </a:fillRef>
-          <a:effectRef idx="2">
-            <a:schemeClr val="accent1"/>
-          </a:effectRef>
-          <a:fontRef idx="minor">
-            <a:schemeClr val="lt1"/>
-          </a:fontRef>
-        </p:style>
-        <p:txBody>
-          <a:bodyPr rtlCol="0" anchor="ctr"/>
-          <a:lstStyle/>
-          <a:p>
-            <a:pPr algn="ctr"/>
-          </a:p>
-        </p:txBody>
-      </p:sp>
-      <p:sp>
-        <p:nvSpPr>
-          <p:cNvPr id="18" name="TextBox 17"/>
-          <p:cNvSpPr txBox="1"/>
-          <p:nvPr/>
-        </p:nvSpPr>
-        <p:spPr>
-          <a:xfrm>
-            <a:off x="4526280" y="4297680"/>
-            <a:ext cx="3383280" cy="365760"/>
-          </a:xfrm>
-          <a:prstGeom prst="rect">
-            <a:avLst/>
-          </a:prstGeom>
-          <a:noFill/>
-        </p:spPr>
-        <p:txBody>
-          <a:bodyPr wrap="square" lIns="0" rIns="0" tIns="0" bIns="0" anchor="t">
-            <a:spAutoFit/>
-          </a:bodyPr>
-          <a:lstStyle/>
-          <a:p>
-            <a:pPr algn="l"/>
-            <a:r>
-              <a:rPr sz="1100" b="1">
-                <a:solidFill>
-                  <a:srgbClr val="605E5C"/>
-                </a:solidFill>
-                <a:latin typeface="Yu Gothic"/>
-              </a:rPr>
-              <a:t>⏰ 会議時間</a:t>
-            </a:r>
-          </a:p>
-        </p:txBody>
-      </p:sp>
-      <p:sp>
-        <p:nvSpPr>
-          <p:cNvPr id="19" name="TextBox 18"/>
-          <p:cNvSpPr txBox="1"/>
-          <p:nvPr/>
-        </p:nvSpPr>
-        <p:spPr>
-          <a:xfrm>
-            <a:off x="4526280" y="4709160"/>
-            <a:ext cx="3383280" cy="777240"/>
-          </a:xfrm>
-          <a:prstGeom prst="rect">
-            <a:avLst/>
-          </a:prstGeom>
-          <a:noFill/>
-        </p:spPr>
-        <p:txBody>
-          <a:bodyPr wrap="square" lIns="0" rIns="0" tIns="0" bIns="0" anchor="ctr">
-            <a:spAutoFit/>
-          </a:bodyPr>
-          <a:lstStyle/>
-          <a:p>
-            <a:pPr algn="l"/>
-            <a:r>
-              <a:rPr sz="2600" b="1">
-                <a:solidFill>
-                  <a:srgbClr val="0078D4"/>
-                </a:solidFill>
-                <a:latin typeface="Yu Gothic"/>
-              </a:rPr>
-              <a:t>62時間</a:t>
-            </a:r>
-          </a:p>
-        </p:txBody>
-      </p:sp>
-      <p:sp>
-        <p:nvSpPr>
-          <p:cNvPr id="20" name="Rounded Rectangle 19"/>
-          <p:cNvSpPr/>
-          <p:nvPr/>
-        </p:nvSpPr>
-        <p:spPr>
-          <a:xfrm>
-            <a:off x="8138160" y="4206240"/>
-            <a:ext cx="3657600" cy="1371600"/>
-          </a:xfrm>
-          <a:prstGeom prst="roundRect">
-            <a:avLst>
-              <a:gd name="adj" fmla="val 8000"/>
-            </a:avLst>
-          </a:prstGeom>
-          <a:solidFill>
-            <a:srgbClr val="FFFFFF"/>
-          </a:solidFill>
-          <a:ln w="9525">
-            <a:solidFill>
-              <a:srgbClr val="C8C6C4"/>
-            </a:solidFill>
-          </a:ln>
-        </p:spPr>
-        <p:style>
-          <a:lnRef idx="1">
-            <a:schemeClr val="accent1"/>
-          </a:lnRef>
-          <a:fillRef idx="3">
-            <a:schemeClr val="accent1"/>
-          </a:fillRef>
-          <a:effectRef idx="2">
-            <a:schemeClr val="accent1"/>
-          </a:effectRef>
-          <a:fontRef idx="minor">
-            <a:schemeClr val="lt1"/>
-          </a:fontRef>
-        </p:style>
-        <p:txBody>
-          <a:bodyPr rtlCol="0" anchor="ctr"/>
-          <a:lstStyle/>
-          <a:p>
-            <a:pPr algn="ctr"/>
-          </a:p>
-        </p:txBody>
-      </p:sp>
-      <p:sp>
-        <p:nvSpPr>
-          <p:cNvPr id="21" name="Rounded Rectangle 20"/>
-          <p:cNvSpPr/>
-          <p:nvPr/>
-        </p:nvSpPr>
-        <p:spPr>
-          <a:xfrm>
-            <a:off x="8138160" y="4206240"/>
-            <a:ext cx="3657600" cy="54864"/>
-          </a:xfrm>
-          <a:prstGeom prst="roundRect">
-            <a:avLst>
-              <a:gd name="adj" fmla="val 10000"/>
-            </a:avLst>
-          </a:prstGeom>
-          <a:solidFill>
-            <a:srgbClr val="107C10"/>
-          </a:solidFill>
-          <a:ln>
-            <a:noFill/>
-          </a:ln>
-        </p:spPr>
-        <p:style>
-          <a:lnRef idx="1">
-            <a:schemeClr val="accent1"/>
-          </a:lnRef>
-          <a:fillRef idx="3">
-            <a:schemeClr val="accent1"/>
-          </a:fillRef>
-          <a:effectRef idx="2">
-            <a:schemeClr val="accent1"/>
-          </a:effectRef>
-          <a:fontRef idx="minor">
-            <a:schemeClr val="lt1"/>
-          </a:fontRef>
-        </p:style>
-        <p:txBody>
-          <a:bodyPr rtlCol="0" anchor="ctr"/>
-          <a:lstStyle/>
-          <a:p>
-            <a:pPr algn="ctr"/>
-          </a:p>
-        </p:txBody>
-      </p:sp>
-      <p:sp>
-        <p:nvSpPr>
-          <p:cNvPr id="22" name="TextBox 21"/>
-          <p:cNvSpPr txBox="1"/>
-          <p:nvPr/>
-        </p:nvSpPr>
-        <p:spPr>
-          <a:xfrm>
-            <a:off x="8366760" y="4297680"/>
-            <a:ext cx="3383280" cy="365760"/>
-          </a:xfrm>
-          <a:prstGeom prst="rect">
-            <a:avLst/>
-          </a:prstGeom>
-          <a:noFill/>
-        </p:spPr>
-        <p:txBody>
-          <a:bodyPr wrap="square" lIns="0" rIns="0" tIns="0" bIns="0" anchor="t">
-            <a:spAutoFit/>
-          </a:bodyPr>
-          <a:lstStyle/>
-          <a:p>
-            <a:pPr algn="l"/>
-            <a:r>
-              <a:rPr sz="1100" b="1">
-                <a:solidFill>
-                  <a:srgbClr val="605E5C"/>
-                </a:solidFill>
-                <a:latin typeface="Yu Gothic"/>
-              </a:rPr>
-              <a:t>👥 のべ参加者</a:t>
-            </a:r>
-          </a:p>
-        </p:txBody>
-      </p:sp>
-      <p:sp>
-        <p:nvSpPr>
-          <p:cNvPr id="23" name="TextBox 22"/>
-          <p:cNvSpPr txBox="1"/>
-          <p:nvPr/>
-        </p:nvSpPr>
-        <p:spPr>
-          <a:xfrm>
-            <a:off x="8366760" y="4709160"/>
-            <a:ext cx="3383280" cy="777240"/>
-          </a:xfrm>
-          <a:prstGeom prst="rect">
-            <a:avLst/>
-          </a:prstGeom>
-          <a:noFill/>
-        </p:spPr>
-        <p:txBody>
-          <a:bodyPr wrap="square" lIns="0" rIns="0" tIns="0" bIns="0" anchor="ctr">
-            <a:spAutoFit/>
-          </a:bodyPr>
-          <a:lstStyle/>
-          <a:p>
-            <a:pPr algn="l"/>
-            <a:r>
-              <a:rPr sz="2600" b="1">
-                <a:solidFill>
-                  <a:srgbClr val="107C10"/>
-                </a:solidFill>
-                <a:latin typeface="Yu Gothic"/>
-              </a:rPr>
-              <a:t>187人</a:t>
-            </a:r>
-          </a:p>
-        </p:txBody>
-      </p:sp>
-      <p:sp>
-        <p:nvSpPr>
-          <p:cNvPr id="24" name="Rounded Rectangle 23"/>
-          <p:cNvSpPr/>
-          <p:nvPr/>
-        </p:nvSpPr>
-        <p:spPr>
-          <a:xfrm>
-            <a:off x="457200" y="5852160"/>
-            <a:ext cx="54864" cy="365760"/>
-          </a:xfrm>
-          <a:prstGeom prst="roundRect">
-            <a:avLst>
-              <a:gd name="adj" fmla="val 10000"/>
-            </a:avLst>
-          </a:prstGeom>
-          <a:solidFill>
-            <a:srgbClr val="7460DB"/>
-          </a:solidFill>
-          <a:ln>
-            <a:noFill/>
-          </a:ln>
-        </p:spPr>
-        <p:style>
-          <a:lnRef idx="1">
-            <a:schemeClr val="accent1"/>
-          </a:lnRef>
-          <a:fillRef idx="3">
-            <a:schemeClr val="accent1"/>
-          </a:fillRef>
-          <a:effectRef idx="2">
-            <a:schemeClr val="accent1"/>
-          </a:effectRef>
-          <a:fontRef idx="minor">
-            <a:schemeClr val="lt1"/>
-          </a:fontRef>
-        </p:style>
-        <p:txBody>
-          <a:bodyPr rtlCol="0" anchor="ctr"/>
-          <a:lstStyle/>
-          <a:p>
-            <a:pPr algn="ctr"/>
-          </a:p>
-        </p:txBody>
-      </p:sp>
-      <p:sp>
-        <p:nvSpPr>
-          <p:cNvPr id="25" name="TextBox 24"/>
-          <p:cNvSpPr txBox="1"/>
-          <p:nvPr/>
-        </p:nvSpPr>
-        <p:spPr>
-          <a:xfrm>
-            <a:off x="640080" y="5852160"/>
-            <a:ext cx="10972800" cy="365760"/>
-          </a:xfrm>
-          <a:prstGeom prst="rect">
-            <a:avLst/>
-          </a:prstGeom>
-          <a:noFill/>
-        </p:spPr>
-        <p:txBody>
-          <a:bodyPr wrap="square" lIns="0" rIns="0" tIns="0" bIns="0" anchor="ctr">
-            <a:spAutoFit/>
-          </a:bodyPr>
-          <a:lstStyle/>
-          <a:p>
-            <a:pPr algn="l"/>
-            <a:r>
-              <a:rPr sz="1400" b="0">
-                <a:solidFill>
-                  <a:srgbClr val="373E99"/>
-                </a:solidFill>
-                <a:latin typeface="Yu Gothic"/>
-              </a:rPr>
-              <a:t>真面目すぎず、ニヤッと笑える数字の見せ方で作ってます 😎</a:t>
-            </a:r>
-          </a:p>
-        </p:txBody>
-      </p:sp>
-      <p:sp>
-        <p:nvSpPr>
-          <p:cNvPr id="26" name="TextBox 25"/>
-          <p:cNvSpPr txBox="1"/>
-          <p:nvPr/>
-        </p:nvSpPr>
-        <p:spPr>
-          <a:xfrm>
-            <a:off x="365760" y="6446520"/>
-            <a:ext cx="6400800" cy="274320"/>
-          </a:xfrm>
-          <a:prstGeom prst="rect">
-            <a:avLst/>
-          </a:prstGeom>
-          <a:noFill/>
-        </p:spPr>
-        <p:txBody>
-          <a:bodyPr wrap="square" lIns="0" rIns="0" tIns="0" bIns="0" anchor="t">
-            <a:spAutoFit/>
-          </a:bodyPr>
-          <a:lstStyle/>
-          <a:p>
-            <a:pPr algn="l"/>
-            <a:r>
-              <a:rPr sz="1000" b="0">
-                <a:solidFill>
-                  <a:srgbClr val="605E5C"/>
-                </a:solidFill>
-                <a:latin typeface="Yu Gothic"/>
-              </a:rPr>
-              <a:t>Power Automate 45 (PA45)  ×  Copilot Community LT</a:t>
-            </a:r>
-          </a:p>
-        </p:txBody>
-      </p:sp>
-      <p:sp>
-        <p:nvSpPr>
-          <p:cNvPr id="27" name="TextBox 26"/>
-          <p:cNvSpPr txBox="1"/>
-          <p:nvPr/>
-        </p:nvSpPr>
-        <p:spPr>
-          <a:xfrm>
-            <a:off x="11277600" y="6446520"/>
-            <a:ext cx="548640" cy="274320"/>
-          </a:xfrm>
-          <a:prstGeom prst="rect">
-            <a:avLst/>
-          </a:prstGeom>
-          <a:noFill/>
-        </p:spPr>
-        <p:txBody>
-          <a:bodyPr wrap="square" lIns="0" rIns="0" tIns="0" bIns="0" anchor="t">
-            <a:spAutoFit/>
-          </a:bodyPr>
-          <a:lstStyle/>
-          <a:p>
-            <a:pPr algn="r"/>
-            <a:r>
-              <a:rPr sz="1000" b="0">
-                <a:solidFill>
-                  <a:srgbClr val="605E5C"/>
-                </a:solidFill>
-                <a:latin typeface="Yu Gothic"/>
-              </a:rPr>
-              <a:t>10 / 10</a:t>
-            </a:r>
-          </a:p>
-        </p:txBody>
-      </p:sp>
-    </p:spTree>
-  </p:cSld>
-  <p:clrMapOvr>
-    <a:masterClrMapping/>
-  </p:clrMapOvr>
-</p:sld>
-</file>
-
-<file path=ppt/slides/slide2.xml><?xml version="1.0" encoding="utf-8"?>
-<p:sld xmlns:a="http://schemas.openxmlformats.org/drawingml/2006/main" xmlns:p="http://schemas.openxmlformats.org/presentationml/2006/main" xmlns:r="http://schemas.openxmlformats.org/officeDocument/2006/relationships">
-  <p:cSld>
-    <p:spTree>
-      <p:nvGrpSpPr>
-        <p:cNvPr id="1" name=""/>
-        <p:cNvGrpSpPr/>
-        <p:nvPr/>
-      </p:nvGrpSpPr>
-      <p:grpSpPr/>
-      <p:sp>
-        <p:nvSpPr>
-          <p:cNvPr id="2" name="Rounded Rectangle 1"/>
-          <p:cNvSpPr/>
-          <p:nvPr/>
-        </p:nvSpPr>
-        <p:spPr>
-          <a:xfrm>
-            <a:off x="0" y="0"/>
-            <a:ext cx="12192000" cy="6858000"/>
-          </a:xfrm>
-          <a:prstGeom prst="roundRect">
-            <a:avLst>
-              <a:gd name="adj" fmla="val 10000"/>
-            </a:avLst>
-          </a:prstGeom>
-          <a:solidFill>
-            <a:srgbClr val="FFFFFF"/>
-          </a:solidFill>
-          <a:ln>
-            <a:noFill/>
-          </a:ln>
-        </p:spPr>
-        <p:style>
-          <a:lnRef idx="1">
-            <a:schemeClr val="accent1"/>
-          </a:lnRef>
-          <a:fillRef idx="3">
-            <a:schemeClr val="accent1"/>
-          </a:fillRef>
-          <a:effectRef idx="2">
-            <a:schemeClr val="accent1"/>
-          </a:effectRef>
-          <a:fontRef idx="minor">
-            <a:schemeClr val="lt1"/>
-          </a:fontRef>
-        </p:style>
-        <p:txBody>
-          <a:bodyPr rtlCol="0" anchor="ctr"/>
-          <a:lstStyle/>
-          <a:p>
-            <a:pPr algn="ctr"/>
-          </a:p>
-        </p:txBody>
-      </p:sp>
-      <p:sp>
-        <p:nvSpPr>
-          <p:cNvPr id="3" name="Rounded Rectangle 2"/>
-          <p:cNvSpPr/>
-          <p:nvPr/>
-        </p:nvSpPr>
-        <p:spPr>
-          <a:xfrm>
-            <a:off x="0" y="0"/>
-            <a:ext cx="320040" cy="6858000"/>
-          </a:xfrm>
-          <a:prstGeom prst="roundRect">
-            <a:avLst>
-              <a:gd name="adj" fmla="val 10000"/>
-            </a:avLst>
-          </a:prstGeom>
-          <a:solidFill>
-            <a:srgbClr val="464EB8"/>
-          </a:solidFill>
-          <a:ln>
-            <a:noFill/>
-          </a:ln>
-        </p:spPr>
-        <p:style>
-          <a:lnRef idx="1">
-            <a:schemeClr val="accent1"/>
-          </a:lnRef>
-          <a:fillRef idx="3">
-            <a:schemeClr val="accent1"/>
-          </a:fillRef>
-          <a:effectRef idx="2">
-            <a:schemeClr val="accent1"/>
-          </a:effectRef>
-          <a:fontRef idx="minor">
-            <a:schemeClr val="lt1"/>
-          </a:fontRef>
-        </p:style>
-        <p:txBody>
-          <a:bodyPr rtlCol="0" anchor="ctr"/>
-          <a:lstStyle/>
-          <a:p>
-            <a:pPr algn="ctr"/>
-          </a:p>
-        </p:txBody>
-      </p:sp>
-      <p:sp>
-        <p:nvSpPr>
-          <p:cNvPr id="4" name="Rounded Rectangle 3"/>
-          <p:cNvSpPr/>
-          <p:nvPr/>
-        </p:nvSpPr>
-        <p:spPr>
-          <a:xfrm>
-            <a:off x="11643360" y="0"/>
-            <a:ext cx="548640" cy="1828800"/>
-          </a:xfrm>
-          <a:prstGeom prst="roundRect">
-            <a:avLst>
-              <a:gd name="adj" fmla="val 10000"/>
-            </a:avLst>
-          </a:prstGeom>
-          <a:solidFill>
-            <a:srgbClr val="7460DB"/>
-          </a:solidFill>
-          <a:ln>
-            <a:noFill/>
-          </a:ln>
-        </p:spPr>
-        <p:style>
-          <a:lnRef idx="1">
-            <a:schemeClr val="accent1"/>
-          </a:lnRef>
-          <a:fillRef idx="3">
-            <a:schemeClr val="accent1"/>
-          </a:fillRef>
-          <a:effectRef idx="2">
-            <a:schemeClr val="accent1"/>
-          </a:effectRef>
-          <a:fontRef idx="minor">
-            <a:schemeClr val="lt1"/>
-          </a:fontRef>
-        </p:style>
-        <p:txBody>
-          <a:bodyPr rtlCol="0" anchor="ctr"/>
-          <a:lstStyle/>
-          <a:p>
-            <a:pPr algn="ctr"/>
-          </a:p>
-        </p:txBody>
-      </p:sp>
-      <p:sp>
-        <p:nvSpPr>
-          <p:cNvPr id="5" name="Rounded Rectangle 4"/>
-          <p:cNvSpPr/>
-          <p:nvPr/>
-        </p:nvSpPr>
-        <p:spPr>
-          <a:xfrm>
-            <a:off x="731520" y="640080"/>
-            <a:ext cx="3657600" cy="411480"/>
-          </a:xfrm>
-          <a:prstGeom prst="roundRect">
-            <a:avLst>
-              <a:gd name="adj" fmla="val 10000"/>
-            </a:avLst>
-          </a:prstGeom>
-          <a:solidFill>
-            <a:srgbClr val="E8E9F7"/>
-          </a:solidFill>
-          <a:ln>
-            <a:noFill/>
-          </a:ln>
-        </p:spPr>
-        <p:style>
-          <a:lnRef idx="1">
-            <a:schemeClr val="accent1"/>
-          </a:lnRef>
-          <a:fillRef idx="3">
-            <a:schemeClr val="accent1"/>
-          </a:fillRef>
-          <a:effectRef idx="2">
-            <a:schemeClr val="accent1"/>
-          </a:effectRef>
-          <a:fontRef idx="minor">
-            <a:schemeClr val="lt1"/>
-          </a:fontRef>
-        </p:style>
-        <p:txBody>
-          <a:bodyPr rtlCol="0" anchor="ctr"/>
-          <a:lstStyle/>
-          <a:p>
-            <a:pPr algn="ctr"/>
-          </a:p>
-        </p:txBody>
-      </p:sp>
-      <p:sp>
-        <p:nvSpPr>
-          <p:cNvPr id="6" name="TextBox 5"/>
-          <p:cNvSpPr txBox="1"/>
-          <p:nvPr/>
-        </p:nvSpPr>
-        <p:spPr>
-          <a:xfrm>
-            <a:off x="731520" y="640080"/>
-            <a:ext cx="3657600" cy="411480"/>
-          </a:xfrm>
-          <a:prstGeom prst="rect">
-            <a:avLst/>
-          </a:prstGeom>
-          <a:noFill/>
-        </p:spPr>
-        <p:txBody>
-          <a:bodyPr wrap="square" lIns="0" rIns="0" tIns="0" bIns="0" anchor="ctr">
-            <a:spAutoFit/>
-          </a:bodyPr>
-          <a:lstStyle/>
-          <a:p>
-            <a:pPr algn="ctr"/>
-            <a:r>
-              <a:rPr sz="1100" b="1">
-                <a:solidFill>
-                  <a:srgbClr val="373E99"/>
-                </a:solidFill>
-                <a:latin typeface="Yu Gothic"/>
-              </a:rPr>
-              <a:t>⚡ LIGHTNING TALK  ×  COPILOT COMMUNITY</a:t>
-            </a:r>
-          </a:p>
-        </p:txBody>
-      </p:sp>
-      <p:sp>
-        <p:nvSpPr>
-          <p:cNvPr id="7" name="TextBox 6"/>
-          <p:cNvSpPr txBox="1"/>
-          <p:nvPr/>
-        </p:nvSpPr>
-        <p:spPr>
-          <a:xfrm>
-            <a:off x="822960" y="1554480"/>
-            <a:ext cx="10515600" cy="3657600"/>
-          </a:xfrm>
-          <a:prstGeom prst="rect">
-            <a:avLst/>
-          </a:prstGeom>
-          <a:noFill/>
-        </p:spPr>
-        <p:txBody>
-          <a:bodyPr wrap="square" lIns="0" rIns="0">
-            <a:spAutoFit/>
-          </a:bodyPr>
-          <a:lstStyle/>
-          <a:p>
-            <a:pPr algn="l"/>
-            <a:r>
-              <a:rPr sz="3200" b="1">
-                <a:solidFill>
-                  <a:srgbClr val="323130"/>
-                </a:solidFill>
-                <a:latin typeface="Yu Gothic"/>
-              </a:rPr>
-              <a:t>Copilotに「会議減らしたい」と</a:t>
-            </a:r>
-          </a:p>
-          <a:p>
-            <a:pPr algn="l"/>
-            <a:r>
-              <a:rPr sz="3200" b="1">
-                <a:solidFill>
-                  <a:srgbClr val="323130"/>
-                </a:solidFill>
-                <a:latin typeface="Yu Gothic"/>
-              </a:rPr>
-              <a:t>泣きついたら、Power Automateで</a:t>
-            </a:r>
-          </a:p>
-          <a:p>
-            <a:pPr algn="l"/>
-            <a:r>
-              <a:rPr sz="3200" b="1">
-                <a:solidFill>
-                  <a:srgbClr val="323130"/>
-                </a:solidFill>
-                <a:latin typeface="Yu Gothic"/>
-              </a:rPr>
-              <a:t>会議コストBotを生み出す羽目</a:t>
-            </a:r>
-          </a:p>
-          <a:p>
-            <a:pPr algn="l"/>
-            <a:r>
-              <a:rPr sz="3200" b="1">
-                <a:solidFill>
-                  <a:srgbClr val="323130"/>
-                </a:solidFill>
-                <a:latin typeface="Yu Gothic"/>
-              </a:rPr>
-              <a:t>になった話</a:t>
-            </a:r>
-          </a:p>
-        </p:txBody>
-      </p:sp>
-      <p:sp>
-        <p:nvSpPr>
-          <p:cNvPr id="8" name="Rounded Rectangle 7"/>
-          <p:cNvSpPr/>
-          <p:nvPr/>
-        </p:nvSpPr>
-        <p:spPr>
-          <a:xfrm>
-            <a:off x="777240" y="5029200"/>
-            <a:ext cx="54864" cy="502920"/>
-          </a:xfrm>
-          <a:prstGeom prst="roundRect">
-            <a:avLst>
-              <a:gd name="adj" fmla="val 10000"/>
-            </a:avLst>
-          </a:prstGeom>
-          <a:solidFill>
-            <a:srgbClr val="0078D4"/>
-          </a:solidFill>
-          <a:ln>
-            <a:noFill/>
-          </a:ln>
-        </p:spPr>
-        <p:style>
-          <a:lnRef idx="1">
-            <a:schemeClr val="accent1"/>
-          </a:lnRef>
-          <a:fillRef idx="3">
-            <a:schemeClr val="accent1"/>
-          </a:fillRef>
-          <a:effectRef idx="2">
-            <a:schemeClr val="accent1"/>
-          </a:effectRef>
-          <a:fontRef idx="minor">
-            <a:schemeClr val="lt1"/>
-          </a:fontRef>
-        </p:style>
-        <p:txBody>
-          <a:bodyPr rtlCol="0" anchor="ctr"/>
-          <a:lstStyle/>
-          <a:p>
-            <a:pPr algn="ctr"/>
-          </a:p>
-        </p:txBody>
-      </p:sp>
-      <p:sp>
-        <p:nvSpPr>
-          <p:cNvPr id="9" name="TextBox 8"/>
-          <p:cNvSpPr txBox="1"/>
-          <p:nvPr/>
-        </p:nvSpPr>
-        <p:spPr>
-          <a:xfrm>
-            <a:off x="960120" y="5029200"/>
-            <a:ext cx="10972800" cy="502920"/>
-          </a:xfrm>
-          <a:prstGeom prst="rect">
-            <a:avLst/>
-          </a:prstGeom>
-          <a:noFill/>
-        </p:spPr>
-        <p:txBody>
-          <a:bodyPr wrap="square" lIns="0" rIns="0" tIns="0" bIns="0" anchor="ctr">
-            <a:spAutoFit/>
-          </a:bodyPr>
-          <a:lstStyle/>
-          <a:p>
-            <a:pPr algn="l"/>
-            <a:r>
-              <a:rPr sz="1600" b="0">
-                <a:solidFill>
-                  <a:srgbClr val="605E5C"/>
-                </a:solidFill>
-                <a:latin typeface="Yu Gothic"/>
-              </a:rPr>
-              <a:t>Copilot × Power Automate で7アクションのBotを作った話</a:t>
-            </a:r>
-          </a:p>
-        </p:txBody>
-      </p:sp>
-      <p:sp>
-        <p:nvSpPr>
-          <p:cNvPr id="10" name="Rounded Rectangle 9"/>
-          <p:cNvSpPr/>
-          <p:nvPr/>
-        </p:nvSpPr>
-        <p:spPr>
-          <a:xfrm>
-            <a:off x="777240" y="5852160"/>
-            <a:ext cx="54864" cy="502920"/>
-          </a:xfrm>
-          <a:prstGeom prst="roundRect">
-            <a:avLst>
-              <a:gd name="adj" fmla="val 10000"/>
-            </a:avLst>
-          </a:prstGeom>
-          <a:solidFill>
-            <a:srgbClr val="7460DB"/>
-          </a:solidFill>
-          <a:ln>
-            <a:noFill/>
-          </a:ln>
-        </p:spPr>
-        <p:style>
-          <a:lnRef idx="1">
-            <a:schemeClr val="accent1"/>
-          </a:lnRef>
-          <a:fillRef idx="3">
-            <a:schemeClr val="accent1"/>
-          </a:fillRef>
-          <a:effectRef idx="2">
-            <a:schemeClr val="accent1"/>
-          </a:effectRef>
-          <a:fontRef idx="minor">
-            <a:schemeClr val="lt1"/>
-          </a:fontRef>
-        </p:style>
-        <p:txBody>
-          <a:bodyPr rtlCol="0" anchor="ctr"/>
-          <a:lstStyle/>
-          <a:p>
-            <a:pPr algn="ctr"/>
-          </a:p>
-        </p:txBody>
-      </p:sp>
-      <p:sp>
-        <p:nvSpPr>
-          <p:cNvPr id="11" name="TextBox 10"/>
-          <p:cNvSpPr txBox="1"/>
-          <p:nvPr/>
-        </p:nvSpPr>
-        <p:spPr>
-          <a:xfrm>
-            <a:off x="960120" y="5852160"/>
-            <a:ext cx="10972800" cy="502920"/>
-          </a:xfrm>
-          <a:prstGeom prst="rect">
-            <a:avLst/>
-          </a:prstGeom>
-          <a:noFill/>
-        </p:spPr>
-        <p:txBody>
-          <a:bodyPr wrap="square" lIns="0" rIns="0" tIns="0" bIns="0" anchor="ctr">
-            <a:spAutoFit/>
-          </a:bodyPr>
-          <a:lstStyle/>
-          <a:p>
-            <a:pPr algn="l"/>
-            <a:r>
-              <a:rPr sz="1400" b="1">
-                <a:solidFill>
-                  <a:srgbClr val="373E99"/>
-                </a:solidFill>
-                <a:latin typeface="Yu Gothic"/>
-              </a:rPr>
-              <a:t>Haru (ism136)  /  Power Automate 45 主催</a:t>
-            </a:r>
-          </a:p>
-        </p:txBody>
-      </p:sp>
-      <p:sp>
-        <p:nvSpPr>
-          <p:cNvPr id="12" name="Oval 11"/>
-          <p:cNvSpPr/>
-          <p:nvPr/>
-        </p:nvSpPr>
-        <p:spPr>
-          <a:xfrm>
-            <a:off x="11094720" y="5989320"/>
-            <a:ext cx="146304" cy="146304"/>
-          </a:xfrm>
-          <a:prstGeom prst="ellipse">
-            <a:avLst/>
-          </a:prstGeom>
-          <a:solidFill>
-            <a:srgbClr val="0078D4"/>
-          </a:solidFill>
-          <a:ln>
-            <a:noFill/>
-          </a:ln>
-        </p:spPr>
-        <p:style>
-          <a:lnRef idx="1">
-            <a:schemeClr val="accent1"/>
-          </a:lnRef>
-          <a:fillRef idx="3">
-            <a:schemeClr val="accent1"/>
-          </a:fillRef>
-          <a:effectRef idx="2">
-            <a:schemeClr val="accent1"/>
-          </a:effectRef>
-          <a:fontRef idx="minor">
-            <a:schemeClr val="lt1"/>
-          </a:fontRef>
-        </p:style>
-        <p:txBody>
-          <a:bodyPr rtlCol="0" anchor="ctr"/>
-          <a:lstStyle/>
-          <a:p>
-            <a:pPr algn="ctr"/>
-          </a:p>
-        </p:txBody>
-      </p:sp>
-      <p:sp>
-        <p:nvSpPr>
-          <p:cNvPr id="13" name="Oval 12"/>
-          <p:cNvSpPr/>
-          <p:nvPr/>
-        </p:nvSpPr>
-        <p:spPr>
-          <a:xfrm>
-            <a:off x="11277600" y="5989320"/>
-            <a:ext cx="146304" cy="146304"/>
-          </a:xfrm>
-          <a:prstGeom prst="ellipse">
-            <a:avLst/>
-          </a:prstGeom>
-          <a:solidFill>
-            <a:srgbClr val="107C10"/>
-          </a:solidFill>
-          <a:ln>
-            <a:noFill/>
-          </a:ln>
-        </p:spPr>
-        <p:style>
-          <a:lnRef idx="1">
-            <a:schemeClr val="accent1"/>
-          </a:lnRef>
-          <a:fillRef idx="3">
-            <a:schemeClr val="accent1"/>
-          </a:fillRef>
-          <a:effectRef idx="2">
-            <a:schemeClr val="accent1"/>
-          </a:effectRef>
-          <a:fontRef idx="minor">
-            <a:schemeClr val="lt1"/>
-          </a:fontRef>
-        </p:style>
-        <p:txBody>
-          <a:bodyPr rtlCol="0" anchor="ctr"/>
-          <a:lstStyle/>
-          <a:p>
-            <a:pPr algn="ctr"/>
-          </a:p>
-        </p:txBody>
-      </p:sp>
-      <p:sp>
-        <p:nvSpPr>
-          <p:cNvPr id="14" name="Oval 13"/>
-          <p:cNvSpPr/>
-          <p:nvPr/>
-        </p:nvSpPr>
-        <p:spPr>
-          <a:xfrm>
-            <a:off x="11460481" y="5989320"/>
-            <a:ext cx="146304" cy="146304"/>
-          </a:xfrm>
-          <a:prstGeom prst="ellipse">
-            <a:avLst/>
-          </a:prstGeom>
-          <a:solidFill>
-            <a:srgbClr val="FFB900"/>
-          </a:solidFill>
-          <a:ln>
-            <a:noFill/>
-          </a:ln>
-        </p:spPr>
-        <p:style>
-          <a:lnRef idx="1">
-            <a:schemeClr val="accent1"/>
-          </a:lnRef>
-          <a:fillRef idx="3">
-            <a:schemeClr val="accent1"/>
-          </a:fillRef>
-          <a:effectRef idx="2">
-            <a:schemeClr val="accent1"/>
-          </a:effectRef>
-          <a:fontRef idx="minor">
-            <a:schemeClr val="lt1"/>
-          </a:fontRef>
-        </p:style>
-        <p:txBody>
-          <a:bodyPr rtlCol="0" anchor="ctr"/>
-          <a:lstStyle/>
-          <a:p>
-            <a:pPr algn="ctr"/>
-          </a:p>
-        </p:txBody>
-      </p:sp>
-      <p:sp>
-        <p:nvSpPr>
-          <p:cNvPr id="15" name="Oval 14"/>
-          <p:cNvSpPr/>
-          <p:nvPr/>
-        </p:nvSpPr>
-        <p:spPr>
-          <a:xfrm>
-            <a:off x="11643361" y="5989320"/>
-            <a:ext cx="146304" cy="146304"/>
-          </a:xfrm>
-          <a:prstGeom prst="ellipse">
-            <a:avLst/>
-          </a:prstGeom>
-          <a:solidFill>
-            <a:srgbClr val="D83B01"/>
-          </a:solidFill>
-          <a:ln>
-            <a:noFill/>
-          </a:ln>
-        </p:spPr>
-        <p:style>
-          <a:lnRef idx="1">
-            <a:schemeClr val="accent1"/>
-          </a:lnRef>
-          <a:fillRef idx="3">
-            <a:schemeClr val="accent1"/>
-          </a:fillRef>
-          <a:effectRef idx="2">
-            <a:schemeClr val="accent1"/>
-          </a:effectRef>
-          <a:fontRef idx="minor">
-            <a:schemeClr val="lt1"/>
-          </a:fontRef>
-        </p:style>
-        <p:txBody>
-          <a:bodyPr rtlCol="0" anchor="ctr"/>
-          <a:lstStyle/>
-          <a:p>
-            <a:pPr algn="ctr"/>
-          </a:p>
-        </p:txBody>
-      </p:sp>
-    </p:spTree>
-  </p:cSld>
-  <p:clrMapOvr>
-    <a:masterClrMapping/>
-  </p:clrMapOvr>
-</p:sld>
-</file>
-
-<file path=ppt/slides/slide3.xml><?xml version="1.0" encoding="utf-8"?>
-<p:sld xmlns:a="http://schemas.openxmlformats.org/drawingml/2006/main" xmlns:p="http://schemas.openxmlformats.org/presentationml/2006/main" xmlns:r="http://schemas.openxmlformats.org/officeDocument/2006/relationships">
-  <p:cSld>
-    <p:spTree>
-      <p:nvGrpSpPr>
-        <p:cNvPr id="1" name=""/>
-        <p:cNvGrpSpPr/>
-        <p:nvPr/>
-      </p:nvGrpSpPr>
-      <p:grpSpPr/>
-      <p:sp>
-        <p:nvSpPr>
-          <p:cNvPr id="2" name="Rounded Rectangle 1"/>
-          <p:cNvSpPr/>
-          <p:nvPr/>
-        </p:nvSpPr>
-        <p:spPr>
-          <a:xfrm>
-            <a:off x="0" y="0"/>
-            <a:ext cx="12192000" cy="6858000"/>
-          </a:xfrm>
-          <a:prstGeom prst="roundRect">
-            <a:avLst>
-              <a:gd name="adj" fmla="val 10000"/>
-            </a:avLst>
-          </a:prstGeom>
-          <a:solidFill>
-            <a:srgbClr val="FFFFFF"/>
-          </a:solidFill>
-          <a:ln>
-            <a:noFill/>
-          </a:ln>
-        </p:spPr>
-        <p:style>
-          <a:lnRef idx="1">
-            <a:schemeClr val="accent1"/>
-          </a:lnRef>
-          <a:fillRef idx="3">
-            <a:schemeClr val="accent1"/>
-          </a:fillRef>
-          <a:effectRef idx="2">
-            <a:schemeClr val="accent1"/>
-          </a:effectRef>
-          <a:fontRef idx="minor">
-            <a:schemeClr val="lt1"/>
-          </a:fontRef>
-        </p:style>
-        <p:txBody>
-          <a:bodyPr rtlCol="0" anchor="ctr"/>
-          <a:lstStyle/>
-          <a:p>
-            <a:pPr algn="ctr"/>
-          </a:p>
-        </p:txBody>
-      </p:sp>
-      <p:sp>
-        <p:nvSpPr>
-          <p:cNvPr id="3" name="Rounded Rectangle 2"/>
-          <p:cNvSpPr/>
-          <p:nvPr/>
-        </p:nvSpPr>
-        <p:spPr>
-          <a:xfrm>
-            <a:off x="457200" y="411480"/>
-            <a:ext cx="822960" cy="502920"/>
-          </a:xfrm>
-          <a:prstGeom prst="roundRect">
-            <a:avLst>
-              <a:gd name="adj" fmla="val 10000"/>
-            </a:avLst>
-          </a:prstGeom>
-          <a:solidFill>
-            <a:srgbClr val="464EB8"/>
-          </a:solidFill>
-          <a:ln>
-            <a:noFill/>
-          </a:ln>
-        </p:spPr>
-        <p:style>
-          <a:lnRef idx="1">
-            <a:schemeClr val="accent1"/>
-          </a:lnRef>
-          <a:fillRef idx="3">
-            <a:schemeClr val="accent1"/>
-          </a:fillRef>
-          <a:effectRef idx="2">
-            <a:schemeClr val="accent1"/>
-          </a:effectRef>
-          <a:fontRef idx="minor">
-            <a:schemeClr val="lt1"/>
-          </a:fontRef>
-        </p:style>
-        <p:txBody>
-          <a:bodyPr rtlCol="0" anchor="ctr"/>
-          <a:lstStyle/>
-          <a:p>
-            <a:pPr algn="ctr"/>
-          </a:p>
-        </p:txBody>
-      </p:sp>
-      <p:sp>
-        <p:nvSpPr>
-          <p:cNvPr id="4" name="TextBox 3"/>
-          <p:cNvSpPr txBox="1"/>
-          <p:nvPr/>
-        </p:nvSpPr>
-        <p:spPr>
-          <a:xfrm>
-            <a:off x="457200" y="411480"/>
-            <a:ext cx="822960" cy="502920"/>
-          </a:xfrm>
-          <a:prstGeom prst="rect">
-            <a:avLst/>
-          </a:prstGeom>
-          <a:noFill/>
-        </p:spPr>
-        <p:txBody>
-          <a:bodyPr wrap="square" lIns="0" rIns="0" tIns="0" bIns="0" anchor="ctr">
-            <a:spAutoFit/>
-          </a:bodyPr>
-          <a:lstStyle/>
-          <a:p>
-            <a:pPr algn="ctr"/>
-            <a:r>
-              <a:rPr sz="1800" b="1">
-                <a:solidFill>
-                  <a:srgbClr val="FFFFFF"/>
-                </a:solidFill>
-                <a:latin typeface="Yu Gothic"/>
-              </a:rPr>
-              <a:t>01</a:t>
-            </a:r>
-          </a:p>
-        </p:txBody>
-      </p:sp>
-      <p:sp>
-        <p:nvSpPr>
-          <p:cNvPr id="5" name="TextBox 4"/>
-          <p:cNvSpPr txBox="1"/>
-          <p:nvPr/>
-        </p:nvSpPr>
-        <p:spPr>
-          <a:xfrm>
-            <a:off x="1463040" y="411480"/>
-            <a:ext cx="10058400" cy="502920"/>
-          </a:xfrm>
-          <a:prstGeom prst="rect">
-            <a:avLst/>
-          </a:prstGeom>
-          <a:noFill/>
-        </p:spPr>
-        <p:txBody>
-          <a:bodyPr wrap="square" lIns="0" rIns="0" tIns="0" bIns="0" anchor="ctr">
-            <a:spAutoFit/>
-          </a:bodyPr>
-          <a:lstStyle/>
-          <a:p>
-            <a:pPr algn="l"/>
-            <a:r>
-              <a:rPr sz="2200" b="1">
-                <a:solidFill>
-                  <a:srgbClr val="323130"/>
-                </a:solidFill>
-                <a:latin typeface="Yu Gothic"/>
-              </a:rPr>
-              <a:t>ある日、自分のカレンダーを見たら…</a:t>
-            </a:r>
-          </a:p>
-        </p:txBody>
-      </p:sp>
-      <p:sp>
-        <p:nvSpPr>
-          <p:cNvPr id="6" name="Rounded Rectangle 5"/>
-          <p:cNvSpPr/>
-          <p:nvPr/>
-        </p:nvSpPr>
-        <p:spPr>
-          <a:xfrm>
-            <a:off x="457200" y="1005840"/>
-            <a:ext cx="1828800" cy="36576"/>
-          </a:xfrm>
-          <a:prstGeom prst="roundRect">
-            <a:avLst>
-              <a:gd name="adj" fmla="val 10000"/>
-            </a:avLst>
-          </a:prstGeom>
-          <a:solidFill>
-            <a:srgbClr val="0078D4"/>
-          </a:solidFill>
-          <a:ln>
-            <a:noFill/>
-          </a:ln>
-        </p:spPr>
-        <p:style>
-          <a:lnRef idx="1">
-            <a:schemeClr val="accent1"/>
-          </a:lnRef>
-          <a:fillRef idx="3">
-            <a:schemeClr val="accent1"/>
-          </a:fillRef>
-          <a:effectRef idx="2">
-            <a:schemeClr val="accent1"/>
-          </a:effectRef>
-          <a:fontRef idx="minor">
-            <a:schemeClr val="lt1"/>
-          </a:fontRef>
-        </p:style>
-        <p:txBody>
-          <a:bodyPr rtlCol="0" anchor="ctr"/>
-          <a:lstStyle/>
-          <a:p>
-            <a:pPr algn="ctr"/>
+            <a:endParaRPr/>
           </a:p>
         </p:txBody>
       </p:sp>
@@ -5057,14 +3985,15 @@
         </p:nvPicPr>
         <p:blipFill>
           <a:blip r:embed="rId2"/>
+          <a:srcRect b="10021"/>
           <a:stretch>
             <a:fillRect/>
           </a:stretch>
         </p:blipFill>
         <p:spPr>
           <a:xfrm>
-            <a:off x="457200" y="1280160"/>
-            <a:ext cx="10058400" cy="4206240"/>
+            <a:off x="426720" y="1051560"/>
+            <a:ext cx="10058400" cy="4846320"/>
           </a:xfrm>
           <a:prstGeom prst="rect">
             <a:avLst/>
@@ -5115,6 +4044,7 @@
           <a:lstStyle/>
           <a:p>
             <a:pPr algn="ctr"/>
+            <a:endParaRPr/>
           </a:p>
         </p:txBody>
       </p:sp>
@@ -5135,7 +4065,7 @@
           <a:noFill/>
         </p:spPr>
         <p:txBody>
-          <a:bodyPr wrap="square" lIns="0" rIns="0" tIns="0" bIns="0" anchor="ctr">
+          <a:bodyPr wrap="square" lIns="0" tIns="0" rIns="0" bIns="0" anchor="ctr">
             <a:spAutoFit/>
           </a:bodyPr>
           <a:lstStyle/>
@@ -5161,7 +4091,7 @@
         </p:nvSpPr>
         <p:spPr>
           <a:xfrm>
-            <a:off x="457200" y="5669280"/>
+            <a:off x="457200" y="5920740"/>
             <a:ext cx="54864" cy="457200"/>
           </a:xfrm>
           <a:prstGeom prst="roundRect">
@@ -5195,6 +4125,7 @@
           <a:lstStyle/>
           <a:p>
             <a:pPr algn="ctr"/>
+            <a:endParaRPr/>
           </a:p>
         </p:txBody>
       </p:sp>
@@ -5206,7 +4137,7 @@
         </p:nvSpPr>
         <p:spPr>
           <a:xfrm>
-            <a:off x="640080" y="5669280"/>
+            <a:off x="640080" y="5920740"/>
             <a:ext cx="10972800" cy="457200"/>
           </a:xfrm>
           <a:prstGeom prst="rect">
@@ -5215,7 +4146,7 @@
           <a:noFill/>
         </p:spPr>
         <p:txBody>
-          <a:bodyPr wrap="square" lIns="0" rIns="0" tIns="0" bIns="0" anchor="ctr">
+          <a:bodyPr wrap="square" lIns="0" tIns="0" rIns="0" bIns="0" anchor="ctr">
             <a:spAutoFit/>
           </a:bodyPr>
           <a:lstStyle/>
@@ -5241,7 +4172,7 @@
         </p:nvSpPr>
         <p:spPr>
           <a:xfrm>
-            <a:off x="365760" y="6446520"/>
+            <a:off x="365760" y="6556192"/>
             <a:ext cx="6400800" cy="274320"/>
           </a:xfrm>
           <a:prstGeom prst="rect">
@@ -5250,7 +4181,7 @@
           <a:noFill/>
         </p:spPr>
         <p:txBody>
-          <a:bodyPr wrap="square" lIns="0" rIns="0" tIns="0" bIns="0" anchor="t">
+          <a:bodyPr wrap="square" lIns="0" tIns="0" rIns="0" bIns="0" anchor="t">
             <a:spAutoFit/>
           </a:bodyPr>
           <a:lstStyle/>
@@ -5285,7 +4216,7 @@
           <a:noFill/>
         </p:spPr>
         <p:txBody>
-          <a:bodyPr wrap="square" lIns="0" rIns="0" tIns="0" bIns="0" anchor="t">
+          <a:bodyPr wrap="square" lIns="0" tIns="0" rIns="0" bIns="0" anchor="t">
             <a:spAutoFit/>
           </a:bodyPr>
           <a:lstStyle/>
@@ -5312,7 +4243,7 @@
 </file>
 
 <file path=ppt/slides/slide4.xml><?xml version="1.0" encoding="utf-8"?>
-<p:sld xmlns:a="http://schemas.openxmlformats.org/drawingml/2006/main" xmlns:p="http://schemas.openxmlformats.org/presentationml/2006/main" xmlns:r="http://schemas.openxmlformats.org/officeDocument/2006/relationships">
+<p:sld xmlns:a="http://schemas.openxmlformats.org/drawingml/2006/main" xmlns:r="http://schemas.openxmlformats.org/officeDocument/2006/relationships" xmlns:p="http://schemas.openxmlformats.org/presentationml/2006/main">
   <p:cSld>
     <p:spTree>
       <p:nvGrpSpPr>
@@ -5320,7 +4251,14 @@
         <p:cNvGrpSpPr/>
         <p:nvPr/>
       </p:nvGrpSpPr>
-      <p:grpSpPr/>
+      <p:grpSpPr>
+        <a:xfrm>
+          <a:off x="0" y="0"/>
+          <a:ext cx="0" cy="0"/>
+          <a:chOff x="0" y="0"/>
+          <a:chExt cx="0" cy="0"/>
+        </a:xfrm>
+      </p:grpSpPr>
       <p:sp>
         <p:nvSpPr>
           <p:cNvPr id="2" name="Rounded Rectangle 1"/>
@@ -5363,6 +4301,7 @@
           <a:lstStyle/>
           <a:p>
             <a:pPr algn="ctr"/>
+            <a:endParaRPr/>
           </a:p>
         </p:txBody>
       </p:sp>
@@ -5408,6 +4347,7 @@
           <a:lstStyle/>
           <a:p>
             <a:pPr algn="ctr"/>
+            <a:endParaRPr/>
           </a:p>
         </p:txBody>
       </p:sp>
@@ -5428,7 +4368,7 @@
           <a:noFill/>
         </p:spPr>
         <p:txBody>
-          <a:bodyPr wrap="square" lIns="0" rIns="0" tIns="0" bIns="0" anchor="ctr">
+          <a:bodyPr wrap="square" lIns="0" tIns="0" rIns="0" bIns="0" anchor="ctr">
             <a:spAutoFit/>
           </a:bodyPr>
           <a:lstStyle/>
@@ -5463,7 +4403,7 @@
           <a:noFill/>
         </p:spPr>
         <p:txBody>
-          <a:bodyPr wrap="square" lIns="0" rIns="0" tIns="0" bIns="0" anchor="ctr">
+          <a:bodyPr wrap="square" lIns="0" tIns="0" rIns="0" bIns="0" anchor="ctr">
             <a:spAutoFit/>
           </a:bodyPr>
           <a:lstStyle/>
@@ -5523,6 +4463,7 @@
           <a:lstStyle/>
           <a:p>
             <a:pPr algn="ctr"/>
+            <a:endParaRPr/>
           </a:p>
         </p:txBody>
       </p:sp>
@@ -5536,14 +4477,15 @@
         </p:nvPicPr>
         <p:blipFill>
           <a:blip r:embed="rId2"/>
+          <a:srcRect b="22442"/>
           <a:stretch>
             <a:fillRect/>
           </a:stretch>
         </p:blipFill>
         <p:spPr>
           <a:xfrm>
-            <a:off x="457200" y="1280160"/>
-            <a:ext cx="8686800" cy="4297680"/>
+            <a:off x="457200" y="1142999"/>
+            <a:ext cx="7343874" cy="4469101"/>
           </a:xfrm>
           <a:prstGeom prst="rect">
             <a:avLst/>
@@ -5567,7 +4509,7 @@
           <a:noFill/>
         </p:spPr>
         <p:txBody>
-          <a:bodyPr wrap="square" lIns="0" rIns="0" tIns="0" bIns="0" anchor="t">
+          <a:bodyPr wrap="square" lIns="0" tIns="0" rIns="0" bIns="0" anchor="t">
             <a:spAutoFit/>
           </a:bodyPr>
           <a:lstStyle/>
@@ -5629,6 +4571,7 @@
           <a:lstStyle/>
           <a:p>
             <a:pPr algn="ctr"/>
+            <a:endParaRPr/>
           </a:p>
         </p:txBody>
       </p:sp>
@@ -5674,6 +4617,7 @@
           <a:lstStyle/>
           <a:p>
             <a:pPr algn="ctr"/>
+            <a:endParaRPr/>
           </a:p>
         </p:txBody>
       </p:sp>
@@ -5694,7 +4638,7 @@
           <a:noFill/>
         </p:spPr>
         <p:txBody>
-          <a:bodyPr wrap="square" lIns="0" rIns="0" tIns="0" bIns="0" anchor="t">
+          <a:bodyPr wrap="square" lIns="0" tIns="0" rIns="0" bIns="0" anchor="t">
             <a:spAutoFit/>
           </a:bodyPr>
           <a:lstStyle/>
@@ -5729,7 +4673,7 @@
           <a:noFill/>
         </p:spPr>
         <p:txBody>
-          <a:bodyPr wrap="square" lIns="0" rIns="0" tIns="0" bIns="0" anchor="ctr">
+          <a:bodyPr wrap="square" lIns="0" tIns="0" rIns="0" bIns="0" anchor="ctr">
             <a:spAutoFit/>
           </a:bodyPr>
           <a:lstStyle/>
@@ -5791,6 +4735,7 @@
           <a:lstStyle/>
           <a:p>
             <a:pPr algn="ctr"/>
+            <a:endParaRPr/>
           </a:p>
         </p:txBody>
       </p:sp>
@@ -5836,6 +4781,7 @@
           <a:lstStyle/>
           <a:p>
             <a:pPr algn="ctr"/>
+            <a:endParaRPr/>
           </a:p>
         </p:txBody>
       </p:sp>
@@ -5856,7 +4802,7 @@
           <a:noFill/>
         </p:spPr>
         <p:txBody>
-          <a:bodyPr wrap="square" lIns="0" rIns="0" tIns="0" bIns="0" anchor="t">
+          <a:bodyPr wrap="square" lIns="0" tIns="0" rIns="0" bIns="0" anchor="t">
             <a:spAutoFit/>
           </a:bodyPr>
           <a:lstStyle/>
@@ -5891,7 +4837,7 @@
           <a:noFill/>
         </p:spPr>
         <p:txBody>
-          <a:bodyPr wrap="square" lIns="0" rIns="0" tIns="0" bIns="0" anchor="ctr">
+          <a:bodyPr wrap="square" lIns="0" tIns="0" rIns="0" bIns="0" anchor="ctr">
             <a:spAutoFit/>
           </a:bodyPr>
           <a:lstStyle/>
@@ -5953,6 +4899,7 @@
           <a:lstStyle/>
           <a:p>
             <a:pPr algn="ctr"/>
+            <a:endParaRPr/>
           </a:p>
         </p:txBody>
       </p:sp>
@@ -5998,6 +4945,7 @@
           <a:lstStyle/>
           <a:p>
             <a:pPr algn="ctr"/>
+            <a:endParaRPr/>
           </a:p>
         </p:txBody>
       </p:sp>
@@ -6018,7 +4966,7 @@
           <a:noFill/>
         </p:spPr>
         <p:txBody>
-          <a:bodyPr wrap="square" lIns="0" rIns="0" tIns="0" bIns="0" anchor="t">
+          <a:bodyPr wrap="square" lIns="0" tIns="0" rIns="0" bIns="0" anchor="t">
             <a:spAutoFit/>
           </a:bodyPr>
           <a:lstStyle/>
@@ -6053,7 +5001,7 @@
           <a:noFill/>
         </p:spPr>
         <p:txBody>
-          <a:bodyPr wrap="square" lIns="0" rIns="0" tIns="0" bIns="0" anchor="ctr">
+          <a:bodyPr wrap="square" lIns="0" tIns="0" rIns="0" bIns="0" anchor="ctr">
             <a:spAutoFit/>
           </a:bodyPr>
           <a:lstStyle/>
@@ -6115,6 +5063,7 @@
           <a:lstStyle/>
           <a:p>
             <a:pPr algn="ctr"/>
+            <a:endParaRPr/>
           </a:p>
         </p:txBody>
       </p:sp>
@@ -6160,6 +5109,7 @@
           <a:lstStyle/>
           <a:p>
             <a:pPr algn="ctr"/>
+            <a:endParaRPr/>
           </a:p>
         </p:txBody>
       </p:sp>
@@ -6180,7 +5130,7 @@
           <a:noFill/>
         </p:spPr>
         <p:txBody>
-          <a:bodyPr wrap="square" lIns="0" rIns="0" tIns="0" bIns="0" anchor="t">
+          <a:bodyPr wrap="square" lIns="0" tIns="0" rIns="0" bIns="0" anchor="t">
             <a:spAutoFit/>
           </a:bodyPr>
           <a:lstStyle/>
@@ -6194,41 +5144,6 @@
                 <a:latin typeface="Yu Gothic"/>
               </a:rPr>
               <a:t>推定コスト</a:t>
-            </a:r>
-          </a:p>
-        </p:txBody>
-      </p:sp>
-      <p:sp>
-        <p:nvSpPr>
-          <p:cNvPr id="24" name="TextBox 23"/>
-          <p:cNvSpPr txBox="1"/>
-          <p:nvPr/>
-        </p:nvSpPr>
-        <p:spPr>
-          <a:xfrm>
-            <a:off x="9555480" y="4956048"/>
-            <a:ext cx="2286000" cy="457200"/>
-          </a:xfrm>
-          <a:prstGeom prst="rect">
-            <a:avLst/>
-          </a:prstGeom>
-          <a:noFill/>
-        </p:spPr>
-        <p:txBody>
-          <a:bodyPr wrap="square" lIns="0" rIns="0" tIns="0" bIns="0" anchor="ctr">
-            <a:spAutoFit/>
-          </a:bodyPr>
-          <a:lstStyle/>
-          <a:p>
-            <a:pPr algn="l"/>
-            <a:r>
-              <a:rPr sz="2000" b="1">
-                <a:solidFill>
-                  <a:srgbClr val="D83B01"/>
-                </a:solidFill>
-                <a:latin typeface="Yu Gothic"/>
-              </a:rPr>
-              <a:t>700,000円</a:t>
             </a:r>
           </a:p>
         </p:txBody>
@@ -6275,6 +5190,7 @@
           <a:lstStyle/>
           <a:p>
             <a:pPr algn="ctr"/>
+            <a:endParaRPr/>
           </a:p>
         </p:txBody>
       </p:sp>
@@ -6295,7 +5211,7 @@
           <a:noFill/>
         </p:spPr>
         <p:txBody>
-          <a:bodyPr wrap="square" lIns="0" rIns="0" tIns="0" bIns="0" anchor="ctr">
+          <a:bodyPr wrap="square" lIns="0" tIns="0" rIns="0" bIns="0" anchor="ctr">
             <a:spAutoFit/>
           </a:bodyPr>
           <a:lstStyle/>
@@ -6330,7 +5246,7 @@
           <a:noFill/>
         </p:spPr>
         <p:txBody>
-          <a:bodyPr wrap="square" lIns="0" rIns="0" tIns="0" bIns="0" anchor="t">
+          <a:bodyPr wrap="square" lIns="0" tIns="0" rIns="0" bIns="0" anchor="t">
             <a:spAutoFit/>
           </a:bodyPr>
           <a:lstStyle/>
@@ -6365,7 +5281,7 @@
           <a:noFill/>
         </p:spPr>
         <p:txBody>
-          <a:bodyPr wrap="square" lIns="0" rIns="0" tIns="0" bIns="0" anchor="t">
+          <a:bodyPr wrap="square" lIns="0" tIns="0" rIns="0" bIns="0" anchor="t">
             <a:spAutoFit/>
           </a:bodyPr>
           <a:lstStyle/>
@@ -6392,7 +5308,7 @@
 </file>
 
 <file path=ppt/slides/slide5.xml><?xml version="1.0" encoding="utf-8"?>
-<p:sld xmlns:a="http://schemas.openxmlformats.org/drawingml/2006/main" xmlns:p="http://schemas.openxmlformats.org/presentationml/2006/main" xmlns:r="http://schemas.openxmlformats.org/officeDocument/2006/relationships">
+<p:sld xmlns:a="http://schemas.openxmlformats.org/drawingml/2006/main" xmlns:r="http://schemas.openxmlformats.org/officeDocument/2006/relationships" xmlns:p="http://schemas.openxmlformats.org/presentationml/2006/main">
   <p:cSld>
     <p:spTree>
       <p:nvGrpSpPr>
@@ -6400,7 +5316,14 @@
         <p:cNvGrpSpPr/>
         <p:nvPr/>
       </p:nvGrpSpPr>
-      <p:grpSpPr/>
+      <p:grpSpPr>
+        <a:xfrm>
+          <a:off x="0" y="0"/>
+          <a:ext cx="0" cy="0"/>
+          <a:chOff x="0" y="0"/>
+          <a:chExt cx="0" cy="0"/>
+        </a:xfrm>
+      </p:grpSpPr>
       <p:sp>
         <p:nvSpPr>
           <p:cNvPr id="2" name="Rounded Rectangle 1"/>
@@ -6443,6 +5366,7 @@
           <a:lstStyle/>
           <a:p>
             <a:pPr algn="ctr"/>
+            <a:endParaRPr/>
           </a:p>
         </p:txBody>
       </p:sp>
@@ -6488,6 +5412,7 @@
           <a:lstStyle/>
           <a:p>
             <a:pPr algn="ctr"/>
+            <a:endParaRPr/>
           </a:p>
         </p:txBody>
       </p:sp>
@@ -6508,7 +5433,7 @@
           <a:noFill/>
         </p:spPr>
         <p:txBody>
-          <a:bodyPr wrap="square" lIns="0" rIns="0" tIns="0" bIns="0" anchor="ctr">
+          <a:bodyPr wrap="square" lIns="0" tIns="0" rIns="0" bIns="0" anchor="ctr">
             <a:spAutoFit/>
           </a:bodyPr>
           <a:lstStyle/>
@@ -6543,7 +5468,7 @@
           <a:noFill/>
         </p:spPr>
         <p:txBody>
-          <a:bodyPr wrap="square" lIns="0" rIns="0" tIns="0" bIns="0" anchor="ctr">
+          <a:bodyPr wrap="square" lIns="0" tIns="0" rIns="0" bIns="0" anchor="ctr">
             <a:spAutoFit/>
           </a:bodyPr>
           <a:lstStyle/>
@@ -6603,6 +5528,7 @@
           <a:lstStyle/>
           <a:p>
             <a:pPr algn="ctr"/>
+            <a:endParaRPr/>
           </a:p>
         </p:txBody>
       </p:sp>
@@ -6650,6 +5576,7 @@
           <a:lstStyle/>
           <a:p>
             <a:pPr algn="ctr"/>
+            <a:endParaRPr/>
           </a:p>
         </p:txBody>
       </p:sp>
@@ -6670,7 +5597,7 @@
           <a:noFill/>
         </p:spPr>
         <p:txBody>
-          <a:bodyPr wrap="square" lIns="0" rIns="0" tIns="0" bIns="0" anchor="ctr">
+          <a:bodyPr wrap="square" lIns="0" tIns="0" rIns="0" bIns="0" anchor="ctr">
             <a:spAutoFit/>
           </a:bodyPr>
           <a:lstStyle/>
@@ -6732,6 +5659,7 @@
           <a:lstStyle/>
           <a:p>
             <a:pPr algn="ctr"/>
+            <a:endParaRPr/>
           </a:p>
         </p:txBody>
       </p:sp>
@@ -6752,7 +5680,7 @@
           <a:noFill/>
         </p:spPr>
         <p:txBody>
-          <a:bodyPr wrap="square" lIns="0" rIns="0" tIns="0" bIns="0" anchor="ctr">
+          <a:bodyPr wrap="square" lIns="0" tIns="0" rIns="0" bIns="0" anchor="ctr">
             <a:spAutoFit/>
           </a:bodyPr>
           <a:lstStyle/>
@@ -6772,41 +5700,6 @@
       </p:sp>
       <p:sp>
         <p:nvSpPr>
-          <p:cNvPr id="11" name="TextBox 10"/>
-          <p:cNvSpPr txBox="1"/>
-          <p:nvPr/>
-        </p:nvSpPr>
-        <p:spPr>
-          <a:xfrm>
-            <a:off x="10515600" y="3520440"/>
-            <a:ext cx="1371600" cy="365760"/>
-          </a:xfrm>
-          <a:prstGeom prst="rect">
-            <a:avLst/>
-          </a:prstGeom>
-          <a:noFill/>
-        </p:spPr>
-        <p:txBody>
-          <a:bodyPr wrap="square" lIns="0" rIns="0" tIns="0" bIns="0" anchor="t">
-            <a:spAutoFit/>
-          </a:bodyPr>
-          <a:lstStyle/>
-          <a:p>
-            <a:pPr algn="l"/>
-            <a:r>
-              <a:rPr sz="1400" b="1">
-                <a:solidFill>
-                  <a:srgbClr val="605E5C"/>
-                </a:solidFill>
-                <a:latin typeface="Yu Gothic"/>
-              </a:rPr>
-              <a:t>💭 モヤッ</a:t>
-            </a:r>
-          </a:p>
-        </p:txBody>
-      </p:sp>
-      <p:sp>
-        <p:nvSpPr>
           <p:cNvPr id="12" name="TextBox 11"/>
           <p:cNvSpPr txBox="1"/>
           <p:nvPr/>
@@ -6822,7 +5715,7 @@
           <a:noFill/>
         </p:spPr>
         <p:txBody>
-          <a:bodyPr wrap="square" lIns="0" rIns="0" tIns="0" bIns="0" anchor="t">
+          <a:bodyPr wrap="square" lIns="0" tIns="0" rIns="0" bIns="0" anchor="t">
             <a:spAutoFit/>
           </a:bodyPr>
           <a:lstStyle/>
@@ -6882,6 +5775,7 @@
           <a:lstStyle/>
           <a:p>
             <a:pPr algn="ctr"/>
+            <a:endParaRPr/>
           </a:p>
         </p:txBody>
       </p:sp>
@@ -6902,7 +5796,7 @@
           <a:noFill/>
         </p:spPr>
         <p:txBody>
-          <a:bodyPr wrap="square" lIns="0" rIns="0" tIns="0" bIns="0" anchor="t">
+          <a:bodyPr wrap="square" lIns="0" tIns="0" rIns="0" bIns="0" anchor="t">
             <a:spAutoFit/>
           </a:bodyPr>
           <a:lstStyle/>
@@ -6937,7 +5831,7 @@
           <a:noFill/>
         </p:spPr>
         <p:txBody>
-          <a:bodyPr wrap="square" lIns="0" rIns="0" tIns="0" bIns="0" anchor="t">
+          <a:bodyPr wrap="square" lIns="0" tIns="0" rIns="0" bIns="0" anchor="t">
             <a:spAutoFit/>
           </a:bodyPr>
           <a:lstStyle/>
@@ -6972,7 +5866,7 @@
           <a:noFill/>
         </p:spPr>
         <p:txBody>
-          <a:bodyPr wrap="square" lIns="0" rIns="0" tIns="0" bIns="0" anchor="t">
+          <a:bodyPr wrap="square" lIns="0" tIns="0" rIns="0" bIns="0" anchor="t">
             <a:spAutoFit/>
           </a:bodyPr>
           <a:lstStyle/>
@@ -7007,7 +5901,7 @@
           <a:noFill/>
         </p:spPr>
         <p:txBody>
-          <a:bodyPr wrap="square" lIns="0" rIns="0" tIns="0" bIns="0" anchor="t">
+          <a:bodyPr wrap="square" lIns="0" tIns="0" rIns="0" bIns="0" anchor="t">
             <a:spAutoFit/>
           </a:bodyPr>
           <a:lstStyle/>
@@ -7034,7 +5928,7 @@
 </file>
 
 <file path=ppt/slides/slide6.xml><?xml version="1.0" encoding="utf-8"?>
-<p:sld xmlns:a="http://schemas.openxmlformats.org/drawingml/2006/main" xmlns:p="http://schemas.openxmlformats.org/presentationml/2006/main" xmlns:r="http://schemas.openxmlformats.org/officeDocument/2006/relationships">
+<p:sld xmlns:a="http://schemas.openxmlformats.org/drawingml/2006/main" xmlns:r="http://schemas.openxmlformats.org/officeDocument/2006/relationships" xmlns:p="http://schemas.openxmlformats.org/presentationml/2006/main">
   <p:cSld>
     <p:spTree>
       <p:nvGrpSpPr>
@@ -7042,7 +5936,14 @@
         <p:cNvGrpSpPr/>
         <p:nvPr/>
       </p:nvGrpSpPr>
-      <p:grpSpPr/>
+      <p:grpSpPr>
+        <a:xfrm>
+          <a:off x="0" y="0"/>
+          <a:ext cx="0" cy="0"/>
+          <a:chOff x="0" y="0"/>
+          <a:chExt cx="0" cy="0"/>
+        </a:xfrm>
+      </p:grpSpPr>
       <p:sp>
         <p:nvSpPr>
           <p:cNvPr id="2" name="Rounded Rectangle 1"/>
@@ -7085,6 +5986,7 @@
           <a:lstStyle/>
           <a:p>
             <a:pPr algn="ctr"/>
+            <a:endParaRPr/>
           </a:p>
         </p:txBody>
       </p:sp>
@@ -7130,6 +6032,7 @@
           <a:lstStyle/>
           <a:p>
             <a:pPr algn="ctr"/>
+            <a:endParaRPr/>
           </a:p>
         </p:txBody>
       </p:sp>
@@ -7150,7 +6053,7 @@
           <a:noFill/>
         </p:spPr>
         <p:txBody>
-          <a:bodyPr wrap="square" lIns="0" rIns="0" tIns="0" bIns="0" anchor="ctr">
+          <a:bodyPr wrap="square" lIns="0" tIns="0" rIns="0" bIns="0" anchor="ctr">
             <a:spAutoFit/>
           </a:bodyPr>
           <a:lstStyle/>
@@ -7185,7 +6088,7 @@
           <a:noFill/>
         </p:spPr>
         <p:txBody>
-          <a:bodyPr wrap="square" lIns="0" rIns="0" tIns="0" bIns="0" anchor="ctr">
+          <a:bodyPr wrap="square" lIns="0" tIns="0" rIns="0" bIns="0" anchor="ctr">
             <a:spAutoFit/>
           </a:bodyPr>
           <a:lstStyle/>
@@ -7245,6 +6148,7 @@
           <a:lstStyle/>
           <a:p>
             <a:pPr algn="ctr"/>
+            <a:endParaRPr/>
           </a:p>
         </p:txBody>
       </p:sp>
@@ -7292,6 +6196,7 @@
           <a:lstStyle/>
           <a:p>
             <a:pPr algn="ctr"/>
+            <a:endParaRPr/>
           </a:p>
         </p:txBody>
       </p:sp>
@@ -7337,6 +6242,7 @@
           <a:lstStyle/>
           <a:p>
             <a:pPr algn="ctr"/>
+            <a:endParaRPr/>
           </a:p>
         </p:txBody>
       </p:sp>
@@ -7357,7 +6263,7 @@
           <a:noFill/>
         </p:spPr>
         <p:txBody>
-          <a:bodyPr wrap="square" lIns="0" rIns="0" tIns="0" bIns="0" anchor="ctr">
+          <a:bodyPr wrap="square" lIns="0" tIns="0" rIns="0" bIns="0" anchor="ctr">
             <a:spAutoFit/>
           </a:bodyPr>
           <a:lstStyle/>
@@ -7384,7 +6290,7 @@
         <p:spPr>
           <a:xfrm>
             <a:off x="777240" y="1874519"/>
-            <a:ext cx="4937760" cy="4114800"/>
+            <a:ext cx="5029200" cy="3908762"/>
           </a:xfrm>
           <a:prstGeom prst="rect">
             <a:avLst/>
@@ -7399,7 +6305,7 @@
           <a:p>
             <a:pPr algn="l"/>
             <a:r>
-              <a:rPr sz="1100" b="1">
+              <a:rPr sz="1400" b="1">
                 <a:solidFill>
                   <a:srgbClr val="323130"/>
                 </a:solidFill>
@@ -7411,175 +6317,163 @@
           <a:p>
             <a:pPr algn="l"/>
             <a:r>
+              <a:rPr b="0">
+                <a:solidFill>
+                  <a:srgbClr val="323130"/>
+                </a:solidFill>
+                <a:latin typeface="Yu Gothic"/>
+              </a:rPr>
+              <a:t>「会議のコストを可視化したい」</a:t>
+            </a:r>
+          </a:p>
+          <a:p>
+            <a:pPr algn="l"/>
+            <a:endParaRPr b="0">
+              <a:solidFill>
+                <a:srgbClr val="323130"/>
+              </a:solidFill>
+              <a:latin typeface="Yu Gothic"/>
+            </a:endParaRPr>
+          </a:p>
+          <a:p>
+            <a:pPr algn="l"/>
+            <a:r>
+              <a:rPr sz="1400" b="1">
+                <a:solidFill>
+                  <a:srgbClr val="323130"/>
+                </a:solidFill>
+                <a:latin typeface="Yu Gothic"/>
+              </a:rPr>
+              <a:t>Copilot:</a:t>
+            </a:r>
+          </a:p>
+          <a:p>
+            <a:pPr algn="l"/>
+            <a:r>
+              <a:rPr sz="1600" b="0">
+                <a:solidFill>
+                  <a:srgbClr val="323130"/>
+                </a:solidFill>
+                <a:latin typeface="Yu Gothic"/>
+              </a:rPr>
+              <a:t>「Power Automateで作れますよ」</a:t>
+            </a:r>
+          </a:p>
+          <a:p>
+            <a:pPr algn="l"/>
+            <a:r>
+              <a:rPr sz="1600" b="0">
+                <a:solidFill>
+                  <a:srgbClr val="323130"/>
+                </a:solidFill>
+                <a:latin typeface="Yu Gothic"/>
+              </a:rPr>
+              <a:t>「Outlookトリガー＋7アクションでOK」</a:t>
+            </a:r>
+          </a:p>
+          <a:p>
+            <a:pPr algn="l"/>
+            <a:endParaRPr sz="1600" b="0">
+              <a:solidFill>
+                <a:srgbClr val="323130"/>
+              </a:solidFill>
+              <a:latin typeface="Yu Gothic"/>
+            </a:endParaRPr>
+          </a:p>
+          <a:p>
+            <a:pPr algn="l"/>
+            <a:r>
+              <a:rPr sz="1400" b="1">
+                <a:solidFill>
+                  <a:srgbClr val="323130"/>
+                </a:solidFill>
+                <a:latin typeface="Yu Gothic"/>
+              </a:rPr>
+              <a:t>自分:</a:t>
+            </a:r>
+          </a:p>
+          <a:p>
+            <a:pPr algn="l"/>
+            <a:r>
+              <a:rPr b="0">
+                <a:solidFill>
+                  <a:srgbClr val="323130"/>
+                </a:solidFill>
+                <a:latin typeface="Yu Gothic"/>
+              </a:rPr>
+              <a:t>「式どう書くの？」</a:t>
+            </a:r>
+          </a:p>
+          <a:p>
+            <a:pPr algn="l"/>
+            <a:endParaRPr b="0">
+              <a:solidFill>
+                <a:srgbClr val="323130"/>
+              </a:solidFill>
+              <a:latin typeface="Yu Gothic"/>
+            </a:endParaRPr>
+          </a:p>
+          <a:p>
+            <a:pPr algn="l"/>
+            <a:r>
+              <a:rPr sz="1400" b="1">
+                <a:solidFill>
+                  <a:srgbClr val="323130"/>
+                </a:solidFill>
+                <a:latin typeface="Yu Gothic"/>
+              </a:rPr>
+              <a:t>Copilot:</a:t>
+            </a:r>
+          </a:p>
+          <a:p>
+            <a:pPr algn="l"/>
+            <a:r>
               <a:rPr sz="1400" b="0">
                 <a:solidFill>
                   <a:srgbClr val="323130"/>
                 </a:solidFill>
                 <a:latin typeface="Yu Gothic"/>
               </a:rPr>
-              <a:t>「会議のコストを可視化したい」</a:t>
+              <a:t>div(sub(ticks(end),ticks(start)),</a:t>
             </a:r>
           </a:p>
           <a:p>
             <a:pPr algn="l"/>
             <a:r>
-              <a:rPr sz="600" b="0">
+              <a:rPr sz="1400" b="0">
                 <a:solidFill>
                   <a:srgbClr val="323130"/>
                 </a:solidFill>
                 <a:latin typeface="Yu Gothic"/>
               </a:rPr>
-              <a:t/>
+              <a:t>  600000000)</a:t>
             </a:r>
           </a:p>
           <a:p>
             <a:pPr algn="l"/>
-            <a:r>
-              <a:rPr sz="1100" b="1">
+            <a:endParaRPr sz="1400" b="0">
+              <a:solidFill>
+                <a:srgbClr val="323130"/>
+              </a:solidFill>
+              <a:latin typeface="Yu Gothic"/>
+            </a:endParaRPr>
+          </a:p>
+          <a:p>
+            <a:pPr algn="l"/>
+            <a:r>
+              <a:rPr sz="1400" b="1">
                 <a:solidFill>
                   <a:srgbClr val="323130"/>
                 </a:solidFill>
                 <a:latin typeface="Yu Gothic"/>
               </a:rPr>
-              <a:t>Copilot:</a:t>
+              <a:t>自分:</a:t>
             </a:r>
           </a:p>
           <a:p>
             <a:pPr algn="l"/>
             <a:r>
-              <a:rPr sz="1300" b="0">
-                <a:solidFill>
-                  <a:srgbClr val="323130"/>
-                </a:solidFill>
-                <a:latin typeface="Yu Gothic"/>
-              </a:rPr>
-              <a:t>「Power Automateで作れますよ」</a:t>
-            </a:r>
-          </a:p>
-          <a:p>
-            <a:pPr algn="l"/>
-            <a:r>
-              <a:rPr sz="1300" b="0">
-                <a:solidFill>
-                  <a:srgbClr val="323130"/>
-                </a:solidFill>
-                <a:latin typeface="Yu Gothic"/>
-              </a:rPr>
-              <a:t>「Outlookトリガー＋7アクションでOK」</a:t>
-            </a:r>
-          </a:p>
-          <a:p>
-            <a:pPr algn="l"/>
-            <a:r>
-              <a:rPr sz="600" b="0">
-                <a:solidFill>
-                  <a:srgbClr val="323130"/>
-                </a:solidFill>
-                <a:latin typeface="Yu Gothic"/>
-              </a:rPr>
-              <a:t/>
-            </a:r>
-          </a:p>
-          <a:p>
-            <a:pPr algn="l"/>
-            <a:r>
-              <a:rPr sz="1100" b="1">
-                <a:solidFill>
-                  <a:srgbClr val="323130"/>
-                </a:solidFill>
-                <a:latin typeface="Yu Gothic"/>
-              </a:rPr>
-              <a:t>自分:</a:t>
-            </a:r>
-          </a:p>
-          <a:p>
-            <a:pPr algn="l"/>
-            <a:r>
-              <a:rPr sz="1400" b="0">
-                <a:solidFill>
-                  <a:srgbClr val="323130"/>
-                </a:solidFill>
-                <a:latin typeface="Yu Gothic"/>
-              </a:rPr>
-              <a:t>「式どう書くの？」</a:t>
-            </a:r>
-          </a:p>
-          <a:p>
-            <a:pPr algn="l"/>
-            <a:r>
-              <a:rPr sz="600" b="0">
-                <a:solidFill>
-                  <a:srgbClr val="323130"/>
-                </a:solidFill>
-                <a:latin typeface="Yu Gothic"/>
-              </a:rPr>
-              <a:t/>
-            </a:r>
-          </a:p>
-          <a:p>
-            <a:pPr algn="l"/>
-            <a:r>
-              <a:rPr sz="1100" b="1">
-                <a:solidFill>
-                  <a:srgbClr val="323130"/>
-                </a:solidFill>
-                <a:latin typeface="Yu Gothic"/>
-              </a:rPr>
-              <a:t>Copilot:</a:t>
-            </a:r>
-          </a:p>
-          <a:p>
-            <a:pPr algn="l"/>
-            <a:r>
-              <a:rPr sz="1100" b="0">
-                <a:solidFill>
-                  <a:srgbClr val="323130"/>
-                </a:solidFill>
-                <a:latin typeface="Yu Gothic"/>
-              </a:rPr>
-              <a:t>div(sub(ticks(end),ticks(start)),</a:t>
-            </a:r>
-          </a:p>
-          <a:p>
-            <a:pPr algn="l"/>
-            <a:r>
-              <a:rPr sz="1100" b="0">
-                <a:solidFill>
-                  <a:srgbClr val="323130"/>
-                </a:solidFill>
-                <a:latin typeface="Yu Gothic"/>
-              </a:rPr>
-              <a:t>  600000000)</a:t>
-            </a:r>
-          </a:p>
-          <a:p>
-            <a:pPr algn="l"/>
-            <a:r>
-              <a:rPr sz="600" b="0">
-                <a:solidFill>
-                  <a:srgbClr val="323130"/>
-                </a:solidFill>
-                <a:latin typeface="Yu Gothic"/>
-              </a:rPr>
-              <a:t/>
-            </a:r>
-          </a:p>
-          <a:p>
-            <a:pPr algn="l"/>
-            <a:r>
-              <a:rPr sz="1100" b="1">
-                <a:solidFill>
-                  <a:srgbClr val="323130"/>
-                </a:solidFill>
-                <a:latin typeface="Yu Gothic"/>
-              </a:rPr>
-              <a:t>自分:</a:t>
-            </a:r>
-          </a:p>
-          <a:p>
-            <a:pPr algn="l"/>
-            <a:r>
-              <a:rPr sz="1400" b="0">
+              <a:rPr b="0">
                 <a:solidFill>
                   <a:srgbClr val="323130"/>
                 </a:solidFill>
@@ -7634,6 +6528,7 @@
           <a:lstStyle/>
           <a:p>
             <a:pPr algn="ctr"/>
+            <a:endParaRPr/>
           </a:p>
         </p:txBody>
       </p:sp>
@@ -7679,6 +6574,7 @@
           <a:lstStyle/>
           <a:p>
             <a:pPr algn="ctr"/>
+            <a:endParaRPr/>
           </a:p>
         </p:txBody>
       </p:sp>
@@ -7699,7 +6595,7 @@
           <a:noFill/>
         </p:spPr>
         <p:txBody>
-          <a:bodyPr wrap="square" lIns="0" rIns="0" tIns="0" bIns="0" anchor="ctr">
+          <a:bodyPr wrap="square" lIns="0" tIns="0" rIns="0" bIns="0" anchor="ctr">
             <a:spAutoFit/>
           </a:bodyPr>
           <a:lstStyle/>
@@ -7759,6 +6655,7 @@
           <a:lstStyle/>
           <a:p>
             <a:pPr algn="ctr"/>
+            <a:endParaRPr/>
           </a:p>
         </p:txBody>
       </p:sp>
@@ -7779,7 +6676,7 @@
           <a:noFill/>
         </p:spPr>
         <p:txBody>
-          <a:bodyPr wrap="square" lIns="0" rIns="0" tIns="0" bIns="0" anchor="ctr">
+          <a:bodyPr wrap="square" lIns="0" tIns="0" rIns="0" bIns="0" anchor="ctr">
             <a:spAutoFit/>
           </a:bodyPr>
           <a:lstStyle/>
@@ -7805,23 +6702,23 @@
         </p:nvSpPr>
         <p:spPr>
           <a:xfrm>
-            <a:off x="7086600" y="1965960"/>
-            <a:ext cx="4572000" cy="384048"/>
-          </a:xfrm>
-          <a:prstGeom prst="rect">
-            <a:avLst/>
-          </a:prstGeom>
-          <a:noFill/>
-        </p:spPr>
-        <p:txBody>
-          <a:bodyPr wrap="square" lIns="0" rIns="0" tIns="0" bIns="0" anchor="ctr">
+            <a:off x="7086600" y="2070386"/>
+            <a:ext cx="4572000" cy="246221"/>
+          </a:xfrm>
+          <a:prstGeom prst="rect">
+            <a:avLst/>
+          </a:prstGeom>
+          <a:noFill/>
+        </p:spPr>
+        <p:txBody>
+          <a:bodyPr wrap="square" lIns="0" tIns="0" rIns="0" bIns="0" anchor="ctr">
             <a:spAutoFit/>
           </a:bodyPr>
           <a:lstStyle/>
           <a:p>
             <a:pPr algn="l"/>
             <a:r>
-              <a:rPr sz="1200" b="0">
+              <a:rPr sz="1600" b="0">
                 <a:solidFill>
                   <a:srgbClr val="323130"/>
                 </a:solidFill>
@@ -7874,6 +6771,7 @@
           <a:lstStyle/>
           <a:p>
             <a:pPr algn="ctr"/>
+            <a:endParaRPr/>
           </a:p>
         </p:txBody>
       </p:sp>
@@ -7894,7 +6792,7 @@
           <a:noFill/>
         </p:spPr>
         <p:txBody>
-          <a:bodyPr wrap="square" lIns="0" rIns="0" tIns="0" bIns="0" anchor="ctr">
+          <a:bodyPr wrap="square" lIns="0" tIns="0" rIns="0" bIns="0" anchor="ctr">
             <a:spAutoFit/>
           </a:bodyPr>
           <a:lstStyle/>
@@ -7920,23 +6818,23 @@
         </p:nvSpPr>
         <p:spPr>
           <a:xfrm>
-            <a:off x="7086600" y="2532888"/>
-            <a:ext cx="4572000" cy="384048"/>
-          </a:xfrm>
-          <a:prstGeom prst="rect">
-            <a:avLst/>
-          </a:prstGeom>
-          <a:noFill/>
-        </p:spPr>
-        <p:txBody>
-          <a:bodyPr wrap="square" lIns="0" rIns="0" tIns="0" bIns="0" anchor="ctr">
+            <a:off x="7086600" y="2637314"/>
+            <a:ext cx="4572000" cy="246221"/>
+          </a:xfrm>
+          <a:prstGeom prst="rect">
+            <a:avLst/>
+          </a:prstGeom>
+          <a:noFill/>
+        </p:spPr>
+        <p:txBody>
+          <a:bodyPr wrap="square" lIns="0" tIns="0" rIns="0" bIns="0" anchor="ctr">
             <a:spAutoFit/>
           </a:bodyPr>
           <a:lstStyle/>
           <a:p>
             <a:pPr algn="l"/>
             <a:r>
-              <a:rPr sz="1200" b="0">
+              <a:rPr sz="1600" b="0">
                 <a:solidFill>
                   <a:srgbClr val="323130"/>
                 </a:solidFill>
@@ -7989,6 +6887,7 @@
           <a:lstStyle/>
           <a:p>
             <a:pPr algn="ctr"/>
+            <a:endParaRPr/>
           </a:p>
         </p:txBody>
       </p:sp>
@@ -8009,7 +6908,7 @@
           <a:noFill/>
         </p:spPr>
         <p:txBody>
-          <a:bodyPr wrap="square" lIns="0" rIns="0" tIns="0" bIns="0" anchor="ctr">
+          <a:bodyPr wrap="square" lIns="0" tIns="0" rIns="0" bIns="0" anchor="ctr">
             <a:spAutoFit/>
           </a:bodyPr>
           <a:lstStyle/>
@@ -8035,23 +6934,23 @@
         </p:nvSpPr>
         <p:spPr>
           <a:xfrm>
-            <a:off x="7086600" y="3099815"/>
-            <a:ext cx="4572000" cy="384048"/>
-          </a:xfrm>
-          <a:prstGeom prst="rect">
-            <a:avLst/>
-          </a:prstGeom>
-          <a:noFill/>
-        </p:spPr>
-        <p:txBody>
-          <a:bodyPr wrap="square" lIns="0" rIns="0" tIns="0" bIns="0" anchor="ctr">
+            <a:off x="7086600" y="3149378"/>
+            <a:ext cx="4572000" cy="246221"/>
+          </a:xfrm>
+          <a:prstGeom prst="rect">
+            <a:avLst/>
+          </a:prstGeom>
+          <a:noFill/>
+        </p:spPr>
+        <p:txBody>
+          <a:bodyPr wrap="square" lIns="0" tIns="0" rIns="0" bIns="0" anchor="ctr">
             <a:spAutoFit/>
           </a:bodyPr>
           <a:lstStyle/>
           <a:p>
             <a:pPr algn="l"/>
             <a:r>
-              <a:rPr sz="1200" b="0">
+              <a:rPr sz="1600" b="0">
                 <a:solidFill>
                   <a:srgbClr val="323130"/>
                 </a:solidFill>
@@ -8104,6 +7003,7 @@
           <a:lstStyle/>
           <a:p>
             <a:pPr algn="ctr"/>
+            <a:endParaRPr/>
           </a:p>
         </p:txBody>
       </p:sp>
@@ -8124,7 +7024,7 @@
           <a:noFill/>
         </p:spPr>
         <p:txBody>
-          <a:bodyPr wrap="square" lIns="0" rIns="0" tIns="0" bIns="0" anchor="ctr">
+          <a:bodyPr wrap="square" lIns="0" tIns="0" rIns="0" bIns="0" anchor="ctr">
             <a:spAutoFit/>
           </a:bodyPr>
           <a:lstStyle/>
@@ -8150,23 +7050,23 @@
         </p:nvSpPr>
         <p:spPr>
           <a:xfrm>
-            <a:off x="7086600" y="3666744"/>
-            <a:ext cx="4572000" cy="384048"/>
-          </a:xfrm>
-          <a:prstGeom prst="rect">
-            <a:avLst/>
-          </a:prstGeom>
-          <a:noFill/>
-        </p:spPr>
-        <p:txBody>
-          <a:bodyPr wrap="square" lIns="0" rIns="0" tIns="0" bIns="0" anchor="ctr">
+            <a:off x="7086600" y="3716307"/>
+            <a:ext cx="4572000" cy="246221"/>
+          </a:xfrm>
+          <a:prstGeom prst="rect">
+            <a:avLst/>
+          </a:prstGeom>
+          <a:noFill/>
+        </p:spPr>
+        <p:txBody>
+          <a:bodyPr wrap="square" lIns="0" tIns="0" rIns="0" bIns="0" anchor="ctr">
             <a:spAutoFit/>
           </a:bodyPr>
           <a:lstStyle/>
           <a:p>
             <a:pPr algn="l"/>
             <a:r>
-              <a:rPr sz="1200" b="0">
+              <a:rPr sz="1600" b="0">
                 <a:solidFill>
                   <a:srgbClr val="323130"/>
                 </a:solidFill>
@@ -8219,6 +7119,7 @@
           <a:lstStyle/>
           <a:p>
             <a:pPr algn="ctr"/>
+            <a:endParaRPr/>
           </a:p>
         </p:txBody>
       </p:sp>
@@ -8239,7 +7140,7 @@
           <a:noFill/>
         </p:spPr>
         <p:txBody>
-          <a:bodyPr wrap="square" lIns="0" rIns="0" tIns="0" bIns="0" anchor="ctr">
+          <a:bodyPr wrap="square" lIns="0" tIns="0" rIns="0" bIns="0" anchor="ctr">
             <a:spAutoFit/>
           </a:bodyPr>
           <a:lstStyle/>
@@ -8265,23 +7166,23 @@
         </p:nvSpPr>
         <p:spPr>
           <a:xfrm>
-            <a:off x="7086600" y="4233672"/>
-            <a:ext cx="4572000" cy="384048"/>
-          </a:xfrm>
-          <a:prstGeom prst="rect">
-            <a:avLst/>
-          </a:prstGeom>
-          <a:noFill/>
-        </p:spPr>
-        <p:txBody>
-          <a:bodyPr wrap="square" lIns="0" rIns="0" tIns="0" bIns="0" anchor="ctr">
+            <a:off x="7086600" y="4283235"/>
+            <a:ext cx="4572000" cy="246221"/>
+          </a:xfrm>
+          <a:prstGeom prst="rect">
+            <a:avLst/>
+          </a:prstGeom>
+          <a:noFill/>
+        </p:spPr>
+        <p:txBody>
+          <a:bodyPr wrap="square" lIns="0" tIns="0" rIns="0" bIns="0" anchor="ctr">
             <a:spAutoFit/>
           </a:bodyPr>
           <a:lstStyle/>
           <a:p>
             <a:pPr algn="l"/>
             <a:r>
-              <a:rPr sz="1200" b="0">
+              <a:rPr sz="1600" b="0">
                 <a:solidFill>
                   <a:srgbClr val="323130"/>
                 </a:solidFill>
@@ -8334,6 +7235,7 @@
           <a:lstStyle/>
           <a:p>
             <a:pPr algn="ctr"/>
+            <a:endParaRPr/>
           </a:p>
         </p:txBody>
       </p:sp>
@@ -8354,7 +7256,7 @@
           <a:noFill/>
         </p:spPr>
         <p:txBody>
-          <a:bodyPr wrap="square" lIns="0" rIns="0" tIns="0" bIns="0" anchor="ctr">
+          <a:bodyPr wrap="square" lIns="0" tIns="0" rIns="0" bIns="0" anchor="ctr">
             <a:spAutoFit/>
           </a:bodyPr>
           <a:lstStyle/>
@@ -8380,23 +7282,23 @@
         </p:nvSpPr>
         <p:spPr>
           <a:xfrm>
-            <a:off x="7086600" y="4800600"/>
-            <a:ext cx="4572000" cy="384048"/>
-          </a:xfrm>
-          <a:prstGeom prst="rect">
-            <a:avLst/>
-          </a:prstGeom>
-          <a:noFill/>
-        </p:spPr>
-        <p:txBody>
-          <a:bodyPr wrap="square" lIns="0" rIns="0" tIns="0" bIns="0" anchor="ctr">
+            <a:off x="7086600" y="4850163"/>
+            <a:ext cx="4572000" cy="246221"/>
+          </a:xfrm>
+          <a:prstGeom prst="rect">
+            <a:avLst/>
+          </a:prstGeom>
+          <a:noFill/>
+        </p:spPr>
+        <p:txBody>
+          <a:bodyPr wrap="square" lIns="0" tIns="0" rIns="0" bIns="0" anchor="ctr">
             <a:spAutoFit/>
           </a:bodyPr>
           <a:lstStyle/>
           <a:p>
             <a:pPr algn="l"/>
             <a:r>
-              <a:rPr sz="1200" b="0">
+              <a:rPr sz="1600" b="0">
                 <a:solidFill>
                   <a:srgbClr val="323130"/>
                 </a:solidFill>
@@ -8449,6 +7351,7 @@
           <a:lstStyle/>
           <a:p>
             <a:pPr algn="ctr"/>
+            <a:endParaRPr/>
           </a:p>
         </p:txBody>
       </p:sp>
@@ -8469,7 +7372,7 @@
           <a:noFill/>
         </p:spPr>
         <p:txBody>
-          <a:bodyPr wrap="square" lIns="0" rIns="0" tIns="0" bIns="0" anchor="ctr">
+          <a:bodyPr wrap="square" lIns="0" tIns="0" rIns="0" bIns="0" anchor="ctr">
             <a:spAutoFit/>
           </a:bodyPr>
           <a:lstStyle/>
@@ -8495,29 +7398,47 @@
         </p:nvSpPr>
         <p:spPr>
           <a:xfrm>
-            <a:off x="7086600" y="5367527"/>
-            <a:ext cx="4572000" cy="384048"/>
-          </a:xfrm>
-          <a:prstGeom prst="rect">
-            <a:avLst/>
-          </a:prstGeom>
-          <a:noFill/>
-        </p:spPr>
-        <p:txBody>
-          <a:bodyPr wrap="square" lIns="0" rIns="0" tIns="0" bIns="0" anchor="ctr">
+            <a:off x="7086600" y="5417090"/>
+            <a:ext cx="4572000" cy="246221"/>
+          </a:xfrm>
+          <a:prstGeom prst="rect">
+            <a:avLst/>
+          </a:prstGeom>
+          <a:noFill/>
+        </p:spPr>
+        <p:txBody>
+          <a:bodyPr wrap="square" lIns="0" tIns="0" rIns="0" bIns="0" anchor="ctr">
             <a:spAutoFit/>
           </a:bodyPr>
           <a:lstStyle/>
           <a:p>
             <a:pPr algn="l"/>
             <a:r>
-              <a:rPr sz="1200" b="0">
+              <a:rPr sz="1600" b="0">
                 <a:solidFill>
                   <a:srgbClr val="323130"/>
                 </a:solidFill>
                 <a:latin typeface="Yu Gothic"/>
               </a:rPr>
-              <a:t>Teams投稿 (Flowbot)</a:t>
+              <a:t>Teams投稿</a:t>
+            </a:r>
+            <a:r>
+              <a:rPr lang="ja-JP" altLang="en-US" sz="1600" b="0">
+                <a:solidFill>
+                  <a:srgbClr val="323130"/>
+                </a:solidFill>
+                <a:latin typeface="Yu Gothic"/>
+              </a:rPr>
+              <a:t>ありがとうございました。 </a:t>
+            </a:r>
+            <a:r>
+              <a:rPr sz="1600" b="0">
+                <a:solidFill>
+                  <a:srgbClr val="323130"/>
+                </a:solidFill>
+                <a:latin typeface="Yu Gothic"/>
+              </a:rPr>
+              <a:t>(Flowbot)</a:t>
             </a:r>
           </a:p>
         </p:txBody>
@@ -8539,7 +7460,7 @@
           <a:noFill/>
         </p:spPr>
         <p:txBody>
-          <a:bodyPr wrap="square" lIns="0" rIns="0" tIns="0" bIns="0" anchor="t">
+          <a:bodyPr wrap="square" lIns="0" tIns="0" rIns="0" bIns="0" anchor="t">
             <a:spAutoFit/>
           </a:bodyPr>
           <a:lstStyle/>
@@ -8574,7 +7495,7 @@
           <a:noFill/>
         </p:spPr>
         <p:txBody>
-          <a:bodyPr wrap="square" lIns="0" rIns="0" tIns="0" bIns="0" anchor="t">
+          <a:bodyPr wrap="square" lIns="0" tIns="0" rIns="0" bIns="0" anchor="t">
             <a:spAutoFit/>
           </a:bodyPr>
           <a:lstStyle/>
@@ -8601,7 +7522,7 @@
 </file>
 
 <file path=ppt/slides/slide7.xml><?xml version="1.0" encoding="utf-8"?>
-<p:sld xmlns:a="http://schemas.openxmlformats.org/drawingml/2006/main" xmlns:p="http://schemas.openxmlformats.org/presentationml/2006/main" xmlns:r="http://schemas.openxmlformats.org/officeDocument/2006/relationships">
+<p:sld xmlns:a="http://schemas.openxmlformats.org/drawingml/2006/main" xmlns:r="http://schemas.openxmlformats.org/officeDocument/2006/relationships" xmlns:p="http://schemas.openxmlformats.org/presentationml/2006/main">
   <p:cSld>
     <p:spTree>
       <p:nvGrpSpPr>
@@ -8609,7 +7530,14 @@
         <p:cNvGrpSpPr/>
         <p:nvPr/>
       </p:nvGrpSpPr>
-      <p:grpSpPr/>
+      <p:grpSpPr>
+        <a:xfrm>
+          <a:off x="0" y="0"/>
+          <a:ext cx="0" cy="0"/>
+          <a:chOff x="0" y="0"/>
+          <a:chExt cx="0" cy="0"/>
+        </a:xfrm>
+      </p:grpSpPr>
       <p:sp>
         <p:nvSpPr>
           <p:cNvPr id="2" name="Rounded Rectangle 1"/>
@@ -8652,6 +7580,7 @@
           <a:lstStyle/>
           <a:p>
             <a:pPr algn="ctr"/>
+            <a:endParaRPr/>
           </a:p>
         </p:txBody>
       </p:sp>
@@ -8697,6 +7626,7 @@
           <a:lstStyle/>
           <a:p>
             <a:pPr algn="ctr"/>
+            <a:endParaRPr/>
           </a:p>
         </p:txBody>
       </p:sp>
@@ -8717,7 +7647,7 @@
           <a:noFill/>
         </p:spPr>
         <p:txBody>
-          <a:bodyPr wrap="square" lIns="0" rIns="0" tIns="0" bIns="0" anchor="ctr">
+          <a:bodyPr wrap="square" lIns="0" tIns="0" rIns="0" bIns="0" anchor="ctr">
             <a:spAutoFit/>
           </a:bodyPr>
           <a:lstStyle/>
@@ -8752,7 +7682,7 @@
           <a:noFill/>
         </p:spPr>
         <p:txBody>
-          <a:bodyPr wrap="square" lIns="0" rIns="0" tIns="0" bIns="0" anchor="ctr">
+          <a:bodyPr wrap="square" lIns="0" tIns="0" rIns="0" bIns="0" anchor="ctr">
             <a:spAutoFit/>
           </a:bodyPr>
           <a:lstStyle/>
@@ -8812,6 +7742,7 @@
           <a:lstStyle/>
           <a:p>
             <a:pPr algn="ctr"/>
+            <a:endParaRPr/>
           </a:p>
         </p:txBody>
       </p:sp>
@@ -8823,7 +7754,7 @@
         </p:nvSpPr>
         <p:spPr>
           <a:xfrm>
-            <a:off x="457200" y="1371600"/>
+            <a:off x="365760" y="1316736"/>
             <a:ext cx="11430000" cy="4206240"/>
           </a:xfrm>
           <a:prstGeom prst="roundRect">
@@ -8860,76 +7791,7 @@
           <a:lstStyle/>
           <a:p>
             <a:pPr algn="ctr"/>
-          </a:p>
-        </p:txBody>
-      </p:sp>
-      <p:sp>
-        <p:nvSpPr>
-          <p:cNvPr id="8" name="TextBox 7"/>
-          <p:cNvSpPr txBox="1"/>
-          <p:nvPr/>
-        </p:nvSpPr>
-        <p:spPr>
-          <a:xfrm>
-            <a:off x="457200" y="1371600"/>
-            <a:ext cx="11430000" cy="3840480"/>
-          </a:xfrm>
-          <a:prstGeom prst="rect">
-            <a:avLst/>
-          </a:prstGeom>
-          <a:noFill/>
-        </p:spPr>
-        <p:txBody>
-          <a:bodyPr wrap="square" lIns="0" rIns="0" tIns="0" bIns="0" anchor="ctr">
-            <a:spAutoFit/>
-          </a:bodyPr>
-          <a:lstStyle/>
-          <a:p>
-            <a:pPr algn="ctr"/>
-            <a:r>
-              <a:rPr sz="1800" b="1">
-                <a:solidFill>
-                  <a:srgbClr val="605E5C"/>
-                </a:solidFill>
-                <a:latin typeface="Yu Gothic"/>
-              </a:rPr>
-              <a:t>📸  ここにPower Automateフロー全体のスクショを貼り付け</a:t>
-            </a:r>
-          </a:p>
-        </p:txBody>
-      </p:sp>
-      <p:sp>
-        <p:nvSpPr>
-          <p:cNvPr id="9" name="TextBox 8"/>
-          <p:cNvSpPr txBox="1"/>
-          <p:nvPr/>
-        </p:nvSpPr>
-        <p:spPr>
-          <a:xfrm>
-            <a:off x="457200" y="5120640"/>
-            <a:ext cx="11430000" cy="365760"/>
-          </a:xfrm>
-          <a:prstGeom prst="rect">
-            <a:avLst/>
-          </a:prstGeom>
-          <a:noFill/>
-        </p:spPr>
-        <p:txBody>
-          <a:bodyPr wrap="square" lIns="0" rIns="0" tIns="0" bIns="0" anchor="t">
-            <a:spAutoFit/>
-          </a:bodyPr>
-          <a:lstStyle/>
-          <a:p>
-            <a:pPr algn="ctr"/>
-            <a:r>
-              <a:rPr sz="1100" b="0">
-                <a:solidFill>
-                  <a:srgbClr val="605E5C"/>
-                </a:solidFill>
-                <a:latin typeface="Yu Gothic"/>
-              </a:rPr>
-              <a:t>👉 推奨：フロー全体が見えるスクショ → トリミングして横配置</a:t>
-            </a:r>
+            <a:endParaRPr/>
           </a:p>
         </p:txBody>
       </p:sp>
@@ -8977,6 +7839,7 @@
           <a:lstStyle/>
           <a:p>
             <a:pPr algn="ctr"/>
+            <a:endParaRPr/>
           </a:p>
         </p:txBody>
       </p:sp>
@@ -9022,6 +7885,7 @@
           <a:lstStyle/>
           <a:p>
             <a:pPr algn="ctr"/>
+            <a:endParaRPr/>
           </a:p>
         </p:txBody>
       </p:sp>
@@ -9042,7 +7906,7 @@
           <a:noFill/>
         </p:spPr>
         <p:txBody>
-          <a:bodyPr wrap="square" lIns="0" rIns="0" tIns="0" bIns="0" anchor="t">
+          <a:bodyPr wrap="square" lIns="0" tIns="0" rIns="0" bIns="0" anchor="t">
             <a:spAutoFit/>
           </a:bodyPr>
           <a:lstStyle/>
@@ -9077,7 +7941,7 @@
           <a:noFill/>
         </p:spPr>
         <p:txBody>
-          <a:bodyPr wrap="square" lIns="0" rIns="0" tIns="0" bIns="0" anchor="t">
+          <a:bodyPr wrap="square" lIns="0" tIns="0" rIns="0" bIns="0" anchor="t">
             <a:spAutoFit/>
           </a:bodyPr>
           <a:lstStyle/>
@@ -9139,6 +8003,7 @@
           <a:lstStyle/>
           <a:p>
             <a:pPr algn="ctr"/>
+            <a:endParaRPr/>
           </a:p>
         </p:txBody>
       </p:sp>
@@ -9184,6 +8049,7 @@
           <a:lstStyle/>
           <a:p>
             <a:pPr algn="ctr"/>
+            <a:endParaRPr/>
           </a:p>
         </p:txBody>
       </p:sp>
@@ -9204,7 +8070,7 @@
           <a:noFill/>
         </p:spPr>
         <p:txBody>
-          <a:bodyPr wrap="square" lIns="0" rIns="0" tIns="0" bIns="0" anchor="t">
+          <a:bodyPr wrap="square" lIns="0" tIns="0" rIns="0" bIns="0" anchor="t">
             <a:spAutoFit/>
           </a:bodyPr>
           <a:lstStyle/>
@@ -9239,7 +8105,7 @@
           <a:noFill/>
         </p:spPr>
         <p:txBody>
-          <a:bodyPr wrap="square" lIns="0" rIns="0" tIns="0" bIns="0" anchor="t">
+          <a:bodyPr wrap="square" lIns="0" tIns="0" rIns="0" bIns="0" anchor="t">
             <a:spAutoFit/>
           </a:bodyPr>
           <a:lstStyle/>
@@ -9301,6 +8167,7 @@
           <a:lstStyle/>
           <a:p>
             <a:pPr algn="ctr"/>
+            <a:endParaRPr/>
           </a:p>
         </p:txBody>
       </p:sp>
@@ -9346,6 +8213,7 @@
           <a:lstStyle/>
           <a:p>
             <a:pPr algn="ctr"/>
+            <a:endParaRPr/>
           </a:p>
         </p:txBody>
       </p:sp>
@@ -9366,7 +8234,7 @@
           <a:noFill/>
         </p:spPr>
         <p:txBody>
-          <a:bodyPr wrap="square" lIns="0" rIns="0" tIns="0" bIns="0" anchor="t">
+          <a:bodyPr wrap="square" lIns="0" tIns="0" rIns="0" bIns="0" anchor="t">
             <a:spAutoFit/>
           </a:bodyPr>
           <a:lstStyle/>
@@ -9401,7 +8269,7 @@
           <a:noFill/>
         </p:spPr>
         <p:txBody>
-          <a:bodyPr wrap="square" lIns="0" rIns="0" tIns="0" bIns="0" anchor="t">
+          <a:bodyPr wrap="square" lIns="0" tIns="0" rIns="0" bIns="0" anchor="t">
             <a:spAutoFit/>
           </a:bodyPr>
           <a:lstStyle/>
@@ -9436,7 +8304,7 @@
           <a:noFill/>
         </p:spPr>
         <p:txBody>
-          <a:bodyPr wrap="square" lIns="0" rIns="0" tIns="0" bIns="0" anchor="t">
+          <a:bodyPr wrap="square" lIns="0" tIns="0" rIns="0" bIns="0" anchor="t">
             <a:spAutoFit/>
           </a:bodyPr>
           <a:lstStyle/>
@@ -9471,7 +8339,7 @@
           <a:noFill/>
         </p:spPr>
         <p:txBody>
-          <a:bodyPr wrap="square" lIns="0" rIns="0" tIns="0" bIns="0" anchor="t">
+          <a:bodyPr wrap="square" lIns="0" tIns="0" rIns="0" bIns="0" anchor="t">
             <a:spAutoFit/>
           </a:bodyPr>
           <a:lstStyle/>
@@ -9489,6 +8357,156 @@
           </a:p>
         </p:txBody>
       </p:sp>
+      <p:pic>
+        <p:nvPicPr>
+          <p:cNvPr id="25" name="図 24" descr="The image displays a user interface with a flowchart that illustrates an event creation process, including steps for required and optional participant counts, and a calculation for total participants.&#10;&#10;AI 生成コンテンツは誤りを含む可能性があります。">
+            <a:extLst>
+              <a:ext uri="{FF2B5EF4-FFF2-40B4-BE49-F238E27FC236}">
+                <a16:creationId xmlns:a16="http://schemas.microsoft.com/office/drawing/2014/main" id="{ECD95901-3818-AB98-430B-A0191FCCFA4C}"/>
+              </a:ext>
+            </a:extLst>
+          </p:cNvPr>
+          <p:cNvPicPr>
+            <a:picLocks noChangeAspect="1"/>
+          </p:cNvPicPr>
+          <p:nvPr/>
+        </p:nvPicPr>
+        <p:blipFill>
+          <a:blip r:embed="rId2"/>
+          <a:stretch>
+            <a:fillRect/>
+          </a:stretch>
+        </p:blipFill>
+        <p:spPr>
+          <a:xfrm>
+            <a:off x="512064" y="1680173"/>
+            <a:ext cx="2162191" cy="3467125"/>
+          </a:xfrm>
+          <a:prstGeom prst="rect">
+            <a:avLst/>
+          </a:prstGeom>
+        </p:spPr>
+      </p:pic>
+      <p:pic>
+        <p:nvPicPr>
+          <p:cNvPr id="27" name="図 26" descr="The image illustrates a workflow diagram in Japanese, showing a series of steps for initializing a variable, calculating costs, and notifying conference attendees via chat or email.&#10;&#10;AI 生成コンテンツは誤りを含む可能性があります。">
+            <a:extLst>
+              <a:ext uri="{FF2B5EF4-FFF2-40B4-BE49-F238E27FC236}">
+                <a16:creationId xmlns:a16="http://schemas.microsoft.com/office/drawing/2014/main" id="{58B7430B-E5E7-D7F4-22F3-4D118C5C5059}"/>
+              </a:ext>
+            </a:extLst>
+          </p:cNvPr>
+          <p:cNvPicPr>
+            <a:picLocks noChangeAspect="1"/>
+          </p:cNvPicPr>
+          <p:nvPr/>
+        </p:nvPicPr>
+        <p:blipFill>
+          <a:blip r:embed="rId3"/>
+          <a:stretch>
+            <a:fillRect/>
+          </a:stretch>
+        </p:blipFill>
+        <p:spPr>
+          <a:xfrm>
+            <a:off x="7630838" y="1538273"/>
+            <a:ext cx="2047890" cy="3781453"/>
+          </a:xfrm>
+          <a:prstGeom prst="rect">
+            <a:avLst/>
+          </a:prstGeom>
+        </p:spPr>
+      </p:pic>
+      <p:pic>
+        <p:nvPicPr>
+          <p:cNvPr id="29" name="図 28" descr="The provided text appears to be a snippet of code, specifically a conditional statement in a programming language, likely JavaScript. It checks if an array called `triggerOutputs` has an element at the key `'body/requiredAttendees'` and is empty. If it is, it returns `0`. If it's not empty, it splits the array at the semicolon delimiter, then returns the length of the resulting array minus one.&#10;&#10;AI 生成コンテンツは誤りを含む可能性があります。">
+            <a:extLst>
+              <a:ext uri="{FF2B5EF4-FFF2-40B4-BE49-F238E27FC236}">
+                <a16:creationId xmlns:a16="http://schemas.microsoft.com/office/drawing/2014/main" id="{038036A4-7789-1BD5-DF2D-59D757D0F762}"/>
+              </a:ext>
+            </a:extLst>
+          </p:cNvPr>
+          <p:cNvPicPr>
+            <a:picLocks noChangeAspect="1"/>
+          </p:cNvPicPr>
+          <p:nvPr/>
+        </p:nvPicPr>
+        <p:blipFill>
+          <a:blip r:embed="rId4"/>
+          <a:stretch>
+            <a:fillRect/>
+          </a:stretch>
+        </p:blipFill>
+        <p:spPr>
+          <a:xfrm>
+            <a:off x="2729119" y="2684333"/>
+            <a:ext cx="4514883" cy="657230"/>
+          </a:xfrm>
+          <a:prstGeom prst="rect">
+            <a:avLst/>
+          </a:prstGeom>
+        </p:spPr>
+      </p:pic>
+      <p:pic>
+        <p:nvPicPr>
+          <p:cNvPr id="31" name="図 30" descr="body/optionalAttendees&#10;&#10;AI 生成コンテンツは誤りを含む可能性があります。">
+            <a:extLst>
+              <a:ext uri="{FF2B5EF4-FFF2-40B4-BE49-F238E27FC236}">
+                <a16:creationId xmlns:a16="http://schemas.microsoft.com/office/drawing/2014/main" id="{8F64F2FC-8D13-BD47-FC04-95553988425C}"/>
+              </a:ext>
+            </a:extLst>
+          </p:cNvPr>
+          <p:cNvPicPr>
+            <a:picLocks noChangeAspect="1"/>
+          </p:cNvPicPr>
+          <p:nvPr/>
+        </p:nvPicPr>
+        <p:blipFill>
+          <a:blip r:embed="rId5"/>
+          <a:stretch>
+            <a:fillRect/>
+          </a:stretch>
+        </p:blipFill>
+        <p:spPr>
+          <a:xfrm>
+            <a:off x="2767219" y="3627853"/>
+            <a:ext cx="4476783" cy="685805"/>
+          </a:xfrm>
+          <a:prstGeom prst="rect">
+            <a:avLst/>
+          </a:prstGeom>
+        </p:spPr>
+      </p:pic>
+      <p:pic>
+        <p:nvPicPr>
+          <p:cNvPr id="33" name="図 32" descr="The image shows a snippet of code with a function call in a programming language, specifically adding two outputs with given strings and an integer.&#10;&#10;AI 生成コンテンツは誤りを含む可能性があります。">
+            <a:extLst>
+              <a:ext uri="{FF2B5EF4-FFF2-40B4-BE49-F238E27FC236}">
+                <a16:creationId xmlns:a16="http://schemas.microsoft.com/office/drawing/2014/main" id="{5B4ED5E9-2204-DFCF-0FF4-DAA225B1A49E}"/>
+              </a:ext>
+            </a:extLst>
+          </p:cNvPr>
+          <p:cNvPicPr>
+            <a:picLocks noChangeAspect="1"/>
+          </p:cNvPicPr>
+          <p:nvPr/>
+        </p:nvPicPr>
+        <p:blipFill>
+          <a:blip r:embed="rId6"/>
+          <a:stretch>
+            <a:fillRect/>
+          </a:stretch>
+        </p:blipFill>
+        <p:spPr>
+          <a:xfrm>
+            <a:off x="2816019" y="4587978"/>
+            <a:ext cx="4514883" cy="533404"/>
+          </a:xfrm>
+          <a:prstGeom prst="rect">
+            <a:avLst/>
+          </a:prstGeom>
+        </p:spPr>
+      </p:pic>
     </p:spTree>
   </p:cSld>
   <p:clrMapOvr>
@@ -9498,7 +8516,7 @@
 </file>
 
 <file path=ppt/slides/slide8.xml><?xml version="1.0" encoding="utf-8"?>
-<p:sld xmlns:a="http://schemas.openxmlformats.org/drawingml/2006/main" xmlns:p="http://schemas.openxmlformats.org/presentationml/2006/main" xmlns:r="http://schemas.openxmlformats.org/officeDocument/2006/relationships">
+<p:sld xmlns:a="http://schemas.openxmlformats.org/drawingml/2006/main" xmlns:r="http://schemas.openxmlformats.org/officeDocument/2006/relationships" xmlns:p="http://schemas.openxmlformats.org/presentationml/2006/main">
   <p:cSld>
     <p:spTree>
       <p:nvGrpSpPr>
@@ -9506,7 +8524,14 @@
         <p:cNvGrpSpPr/>
         <p:nvPr/>
       </p:nvGrpSpPr>
-      <p:grpSpPr/>
+      <p:grpSpPr>
+        <a:xfrm>
+          <a:off x="0" y="0"/>
+          <a:ext cx="0" cy="0"/>
+          <a:chOff x="0" y="0"/>
+          <a:chExt cx="0" cy="0"/>
+        </a:xfrm>
+      </p:grpSpPr>
       <p:sp>
         <p:nvSpPr>
           <p:cNvPr id="2" name="Rounded Rectangle 1"/>
@@ -9549,6 +8574,7 @@
           <a:lstStyle/>
           <a:p>
             <a:pPr algn="ctr"/>
+            <a:endParaRPr/>
           </a:p>
         </p:txBody>
       </p:sp>
@@ -9594,6 +8620,7 @@
           <a:lstStyle/>
           <a:p>
             <a:pPr algn="ctr"/>
+            <a:endParaRPr/>
           </a:p>
         </p:txBody>
       </p:sp>
@@ -9614,7 +8641,7 @@
           <a:noFill/>
         </p:spPr>
         <p:txBody>
-          <a:bodyPr wrap="square" lIns="0" rIns="0" tIns="0" bIns="0" anchor="ctr">
+          <a:bodyPr wrap="square" lIns="0" tIns="0" rIns="0" bIns="0" anchor="ctr">
             <a:spAutoFit/>
           </a:bodyPr>
           <a:lstStyle/>
@@ -9627,7 +8654,7 @@
                 </a:solidFill>
                 <a:latin typeface="Yu Gothic"/>
               </a:rPr>
-              <a:t>06</a:t>
+              <a:t>07</a:t>
             </a:r>
           </a:p>
         </p:txBody>
@@ -9649,7 +8676,7 @@
           <a:noFill/>
         </p:spPr>
         <p:txBody>
-          <a:bodyPr wrap="square" lIns="0" rIns="0" tIns="0" bIns="0" anchor="ctr">
+          <a:bodyPr wrap="square" lIns="0" tIns="0" rIns="0" bIns="0" anchor="ctr">
             <a:spAutoFit/>
           </a:bodyPr>
           <a:lstStyle/>
@@ -9709,6 +8736,7 @@
           <a:lstStyle/>
           <a:p>
             <a:pPr algn="ctr"/>
+            <a:endParaRPr/>
           </a:p>
         </p:txBody>
       </p:sp>
@@ -9756,6 +8784,7 @@
           <a:lstStyle/>
           <a:p>
             <a:pPr algn="ctr"/>
+            <a:endParaRPr/>
           </a:p>
         </p:txBody>
       </p:sp>
@@ -9801,6 +8830,7 @@
           <a:lstStyle/>
           <a:p>
             <a:pPr algn="ctr"/>
+            <a:endParaRPr/>
           </a:p>
         </p:txBody>
       </p:sp>
@@ -9821,7 +8851,7 @@
           <a:noFill/>
         </p:spPr>
         <p:txBody>
-          <a:bodyPr wrap="square" lIns="0" rIns="0" tIns="0" bIns="0" anchor="ctr">
+          <a:bodyPr wrap="square" lIns="0" tIns="0" rIns="0" bIns="0" anchor="ctr">
             <a:spAutoFit/>
           </a:bodyPr>
           <a:lstStyle/>
@@ -9841,97 +8871,14 @@
       </p:sp>
       <p:sp>
         <p:nvSpPr>
-          <p:cNvPr id="10" name="TextBox 9"/>
-          <p:cNvSpPr txBox="1"/>
-          <p:nvPr/>
-        </p:nvSpPr>
-        <p:spPr>
-          <a:xfrm>
-            <a:off x="777240" y="1828800"/>
-            <a:ext cx="5029200" cy="2377440"/>
-          </a:xfrm>
-          <a:prstGeom prst="rect">
-            <a:avLst/>
-          </a:prstGeom>
-          <a:noFill/>
-        </p:spPr>
-        <p:txBody>
-          <a:bodyPr wrap="square" lIns="0" rIns="0">
-            <a:spAutoFit/>
-          </a:bodyPr>
-          <a:lstStyle/>
-          <a:p>
-            <a:pPr algn="l"/>
-            <a:r>
-              <a:rPr sz="1300" b="0">
-                <a:solidFill>
-                  <a:srgbClr val="323130"/>
-                </a:solidFill>
-                <a:latin typeface="Yu Gothic"/>
-              </a:rPr>
-              <a:t>📅 件名：定例MTG</a:t>
-            </a:r>
-          </a:p>
-          <a:p>
-            <a:pPr algn="l"/>
-            <a:r>
-              <a:rPr sz="1300" b="0">
-                <a:solidFill>
-                  <a:srgbClr val="323130"/>
-                </a:solidFill>
-                <a:latin typeface="Yu Gothic"/>
-              </a:rPr>
-              <a:t>👥 参加者：6人</a:t>
-            </a:r>
-          </a:p>
-          <a:p>
-            <a:pPr algn="l"/>
-            <a:r>
-              <a:rPr sz="1300" b="0">
-                <a:solidFill>
-                  <a:srgbClr val="323130"/>
-                </a:solidFill>
-                <a:latin typeface="Yu Gothic"/>
-              </a:rPr>
-              <a:t>⏰ 時間：60分</a:t>
-            </a:r>
-          </a:p>
-          <a:p>
-            <a:pPr algn="l"/>
-            <a:r>
-              <a:rPr sz="600" b="0">
-                <a:solidFill>
-                  <a:srgbClr val="323130"/>
-                </a:solidFill>
-                <a:latin typeface="Yu Gothic"/>
-              </a:rPr>
-              <a:t/>
-            </a:r>
-          </a:p>
-          <a:p>
-            <a:pPr algn="l"/>
-            <a:r>
-              <a:rPr sz="2200" b="1">
-                <a:solidFill>
-                  <a:srgbClr val="323130"/>
-                </a:solidFill>
-                <a:latin typeface="Yu Gothic"/>
-              </a:rPr>
-              <a:t>💰 推定コスト：30,000円</a:t>
-            </a:r>
-          </a:p>
-        </p:txBody>
-      </p:sp>
-      <p:sp>
-        <p:nvSpPr>
-          <p:cNvPr id="11" name="Rounded Rectangle 10"/>
+          <p:cNvPr id="14" name="Rounded Rectangle 13"/>
           <p:cNvSpPr/>
           <p:nvPr/>
         </p:nvSpPr>
         <p:spPr>
           <a:xfrm>
-            <a:off x="777240" y="3886200"/>
-            <a:ext cx="5029200" cy="411480"/>
+            <a:off x="6309360" y="1280160"/>
+            <a:ext cx="5577840" cy="1554480"/>
           </a:xfrm>
           <a:prstGeom prst="roundRect">
             <a:avLst>
@@ -9939,7 +8886,7 @@
             </a:avLst>
           </a:prstGeom>
           <a:solidFill>
-            <a:srgbClr val="FFF4CE"/>
+            <a:srgbClr val="373E99"/>
           </a:solidFill>
           <a:ln>
             <a:noFill/>
@@ -9964,19 +8911,125 @@
           <a:lstStyle/>
           <a:p>
             <a:pPr algn="ctr"/>
-          </a:p>
-        </p:txBody>
-      </p:sp>
-      <p:sp>
-        <p:nvSpPr>
-          <p:cNvPr id="12" name="Rounded Rectangle 11"/>
+            <a:endParaRPr/>
+          </a:p>
+        </p:txBody>
+      </p:sp>
+      <p:sp>
+        <p:nvSpPr>
+          <p:cNvPr id="15" name="TextBox 14"/>
+          <p:cNvSpPr txBox="1"/>
+          <p:nvPr/>
+        </p:nvSpPr>
+        <p:spPr>
+          <a:xfrm>
+            <a:off x="6537960" y="1371600"/>
+            <a:ext cx="5029200" cy="640080"/>
+          </a:xfrm>
+          <a:prstGeom prst="rect">
+            <a:avLst/>
+          </a:prstGeom>
+          <a:noFill/>
+        </p:spPr>
+        <p:txBody>
+          <a:bodyPr wrap="square" lIns="0" tIns="0" rIns="0" bIns="0" anchor="ctr">
+            <a:spAutoFit/>
+          </a:bodyPr>
+          <a:lstStyle/>
+          <a:p>
+            <a:pPr algn="l"/>
+            <a:r>
+              <a:rPr sz="2200" b="1">
+                <a:solidFill>
+                  <a:srgbClr val="FFFFFF"/>
+                </a:solidFill>
+                <a:latin typeface="Yu Gothic"/>
+              </a:rPr>
+              <a:t>会議は減らなかった。</a:t>
+            </a:r>
+          </a:p>
+        </p:txBody>
+      </p:sp>
+      <p:sp>
+        <p:nvSpPr>
+          <p:cNvPr id="16" name="TextBox 15"/>
+          <p:cNvSpPr txBox="1"/>
+          <p:nvPr/>
+        </p:nvSpPr>
+        <p:spPr>
+          <a:xfrm>
+            <a:off x="6537960" y="2011680"/>
+            <a:ext cx="5029200" cy="640080"/>
+          </a:xfrm>
+          <a:prstGeom prst="rect">
+            <a:avLst/>
+          </a:prstGeom>
+          <a:noFill/>
+        </p:spPr>
+        <p:txBody>
+          <a:bodyPr wrap="square" lIns="0" tIns="0" rIns="0" bIns="0" anchor="ctr">
+            <a:spAutoFit/>
+          </a:bodyPr>
+          <a:lstStyle/>
+          <a:p>
+            <a:pPr algn="l"/>
+            <a:r>
+              <a:rPr sz="2200" b="1">
+                <a:solidFill>
+                  <a:srgbClr val="FFB900"/>
+                </a:solidFill>
+                <a:latin typeface="Yu Gothic"/>
+              </a:rPr>
+              <a:t>でも、空気が変わった。</a:t>
+            </a:r>
+          </a:p>
+        </p:txBody>
+      </p:sp>
+      <p:sp>
+        <p:nvSpPr>
+          <p:cNvPr id="17" name="TextBox 16"/>
+          <p:cNvSpPr txBox="1"/>
+          <p:nvPr/>
+        </p:nvSpPr>
+        <p:spPr>
+          <a:xfrm>
+            <a:off x="6309360" y="3017520"/>
+            <a:ext cx="5303520" cy="365760"/>
+          </a:xfrm>
+          <a:prstGeom prst="rect">
+            <a:avLst/>
+          </a:prstGeom>
+          <a:noFill/>
+        </p:spPr>
+        <p:txBody>
+          <a:bodyPr wrap="square" lIns="0" tIns="0" rIns="0" bIns="0" anchor="t">
+            <a:spAutoFit/>
+          </a:bodyPr>
+          <a:lstStyle/>
+          <a:p>
+            <a:pPr algn="l"/>
+            <a:r>
+              <a:rPr sz="1500" b="1">
+                <a:solidFill>
+                  <a:srgbClr val="373E99"/>
+                </a:solidFill>
+                <a:latin typeface="Yu Gothic"/>
+              </a:rPr>
+              <a:t>💡 今日の学び</a:t>
+            </a:r>
+          </a:p>
+        </p:txBody>
+      </p:sp>
+      <p:sp>
+        <p:nvSpPr>
+          <p:cNvPr id="18" name="Rounded Rectangle 17"/>
           <p:cNvSpPr/>
           <p:nvPr/>
         </p:nvSpPr>
         <p:spPr>
           <a:xfrm>
-            <a:off x="777240" y="3886200"/>
-            <a:ext cx="54864" cy="411480"/>
+            <a:off x="6309360" y="3566160"/>
+            <a:ext cx="292608" cy="292608"/>
           </a:xfrm>
           <a:prstGeom prst="roundRect">
             <a:avLst>
@@ -9984,7 +9037,7 @@
             </a:avLst>
           </a:prstGeom>
           <a:solidFill>
-            <a:srgbClr val="FFB900"/>
+            <a:srgbClr val="0078D4"/>
           </a:solidFill>
           <a:ln>
             <a:noFill/>
@@ -10009,54 +9062,90 @@
           <a:lstStyle/>
           <a:p>
             <a:pPr algn="ctr"/>
-          </a:p>
-        </p:txBody>
-      </p:sp>
-      <p:sp>
-        <p:nvSpPr>
-          <p:cNvPr id="13" name="TextBox 12"/>
-          <p:cNvSpPr txBox="1"/>
-          <p:nvPr/>
-        </p:nvSpPr>
-        <p:spPr>
-          <a:xfrm>
-            <a:off x="914400" y="3886200"/>
-            <a:ext cx="4846320" cy="411480"/>
-          </a:xfrm>
-          <a:prstGeom prst="rect">
-            <a:avLst/>
-          </a:prstGeom>
-          <a:noFill/>
-        </p:spPr>
-        <p:txBody>
-          <a:bodyPr wrap="square" lIns="0" rIns="0" tIns="0" bIns="0" anchor="ctr">
+            <a:endParaRPr/>
+          </a:p>
+        </p:txBody>
+      </p:sp>
+      <p:sp>
+        <p:nvSpPr>
+          <p:cNvPr id="19" name="TextBox 18"/>
+          <p:cNvSpPr txBox="1"/>
+          <p:nvPr/>
+        </p:nvSpPr>
+        <p:spPr>
+          <a:xfrm>
+            <a:off x="6309360" y="3566160"/>
+            <a:ext cx="292608" cy="292608"/>
+          </a:xfrm>
+          <a:prstGeom prst="rect">
+            <a:avLst/>
+          </a:prstGeom>
+          <a:noFill/>
+        </p:spPr>
+        <p:txBody>
+          <a:bodyPr wrap="square" lIns="0" tIns="0" rIns="0" bIns="0" anchor="ctr">
             <a:spAutoFit/>
           </a:bodyPr>
           <a:lstStyle/>
           <a:p>
+            <a:pPr algn="ctr"/>
+            <a:r>
+              <a:rPr sz="1100" b="1">
+                <a:solidFill>
+                  <a:srgbClr val="FFFFFF"/>
+                </a:solidFill>
+                <a:latin typeface="Yu Gothic"/>
+              </a:rPr>
+              <a:t>1</a:t>
+            </a:r>
+          </a:p>
+        </p:txBody>
+      </p:sp>
+      <p:sp>
+        <p:nvSpPr>
+          <p:cNvPr id="20" name="TextBox 19"/>
+          <p:cNvSpPr txBox="1"/>
+          <p:nvPr/>
+        </p:nvSpPr>
+        <p:spPr>
+          <a:xfrm>
+            <a:off x="6766560" y="3520440"/>
+            <a:ext cx="5029200" cy="411480"/>
+          </a:xfrm>
+          <a:prstGeom prst="rect">
+            <a:avLst/>
+          </a:prstGeom>
+          <a:noFill/>
+        </p:spPr>
+        <p:txBody>
+          <a:bodyPr wrap="square" lIns="0" tIns="0" rIns="0" bIns="0" anchor="ctr">
+            <a:spAutoFit/>
+          </a:bodyPr>
+          <a:lstStyle/>
+          <a:p>
             <a:pPr algn="l"/>
             <a:r>
-              <a:rPr sz="1200" b="1">
+              <a:rPr sz="1300" b="0">
                 <a:solidFill>
                   <a:srgbClr val="323130"/>
                 </a:solidFill>
                 <a:latin typeface="Yu Gothic"/>
               </a:rPr>
-              <a:t>⚠ 本当にこの人数必要ですか？</a:t>
-            </a:r>
-          </a:p>
-        </p:txBody>
-      </p:sp>
-      <p:sp>
-        <p:nvSpPr>
-          <p:cNvPr id="14" name="Rounded Rectangle 13"/>
+              <a:t>Copilotは"何を作るか"も提案してくれる</a:t>
+            </a:r>
+          </a:p>
+        </p:txBody>
+      </p:sp>
+      <p:sp>
+        <p:nvSpPr>
+          <p:cNvPr id="21" name="Rounded Rectangle 20"/>
           <p:cNvSpPr/>
           <p:nvPr/>
         </p:nvSpPr>
         <p:spPr>
           <a:xfrm>
-            <a:off x="6309360" y="1280160"/>
-            <a:ext cx="5577840" cy="1554480"/>
+            <a:off x="6309360" y="4069080"/>
+            <a:ext cx="292608" cy="292608"/>
           </a:xfrm>
           <a:prstGeom prst="roundRect">
             <a:avLst>
@@ -10064,7 +9153,7 @@
             </a:avLst>
           </a:prstGeom>
           <a:solidFill>
-            <a:srgbClr val="373E99"/>
+            <a:srgbClr val="0078D4"/>
           </a:solidFill>
           <a:ln>
             <a:noFill/>
@@ -10089,123 +9178,89 @@
           <a:lstStyle/>
           <a:p>
             <a:pPr algn="ctr"/>
-          </a:p>
-        </p:txBody>
-      </p:sp>
-      <p:sp>
-        <p:nvSpPr>
-          <p:cNvPr id="15" name="TextBox 14"/>
-          <p:cNvSpPr txBox="1"/>
-          <p:nvPr/>
-        </p:nvSpPr>
-        <p:spPr>
-          <a:xfrm>
-            <a:off x="6537960" y="1371600"/>
-            <a:ext cx="5029200" cy="640080"/>
-          </a:xfrm>
-          <a:prstGeom prst="rect">
-            <a:avLst/>
-          </a:prstGeom>
-          <a:noFill/>
-        </p:spPr>
-        <p:txBody>
-          <a:bodyPr wrap="square" lIns="0" rIns="0" tIns="0" bIns="0" anchor="ctr">
+            <a:endParaRPr/>
+          </a:p>
+        </p:txBody>
+      </p:sp>
+      <p:sp>
+        <p:nvSpPr>
+          <p:cNvPr id="22" name="TextBox 21"/>
+          <p:cNvSpPr txBox="1"/>
+          <p:nvPr/>
+        </p:nvSpPr>
+        <p:spPr>
+          <a:xfrm>
+            <a:off x="6309360" y="4069080"/>
+            <a:ext cx="292608" cy="292608"/>
+          </a:xfrm>
+          <a:prstGeom prst="rect">
+            <a:avLst/>
+          </a:prstGeom>
+          <a:noFill/>
+        </p:spPr>
+        <p:txBody>
+          <a:bodyPr wrap="square" lIns="0" tIns="0" rIns="0" bIns="0" anchor="ctr">
             <a:spAutoFit/>
           </a:bodyPr>
           <a:lstStyle/>
           <a:p>
-            <a:pPr algn="l"/>
-            <a:r>
-              <a:rPr sz="2200" b="1">
+            <a:pPr algn="ctr"/>
+            <a:r>
+              <a:rPr sz="1100" b="1">
                 <a:solidFill>
                   <a:srgbClr val="FFFFFF"/>
                 </a:solidFill>
                 <a:latin typeface="Yu Gothic"/>
               </a:rPr>
-              <a:t>会議は減らなかった。</a:t>
-            </a:r>
-          </a:p>
-        </p:txBody>
-      </p:sp>
-      <p:sp>
-        <p:nvSpPr>
-          <p:cNvPr id="16" name="TextBox 15"/>
-          <p:cNvSpPr txBox="1"/>
-          <p:nvPr/>
-        </p:nvSpPr>
-        <p:spPr>
-          <a:xfrm>
-            <a:off x="6537960" y="2011680"/>
-            <a:ext cx="5029200" cy="640080"/>
-          </a:xfrm>
-          <a:prstGeom prst="rect">
-            <a:avLst/>
-          </a:prstGeom>
-          <a:noFill/>
-        </p:spPr>
-        <p:txBody>
-          <a:bodyPr wrap="square" lIns="0" rIns="0" tIns="0" bIns="0" anchor="ctr">
+              <a:t>2</a:t>
+            </a:r>
+          </a:p>
+        </p:txBody>
+      </p:sp>
+      <p:sp>
+        <p:nvSpPr>
+          <p:cNvPr id="23" name="TextBox 22"/>
+          <p:cNvSpPr txBox="1"/>
+          <p:nvPr/>
+        </p:nvSpPr>
+        <p:spPr>
+          <a:xfrm>
+            <a:off x="6766560" y="4023360"/>
+            <a:ext cx="5029200" cy="411480"/>
+          </a:xfrm>
+          <a:prstGeom prst="rect">
+            <a:avLst/>
+          </a:prstGeom>
+          <a:noFill/>
+        </p:spPr>
+        <p:txBody>
+          <a:bodyPr wrap="square" lIns="0" tIns="0" rIns="0" bIns="0" anchor="ctr">
             <a:spAutoFit/>
           </a:bodyPr>
           <a:lstStyle/>
           <a:p>
             <a:pPr algn="l"/>
             <a:r>
-              <a:rPr sz="2200" b="1">
-                <a:solidFill>
-                  <a:srgbClr val="FFB900"/>
+              <a:rPr sz="1300" b="0">
+                <a:solidFill>
+                  <a:srgbClr val="323130"/>
                 </a:solidFill>
                 <a:latin typeface="Yu Gothic"/>
               </a:rPr>
-              <a:t>でも、空気が変わった。</a:t>
-            </a:r>
-          </a:p>
-        </p:txBody>
-      </p:sp>
-      <p:sp>
-        <p:nvSpPr>
-          <p:cNvPr id="17" name="TextBox 16"/>
-          <p:cNvSpPr txBox="1"/>
-          <p:nvPr/>
-        </p:nvSpPr>
-        <p:spPr>
-          <a:xfrm>
-            <a:off x="6309360" y="3017520"/>
-            <a:ext cx="5303520" cy="365760"/>
-          </a:xfrm>
-          <a:prstGeom prst="rect">
-            <a:avLst/>
-          </a:prstGeom>
-          <a:noFill/>
-        </p:spPr>
-        <p:txBody>
-          <a:bodyPr wrap="square" lIns="0" rIns="0" tIns="0" bIns="0" anchor="t">
-            <a:spAutoFit/>
-          </a:bodyPr>
-          <a:lstStyle/>
-          <a:p>
-            <a:pPr algn="l"/>
-            <a:r>
-              <a:rPr sz="1500" b="1">
-                <a:solidFill>
-                  <a:srgbClr val="373E99"/>
-                </a:solidFill>
-                <a:latin typeface="Yu Gothic"/>
-              </a:rPr>
-              <a:t>💡 今日の学び</a:t>
-            </a:r>
-          </a:p>
-        </p:txBody>
-      </p:sp>
-      <p:sp>
-        <p:nvSpPr>
-          <p:cNvPr id="18" name="Rounded Rectangle 17"/>
+              <a:t>式が読めなくても動く（理解は後で追いつく）</a:t>
+            </a:r>
+          </a:p>
+        </p:txBody>
+      </p:sp>
+      <p:sp>
+        <p:nvSpPr>
+          <p:cNvPr id="24" name="Rounded Rectangle 23"/>
           <p:cNvSpPr/>
           <p:nvPr/>
         </p:nvSpPr>
         <p:spPr>
           <a:xfrm>
-            <a:off x="6309360" y="3566160"/>
+            <a:off x="6309360" y="4572000"/>
             <a:ext cx="292608" cy="292608"/>
           </a:xfrm>
           <a:prstGeom prst="roundRect">
@@ -10239,18 +9294,19 @@
           <a:lstStyle/>
           <a:p>
             <a:pPr algn="ctr"/>
-          </a:p>
-        </p:txBody>
-      </p:sp>
-      <p:sp>
-        <p:nvSpPr>
-          <p:cNvPr id="19" name="TextBox 18"/>
-          <p:cNvSpPr txBox="1"/>
-          <p:nvPr/>
-        </p:nvSpPr>
-        <p:spPr>
-          <a:xfrm>
-            <a:off x="6309360" y="3566160"/>
+            <a:endParaRPr/>
+          </a:p>
+        </p:txBody>
+      </p:sp>
+      <p:sp>
+        <p:nvSpPr>
+          <p:cNvPr id="25" name="TextBox 24"/>
+          <p:cNvSpPr txBox="1"/>
+          <p:nvPr/>
+        </p:nvSpPr>
+        <p:spPr>
+          <a:xfrm>
+            <a:off x="6309360" y="4572000"/>
             <a:ext cx="292608" cy="292608"/>
           </a:xfrm>
           <a:prstGeom prst="rect">
@@ -10259,7 +9315,7 @@
           <a:noFill/>
         </p:spPr>
         <p:txBody>
-          <a:bodyPr wrap="square" lIns="0" rIns="0" tIns="0" bIns="0" anchor="ctr">
+          <a:bodyPr wrap="square" lIns="0" tIns="0" rIns="0" bIns="0" anchor="ctr">
             <a:spAutoFit/>
           </a:bodyPr>
           <a:lstStyle/>
@@ -10272,20 +9328,20 @@
                 </a:solidFill>
                 <a:latin typeface="Yu Gothic"/>
               </a:rPr>
-              <a:t>1</a:t>
-            </a:r>
-          </a:p>
-        </p:txBody>
-      </p:sp>
-      <p:sp>
-        <p:nvSpPr>
-          <p:cNvPr id="20" name="TextBox 19"/>
-          <p:cNvSpPr txBox="1"/>
-          <p:nvPr/>
-        </p:nvSpPr>
-        <p:spPr>
-          <a:xfrm>
-            <a:off x="6766560" y="3520440"/>
+              <a:t>3</a:t>
+            </a:r>
+          </a:p>
+        </p:txBody>
+      </p:sp>
+      <p:sp>
+        <p:nvSpPr>
+          <p:cNvPr id="26" name="TextBox 25"/>
+          <p:cNvSpPr txBox="1"/>
+          <p:nvPr/>
+        </p:nvSpPr>
+        <p:spPr>
+          <a:xfrm>
+            <a:off x="6766560" y="4526280"/>
             <a:ext cx="5029200" cy="411480"/>
           </a:xfrm>
           <a:prstGeom prst="rect">
@@ -10294,7 +9350,7 @@
           <a:noFill/>
         </p:spPr>
         <p:txBody>
-          <a:bodyPr wrap="square" lIns="0" rIns="0" tIns="0" bIns="0" anchor="ctr">
+          <a:bodyPr wrap="square" lIns="0" tIns="0" rIns="0" bIns="0" anchor="ctr">
             <a:spAutoFit/>
           </a:bodyPr>
           <a:lstStyle/>
@@ -10307,21 +9363,21 @@
                 </a:solidFill>
                 <a:latin typeface="Yu Gothic"/>
               </a:rPr>
-              <a:t>Copilotは"何を作るか"も提案してくれる</a:t>
-            </a:r>
-          </a:p>
-        </p:txBody>
-      </p:sp>
-      <p:sp>
-        <p:nvSpPr>
-          <p:cNvPr id="21" name="Rounded Rectangle 20"/>
+              <a:t>数字を見せると、人は動く</a:t>
+            </a:r>
+          </a:p>
+        </p:txBody>
+      </p:sp>
+      <p:sp>
+        <p:nvSpPr>
+          <p:cNvPr id="27" name="Rounded Rectangle 26"/>
           <p:cNvSpPr/>
           <p:nvPr/>
         </p:nvSpPr>
         <p:spPr>
           <a:xfrm>
-            <a:off x="6309360" y="4069080"/>
-            <a:ext cx="292608" cy="292608"/>
+            <a:off x="457200" y="5029200"/>
+            <a:ext cx="11430000" cy="1280160"/>
           </a:xfrm>
           <a:prstGeom prst="roundRect">
             <a:avLst>
@@ -10329,7 +9385,7 @@
             </a:avLst>
           </a:prstGeom>
           <a:solidFill>
-            <a:srgbClr val="0078D4"/>
+            <a:srgbClr val="464EB8"/>
           </a:solidFill>
           <a:ln>
             <a:noFill/>
@@ -10354,89 +9410,20 @@
           <a:lstStyle/>
           <a:p>
             <a:pPr algn="ctr"/>
-          </a:p>
-        </p:txBody>
-      </p:sp>
-      <p:sp>
-        <p:nvSpPr>
-          <p:cNvPr id="22" name="TextBox 21"/>
-          <p:cNvSpPr txBox="1"/>
-          <p:nvPr/>
-        </p:nvSpPr>
-        <p:spPr>
-          <a:xfrm>
-            <a:off x="6309360" y="4069080"/>
-            <a:ext cx="292608" cy="292608"/>
-          </a:xfrm>
-          <a:prstGeom prst="rect">
-            <a:avLst/>
-          </a:prstGeom>
-          <a:noFill/>
-        </p:spPr>
-        <p:txBody>
-          <a:bodyPr wrap="square" lIns="0" rIns="0" tIns="0" bIns="0" anchor="ctr">
-            <a:spAutoFit/>
-          </a:bodyPr>
-          <a:lstStyle/>
-          <a:p>
-            <a:pPr algn="ctr"/>
-            <a:r>
-              <a:rPr sz="1100" b="1">
-                <a:solidFill>
-                  <a:srgbClr val="FFFFFF"/>
-                </a:solidFill>
-                <a:latin typeface="Yu Gothic"/>
-              </a:rPr>
-              <a:t>2</a:t>
-            </a:r>
-          </a:p>
-        </p:txBody>
-      </p:sp>
-      <p:sp>
-        <p:nvSpPr>
-          <p:cNvPr id="23" name="TextBox 22"/>
-          <p:cNvSpPr txBox="1"/>
-          <p:nvPr/>
-        </p:nvSpPr>
-        <p:spPr>
-          <a:xfrm>
-            <a:off x="6766560" y="4023360"/>
-            <a:ext cx="5029200" cy="411480"/>
-          </a:xfrm>
-          <a:prstGeom prst="rect">
-            <a:avLst/>
-          </a:prstGeom>
-          <a:noFill/>
-        </p:spPr>
-        <p:txBody>
-          <a:bodyPr wrap="square" lIns="0" rIns="0" tIns="0" bIns="0" anchor="ctr">
-            <a:spAutoFit/>
-          </a:bodyPr>
-          <a:lstStyle/>
-          <a:p>
-            <a:pPr algn="l"/>
-            <a:r>
-              <a:rPr sz="1300" b="0">
-                <a:solidFill>
-                  <a:srgbClr val="323130"/>
-                </a:solidFill>
-                <a:latin typeface="Yu Gothic"/>
-              </a:rPr>
-              <a:t>式が読めなくても動く（理解は後で追いつく）</a:t>
-            </a:r>
-          </a:p>
-        </p:txBody>
-      </p:sp>
-      <p:sp>
-        <p:nvSpPr>
-          <p:cNvPr id="24" name="Rounded Rectangle 23"/>
+            <a:endParaRPr/>
+          </a:p>
+        </p:txBody>
+      </p:sp>
+      <p:sp>
+        <p:nvSpPr>
+          <p:cNvPr id="28" name="Rounded Rectangle 27"/>
           <p:cNvSpPr/>
           <p:nvPr/>
         </p:nvSpPr>
         <p:spPr>
           <a:xfrm>
-            <a:off x="6309360" y="4572000"/>
-            <a:ext cx="292608" cy="292608"/>
+            <a:off x="457200" y="5029200"/>
+            <a:ext cx="137160" cy="1280160"/>
           </a:xfrm>
           <a:prstGeom prst="roundRect">
             <a:avLst>
@@ -10444,7 +9431,7 @@
             </a:avLst>
           </a:prstGeom>
           <a:solidFill>
-            <a:srgbClr val="0078D4"/>
+            <a:srgbClr val="7460DB"/>
           </a:solidFill>
           <a:ln>
             <a:noFill/>
@@ -10469,344 +9456,225 @@
           <a:lstStyle/>
           <a:p>
             <a:pPr algn="ctr"/>
-          </a:p>
-        </p:txBody>
-      </p:sp>
-      <p:sp>
-        <p:nvSpPr>
-          <p:cNvPr id="25" name="TextBox 24"/>
-          <p:cNvSpPr txBox="1"/>
-          <p:nvPr/>
-        </p:nvSpPr>
-        <p:spPr>
-          <a:xfrm>
-            <a:off x="6309360" y="4572000"/>
-            <a:ext cx="292608" cy="292608"/>
-          </a:xfrm>
-          <a:prstGeom prst="rect">
-            <a:avLst/>
-          </a:prstGeom>
-          <a:noFill/>
-        </p:spPr>
-        <p:txBody>
-          <a:bodyPr wrap="square" lIns="0" rIns="0" tIns="0" bIns="0" anchor="ctr">
+            <a:endParaRPr/>
+          </a:p>
+        </p:txBody>
+      </p:sp>
+      <p:sp>
+        <p:nvSpPr>
+          <p:cNvPr id="29" name="TextBox 28"/>
+          <p:cNvSpPr txBox="1"/>
+          <p:nvPr/>
+        </p:nvSpPr>
+        <p:spPr>
+          <a:xfrm>
+            <a:off x="868680" y="5166360"/>
+            <a:ext cx="10972800" cy="457200"/>
+          </a:xfrm>
+          <a:prstGeom prst="rect">
+            <a:avLst/>
+          </a:prstGeom>
+          <a:noFill/>
+        </p:spPr>
+        <p:txBody>
+          <a:bodyPr wrap="square" lIns="0" tIns="0" rIns="0" bIns="0" anchor="t">
             <a:spAutoFit/>
           </a:bodyPr>
           <a:lstStyle/>
           <a:p>
-            <a:pPr algn="ctr"/>
-            <a:r>
-              <a:rPr sz="1100" b="1">
-                <a:solidFill>
-                  <a:srgbClr val="FFFFFF"/>
+            <a:pPr algn="l"/>
+            <a:r>
+              <a:rPr sz="1800" b="1">
+                <a:solidFill>
+                  <a:srgbClr val="FFB900"/>
                 </a:solidFill>
                 <a:latin typeface="Yu Gothic"/>
               </a:rPr>
-              <a:t>3</a:t>
-            </a:r>
-          </a:p>
-        </p:txBody>
-      </p:sp>
-      <p:sp>
-        <p:nvSpPr>
-          <p:cNvPr id="26" name="TextBox 25"/>
-          <p:cNvSpPr txBox="1"/>
-          <p:nvPr/>
-        </p:nvSpPr>
-        <p:spPr>
-          <a:xfrm>
-            <a:off x="6766560" y="4526280"/>
-            <a:ext cx="5029200" cy="411480"/>
-          </a:xfrm>
-          <a:prstGeom prst="rect">
-            <a:avLst/>
-          </a:prstGeom>
-          <a:noFill/>
-        </p:spPr>
-        <p:txBody>
-          <a:bodyPr wrap="square" lIns="0" rIns="0" tIns="0" bIns="0" anchor="ctr">
+              <a:t>🎁  Power Automate 45 (PA45)</a:t>
+            </a:r>
+          </a:p>
+        </p:txBody>
+      </p:sp>
+      <p:sp>
+        <p:nvSpPr>
+          <p:cNvPr id="30" name="TextBox 29"/>
+          <p:cNvSpPr txBox="1"/>
+          <p:nvPr/>
+        </p:nvSpPr>
+        <p:spPr>
+          <a:xfrm>
+            <a:off x="868680" y="5623560"/>
+            <a:ext cx="10972800" cy="365760"/>
+          </a:xfrm>
+          <a:prstGeom prst="rect">
+            <a:avLst/>
+          </a:prstGeom>
+          <a:noFill/>
+        </p:spPr>
+        <p:txBody>
+          <a:bodyPr wrap="square" lIns="0" tIns="0" rIns="0" bIns="0" anchor="t">
             <a:spAutoFit/>
           </a:bodyPr>
           <a:lstStyle/>
           <a:p>
             <a:pPr algn="l"/>
             <a:r>
-              <a:rPr sz="1300" b="0">
-                <a:solidFill>
-                  <a:srgbClr val="323130"/>
+              <a:rPr sz="1500" b="0">
+                <a:solidFill>
+                  <a:srgbClr val="FFFFFF"/>
                 </a:solidFill>
                 <a:latin typeface="Yu Gothic"/>
               </a:rPr>
-              <a:t>数字を見せると、人は動く</a:t>
-            </a:r>
-          </a:p>
-        </p:txBody>
-      </p:sp>
-      <p:sp>
-        <p:nvSpPr>
-          <p:cNvPr id="27" name="Rounded Rectangle 26"/>
-          <p:cNvSpPr/>
-          <p:nvPr/>
-        </p:nvSpPr>
-        <p:spPr>
-          <a:xfrm>
-            <a:off x="457200" y="5029200"/>
-            <a:ext cx="11430000" cy="1280160"/>
-          </a:xfrm>
-          <a:prstGeom prst="roundRect">
-            <a:avLst>
-              <a:gd name="adj" fmla="val 10000"/>
-            </a:avLst>
-          </a:prstGeom>
-          <a:solidFill>
-            <a:srgbClr val="464EB8"/>
-          </a:solidFill>
+              <a:t>毎週木曜 20:15〜  /  45分の "1粒ハンズオン"</a:t>
+            </a:r>
+          </a:p>
+        </p:txBody>
+      </p:sp>
+      <p:sp>
+        <p:nvSpPr>
+          <p:cNvPr id="31" name="TextBox 30"/>
+          <p:cNvSpPr txBox="1"/>
+          <p:nvPr/>
+        </p:nvSpPr>
+        <p:spPr>
+          <a:xfrm>
+            <a:off x="868680" y="5989320"/>
+            <a:ext cx="10972800" cy="320040"/>
+          </a:xfrm>
+          <a:prstGeom prst="rect">
+            <a:avLst/>
+          </a:prstGeom>
+          <a:noFill/>
+        </p:spPr>
+        <p:txBody>
+          <a:bodyPr wrap="square" lIns="0" tIns="0" rIns="0" bIns="0" anchor="t">
+            <a:spAutoFit/>
+          </a:bodyPr>
+          <a:lstStyle/>
+          <a:p>
+            <a:pPr algn="l"/>
+            <a:r>
+              <a:rPr sz="1200" b="0">
+                <a:solidFill>
+                  <a:srgbClr val="E8E9F7"/>
+                </a:solidFill>
+                <a:latin typeface="Yu Gothic"/>
+              </a:rPr>
+              <a:t>powerautomate-create.connpass.com</a:t>
+            </a:r>
+          </a:p>
+        </p:txBody>
+      </p:sp>
+      <p:sp>
+        <p:nvSpPr>
+          <p:cNvPr id="32" name="TextBox 31"/>
+          <p:cNvSpPr txBox="1"/>
+          <p:nvPr/>
+        </p:nvSpPr>
+        <p:spPr>
+          <a:xfrm>
+            <a:off x="365760" y="6446520"/>
+            <a:ext cx="6400800" cy="274320"/>
+          </a:xfrm>
+          <a:prstGeom prst="rect">
+            <a:avLst/>
+          </a:prstGeom>
+          <a:noFill/>
+        </p:spPr>
+        <p:txBody>
+          <a:bodyPr wrap="square" lIns="0" tIns="0" rIns="0" bIns="0" anchor="t">
+            <a:spAutoFit/>
+          </a:bodyPr>
+          <a:lstStyle/>
+          <a:p>
+            <a:pPr algn="l"/>
+            <a:r>
+              <a:rPr sz="1000" b="0">
+                <a:solidFill>
+                  <a:srgbClr val="605E5C"/>
+                </a:solidFill>
+                <a:latin typeface="Yu Gothic"/>
+              </a:rPr>
+              <a:t>Power Automate 45 (PA45)  ×  Copilot Community LT</a:t>
+            </a:r>
+          </a:p>
+        </p:txBody>
+      </p:sp>
+      <p:sp>
+        <p:nvSpPr>
+          <p:cNvPr id="33" name="TextBox 32"/>
+          <p:cNvSpPr txBox="1"/>
+          <p:nvPr/>
+        </p:nvSpPr>
+        <p:spPr>
+          <a:xfrm>
+            <a:off x="11277600" y="6446520"/>
+            <a:ext cx="548640" cy="274320"/>
+          </a:xfrm>
+          <a:prstGeom prst="rect">
+            <a:avLst/>
+          </a:prstGeom>
+          <a:noFill/>
+        </p:spPr>
+        <p:txBody>
+          <a:bodyPr wrap="square" lIns="0" tIns="0" rIns="0" bIns="0" anchor="t">
+            <a:spAutoFit/>
+          </a:bodyPr>
+          <a:lstStyle/>
+          <a:p>
+            <a:pPr algn="r"/>
+            <a:r>
+              <a:rPr sz="1000" b="0">
+                <a:solidFill>
+                  <a:srgbClr val="605E5C"/>
+                </a:solidFill>
+                <a:latin typeface="Yu Gothic"/>
+              </a:rPr>
+              <a:t>9 / 10</a:t>
+            </a:r>
+          </a:p>
+        </p:txBody>
+      </p:sp>
+      <p:pic>
+        <p:nvPicPr>
+          <p:cNvPr id="35" name="図 34" descr="PA45,&#10;&#10;AI 生成コンテンツは誤りを含む可能性があります。">
+            <a:extLst>
+              <a:ext uri="{FF2B5EF4-FFF2-40B4-BE49-F238E27FC236}">
+                <a16:creationId xmlns:a16="http://schemas.microsoft.com/office/drawing/2014/main" id="{B134EC95-E660-EC78-DEE9-EC24ACCDF754}"/>
+              </a:ext>
+            </a:extLst>
+          </p:cNvPr>
+          <p:cNvPicPr>
+            <a:picLocks noChangeAspect="1"/>
+          </p:cNvPicPr>
+          <p:nvPr/>
+        </p:nvPicPr>
+        <p:blipFill>
+          <a:blip r:embed="rId2"/>
+          <a:stretch>
+            <a:fillRect/>
+          </a:stretch>
+        </p:blipFill>
+        <p:spPr>
+          <a:xfrm>
+            <a:off x="1463040" y="1889760"/>
+            <a:ext cx="2957109" cy="2407931"/>
+          </a:xfrm>
+          <a:prstGeom prst="rect">
+            <a:avLst/>
+          </a:prstGeom>
           <a:ln>
             <a:noFill/>
           </a:ln>
-        </p:spPr>
-        <p:style>
-          <a:lnRef idx="1">
-            <a:schemeClr val="accent1"/>
-          </a:lnRef>
-          <a:fillRef idx="3">
-            <a:schemeClr val="accent1"/>
-          </a:fillRef>
-          <a:effectRef idx="2">
-            <a:schemeClr val="accent1"/>
-          </a:effectRef>
-          <a:fontRef idx="minor">
-            <a:schemeClr val="lt1"/>
-          </a:fontRef>
-        </p:style>
-        <p:txBody>
-          <a:bodyPr rtlCol="0" anchor="ctr"/>
-          <a:lstStyle/>
-          <a:p>
-            <a:pPr algn="ctr"/>
-          </a:p>
-        </p:txBody>
-      </p:sp>
-      <p:sp>
-        <p:nvSpPr>
-          <p:cNvPr id="28" name="Rounded Rectangle 27"/>
-          <p:cNvSpPr/>
-          <p:nvPr/>
-        </p:nvSpPr>
-        <p:spPr>
-          <a:xfrm>
-            <a:off x="457200" y="5029200"/>
-            <a:ext cx="137160" cy="1280160"/>
-          </a:xfrm>
-          <a:prstGeom prst="roundRect">
-            <a:avLst>
-              <a:gd name="adj" fmla="val 10000"/>
-            </a:avLst>
-          </a:prstGeom>
-          <a:solidFill>
-            <a:srgbClr val="7460DB"/>
-          </a:solidFill>
-          <a:ln>
-            <a:noFill/>
-          </a:ln>
-        </p:spPr>
-        <p:style>
-          <a:lnRef idx="1">
-            <a:schemeClr val="accent1"/>
-          </a:lnRef>
-          <a:fillRef idx="3">
-            <a:schemeClr val="accent1"/>
-          </a:fillRef>
-          <a:effectRef idx="2">
-            <a:schemeClr val="accent1"/>
-          </a:effectRef>
-          <a:fontRef idx="minor">
-            <a:schemeClr val="lt1"/>
-          </a:fontRef>
-        </p:style>
-        <p:txBody>
-          <a:bodyPr rtlCol="0" anchor="ctr"/>
-          <a:lstStyle/>
-          <a:p>
-            <a:pPr algn="ctr"/>
-          </a:p>
-        </p:txBody>
-      </p:sp>
-      <p:sp>
-        <p:nvSpPr>
-          <p:cNvPr id="29" name="TextBox 28"/>
-          <p:cNvSpPr txBox="1"/>
-          <p:nvPr/>
-        </p:nvSpPr>
-        <p:spPr>
-          <a:xfrm>
-            <a:off x="868680" y="5166360"/>
-            <a:ext cx="10972800" cy="457200"/>
-          </a:xfrm>
-          <a:prstGeom prst="rect">
-            <a:avLst/>
-          </a:prstGeom>
-          <a:noFill/>
-        </p:spPr>
-        <p:txBody>
-          <a:bodyPr wrap="square" lIns="0" rIns="0" tIns="0" bIns="0" anchor="t">
-            <a:spAutoFit/>
-          </a:bodyPr>
-          <a:lstStyle/>
-          <a:p>
-            <a:pPr algn="l"/>
-            <a:r>
-              <a:rPr sz="1800" b="1">
-                <a:solidFill>
-                  <a:srgbClr val="FFB900"/>
-                </a:solidFill>
-                <a:latin typeface="Yu Gothic"/>
-              </a:rPr>
-              <a:t>🎁  Power Automate 45 (PA45)</a:t>
-            </a:r>
-          </a:p>
-        </p:txBody>
-      </p:sp>
-      <p:sp>
-        <p:nvSpPr>
-          <p:cNvPr id="30" name="TextBox 29"/>
-          <p:cNvSpPr txBox="1"/>
-          <p:nvPr/>
-        </p:nvSpPr>
-        <p:spPr>
-          <a:xfrm>
-            <a:off x="868680" y="5623560"/>
-            <a:ext cx="10972800" cy="365760"/>
-          </a:xfrm>
-          <a:prstGeom prst="rect">
-            <a:avLst/>
-          </a:prstGeom>
-          <a:noFill/>
-        </p:spPr>
-        <p:txBody>
-          <a:bodyPr wrap="square" lIns="0" rIns="0" tIns="0" bIns="0" anchor="t">
-            <a:spAutoFit/>
-          </a:bodyPr>
-          <a:lstStyle/>
-          <a:p>
-            <a:pPr algn="l"/>
-            <a:r>
-              <a:rPr sz="1500" b="0">
-                <a:solidFill>
-                  <a:srgbClr val="FFFFFF"/>
-                </a:solidFill>
-                <a:latin typeface="Yu Gothic"/>
-              </a:rPr>
-              <a:t>毎週木曜 20:15〜  /  45分の "1粒ハンズオン"</a:t>
-            </a:r>
-          </a:p>
-        </p:txBody>
-      </p:sp>
-      <p:sp>
-        <p:nvSpPr>
-          <p:cNvPr id="31" name="TextBox 30"/>
-          <p:cNvSpPr txBox="1"/>
-          <p:nvPr/>
-        </p:nvSpPr>
-        <p:spPr>
-          <a:xfrm>
-            <a:off x="868680" y="5989320"/>
-            <a:ext cx="10972800" cy="320040"/>
-          </a:xfrm>
-          <a:prstGeom prst="rect">
-            <a:avLst/>
-          </a:prstGeom>
-          <a:noFill/>
-        </p:spPr>
-        <p:txBody>
-          <a:bodyPr wrap="square" lIns="0" rIns="0" tIns="0" bIns="0" anchor="t">
-            <a:spAutoFit/>
-          </a:bodyPr>
-          <a:lstStyle/>
-          <a:p>
-            <a:pPr algn="l"/>
-            <a:r>
-              <a:rPr sz="1200" b="0">
-                <a:solidFill>
-                  <a:srgbClr val="E8E9F7"/>
-                </a:solidFill>
-                <a:latin typeface="Yu Gothic"/>
-              </a:rPr>
-              <a:t>powerautomate-create.connpass.com</a:t>
-            </a:r>
-          </a:p>
-        </p:txBody>
-      </p:sp>
-      <p:sp>
-        <p:nvSpPr>
-          <p:cNvPr id="32" name="TextBox 31"/>
-          <p:cNvSpPr txBox="1"/>
-          <p:nvPr/>
-        </p:nvSpPr>
-        <p:spPr>
-          <a:xfrm>
-            <a:off x="365760" y="6446520"/>
-            <a:ext cx="6400800" cy="274320"/>
-          </a:xfrm>
-          <a:prstGeom prst="rect">
-            <a:avLst/>
-          </a:prstGeom>
-          <a:noFill/>
-        </p:spPr>
-        <p:txBody>
-          <a:bodyPr wrap="square" lIns="0" rIns="0" tIns="0" bIns="0" anchor="t">
-            <a:spAutoFit/>
-          </a:bodyPr>
-          <a:lstStyle/>
-          <a:p>
-            <a:pPr algn="l"/>
-            <a:r>
-              <a:rPr sz="1000" b="0">
-                <a:solidFill>
-                  <a:srgbClr val="605E5C"/>
-                </a:solidFill>
-                <a:latin typeface="Yu Gothic"/>
-              </a:rPr>
-              <a:t>Power Automate 45 (PA45)  ×  Copilot Community LT</a:t>
-            </a:r>
-          </a:p>
-        </p:txBody>
-      </p:sp>
-      <p:sp>
-        <p:nvSpPr>
-          <p:cNvPr id="33" name="TextBox 32"/>
-          <p:cNvSpPr txBox="1"/>
-          <p:nvPr/>
-        </p:nvSpPr>
-        <p:spPr>
-          <a:xfrm>
-            <a:off x="11277600" y="6446520"/>
-            <a:ext cx="548640" cy="274320"/>
-          </a:xfrm>
-          <a:prstGeom prst="rect">
-            <a:avLst/>
-          </a:prstGeom>
-          <a:noFill/>
-        </p:spPr>
-        <p:txBody>
-          <a:bodyPr wrap="square" lIns="0" rIns="0" tIns="0" bIns="0" anchor="t">
-            <a:spAutoFit/>
-          </a:bodyPr>
-          <a:lstStyle/>
-          <a:p>
-            <a:pPr algn="r"/>
-            <a:r>
-              <a:rPr sz="1000" b="0">
-                <a:solidFill>
-                  <a:srgbClr val="605E5C"/>
-                </a:solidFill>
-                <a:latin typeface="Yu Gothic"/>
-              </a:rPr>
-              <a:t>8 / 10</a:t>
-            </a:r>
-          </a:p>
-        </p:txBody>
-      </p:sp>
+          <a:effectLst>
+            <a:outerShdw blurRad="190500" algn="tl" rotWithShape="0">
+              <a:srgbClr val="000000">
+                <a:alpha val="70000"/>
+              </a:srgbClr>
+            </a:outerShdw>
+          </a:effectLst>
+        </p:spPr>
+      </p:pic>
     </p:spTree>
   </p:cSld>
   <p:clrMapOvr>
@@ -10838,7 +9706,7 @@
           </a:xfrm>
           <a:prstGeom prst="roundRect">
             <a:avLst>
-              <a:gd name="adj" fmla="val 10000"/>
+              <a:gd name="adj" fmla="val 0"/>
             </a:avLst>
           </a:prstGeom>
           <a:solidFill>
@@ -10998,7 +9866,7 @@
           </a:xfrm>
           <a:prstGeom prst="roundRect">
             <a:avLst>
-              <a:gd name="adj" fmla="val 10000"/>
+              <a:gd name="adj" fmla="val 0"/>
             </a:avLst>
           </a:prstGeom>
           <a:solidFill>
@@ -11205,7 +10073,7 @@
           </a:xfrm>
           <a:prstGeom prst="roundRect">
             <a:avLst>
-              <a:gd name="adj" fmla="val 10000"/>
+              <a:gd name="adj" fmla="val 0"/>
             </a:avLst>
           </a:prstGeom>
           <a:solidFill>
@@ -11320,7 +10188,7 @@
           </a:xfrm>
           <a:prstGeom prst="roundRect">
             <a:avLst>
-              <a:gd name="adj" fmla="val 10000"/>
+              <a:gd name="adj" fmla="val 0"/>
             </a:avLst>
           </a:prstGeom>
           <a:solidFill>
@@ -11435,7 +10303,7 @@
           </a:xfrm>
           <a:prstGeom prst="roundRect">
             <a:avLst>
-              <a:gd name="adj" fmla="val 10000"/>
+              <a:gd name="adj" fmla="val 0"/>
             </a:avLst>
           </a:prstGeom>
           <a:solidFill>
@@ -11677,7 +10545,7 @@
           </a:xfrm>
           <a:prstGeom prst="roundRect">
             <a:avLst>
-              <a:gd name="adj" fmla="val 10000"/>
+              <a:gd name="adj" fmla="val 0"/>
             </a:avLst>
           </a:prstGeom>
           <a:solidFill>
@@ -11792,7 +10660,7 @@
           </a:xfrm>
           <a:prstGeom prst="roundRect">
             <a:avLst>
-              <a:gd name="adj" fmla="val 10000"/>
+              <a:gd name="adj" fmla="val 0"/>
             </a:avLst>
           </a:prstGeom>
           <a:solidFill>
@@ -11907,7 +10775,7 @@
           </a:xfrm>
           <a:prstGeom prst="roundRect">
             <a:avLst>
-              <a:gd name="adj" fmla="val 10000"/>
+              <a:gd name="adj" fmla="val 0"/>
             </a:avLst>
           </a:prstGeom>
           <a:solidFill>
@@ -12154,7 +11022,7 @@
                 </a:solidFill>
                 <a:latin typeface="Yu Gothic"/>
               </a:rPr>
-              <a:t>9 / 10</a:t>
+              <a:t>9 / 9</a:t>
             </a:r>
           </a:p>
         </p:txBody>

--- a/assets/pa45/LT001_Copilot_MeetingCostBot_20260428.pptx
+++ b/assets/pa45/LT001_Copilot_MeetingCostBot_20260428.pptx
@@ -5,7 +5,7 @@
     <p:sldMasterId id="2147483648" r:id="rId1"/>
   </p:sldMasterIdLst>
   <p:notesMasterIdLst>
-    <p:notesMasterId r:id="rId10"/>
+    <p:notesMasterId r:id="rId11"/>
   </p:notesMasterIdLst>
   <p:sldIdLst>
     <p:sldId id="272" r:id="rId2"/>
@@ -16,7 +16,7 @@
     <p:sldId id="276" r:id="rId7"/>
     <p:sldId id="277" r:id="rId8"/>
     <p:sldId id="279" r:id="rId9"/>
-    <p:sldId id="280" r:id="rId17"/>
+    <p:sldId id="280" r:id="rId10"/>
   </p:sldIdLst>
   <p:sldSz cx="12192000" cy="6858000"/>
   <p:notesSz cx="6858000" cy="12192000"/>
@@ -120,422 +120,29 @@
 </p:presentation>
 </file>
 
-<file path=ppt/revisionInfo.xml><?xml version="1.0" encoding="utf-8"?>
-<p1510:revInfo xmlns:a="http://schemas.openxmlformats.org/drawingml/2006/main" xmlns:r="http://schemas.openxmlformats.org/officeDocument/2006/relationships" xmlns:p1510="http://schemas.microsoft.com/office/powerpoint/2015/10/main">
-  <p1510:revLst>
-    <p1510:client id="{08F31A18-F8DF-4B0F-95F3-441F5794CAA8}" v="11" dt="2026-04-17T02:48:52.533"/>
-  </p1510:revLst>
-</p1510:revInfo>
-</file>
-
 <file path=ppt/changesInfos/changesInfo1.xml><?xml version="1.0" encoding="utf-8"?>
 <pc:chgInfo xmlns:a="http://schemas.openxmlformats.org/drawingml/2006/main" xmlns:r="http://schemas.openxmlformats.org/officeDocument/2006/relationships" xmlns:ac="http://schemas.microsoft.com/office/drawing/2013/main/command" xmlns:pc="http://schemas.microsoft.com/office/powerpoint/2013/main/command">
   <pc:docChgLst>
     <pc:chgData name="Ueda Isamu" userId="35289799e0376f2e" providerId="LiveId" clId="{DD31E282-B62B-4911-91B6-43B1B98908F9}"/>
     <pc:docChg chg="undo custSel addSld delSld modSld sldOrd">
-      <pc:chgData name="Ueda Isamu" userId="35289799e0376f2e" providerId="LiveId" clId="{DD31E282-B62B-4911-91B6-43B1B98908F9}" dt="2026-04-17T11:58:09.756" v="646" actId="20577"/>
+      <pc:chgData name="Ueda Isamu" userId="35289799e0376f2e" providerId="LiveId" clId="{DD31E282-B62B-4911-91B6-43B1B98908F9}" dt="2026-04-28T05:35:34.948" v="647" actId="20577"/>
       <pc:docMkLst>
         <pc:docMk/>
       </pc:docMkLst>
       <pc:sldChg chg="modSp mod">
-        <pc:chgData name="Ueda Isamu" userId="35289799e0376f2e" providerId="LiveId" clId="{DD31E282-B62B-4911-91B6-43B1B98908F9}" dt="2026-04-17T02:13:28.377" v="23" actId="20577"/>
+        <pc:chgData name="Ueda Isamu" userId="35289799e0376f2e" providerId="LiveId" clId="{DD31E282-B62B-4911-91B6-43B1B98908F9}" dt="2026-04-28T05:35:34.948" v="647" actId="20577"/>
         <pc:sldMkLst>
           <pc:docMk/>
-          <pc:sldMk cId="0" sldId="268"/>
+          <pc:sldMk cId="0" sldId="280"/>
         </pc:sldMkLst>
         <pc:spChg chg="mod">
-          <ac:chgData name="Ueda Isamu" userId="35289799e0376f2e" providerId="LiveId" clId="{DD31E282-B62B-4911-91B6-43B1B98908F9}" dt="2026-04-17T02:13:28.377" v="23" actId="20577"/>
+          <ac:chgData name="Ueda Isamu" userId="35289799e0376f2e" providerId="LiveId" clId="{DD31E282-B62B-4911-91B6-43B1B98908F9}" dt="2026-04-28T05:35:34.948" v="647" actId="20577"/>
           <ac:spMkLst>
             <pc:docMk/>
-            <pc:sldMk cId="0" sldId="268"/>
-            <ac:spMk id="41" creationId="{00000000-0000-0000-0000-000000000000}"/>
+            <pc:sldMk cId="0" sldId="280"/>
+            <ac:spMk id="33" creationId="{00000000-0000-0000-0000-000000000000}"/>
           </ac:spMkLst>
         </pc:spChg>
-      </pc:sldChg>
-      <pc:sldChg chg="modSp mod">
-        <pc:chgData name="Ueda Isamu" userId="35289799e0376f2e" providerId="LiveId" clId="{DD31E282-B62B-4911-91B6-43B1B98908F9}" dt="2026-04-17T11:58:09.756" v="646" actId="20577"/>
-        <pc:sldMkLst>
-          <pc:docMk/>
-          <pc:sldMk cId="0" sldId="269"/>
-        </pc:sldMkLst>
-        <pc:spChg chg="mod">
-          <ac:chgData name="Ueda Isamu" userId="35289799e0376f2e" providerId="LiveId" clId="{DD31E282-B62B-4911-91B6-43B1B98908F9}" dt="2026-04-17T11:58:09.756" v="646" actId="20577"/>
-          <ac:spMkLst>
-            <pc:docMk/>
-            <pc:sldMk cId="0" sldId="269"/>
-            <ac:spMk id="29" creationId="{00000000-0000-0000-0000-000000000000}"/>
-          </ac:spMkLst>
-        </pc:spChg>
-      </pc:sldChg>
-      <pc:sldChg chg="modSp mod">
-        <pc:chgData name="Ueda Isamu" userId="35289799e0376f2e" providerId="LiveId" clId="{DD31E282-B62B-4911-91B6-43B1B98908F9}" dt="2026-04-17T11:05:56.530" v="641" actId="207"/>
-        <pc:sldMkLst>
-          <pc:docMk/>
-          <pc:sldMk cId="1581914844" sldId="279"/>
-        </pc:sldMkLst>
-        <pc:spChg chg="mod">
-          <ac:chgData name="Ueda Isamu" userId="35289799e0376f2e" providerId="LiveId" clId="{DD31E282-B62B-4911-91B6-43B1B98908F9}" dt="2026-04-17T11:05:56.530" v="641" actId="207"/>
-          <ac:spMkLst>
-            <pc:docMk/>
-            <pc:sldMk cId="1581914844" sldId="279"/>
-            <ac:spMk id="2" creationId="{E7009479-6313-ABD6-833D-A3E138A01A61}"/>
-          </ac:spMkLst>
-        </pc:spChg>
-      </pc:sldChg>
-      <pc:sldChg chg="addSp delSp modSp add mod">
-        <pc:chgData name="Ueda Isamu" userId="35289799e0376f2e" providerId="LiveId" clId="{DD31E282-B62B-4911-91B6-43B1B98908F9}" dt="2026-04-17T02:47:36.616" v="459" actId="1076"/>
-        <pc:sldMkLst>
-          <pc:docMk/>
-          <pc:sldMk cId="2459475835" sldId="281"/>
-        </pc:sldMkLst>
-        <pc:spChg chg="mod">
-          <ac:chgData name="Ueda Isamu" userId="35289799e0376f2e" providerId="LiveId" clId="{DD31E282-B62B-4911-91B6-43B1B98908F9}" dt="2026-04-17T02:14:41.671" v="130" actId="14100"/>
-          <ac:spMkLst>
-            <pc:docMk/>
-            <pc:sldMk cId="2459475835" sldId="281"/>
-            <ac:spMk id="7" creationId="{00000000-0000-0000-0000-000000000000}"/>
-          </ac:spMkLst>
-        </pc:spChg>
-        <pc:spChg chg="add mod ord">
-          <ac:chgData name="Ueda Isamu" userId="35289799e0376f2e" providerId="LiveId" clId="{DD31E282-B62B-4911-91B6-43B1B98908F9}" dt="2026-04-17T02:41:17.821" v="238" actId="14100"/>
-          <ac:spMkLst>
-            <pc:docMk/>
-            <pc:sldMk cId="2459475835" sldId="281"/>
-            <ac:spMk id="10" creationId="{5E06D86B-F8D9-20E7-3D67-0EF3882034F2}"/>
-          </ac:spMkLst>
-        </pc:spChg>
-        <pc:spChg chg="add mod">
-          <ac:chgData name="Ueda Isamu" userId="35289799e0376f2e" providerId="LiveId" clId="{DD31E282-B62B-4911-91B6-43B1B98908F9}" dt="2026-04-17T02:47:36.616" v="459" actId="1076"/>
-          <ac:spMkLst>
-            <pc:docMk/>
-            <pc:sldMk cId="2459475835" sldId="281"/>
-            <ac:spMk id="28" creationId="{C16EA426-E783-A598-7EF5-C60F79944EA6}"/>
-          </ac:spMkLst>
-        </pc:spChg>
-        <pc:spChg chg="del">
-          <ac:chgData name="Ueda Isamu" userId="35289799e0376f2e" providerId="LiveId" clId="{DD31E282-B62B-4911-91B6-43B1B98908F9}" dt="2026-04-17T02:14:56.587" v="133" actId="478"/>
-          <ac:spMkLst>
-            <pc:docMk/>
-            <pc:sldMk cId="2459475835" sldId="281"/>
-            <ac:spMk id="44" creationId="{F9B91B76-7920-EE96-CB51-D8B32827C982}"/>
-          </ac:spMkLst>
-        </pc:spChg>
-        <pc:spChg chg="del">
-          <ac:chgData name="Ueda Isamu" userId="35289799e0376f2e" providerId="LiveId" clId="{DD31E282-B62B-4911-91B6-43B1B98908F9}" dt="2026-04-17T02:14:51.542" v="131" actId="478"/>
-          <ac:spMkLst>
-            <pc:docMk/>
-            <pc:sldMk cId="2459475835" sldId="281"/>
-            <ac:spMk id="51" creationId="{F34FF253-528E-97DF-BF89-4A55B2E7EBC4}"/>
-          </ac:spMkLst>
-        </pc:spChg>
-        <pc:picChg chg="mod">
-          <ac:chgData name="Ueda Isamu" userId="35289799e0376f2e" providerId="LiveId" clId="{DD31E282-B62B-4911-91B6-43B1B98908F9}" dt="2026-04-17T02:14:53.784" v="132" actId="1076"/>
-          <ac:picMkLst>
-            <pc:docMk/>
-            <pc:sldMk cId="2459475835" sldId="281"/>
-            <ac:picMk id="11" creationId="{F68FB933-EA39-0DBF-9AF9-8148DEDB9C4B}"/>
-          </ac:picMkLst>
-        </pc:picChg>
-        <pc:picChg chg="add del mod">
-          <ac:chgData name="Ueda Isamu" userId="35289799e0376f2e" providerId="LiveId" clId="{DD31E282-B62B-4911-91B6-43B1B98908F9}" dt="2026-04-17T02:21:19.453" v="195" actId="478"/>
-          <ac:picMkLst>
-            <pc:docMk/>
-            <pc:sldMk cId="2459475835" sldId="281"/>
-            <ac:picMk id="14" creationId="{A872EEC3-0079-B857-A352-13B0525469F2}"/>
-          </ac:picMkLst>
-        </pc:picChg>
-        <pc:picChg chg="add del mod">
-          <ac:chgData name="Ueda Isamu" userId="35289799e0376f2e" providerId="LiveId" clId="{DD31E282-B62B-4911-91B6-43B1B98908F9}" dt="2026-04-17T02:21:14.537" v="192" actId="478"/>
-          <ac:picMkLst>
-            <pc:docMk/>
-            <pc:sldMk cId="2459475835" sldId="281"/>
-            <ac:picMk id="16" creationId="{7B3B07E8-D558-44C5-F536-149592DC9066}"/>
-          </ac:picMkLst>
-        </pc:picChg>
-        <pc:picChg chg="add del mod">
-          <ac:chgData name="Ueda Isamu" userId="35289799e0376f2e" providerId="LiveId" clId="{DD31E282-B62B-4911-91B6-43B1B98908F9}" dt="2026-04-17T02:21:15.842" v="193" actId="478"/>
-          <ac:picMkLst>
-            <pc:docMk/>
-            <pc:sldMk cId="2459475835" sldId="281"/>
-            <ac:picMk id="18" creationId="{97FD49C7-206D-6C4B-3177-E4037E3C63D6}"/>
-          </ac:picMkLst>
-        </pc:picChg>
-        <pc:picChg chg="add mod">
-          <ac:chgData name="Ueda Isamu" userId="35289799e0376f2e" providerId="LiveId" clId="{DD31E282-B62B-4911-91B6-43B1B98908F9}" dt="2026-04-17T02:38:47.884" v="204" actId="1076"/>
-          <ac:picMkLst>
-            <pc:docMk/>
-            <pc:sldMk cId="2459475835" sldId="281"/>
-            <ac:picMk id="20" creationId="{73095EBC-5E6E-5317-87A5-17E37B58CC5E}"/>
-          </ac:picMkLst>
-        </pc:picChg>
-        <pc:picChg chg="add mod">
-          <ac:chgData name="Ueda Isamu" userId="35289799e0376f2e" providerId="LiveId" clId="{DD31E282-B62B-4911-91B6-43B1B98908F9}" dt="2026-04-17T02:38:58.260" v="212" actId="1076"/>
-          <ac:picMkLst>
-            <pc:docMk/>
-            <pc:sldMk cId="2459475835" sldId="281"/>
-            <ac:picMk id="22" creationId="{79F3BB5C-856E-FA0C-3333-92328AEDB18C}"/>
-          </ac:picMkLst>
-        </pc:picChg>
-        <pc:picChg chg="add mod">
-          <ac:chgData name="Ueda Isamu" userId="35289799e0376f2e" providerId="LiveId" clId="{DD31E282-B62B-4911-91B6-43B1B98908F9}" dt="2026-04-17T02:39:50.989" v="220" actId="1076"/>
-          <ac:picMkLst>
-            <pc:docMk/>
-            <pc:sldMk cId="2459475835" sldId="281"/>
-            <ac:picMk id="25" creationId="{24B8273A-79BB-524B-B355-12D0488F8274}"/>
-          </ac:picMkLst>
-        </pc:picChg>
-        <pc:picChg chg="add mod modCrop">
-          <ac:chgData name="Ueda Isamu" userId="35289799e0376f2e" providerId="LiveId" clId="{DD31E282-B62B-4911-91B6-43B1B98908F9}" dt="2026-04-17T02:41:06.934" v="234" actId="1076"/>
-          <ac:picMkLst>
-            <pc:docMk/>
-            <pc:sldMk cId="2459475835" sldId="281"/>
-            <ac:picMk id="26" creationId="{90BB8993-B660-880F-C455-A312D2B2E10C}"/>
-          </ac:picMkLst>
-        </pc:picChg>
-        <pc:picChg chg="add mod modCrop">
-          <ac:chgData name="Ueda Isamu" userId="35289799e0376f2e" providerId="LiveId" clId="{DD31E282-B62B-4911-91B6-43B1B98908F9}" dt="2026-04-17T02:42:09.134" v="246" actId="1076"/>
-          <ac:picMkLst>
-            <pc:docMk/>
-            <pc:sldMk cId="2459475835" sldId="281"/>
-            <ac:picMk id="27" creationId="{1540BB72-A70B-4993-9B89-22A2C53B10B1}"/>
-          </ac:picMkLst>
-        </pc:picChg>
-        <pc:picChg chg="del">
-          <ac:chgData name="Ueda Isamu" userId="35289799e0376f2e" providerId="LiveId" clId="{DD31E282-B62B-4911-91B6-43B1B98908F9}" dt="2026-04-17T02:14:57.340" v="134" actId="478"/>
-          <ac:picMkLst>
-            <pc:docMk/>
-            <pc:sldMk cId="2459475835" sldId="281"/>
-            <ac:picMk id="43" creationId="{C2A29B6F-3C93-A1C3-76A2-A2F9DE2BAF70}"/>
-          </ac:picMkLst>
-        </pc:picChg>
-      </pc:sldChg>
-      <pc:sldChg chg="del">
-        <pc:chgData name="Ueda Isamu" userId="35289799e0376f2e" providerId="LiveId" clId="{DD31E282-B62B-4911-91B6-43B1B98908F9}" dt="2026-04-17T01:08:17.011" v="0" actId="47"/>
-        <pc:sldMkLst>
-          <pc:docMk/>
-          <pc:sldMk cId="0" sldId="282"/>
-        </pc:sldMkLst>
-      </pc:sldChg>
-      <pc:sldChg chg="addSp modSp add mod ord">
-        <pc:chgData name="Ueda Isamu" userId="35289799e0376f2e" providerId="LiveId" clId="{DD31E282-B62B-4911-91B6-43B1B98908F9}" dt="2026-04-17T02:21:10.454" v="191" actId="1076"/>
-        <pc:sldMkLst>
-          <pc:docMk/>
-          <pc:sldMk cId="3861659691" sldId="282"/>
-        </pc:sldMkLst>
-        <pc:spChg chg="mod">
-          <ac:chgData name="Ueda Isamu" userId="35289799e0376f2e" providerId="LiveId" clId="{DD31E282-B62B-4911-91B6-43B1B98908F9}" dt="2026-04-17T02:20:57.505" v="188" actId="14100"/>
-          <ac:spMkLst>
-            <pc:docMk/>
-            <pc:sldMk cId="3861659691" sldId="282"/>
-            <ac:spMk id="9" creationId="{00000000-0000-0000-0000-000000000000}"/>
-          </ac:spMkLst>
-        </pc:spChg>
-        <pc:spChg chg="mod">
-          <ac:chgData name="Ueda Isamu" userId="35289799e0376f2e" providerId="LiveId" clId="{DD31E282-B62B-4911-91B6-43B1B98908F9}" dt="2026-04-17T02:21:10.454" v="191" actId="1076"/>
-          <ac:spMkLst>
-            <pc:docMk/>
-            <pc:sldMk cId="3861659691" sldId="282"/>
-            <ac:spMk id="10" creationId="{5E06D86B-F8D9-20E7-3D67-0EF3882034F2}"/>
-          </ac:spMkLst>
-        </pc:spChg>
-        <pc:spChg chg="add mod">
-          <ac:chgData name="Ueda Isamu" userId="35289799e0376f2e" providerId="LiveId" clId="{DD31E282-B62B-4911-91B6-43B1B98908F9}" dt="2026-04-17T02:20:50.359" v="185" actId="1076"/>
-          <ac:spMkLst>
-            <pc:docMk/>
-            <pc:sldMk cId="3861659691" sldId="282"/>
-            <ac:spMk id="12" creationId="{B61745D9-8D46-A514-CF17-682EE8BDCFC1}"/>
-          </ac:spMkLst>
-        </pc:spChg>
-        <pc:picChg chg="mod">
-          <ac:chgData name="Ueda Isamu" userId="35289799e0376f2e" providerId="LiveId" clId="{DD31E282-B62B-4911-91B6-43B1B98908F9}" dt="2026-04-17T02:20:51.531" v="186" actId="1076"/>
-          <ac:picMkLst>
-            <pc:docMk/>
-            <pc:sldMk cId="3861659691" sldId="282"/>
-            <ac:picMk id="16" creationId="{7B3B07E8-D558-44C5-F536-149592DC9066}"/>
-          </ac:picMkLst>
-        </pc:picChg>
-        <pc:picChg chg="mod">
-          <ac:chgData name="Ueda Isamu" userId="35289799e0376f2e" providerId="LiveId" clId="{DD31E282-B62B-4911-91B6-43B1B98908F9}" dt="2026-04-17T02:20:53.535" v="187" actId="1076"/>
-          <ac:picMkLst>
-            <pc:docMk/>
-            <pc:sldMk cId="3861659691" sldId="282"/>
-            <ac:picMk id="18" creationId="{97FD49C7-206D-6C4B-3177-E4037E3C63D6}"/>
-          </ac:picMkLst>
-        </pc:picChg>
-      </pc:sldChg>
-      <pc:sldChg chg="addSp delSp modSp add mod">
-        <pc:chgData name="Ueda Isamu" userId="35289799e0376f2e" providerId="LiveId" clId="{DD31E282-B62B-4911-91B6-43B1B98908F9}" dt="2026-04-17T02:48:27.942" v="511" actId="13926"/>
-        <pc:sldMkLst>
-          <pc:docMk/>
-          <pc:sldMk cId="2686875315" sldId="283"/>
-        </pc:sldMkLst>
-        <pc:spChg chg="del">
-          <ac:chgData name="Ueda Isamu" userId="35289799e0376f2e" providerId="LiveId" clId="{DD31E282-B62B-4911-91B6-43B1B98908F9}" dt="2026-04-17T02:42:39.360" v="251" actId="478"/>
-          <ac:spMkLst>
-            <pc:docMk/>
-            <pc:sldMk cId="2686875315" sldId="283"/>
-            <ac:spMk id="10" creationId="{5E06D86B-F8D9-20E7-3D67-0EF3882034F2}"/>
-          </ac:spMkLst>
-        </pc:spChg>
-        <pc:spChg chg="add mod">
-          <ac:chgData name="Ueda Isamu" userId="35289799e0376f2e" providerId="LiveId" clId="{DD31E282-B62B-4911-91B6-43B1B98908F9}" dt="2026-04-17T02:44:46.637" v="448" actId="207"/>
-          <ac:spMkLst>
-            <pc:docMk/>
-            <pc:sldMk cId="2686875315" sldId="283"/>
-            <ac:spMk id="15" creationId="{B5DBE15C-3F0E-995C-C955-5A890D5C4AD0}"/>
-          </ac:spMkLst>
-        </pc:spChg>
-        <pc:spChg chg="add mod">
-          <ac:chgData name="Ueda Isamu" userId="35289799e0376f2e" providerId="LiveId" clId="{DD31E282-B62B-4911-91B6-43B1B98908F9}" dt="2026-04-17T02:47:43.526" v="461" actId="1076"/>
-          <ac:spMkLst>
-            <pc:docMk/>
-            <pc:sldMk cId="2686875315" sldId="283"/>
-            <ac:spMk id="18" creationId="{7CBEC746-521C-9E2B-7D90-711E9905A4D7}"/>
-          </ac:spMkLst>
-        </pc:spChg>
-        <pc:spChg chg="add mod">
-          <ac:chgData name="Ueda Isamu" userId="35289799e0376f2e" providerId="LiveId" clId="{DD31E282-B62B-4911-91B6-43B1B98908F9}" dt="2026-04-17T02:48:27.942" v="511" actId="13926"/>
-          <ac:spMkLst>
-            <pc:docMk/>
-            <pc:sldMk cId="2686875315" sldId="283"/>
-            <ac:spMk id="19" creationId="{B5110F6F-46C1-8584-E321-1DE91CADF579}"/>
-          </ac:spMkLst>
-        </pc:spChg>
-        <pc:picChg chg="add mod">
-          <ac:chgData name="Ueda Isamu" userId="35289799e0376f2e" providerId="LiveId" clId="{DD31E282-B62B-4911-91B6-43B1B98908F9}" dt="2026-04-17T02:43:27.519" v="258" actId="27614"/>
-          <ac:picMkLst>
-            <pc:docMk/>
-            <pc:sldMk cId="2686875315" sldId="283"/>
-            <ac:picMk id="14" creationId="{25F6D668-986E-7313-5F03-1BEC504E4B18}"/>
-          </ac:picMkLst>
-        </pc:picChg>
-        <pc:picChg chg="add mod">
-          <ac:chgData name="Ueda Isamu" userId="35289799e0376f2e" providerId="LiveId" clId="{DD31E282-B62B-4911-91B6-43B1B98908F9}" dt="2026-04-17T02:47:52.757" v="462" actId="1076"/>
-          <ac:picMkLst>
-            <pc:docMk/>
-            <pc:sldMk cId="2686875315" sldId="283"/>
-            <ac:picMk id="17" creationId="{F566F71E-C914-B0FA-ED5D-DC027EE1184D}"/>
-          </ac:picMkLst>
-        </pc:picChg>
-        <pc:picChg chg="del">
-          <ac:chgData name="Ueda Isamu" userId="35289799e0376f2e" providerId="LiveId" clId="{DD31E282-B62B-4911-91B6-43B1B98908F9}" dt="2026-04-17T02:42:36.546" v="248" actId="478"/>
-          <ac:picMkLst>
-            <pc:docMk/>
-            <pc:sldMk cId="2686875315" sldId="283"/>
-            <ac:picMk id="20" creationId="{73095EBC-5E6E-5317-87A5-17E37B58CC5E}"/>
-          </ac:picMkLst>
-        </pc:picChg>
-        <pc:picChg chg="del">
-          <ac:chgData name="Ueda Isamu" userId="35289799e0376f2e" providerId="LiveId" clId="{DD31E282-B62B-4911-91B6-43B1B98908F9}" dt="2026-04-17T02:42:37.963" v="250" actId="478"/>
-          <ac:picMkLst>
-            <pc:docMk/>
-            <pc:sldMk cId="2686875315" sldId="283"/>
-            <ac:picMk id="22" creationId="{79F3BB5C-856E-FA0C-3333-92328AEDB18C}"/>
-          </ac:picMkLst>
-        </pc:picChg>
-        <pc:picChg chg="del">
-          <ac:chgData name="Ueda Isamu" userId="35289799e0376f2e" providerId="LiveId" clId="{DD31E282-B62B-4911-91B6-43B1B98908F9}" dt="2026-04-17T02:42:52.661" v="253" actId="478"/>
-          <ac:picMkLst>
-            <pc:docMk/>
-            <pc:sldMk cId="2686875315" sldId="283"/>
-            <ac:picMk id="25" creationId="{24B8273A-79BB-524B-B355-12D0488F8274}"/>
-          </ac:picMkLst>
-        </pc:picChg>
-        <pc:picChg chg="del">
-          <ac:chgData name="Ueda Isamu" userId="35289799e0376f2e" providerId="LiveId" clId="{DD31E282-B62B-4911-91B6-43B1B98908F9}" dt="2026-04-17T02:42:37.130" v="249" actId="478"/>
-          <ac:picMkLst>
-            <pc:docMk/>
-            <pc:sldMk cId="2686875315" sldId="283"/>
-            <ac:picMk id="26" creationId="{90BB8993-B660-880F-C455-A312D2B2E10C}"/>
-          </ac:picMkLst>
-        </pc:picChg>
-        <pc:picChg chg="del">
-          <ac:chgData name="Ueda Isamu" userId="35289799e0376f2e" providerId="LiveId" clId="{DD31E282-B62B-4911-91B6-43B1B98908F9}" dt="2026-04-17T02:42:40.098" v="252" actId="478"/>
-          <ac:picMkLst>
-            <pc:docMk/>
-            <pc:sldMk cId="2686875315" sldId="283"/>
-            <ac:picMk id="27" creationId="{1540BB72-A70B-4993-9B89-22A2C53B10B1}"/>
-          </ac:picMkLst>
-        </pc:picChg>
-      </pc:sldChg>
-      <pc:sldChg chg="addSp delSp modSp add mod">
-        <pc:chgData name="Ueda Isamu" userId="35289799e0376f2e" providerId="LiveId" clId="{DD31E282-B62B-4911-91B6-43B1B98908F9}" dt="2026-04-17T02:49:36.811" v="596" actId="478"/>
-        <pc:sldMkLst>
-          <pc:docMk/>
-          <pc:sldMk cId="1541831861" sldId="284"/>
-        </pc:sldMkLst>
-        <pc:spChg chg="del mod">
-          <ac:chgData name="Ueda Isamu" userId="35289799e0376f2e" providerId="LiveId" clId="{DD31E282-B62B-4911-91B6-43B1B98908F9}" dt="2026-04-17T02:48:54.791" v="522" actId="478"/>
-          <ac:spMkLst>
-            <pc:docMk/>
-            <pc:sldMk cId="1541831861" sldId="284"/>
-            <ac:spMk id="7" creationId="{00000000-0000-0000-0000-000000000000}"/>
-          </ac:spMkLst>
-        </pc:spChg>
-        <pc:spChg chg="add mod">
-          <ac:chgData name="Ueda Isamu" userId="35289799e0376f2e" providerId="LiveId" clId="{DD31E282-B62B-4911-91B6-43B1B98908F9}" dt="2026-04-17T02:49:34.964" v="595" actId="1076"/>
-          <ac:spMkLst>
-            <pc:docMk/>
-            <pc:sldMk cId="1541831861" sldId="284"/>
-            <ac:spMk id="10" creationId="{0DA7D246-5DFE-385C-DC4F-E8A338DB3505}"/>
-          </ac:spMkLst>
-        </pc:spChg>
-        <pc:spChg chg="add del mod">
-          <ac:chgData name="Ueda Isamu" userId="35289799e0376f2e" providerId="LiveId" clId="{DD31E282-B62B-4911-91B6-43B1B98908F9}" dt="2026-04-17T02:49:26.126" v="591" actId="1076"/>
-          <ac:spMkLst>
-            <pc:docMk/>
-            <pc:sldMk cId="1541831861" sldId="284"/>
-            <ac:spMk id="13" creationId="{00000000-0000-0000-0000-000000000000}"/>
-          </ac:spMkLst>
-        </pc:spChg>
-        <pc:spChg chg="del">
-          <ac:chgData name="Ueda Isamu" userId="35289799e0376f2e" providerId="LiveId" clId="{DD31E282-B62B-4911-91B6-43B1B98908F9}" dt="2026-04-17T02:48:43.215" v="514" actId="478"/>
-          <ac:spMkLst>
-            <pc:docMk/>
-            <pc:sldMk cId="1541831861" sldId="284"/>
-            <ac:spMk id="15" creationId="{B5DBE15C-3F0E-995C-C955-5A890D5C4AD0}"/>
-          </ac:spMkLst>
-        </pc:spChg>
-        <pc:spChg chg="del">
-          <ac:chgData name="Ueda Isamu" userId="35289799e0376f2e" providerId="LiveId" clId="{DD31E282-B62B-4911-91B6-43B1B98908F9}" dt="2026-04-17T02:48:49.830" v="519" actId="478"/>
-          <ac:spMkLst>
-            <pc:docMk/>
-            <pc:sldMk cId="1541831861" sldId="284"/>
-            <ac:spMk id="18" creationId="{7CBEC746-521C-9E2B-7D90-711E9905A4D7}"/>
-          </ac:spMkLst>
-        </pc:spChg>
-        <pc:spChg chg="del">
-          <ac:chgData name="Ueda Isamu" userId="35289799e0376f2e" providerId="LiveId" clId="{DD31E282-B62B-4911-91B6-43B1B98908F9}" dt="2026-04-17T02:49:36.811" v="596" actId="478"/>
-          <ac:spMkLst>
-            <pc:docMk/>
-            <pc:sldMk cId="1541831861" sldId="284"/>
-            <ac:spMk id="19" creationId="{B5110F6F-46C1-8584-E321-1DE91CADF579}"/>
-          </ac:spMkLst>
-        </pc:spChg>
-        <pc:picChg chg="del">
-          <ac:chgData name="Ueda Isamu" userId="35289799e0376f2e" providerId="LiveId" clId="{DD31E282-B62B-4911-91B6-43B1B98908F9}" dt="2026-04-17T02:48:41.561" v="513" actId="478"/>
-          <ac:picMkLst>
-            <pc:docMk/>
-            <pc:sldMk cId="1541831861" sldId="284"/>
-            <ac:picMk id="11" creationId="{F68FB933-EA39-0DBF-9AF9-8148DEDB9C4B}"/>
-          </ac:picMkLst>
-        </pc:picChg>
-        <pc:picChg chg="del">
-          <ac:chgData name="Ueda Isamu" userId="35289799e0376f2e" providerId="LiveId" clId="{DD31E282-B62B-4911-91B6-43B1B98908F9}" dt="2026-04-17T02:48:47.863" v="518" actId="478"/>
-          <ac:picMkLst>
-            <pc:docMk/>
-            <pc:sldMk cId="1541831861" sldId="284"/>
-            <ac:picMk id="14" creationId="{25F6D668-986E-7313-5F03-1BEC504E4B18}"/>
-          </ac:picMkLst>
-        </pc:picChg>
-        <pc:picChg chg="del">
-          <ac:chgData name="Ueda Isamu" userId="35289799e0376f2e" providerId="LiveId" clId="{DD31E282-B62B-4911-91B6-43B1B98908F9}" dt="2026-04-17T02:48:44.024" v="515" actId="478"/>
-          <ac:picMkLst>
-            <pc:docMk/>
-            <pc:sldMk cId="1541831861" sldId="284"/>
-            <ac:picMk id="17" creationId="{F566F71E-C914-B0FA-ED5D-DC027EE1184D}"/>
-          </ac:picMkLst>
-        </pc:picChg>
       </pc:sldChg>
     </pc:docChg>
   </pc:docChgLst>
@@ -9684,7 +9291,7 @@
 </file>
 
 <file path=ppt/slides/slide9.xml><?xml version="1.0" encoding="utf-8"?>
-<p:sld xmlns:a="http://schemas.openxmlformats.org/drawingml/2006/main" xmlns:p="http://schemas.openxmlformats.org/presentationml/2006/main" xmlns:r="http://schemas.openxmlformats.org/officeDocument/2006/relationships">
+<p:sld xmlns:a="http://schemas.openxmlformats.org/drawingml/2006/main" xmlns:r="http://schemas.openxmlformats.org/officeDocument/2006/relationships" xmlns:p="http://schemas.openxmlformats.org/presentationml/2006/main">
   <p:cSld>
     <p:spTree>
       <p:nvGrpSpPr>
@@ -9692,7 +9299,14 @@
         <p:cNvGrpSpPr/>
         <p:nvPr/>
       </p:nvGrpSpPr>
-      <p:grpSpPr/>
+      <p:grpSpPr>
+        <a:xfrm>
+          <a:off x="0" y="0"/>
+          <a:ext cx="0" cy="0"/>
+          <a:chOff x="0" y="0"/>
+          <a:chExt cx="0" cy="0"/>
+        </a:xfrm>
+      </p:grpSpPr>
       <p:sp>
         <p:nvSpPr>
           <p:cNvPr id="2" name="Rounded Rectangle 1"/>
@@ -9735,6 +9349,7 @@
           <a:lstStyle/>
           <a:p>
             <a:pPr algn="ctr"/>
+            <a:endParaRPr/>
           </a:p>
         </p:txBody>
       </p:sp>
@@ -9780,6 +9395,7 @@
           <a:lstStyle/>
           <a:p>
             <a:pPr algn="ctr"/>
+            <a:endParaRPr/>
           </a:p>
         </p:txBody>
       </p:sp>
@@ -9800,7 +9416,7 @@
           <a:noFill/>
         </p:spPr>
         <p:txBody>
-          <a:bodyPr wrap="square" lIns="0" rIns="0" tIns="0" bIns="0" anchor="ctr">
+          <a:bodyPr wrap="square" lIns="0" tIns="0" rIns="0" bIns="0" anchor="ctr">
             <a:spAutoFit/>
           </a:bodyPr>
           <a:lstStyle/>
@@ -9835,7 +9451,7 @@
           <a:noFill/>
         </p:spPr>
         <p:txBody>
-          <a:bodyPr wrap="square" lIns="0" rIns="0" tIns="0" bIns="0" anchor="ctr">
+          <a:bodyPr wrap="square" lIns="0" tIns="0" rIns="0" bIns="0" anchor="ctr">
             <a:spAutoFit/>
           </a:bodyPr>
           <a:lstStyle/>
@@ -9895,6 +9511,7 @@
           <a:lstStyle/>
           <a:p>
             <a:pPr algn="ctr"/>
+            <a:endParaRPr/>
           </a:p>
         </p:txBody>
       </p:sp>
@@ -9915,7 +9532,7 @@
           <a:noFill/>
         </p:spPr>
         <p:txBody>
-          <a:bodyPr wrap="square" lIns="0" rIns="0" tIns="0" bIns="0" anchor="t">
+          <a:bodyPr wrap="square" lIns="0" tIns="0" rIns="0" bIns="0" anchor="t">
             <a:spAutoFit/>
           </a:bodyPr>
           <a:lstStyle/>
@@ -9977,6 +9594,7 @@
           <a:lstStyle/>
           <a:p>
             <a:pPr algn="ctr"/>
+            <a:endParaRPr/>
           </a:p>
         </p:txBody>
       </p:sp>
@@ -10022,6 +9640,7 @@
           <a:lstStyle/>
           <a:p>
             <a:pPr algn="ctr"/>
+            <a:endParaRPr/>
           </a:p>
         </p:txBody>
       </p:sp>
@@ -10042,7 +9661,7 @@
           <a:noFill/>
         </p:spPr>
         <p:txBody>
-          <a:bodyPr wrap="square" lIns="0" rIns="0" tIns="0" bIns="0" anchor="ctr">
+          <a:bodyPr wrap="square" lIns="0" tIns="0" rIns="0" bIns="0" anchor="ctr">
             <a:spAutoFit/>
           </a:bodyPr>
           <a:lstStyle/>
@@ -10102,6 +9721,7 @@
           <a:lstStyle/>
           <a:p>
             <a:pPr algn="ctr"/>
+            <a:endParaRPr/>
           </a:p>
         </p:txBody>
       </p:sp>
@@ -10122,7 +9742,7 @@
           <a:noFill/>
         </p:spPr>
         <p:txBody>
-          <a:bodyPr wrap="square" lIns="0" rIns="0" tIns="0" bIns="0" anchor="t">
+          <a:bodyPr wrap="square" lIns="0" tIns="0" rIns="0" bIns="0" anchor="t">
             <a:spAutoFit/>
           </a:bodyPr>
           <a:lstStyle/>
@@ -10157,7 +9777,7 @@
           <a:noFill/>
         </p:spPr>
         <p:txBody>
-          <a:bodyPr wrap="square" lIns="0" rIns="0" tIns="0" bIns="0" anchor="t">
+          <a:bodyPr wrap="square" lIns="0" tIns="0" rIns="0" bIns="0" anchor="t">
             <a:spAutoFit/>
           </a:bodyPr>
           <a:lstStyle/>
@@ -10217,6 +9837,7 @@
           <a:lstStyle/>
           <a:p>
             <a:pPr algn="ctr"/>
+            <a:endParaRPr/>
           </a:p>
         </p:txBody>
       </p:sp>
@@ -10237,7 +9858,7 @@
           <a:noFill/>
         </p:spPr>
         <p:txBody>
-          <a:bodyPr wrap="square" lIns="0" rIns="0" tIns="0" bIns="0" anchor="t">
+          <a:bodyPr wrap="square" lIns="0" tIns="0" rIns="0" bIns="0" anchor="t">
             <a:spAutoFit/>
           </a:bodyPr>
           <a:lstStyle/>
@@ -10272,7 +9893,7 @@
           <a:noFill/>
         </p:spPr>
         <p:txBody>
-          <a:bodyPr wrap="square" lIns="0" rIns="0" tIns="0" bIns="0" anchor="t">
+          <a:bodyPr wrap="square" lIns="0" tIns="0" rIns="0" bIns="0" anchor="t">
             <a:spAutoFit/>
           </a:bodyPr>
           <a:lstStyle/>
@@ -10332,6 +9953,7 @@
           <a:lstStyle/>
           <a:p>
             <a:pPr algn="ctr"/>
+            <a:endParaRPr/>
           </a:p>
         </p:txBody>
       </p:sp>
@@ -10352,7 +9974,7 @@
           <a:noFill/>
         </p:spPr>
         <p:txBody>
-          <a:bodyPr wrap="square" lIns="0" rIns="0" tIns="0" bIns="0" anchor="t">
+          <a:bodyPr wrap="square" lIns="0" tIns="0" rIns="0" bIns="0" anchor="t">
             <a:spAutoFit/>
           </a:bodyPr>
           <a:lstStyle/>
@@ -10387,7 +10009,7 @@
           <a:noFill/>
         </p:spPr>
         <p:txBody>
-          <a:bodyPr wrap="square" lIns="0" rIns="0" tIns="0" bIns="0" anchor="t">
+          <a:bodyPr wrap="square" lIns="0" tIns="0" rIns="0" bIns="0" anchor="t">
             <a:spAutoFit/>
           </a:bodyPr>
           <a:lstStyle/>
@@ -10449,6 +10071,7 @@
           <a:lstStyle/>
           <a:p>
             <a:pPr algn="ctr"/>
+            <a:endParaRPr/>
           </a:p>
         </p:txBody>
       </p:sp>
@@ -10494,6 +10117,7 @@
           <a:lstStyle/>
           <a:p>
             <a:pPr algn="ctr"/>
+            <a:endParaRPr/>
           </a:p>
         </p:txBody>
       </p:sp>
@@ -10514,7 +10138,7 @@
           <a:noFill/>
         </p:spPr>
         <p:txBody>
-          <a:bodyPr wrap="square" lIns="0" rIns="0" tIns="0" bIns="0" anchor="ctr">
+          <a:bodyPr wrap="square" lIns="0" tIns="0" rIns="0" bIns="0" anchor="ctr">
             <a:spAutoFit/>
           </a:bodyPr>
           <a:lstStyle/>
@@ -10574,6 +10198,7 @@
           <a:lstStyle/>
           <a:p>
             <a:pPr algn="ctr"/>
+            <a:endParaRPr/>
           </a:p>
         </p:txBody>
       </p:sp>
@@ -10594,7 +10219,7 @@
           <a:noFill/>
         </p:spPr>
         <p:txBody>
-          <a:bodyPr wrap="square" lIns="0" rIns="0" tIns="0" bIns="0" anchor="t">
+          <a:bodyPr wrap="square" lIns="0" tIns="0" rIns="0" bIns="0" anchor="t">
             <a:spAutoFit/>
           </a:bodyPr>
           <a:lstStyle/>
@@ -10629,7 +10254,7 @@
           <a:noFill/>
         </p:spPr>
         <p:txBody>
-          <a:bodyPr wrap="square" lIns="0" rIns="0" tIns="0" bIns="0" anchor="t">
+          <a:bodyPr wrap="square" lIns="0" tIns="0" rIns="0" bIns="0" anchor="t">
             <a:spAutoFit/>
           </a:bodyPr>
           <a:lstStyle/>
@@ -10689,6 +10314,7 @@
           <a:lstStyle/>
           <a:p>
             <a:pPr algn="ctr"/>
+            <a:endParaRPr/>
           </a:p>
         </p:txBody>
       </p:sp>
@@ -10709,7 +10335,7 @@
           <a:noFill/>
         </p:spPr>
         <p:txBody>
-          <a:bodyPr wrap="square" lIns="0" rIns="0" tIns="0" bIns="0" anchor="t">
+          <a:bodyPr wrap="square" lIns="0" tIns="0" rIns="0" bIns="0" anchor="t">
             <a:spAutoFit/>
           </a:bodyPr>
           <a:lstStyle/>
@@ -10744,7 +10370,7 @@
           <a:noFill/>
         </p:spPr>
         <p:txBody>
-          <a:bodyPr wrap="square" lIns="0" rIns="0" tIns="0" bIns="0" anchor="t">
+          <a:bodyPr wrap="square" lIns="0" tIns="0" rIns="0" bIns="0" anchor="t">
             <a:spAutoFit/>
           </a:bodyPr>
           <a:lstStyle/>
@@ -10804,6 +10430,7 @@
           <a:lstStyle/>
           <a:p>
             <a:pPr algn="ctr"/>
+            <a:endParaRPr/>
           </a:p>
         </p:txBody>
       </p:sp>
@@ -10824,7 +10451,7 @@
           <a:noFill/>
         </p:spPr>
         <p:txBody>
-          <a:bodyPr wrap="square" lIns="0" rIns="0" tIns="0" bIns="0" anchor="t">
+          <a:bodyPr wrap="square" lIns="0" tIns="0" rIns="0" bIns="0" anchor="t">
             <a:spAutoFit/>
           </a:bodyPr>
           <a:lstStyle/>
@@ -10859,7 +10486,7 @@
           <a:noFill/>
         </p:spPr>
         <p:txBody>
-          <a:bodyPr wrap="square" lIns="0" rIns="0" tIns="0" bIns="0" anchor="t">
+          <a:bodyPr wrap="square" lIns="0" tIns="0" rIns="0" bIns="0" anchor="t">
             <a:spAutoFit/>
           </a:bodyPr>
           <a:lstStyle/>
@@ -10919,6 +10546,7 @@
           <a:lstStyle/>
           <a:p>
             <a:pPr algn="ctr"/>
+            <a:endParaRPr/>
           </a:p>
         </p:txBody>
       </p:sp>
@@ -10930,16 +10558,16 @@
         </p:nvSpPr>
         <p:spPr>
           <a:xfrm>
-            <a:off x="868680" y="5760720"/>
-            <a:ext cx="10972800" cy="640080"/>
-          </a:xfrm>
-          <a:prstGeom prst="rect">
-            <a:avLst/>
-          </a:prstGeom>
-          <a:noFill/>
-        </p:spPr>
-        <p:txBody>
-          <a:bodyPr wrap="square" lIns="0" rIns="0" tIns="0" bIns="0" anchor="ctr">
+            <a:off x="868680" y="5957649"/>
+            <a:ext cx="10972800" cy="246221"/>
+          </a:xfrm>
+          <a:prstGeom prst="rect">
+            <a:avLst/>
+          </a:prstGeom>
+          <a:noFill/>
+        </p:spPr>
+        <p:txBody>
+          <a:bodyPr wrap="square" lIns="0" tIns="0" rIns="0" bIns="0" anchor="ctr">
             <a:spAutoFit/>
           </a:bodyPr>
           <a:lstStyle/>
@@ -10952,7 +10580,7 @@
                 </a:solidFill>
                 <a:latin typeface="Yu Gothic"/>
               </a:rPr>
-              <a:t>💡  アイデアは現場から、実装はCopilotと。これが一番強い。</a:t>
+              <a:t>💡  アイデアは現場から、実装はCopilotと。</a:t>
             </a:r>
           </a:p>
         </p:txBody>
@@ -10974,7 +10602,7 @@
           <a:noFill/>
         </p:spPr>
         <p:txBody>
-          <a:bodyPr wrap="square" lIns="0" rIns="0" tIns="0" bIns="0" anchor="t">
+          <a:bodyPr wrap="square" lIns="0" tIns="0" rIns="0" bIns="0" anchor="t">
             <a:spAutoFit/>
           </a:bodyPr>
           <a:lstStyle/>
@@ -11009,7 +10637,7 @@
           <a:noFill/>
         </p:spPr>
         <p:txBody>
-          <a:bodyPr wrap="square" lIns="0" rIns="0" tIns="0" bIns="0" anchor="t">
+          <a:bodyPr wrap="square" lIns="0" tIns="0" rIns="0" bIns="0" anchor="t">
             <a:spAutoFit/>
           </a:bodyPr>
           <a:lstStyle/>
